--- a/协作/提示词/分享PPT交接_2026-10-29/第三版交付/烟花秀AI全流程_第三版.pptx
+++ b/协作/提示词/分享PPT交接_2026-10-29/第三版交付/烟花秀AI全流程_第三版.pptx
@@ -607,7 +607,7 @@
           <a:p/>
           <a:p>
             <a:r>
-              <a:t>第二个工具是导入器，灵感来自我们之前特效工作台的配表入口。它读取烘焙器导出的素材包，先检查命名、尺寸和规范项，不合格的先拦下来；再按平台创建贴图、材质实例和发射器，按规范设好；写完再读回来对照一遍。和性能组定下的贴图规范，比如手游保留 Mip 和流送、最大 1024，都写在导入器里，不用每次靠人记。自动检查不会改工程，我确认后点导入才写进去。</a:t>
+              <a:t>第二个工具是导入器，灵感来自我们之前特效工作台的配表入口。它读取烘焙器导出的素材包，先检查命名、尺寸和规范项，不合格的先拦下来；再按平台列出要建的贴图、材质实例和发射器；我确认后才写进 UE，写完再读回来对照一遍。和性能组定下的贴图规范，比如手游保留 Mip 和流送、最大 1024，都写在导入器里，不用每次靠人记。</a:t>
             </a:r>
           </a:p>
           <a:p/>
@@ -935,7 +935,7 @@
           <a:p/>
           <a:p>
             <a:r>
-              <a:t>再看成果，和前面三个问题一一对应。先说出图。最终进了跨年 3.0 资源表的，有 26 种开花花型、按尺寸共 30 个规格，升空尾缀 6 档，另外还有一套窜天猴；手游覆盖其中 12 种开花和全部尾缀。26 种开花里，20 种找到了烘焙器的导出材料，其中 19 种留有配方和导出记录，要调整时改参数重新导出就行。</a:t>
+              <a:t>再看成果，和前面三个问题一一对应。先说出图。最终进了跨年 3.0 资源表的，有 26 种开花花型、按尺寸共 30 个规格：球形开花 9 种、冠 3 种、柳 1 种、扇形 1 种、彗星 5 种、爆裂分裂这类特殊星效 6 种；升空尾缀 6 档，还有一套窜天猴。手游覆盖其中 12 种开花和全部尾缀。26 种开花里，20 种找到了烘焙器的导出材料，其中 19 种留有配方和导出记录，要调整时改参数重新导出就行。</a:t>
             </a:r>
           </a:p>
           <a:p/>
@@ -7116,7 +7116,7 @@
         <p:spPr>
           <a:xfrm>
             <a:off x="609600" y="1358900"/>
-            <a:ext cx="6400800" cy="4000500"/>
+            <a:ext cx="6400800" cy="3600450"/>
           </a:xfrm>
           <a:prstGeom prst="rect">
             <a:avLst/>
@@ -7131,7 +7131,7 @@
         </p:nvSpPr>
         <p:spPr>
           <a:xfrm>
-            <a:off x="609600" y="5435600"/>
+            <a:off x="609600" y="5035550"/>
             <a:ext cx="6400800" cy="508000"/>
           </a:xfrm>
           <a:prstGeom prst="rect">
@@ -7161,8 +7161,15 @@
                 <a:ea typeface="微软雅黑"/>
                 <a:cs typeface="微软雅黑"/>
               </a:rPr>
-              <a:t>导入入口在烘焙器「资源交付」页；写进</a:t>
-            </a:r>
+              <a:t>导入器在特效工作台里，挨着原来的配表入口；烘焙器「资源交付」页导出后也能直接进导入清单</a:t>
+            </a:r>
+          </a:p>
+          <a:p>
+            <a:pPr algn="l">
+              <a:lnSpc>
+                <a:spcPts val="1650"/>
+              </a:lnSpc>
+            </a:pPr>
             <a:r>
               <a:rPr sz="1100" b="0" lang="zh-CN" altLang="en-US">
                 <a:solidFill>
@@ -7170,11 +7177,11 @@
                     <a:alpha val="55000"/>
                   </a:srgbClr>
                 </a:solidFill>
-                <a:latin typeface="微软雅黑"/>
-                <a:ea typeface="微软雅黑"/>
-                <a:cs typeface="微软雅黑"/>
-              </a:rPr>
-              <a:t> </a:t>
+                <a:latin typeface="Consolas"/>
+                <a:ea typeface="微软雅黑"/>
+                <a:cs typeface="微软雅黑"/>
+              </a:rPr>
+              <a:t>写进</a:t>
             </a:r>
             <a:r>
               <a:rPr sz="1100" b="0" lang="zh-CN" altLang="en-US">
@@ -7183,6 +7190,19 @@
                     <a:alpha val="55000"/>
                   </a:srgbClr>
                 </a:solidFill>
+                <a:latin typeface="微软雅黑"/>
+                <a:ea typeface="微软雅黑"/>
+                <a:cs typeface="微软雅黑"/>
+              </a:rPr>
+              <a:t> </a:t>
+            </a:r>
+            <a:r>
+              <a:rPr sz="1100" b="0" lang="zh-CN" altLang="en-US">
+                <a:solidFill>
+                  <a:srgbClr val="F5F5F5">
+                    <a:alpha val="55000"/>
+                  </a:srgbClr>
+                </a:solidFill>
                 <a:latin typeface="Consolas"/>
                 <a:ea typeface="微软雅黑"/>
                 <a:cs typeface="微软雅黑"/>
@@ -7266,26 +7286,6 @@
                 <a:cs typeface="微软雅黑"/>
               </a:rPr>
               <a:t>插件和本机交付服务</a:t>
-            </a:r>
-          </a:p>
-          <a:p>
-            <a:pPr algn="l">
-              <a:lnSpc>
-                <a:spcPts val="1650"/>
-              </a:lnSpc>
-            </a:pPr>
-            <a:r>
-              <a:rPr sz="1100" b="0" lang="zh-CN" altLang="en-US">
-                <a:solidFill>
-                  <a:srgbClr val="F5F5F5">
-                    <a:alpha val="55000"/>
-                  </a:srgbClr>
-                </a:solidFill>
-                <a:latin typeface="Consolas"/>
-                <a:ea typeface="微软雅黑"/>
-                <a:cs typeface="微软雅黑"/>
-              </a:rPr>
-              <a:t>灵感来自原特效工作台的配表入口</a:t>
             </a:r>
           </a:p>
         </p:txBody>
@@ -7367,7 +7367,7 @@
                 <a:ea typeface="微软雅黑"/>
                 <a:cs typeface="微软雅黑"/>
               </a:rPr>
-              <a:t>读包检查</a:t>
+              <a:t>配置素材</a:t>
             </a:r>
           </a:p>
         </p:txBody>
@@ -7410,7 +7410,7 @@
                 <a:ea typeface="微软雅黑"/>
                 <a:cs typeface="微软雅黑"/>
               </a:rPr>
-              <a:t>命名、尺寸、平台和规范项；</a:t>
+              <a:t>读素材包，检查命名、尺寸、</a:t>
             </a:r>
             <a:br/>
             <a:r>
@@ -7424,7 +7424,7 @@
                 <a:ea typeface="微软雅黑"/>
                 <a:cs typeface="微软雅黑"/>
               </a:rPr>
-              <a:t>不合格的先拦下</a:t>
+              <a:t>平台和规范项，不合格先拦下</a:t>
             </a:r>
           </a:p>
         </p:txBody>
@@ -7506,7 +7506,7 @@
                 <a:ea typeface="微软雅黑"/>
                 <a:cs typeface="微软雅黑"/>
               </a:rPr>
-              <a:t>按平台创建与设置</a:t>
+              <a:t>核对清单</a:t>
             </a:r>
           </a:p>
         </p:txBody>
@@ -7549,7 +7549,7 @@
                 <a:ea typeface="微软雅黑"/>
                 <a:cs typeface="微软雅黑"/>
               </a:rPr>
-              <a:t>贴图、材质实例、发射器</a:t>
+              <a:t>按平台列出要建的贴图、</a:t>
             </a:r>
             <a:br/>
             <a:r>
@@ -7563,7 +7563,7 @@
                 <a:ea typeface="微软雅黑"/>
                 <a:cs typeface="微软雅黑"/>
               </a:rPr>
-              <a:t>按规范设好</a:t>
+              <a:t>材质实例、发射器和设置</a:t>
             </a:r>
           </a:p>
         </p:txBody>
@@ -7645,7 +7645,7 @@
                 <a:ea typeface="微软雅黑"/>
                 <a:cs typeface="微软雅黑"/>
               </a:rPr>
-              <a:t>读回核对</a:t>
+              <a:t>执行导入</a:t>
             </a:r>
           </a:p>
         </p:txBody>
@@ -7688,7 +7688,47 @@
                 <a:ea typeface="微软雅黑"/>
                 <a:cs typeface="微软雅黑"/>
               </a:rPr>
-              <a:t>写完再读一遍，和规范对照</a:t>
+              <a:t>按规范写进</a:t>
+            </a:r>
+            <a:r>
+              <a:rPr sz="1300" b="0" lang="zh-CN" altLang="en-US">
+                <a:solidFill>
+                  <a:srgbClr val="F5F5F5">
+                    <a:alpha val="70000"/>
+                  </a:srgbClr>
+                </a:solidFill>
+                <a:latin typeface="微软雅黑"/>
+                <a:ea typeface="微软雅黑"/>
+                <a:cs typeface="微软雅黑"/>
+              </a:rPr>
+              <a:t> </a:t>
+            </a:r>
+            <a:r>
+              <a:rPr sz="1300" b="0" lang="zh-CN" altLang="en-US">
+                <a:solidFill>
+                  <a:srgbClr val="F5F5F5">
+                    <a:alpha val="70000"/>
+                  </a:srgbClr>
+                </a:solidFill>
+                <a:latin typeface="Consolas"/>
+                <a:ea typeface="微软雅黑"/>
+                <a:cs typeface="微软雅黑"/>
+              </a:rPr>
+              <a:t>UE，</a:t>
+            </a:r>
+            <a:br/>
+            <a:r>
+              <a:rPr sz="1300" b="0" lang="zh-CN" altLang="en-US">
+                <a:solidFill>
+                  <a:srgbClr val="F5F5F5">
+                    <a:alpha val="70000"/>
+                  </a:srgbClr>
+                </a:solidFill>
+                <a:latin typeface="Consolas"/>
+                <a:ea typeface="微软雅黑"/>
+                <a:cs typeface="微软雅黑"/>
+              </a:rPr>
+              <a:t>写完再读回核对</a:t>
             </a:r>
           </a:p>
         </p:txBody>
@@ -15485,7 +15525,7 @@
         <p:spPr>
           <a:xfrm>
             <a:off x="889000" y="2717800"/>
-            <a:ext cx="2667000" cy="381000"/>
+            <a:ext cx="2667000" cy="635000"/>
           </a:xfrm>
           <a:prstGeom prst="rect">
             <a:avLst/>
@@ -15500,11 +15540,11 @@
           <a:p>
             <a:pPr algn="l">
               <a:lnSpc>
-                <a:spcPts val="1950"/>
-              </a:lnSpc>
-            </a:pPr>
-            <a:r>
-              <a:rPr sz="1300" b="0" lang="zh-CN" altLang="en-US">
+                <a:spcPts val="1937"/>
+              </a:lnSpc>
+            </a:pPr>
+            <a:r>
+              <a:rPr sz="1250" b="0" lang="zh-CN" altLang="en-US">
                 <a:solidFill>
                   <a:srgbClr val="F5F5F5">
                     <a:alpha val="70000"/>
@@ -15517,20 +15557,20 @@
               <a:t>按尺寸共</a:t>
             </a:r>
             <a:r>
-              <a:rPr sz="1300" b="0" lang="zh-CN" altLang="en-US">
-                <a:solidFill>
-                  <a:srgbClr val="F5F5F5">
-                    <a:alpha val="70000"/>
-                  </a:srgbClr>
-                </a:solidFill>
-                <a:latin typeface="微软雅黑"/>
-                <a:ea typeface="微软雅黑"/>
-                <a:cs typeface="微软雅黑"/>
-              </a:rPr>
-              <a:t> </a:t>
-            </a:r>
-            <a:r>
-              <a:rPr sz="1300" b="0" lang="zh-CN" altLang="en-US">
+              <a:rPr sz="1250" b="0" lang="zh-CN" altLang="en-US">
+                <a:solidFill>
+                  <a:srgbClr val="F5F5F5">
+                    <a:alpha val="70000"/>
+                  </a:srgbClr>
+                </a:solidFill>
+                <a:latin typeface="微软雅黑"/>
+                <a:ea typeface="微软雅黑"/>
+                <a:cs typeface="微软雅黑"/>
+              </a:rPr>
+              <a:t> </a:t>
+            </a:r>
+            <a:r>
+              <a:rPr sz="1250" b="0" lang="zh-CN" altLang="en-US">
                 <a:solidFill>
                   <a:srgbClr val="F5F5F5">
                     <a:alpha val="70000"/>
@@ -15543,30 +15583,310 @@
               <a:t>30</a:t>
             </a:r>
             <a:r>
-              <a:rPr sz="1300" b="0" lang="zh-CN" altLang="en-US">
-                <a:solidFill>
-                  <a:srgbClr val="F5F5F5">
-                    <a:alpha val="70000"/>
-                  </a:srgbClr>
-                </a:solidFill>
-                <a:latin typeface="微软雅黑"/>
-                <a:ea typeface="微软雅黑"/>
-                <a:cs typeface="微软雅黑"/>
-              </a:rPr>
-              <a:t> </a:t>
-            </a:r>
-            <a:r>
-              <a:rPr sz="1300" b="0" lang="zh-CN" altLang="en-US">
-                <a:solidFill>
-                  <a:srgbClr val="F5F5F5">
-                    <a:alpha val="70000"/>
-                  </a:srgbClr>
-                </a:solidFill>
-                <a:latin typeface="Consolas"/>
-                <a:ea typeface="微软雅黑"/>
-                <a:cs typeface="微软雅黑"/>
-              </a:rPr>
-              <a:t>个规格</a:t>
+              <a:rPr sz="1250" b="0" lang="zh-CN" altLang="en-US">
+                <a:solidFill>
+                  <a:srgbClr val="F5F5F5">
+                    <a:alpha val="70000"/>
+                  </a:srgbClr>
+                </a:solidFill>
+                <a:latin typeface="微软雅黑"/>
+                <a:ea typeface="微软雅黑"/>
+                <a:cs typeface="微软雅黑"/>
+              </a:rPr>
+              <a:t> </a:t>
+            </a:r>
+            <a:r>
+              <a:rPr sz="1250" b="0" lang="zh-CN" altLang="en-US">
+                <a:solidFill>
+                  <a:srgbClr val="F5F5F5">
+                    <a:alpha val="70000"/>
+                  </a:srgbClr>
+                </a:solidFill>
+                <a:latin typeface="Consolas"/>
+                <a:ea typeface="微软雅黑"/>
+                <a:cs typeface="微软雅黑"/>
+              </a:rPr>
+              <a:t>个规格：</a:t>
+            </a:r>
+          </a:p>
+          <a:p>
+            <a:pPr algn="l">
+              <a:lnSpc>
+                <a:spcPts val="1937"/>
+              </a:lnSpc>
+            </a:pPr>
+            <a:r>
+              <a:rPr sz="1250" b="0" lang="zh-CN" altLang="en-US">
+                <a:solidFill>
+                  <a:srgbClr val="F5F5F5">
+                    <a:alpha val="70000"/>
+                  </a:srgbClr>
+                </a:solidFill>
+                <a:latin typeface="Consolas"/>
+                <a:ea typeface="微软雅黑"/>
+                <a:cs typeface="微软雅黑"/>
+              </a:rPr>
+              <a:t>小号</a:t>
+            </a:r>
+            <a:r>
+              <a:rPr sz="1250" b="0" lang="zh-CN" altLang="en-US">
+                <a:solidFill>
+                  <a:srgbClr val="F5F5F5">
+                    <a:alpha val="70000"/>
+                  </a:srgbClr>
+                </a:solidFill>
+                <a:latin typeface="微软雅黑"/>
+                <a:ea typeface="微软雅黑"/>
+                <a:cs typeface="微软雅黑"/>
+              </a:rPr>
+              <a:t> </a:t>
+            </a:r>
+            <a:r>
+              <a:rPr sz="1250" b="0" lang="zh-CN" altLang="en-US">
+                <a:solidFill>
+                  <a:srgbClr val="F5F5F5">
+                    <a:alpha val="70000"/>
+                  </a:srgbClr>
+                </a:solidFill>
+                <a:latin typeface="Consolas"/>
+                <a:ea typeface="微软雅黑"/>
+                <a:cs typeface="微软雅黑"/>
+              </a:rPr>
+              <a:t>6</a:t>
+            </a:r>
+            <a:r>
+              <a:rPr sz="1250" b="0" lang="zh-CN" altLang="en-US">
+                <a:solidFill>
+                  <a:srgbClr val="F5F5F5">
+                    <a:alpha val="70000"/>
+                  </a:srgbClr>
+                </a:solidFill>
+                <a:latin typeface="微软雅黑"/>
+                <a:ea typeface="微软雅黑"/>
+                <a:cs typeface="微软雅黑"/>
+              </a:rPr>
+              <a:t> </a:t>
+            </a:r>
+            <a:r>
+              <a:rPr sz="1250" b="0" lang="zh-CN" altLang="en-US">
+                <a:solidFill>
+                  <a:srgbClr val="F5F5F5">
+                    <a:alpha val="70000"/>
+                  </a:srgbClr>
+                </a:solidFill>
+                <a:latin typeface="Consolas"/>
+                <a:ea typeface="微软雅黑"/>
+                <a:cs typeface="微软雅黑"/>
+              </a:rPr>
+              <a:t>·</a:t>
+            </a:r>
+            <a:r>
+              <a:rPr sz="1250" b="0" lang="zh-CN" altLang="en-US">
+                <a:solidFill>
+                  <a:srgbClr val="F5F5F5">
+                    <a:alpha val="70000"/>
+                  </a:srgbClr>
+                </a:solidFill>
+                <a:latin typeface="微软雅黑"/>
+                <a:ea typeface="微软雅黑"/>
+                <a:cs typeface="微软雅黑"/>
+              </a:rPr>
+              <a:t> </a:t>
+            </a:r>
+            <a:r>
+              <a:rPr sz="1250" b="0" lang="zh-CN" altLang="en-US">
+                <a:solidFill>
+                  <a:srgbClr val="F5F5F5">
+                    <a:alpha val="70000"/>
+                  </a:srgbClr>
+                </a:solidFill>
+                <a:latin typeface="Consolas"/>
+                <a:ea typeface="微软雅黑"/>
+                <a:cs typeface="微软雅黑"/>
+              </a:rPr>
+              <a:t>小型</a:t>
+            </a:r>
+            <a:r>
+              <a:rPr sz="1250" b="0" lang="zh-CN" altLang="en-US">
+                <a:solidFill>
+                  <a:srgbClr val="F5F5F5">
+                    <a:alpha val="70000"/>
+                  </a:srgbClr>
+                </a:solidFill>
+                <a:latin typeface="微软雅黑"/>
+                <a:ea typeface="微软雅黑"/>
+                <a:cs typeface="微软雅黑"/>
+              </a:rPr>
+              <a:t> </a:t>
+            </a:r>
+            <a:r>
+              <a:rPr sz="1250" b="0" lang="zh-CN" altLang="en-US">
+                <a:solidFill>
+                  <a:srgbClr val="F5F5F5">
+                    <a:alpha val="70000"/>
+                  </a:srgbClr>
+                </a:solidFill>
+                <a:latin typeface="Consolas"/>
+                <a:ea typeface="微软雅黑"/>
+                <a:cs typeface="微软雅黑"/>
+              </a:rPr>
+              <a:t>13</a:t>
+            </a:r>
+            <a:r>
+              <a:rPr sz="1250" b="0" lang="zh-CN" altLang="en-US">
+                <a:solidFill>
+                  <a:srgbClr val="F5F5F5">
+                    <a:alpha val="70000"/>
+                  </a:srgbClr>
+                </a:solidFill>
+                <a:latin typeface="微软雅黑"/>
+                <a:ea typeface="微软雅黑"/>
+                <a:cs typeface="微软雅黑"/>
+              </a:rPr>
+              <a:t> </a:t>
+            </a:r>
+            <a:r>
+              <a:rPr sz="1250" b="0" lang="zh-CN" altLang="en-US">
+                <a:solidFill>
+                  <a:srgbClr val="F5F5F5">
+                    <a:alpha val="70000"/>
+                  </a:srgbClr>
+                </a:solidFill>
+                <a:latin typeface="Consolas"/>
+                <a:ea typeface="微软雅黑"/>
+                <a:cs typeface="微软雅黑"/>
+              </a:rPr>
+              <a:t>·</a:t>
+            </a:r>
+            <a:r>
+              <a:rPr sz="1250" b="0" lang="zh-CN" altLang="en-US">
+                <a:solidFill>
+                  <a:srgbClr val="F5F5F5">
+                    <a:alpha val="70000"/>
+                  </a:srgbClr>
+                </a:solidFill>
+                <a:latin typeface="微软雅黑"/>
+                <a:ea typeface="微软雅黑"/>
+                <a:cs typeface="微软雅黑"/>
+              </a:rPr>
+              <a:t> </a:t>
+            </a:r>
+            <a:r>
+              <a:rPr sz="1250" b="0" lang="zh-CN" altLang="en-US">
+                <a:solidFill>
+                  <a:srgbClr val="F5F5F5">
+                    <a:alpha val="70000"/>
+                  </a:srgbClr>
+                </a:solidFill>
+                <a:latin typeface="Consolas"/>
+                <a:ea typeface="微软雅黑"/>
+                <a:cs typeface="微软雅黑"/>
+              </a:rPr>
+              <a:t>中型</a:t>
+            </a:r>
+            <a:r>
+              <a:rPr sz="1250" b="0" lang="zh-CN" altLang="en-US">
+                <a:solidFill>
+                  <a:srgbClr val="F5F5F5">
+                    <a:alpha val="70000"/>
+                  </a:srgbClr>
+                </a:solidFill>
+                <a:latin typeface="微软雅黑"/>
+                <a:ea typeface="微软雅黑"/>
+                <a:cs typeface="微软雅黑"/>
+              </a:rPr>
+              <a:t> </a:t>
+            </a:r>
+            <a:r>
+              <a:rPr sz="1250" b="0" lang="zh-CN" altLang="en-US">
+                <a:solidFill>
+                  <a:srgbClr val="F5F5F5">
+                    <a:alpha val="70000"/>
+                  </a:srgbClr>
+                </a:solidFill>
+                <a:latin typeface="Consolas"/>
+                <a:ea typeface="微软雅黑"/>
+                <a:cs typeface="微软雅黑"/>
+              </a:rPr>
+              <a:t>7</a:t>
+            </a:r>
+            <a:r>
+              <a:rPr sz="1250" b="0" lang="zh-CN" altLang="en-US">
+                <a:solidFill>
+                  <a:srgbClr val="F5F5F5">
+                    <a:alpha val="70000"/>
+                  </a:srgbClr>
+                </a:solidFill>
+                <a:latin typeface="微软雅黑"/>
+                <a:ea typeface="微软雅黑"/>
+                <a:cs typeface="微软雅黑"/>
+              </a:rPr>
+              <a:t> </a:t>
+            </a:r>
+            <a:r>
+              <a:rPr sz="1250" b="0" lang="zh-CN" altLang="en-US">
+                <a:solidFill>
+                  <a:srgbClr val="F5F5F5">
+                    <a:alpha val="70000"/>
+                  </a:srgbClr>
+                </a:solidFill>
+                <a:latin typeface="Consolas"/>
+                <a:ea typeface="微软雅黑"/>
+                <a:cs typeface="微软雅黑"/>
+              </a:rPr>
+              <a:t>·</a:t>
+            </a:r>
+            <a:r>
+              <a:rPr sz="1250" b="0" lang="zh-CN" altLang="en-US">
+                <a:solidFill>
+                  <a:srgbClr val="F5F5F5">
+                    <a:alpha val="70000"/>
+                  </a:srgbClr>
+                </a:solidFill>
+                <a:latin typeface="微软雅黑"/>
+                <a:ea typeface="微软雅黑"/>
+                <a:cs typeface="微软雅黑"/>
+              </a:rPr>
+              <a:t> </a:t>
+            </a:r>
+            <a:r>
+              <a:rPr sz="1250" b="0" lang="zh-CN" altLang="en-US">
+                <a:solidFill>
+                  <a:srgbClr val="F5F5F5">
+                    <a:alpha val="70000"/>
+                  </a:srgbClr>
+                </a:solidFill>
+                <a:latin typeface="Consolas"/>
+                <a:ea typeface="微软雅黑"/>
+                <a:cs typeface="微软雅黑"/>
+              </a:rPr>
+              <a:t>大型</a:t>
+            </a:r>
+            <a:r>
+              <a:rPr sz="1250" b="0" lang="zh-CN" altLang="en-US">
+                <a:solidFill>
+                  <a:srgbClr val="F5F5F5">
+                    <a:alpha val="70000"/>
+                  </a:srgbClr>
+                </a:solidFill>
+                <a:latin typeface="微软雅黑"/>
+                <a:ea typeface="微软雅黑"/>
+                <a:cs typeface="微软雅黑"/>
+              </a:rPr>
+              <a:t> </a:t>
+            </a:r>
+            <a:r>
+              <a:rPr sz="1250" b="0" lang="zh-CN" altLang="en-US">
+                <a:solidFill>
+                  <a:srgbClr val="F5F5F5">
+                    <a:alpha val="70000"/>
+                  </a:srgbClr>
+                </a:solidFill>
+                <a:latin typeface="Consolas"/>
+                <a:ea typeface="微软雅黑"/>
+                <a:cs typeface="微软雅黑"/>
+              </a:rPr>
+              <a:t>7</a:t>
             </a:r>
           </a:p>
         </p:txBody>
@@ -15579,7 +15899,7 @@
         </p:nvSpPr>
         <p:spPr>
           <a:xfrm>
-            <a:off x="889000" y="3302000"/>
+            <a:off x="889000" y="3429000"/>
             <a:ext cx="2667000" cy="6350"/>
           </a:xfrm>
           <a:prstGeom prst="rect">
@@ -15610,7 +15930,7 @@
         </p:nvSpPr>
         <p:spPr>
           <a:xfrm>
-            <a:off x="889000" y="3479800"/>
+            <a:off x="889000" y="3594100"/>
             <a:ext cx="2667000" cy="889000"/>
           </a:xfrm>
           <a:prstGeom prst="rect">
@@ -15895,7 +16215,7 @@
         <p:spPr>
           <a:xfrm>
             <a:off x="4203700" y="1358900"/>
-            <a:ext cx="1787525" cy="1905000"/>
+            <a:ext cx="1787525" cy="1778000"/>
           </a:xfrm>
           <a:prstGeom prst="rect">
             <a:avLst/>
@@ -15910,7 +16230,7 @@
         </p:nvSpPr>
         <p:spPr>
           <a:xfrm>
-            <a:off x="4203700" y="3314700"/>
+            <a:off x="4203700" y="3175000"/>
             <a:ext cx="1787525" cy="215900"/>
           </a:xfrm>
           <a:prstGeom prst="rect">
@@ -15962,7 +16282,7 @@
         <p:spPr>
           <a:xfrm>
             <a:off x="6067425" y="1358900"/>
-            <a:ext cx="1787525" cy="1905000"/>
+            <a:ext cx="1787525" cy="1778000"/>
           </a:xfrm>
           <a:prstGeom prst="rect">
             <a:avLst/>
@@ -15977,7 +16297,7 @@
         </p:nvSpPr>
         <p:spPr>
           <a:xfrm>
-            <a:off x="6067425" y="3314700"/>
+            <a:off x="6067425" y="3175000"/>
             <a:ext cx="1787525" cy="215900"/>
           </a:xfrm>
           <a:prstGeom prst="rect">
@@ -16029,7 +16349,7 @@
         <p:spPr>
           <a:xfrm>
             <a:off x="7931150" y="1358900"/>
-            <a:ext cx="1787525" cy="1905000"/>
+            <a:ext cx="1787525" cy="1778000"/>
           </a:xfrm>
           <a:prstGeom prst="rect">
             <a:avLst/>
@@ -16044,7 +16364,7 @@
         </p:nvSpPr>
         <p:spPr>
           <a:xfrm>
-            <a:off x="7931150" y="3314700"/>
+            <a:off x="7931150" y="3175000"/>
             <a:ext cx="1787525" cy="215900"/>
           </a:xfrm>
           <a:prstGeom prst="rect">
@@ -16096,7 +16416,7 @@
         <p:spPr>
           <a:xfrm>
             <a:off x="9794875" y="1358900"/>
-            <a:ext cx="1787525" cy="1905000"/>
+            <a:ext cx="1787525" cy="1778000"/>
           </a:xfrm>
           <a:prstGeom prst="rect">
             <a:avLst/>
@@ -16111,7 +16431,7 @@
         </p:nvSpPr>
         <p:spPr>
           <a:xfrm>
-            <a:off x="9794875" y="3314700"/>
+            <a:off x="9794875" y="3175000"/>
             <a:ext cx="1787525" cy="215900"/>
           </a:xfrm>
           <a:prstGeom prst="rect">
@@ -16154,7 +16474,7 @@
         </p:nvSpPr>
         <p:spPr>
           <a:xfrm>
-            <a:off x="9999980" y="2933700"/>
+            <a:off x="9999980" y="2806700"/>
             <a:ext cx="1506220" cy="254000"/>
           </a:xfrm>
           <a:prstGeom prst="rect">
@@ -16185,7 +16505,7 @@
         </p:nvSpPr>
         <p:spPr>
           <a:xfrm>
-            <a:off x="9999980" y="2933700"/>
+            <a:off x="9999980" y="2806700"/>
             <a:ext cx="1506220" cy="254000"/>
           </a:xfrm>
           <a:prstGeom prst="rect">
@@ -16306,8 +16626,8 @@
         </p:nvSpPr>
         <p:spPr>
           <a:xfrm>
-            <a:off x="4203700" y="3746500"/>
-            <a:ext cx="1905000" cy="215900"/>
+            <a:off x="4203700" y="3530600"/>
+            <a:ext cx="1905000" cy="190500"/>
           </a:xfrm>
           <a:prstGeom prst="rect">
             <a:avLst/>
@@ -16322,11 +16642,11 @@
           <a:p>
             <a:pPr algn="l">
               <a:lnSpc>
-                <a:spcPts val="1320"/>
-              </a:lnSpc>
-            </a:pPr>
-            <a:r>
-              <a:rPr sz="1100" b="1" lang="zh-CN" altLang="en-US">
+                <a:spcPts val="1200"/>
+              </a:lnSpc>
+            </a:pPr>
+            <a:r>
+              <a:rPr sz="1000" b="1" lang="zh-CN" altLang="en-US">
                 <a:solidFill>
                   <a:srgbClr val="F5F5F5">
                     <a:alpha val="40000"/>
@@ -16336,7 +16656,7 @@
                 <a:ea typeface="微软雅黑"/>
                 <a:cs typeface="微软雅黑"/>
               </a:rPr>
-              <a:t>分类</a:t>
+              <a:t>形态</a:t>
             </a:r>
           </a:p>
         </p:txBody>
@@ -16349,8 +16669,8 @@
         </p:nvSpPr>
         <p:spPr>
           <a:xfrm>
-            <a:off x="7505700" y="3746500"/>
-            <a:ext cx="1905000" cy="215900"/>
+            <a:off x="8013700" y="3530600"/>
+            <a:ext cx="1905000" cy="190500"/>
           </a:xfrm>
           <a:prstGeom prst="rect">
             <a:avLst/>
@@ -16365,11 +16685,11 @@
           <a:p>
             <a:pPr algn="l">
               <a:lnSpc>
-                <a:spcPts val="1320"/>
-              </a:lnSpc>
-            </a:pPr>
-            <a:r>
-              <a:rPr sz="1100" b="1" lang="zh-CN" altLang="en-US">
+                <a:spcPts val="1200"/>
+              </a:lnSpc>
+            </a:pPr>
+            <a:r>
+              <a:rPr sz="1000" b="1" lang="zh-CN" altLang="en-US">
                 <a:solidFill>
                   <a:srgbClr val="F5F5F5">
                     <a:alpha val="40000"/>
@@ -16392,8 +16712,8 @@
         </p:nvSpPr>
         <p:spPr>
           <a:xfrm>
-            <a:off x="9537700" y="3746500"/>
-            <a:ext cx="1905000" cy="215900"/>
+            <a:off x="9918700" y="3530600"/>
+            <a:ext cx="1905000" cy="190500"/>
           </a:xfrm>
           <a:prstGeom prst="rect">
             <a:avLst/>
@@ -16408,11 +16728,11 @@
           <a:p>
             <a:pPr algn="l">
               <a:lnSpc>
-                <a:spcPts val="1320"/>
-              </a:lnSpc>
-            </a:pPr>
-            <a:r>
-              <a:rPr sz="1100" b="1" lang="zh-CN" altLang="en-US">
+                <a:spcPts val="1200"/>
+              </a:lnSpc>
+            </a:pPr>
+            <a:r>
+              <a:rPr sz="1000" b="1" lang="zh-CN" altLang="en-US">
                 <a:solidFill>
                   <a:srgbClr val="F5F5F5">
                     <a:alpha val="40000"/>
@@ -16435,7 +16755,7 @@
         </p:nvSpPr>
         <p:spPr>
           <a:xfrm>
-            <a:off x="4203700" y="3987800"/>
+            <a:off x="4203700" y="3733800"/>
             <a:ext cx="7378700" cy="6350"/>
           </a:xfrm>
           <a:prstGeom prst="rect">
@@ -16466,8 +16786,8 @@
         </p:nvSpPr>
         <p:spPr>
           <a:xfrm>
-            <a:off x="4203700" y="3987800"/>
-            <a:ext cx="3175000" cy="520700"/>
+            <a:off x="4203700" y="3733800"/>
+            <a:ext cx="3810000" cy="260350"/>
           </a:xfrm>
           <a:prstGeom prst="rect">
             <a:avLst/>
@@ -16482,11 +16802,11 @@
           <a:p>
             <a:pPr algn="l">
               <a:lnSpc>
-                <a:spcPts val="1690"/>
-              </a:lnSpc>
-            </a:pPr>
-            <a:r>
-              <a:rPr sz="1300" b="1" lang="zh-CN" altLang="en-US">
+                <a:spcPts val="1439"/>
+              </a:lnSpc>
+            </a:pPr>
+            <a:r>
+              <a:rPr sz="1200" b="1" lang="zh-CN" altLang="en-US">
                 <a:solidFill>
                   <a:srgbClr val="F5F5F5"/>
                 </a:solidFill>
@@ -16494,7 +16814,7 @@
                 <a:ea typeface="微软雅黑"/>
                 <a:cs typeface="微软雅黑"/>
               </a:rPr>
-              <a:t>开花花型</a:t>
+              <a:t>球形开花（菊、牡丹）</a:t>
             </a:r>
           </a:p>
         </p:txBody>
@@ -16507,8 +16827,8 @@
         </p:nvSpPr>
         <p:spPr>
           <a:xfrm>
-            <a:off x="7505700" y="3987800"/>
-            <a:ext cx="1968500" cy="520700"/>
+            <a:off x="8013700" y="3733800"/>
+            <a:ext cx="1905000" cy="260350"/>
           </a:xfrm>
           <a:prstGeom prst="rect">
             <a:avLst/>
@@ -16523,37 +16843,37 @@
           <a:p>
             <a:pPr algn="l">
               <a:lnSpc>
-                <a:spcPts val="1625"/>
-              </a:lnSpc>
-            </a:pPr>
-            <a:r>
-              <a:rPr sz="1250" b="0" lang="zh-CN" altLang="en-US">
-                <a:solidFill>
-                  <a:srgbClr val="F5F5F5">
-                    <a:alpha val="70000"/>
-                  </a:srgbClr>
-                </a:solidFill>
-                <a:latin typeface="Consolas"/>
-                <a:ea typeface="微软雅黑"/>
-                <a:cs typeface="微软雅黑"/>
-              </a:rPr>
-              <a:t>26</a:t>
-            </a:r>
-            <a:r>
-              <a:rPr sz="1250" b="0" lang="zh-CN" altLang="en-US">
-                <a:solidFill>
-                  <a:srgbClr val="F5F5F5">
-                    <a:alpha val="70000"/>
-                  </a:srgbClr>
-                </a:solidFill>
-                <a:latin typeface="微软雅黑"/>
-                <a:ea typeface="微软雅黑"/>
-                <a:cs typeface="微软雅黑"/>
-              </a:rPr>
-              <a:t> </a:t>
-            </a:r>
-            <a:r>
-              <a:rPr sz="1250" b="0" lang="zh-CN" altLang="en-US">
+                <a:spcPts val="1439"/>
+              </a:lnSpc>
+            </a:pPr>
+            <a:r>
+              <a:rPr sz="1200" b="0" lang="zh-CN" altLang="en-US">
+                <a:solidFill>
+                  <a:srgbClr val="F5F5F5">
+                    <a:alpha val="70000"/>
+                  </a:srgbClr>
+                </a:solidFill>
+                <a:latin typeface="Consolas"/>
+                <a:ea typeface="微软雅黑"/>
+                <a:cs typeface="微软雅黑"/>
+              </a:rPr>
+              <a:t>9</a:t>
+            </a:r>
+            <a:r>
+              <a:rPr sz="1200" b="0" lang="zh-CN" altLang="en-US">
+                <a:solidFill>
+                  <a:srgbClr val="F5F5F5">
+                    <a:alpha val="70000"/>
+                  </a:srgbClr>
+                </a:solidFill>
+                <a:latin typeface="微软雅黑"/>
+                <a:ea typeface="微软雅黑"/>
+                <a:cs typeface="微软雅黑"/>
+              </a:rPr>
+              <a:t> </a:t>
+            </a:r>
+            <a:r>
+              <a:rPr sz="1200" b="0" lang="zh-CN" altLang="en-US">
                 <a:solidFill>
                   <a:srgbClr val="F5F5F5">
                     <a:alpha val="70000"/>
@@ -16564,84 +16884,6 @@
                 <a:cs typeface="微软雅黑"/>
               </a:rPr>
               <a:t>种</a:t>
-            </a:r>
-            <a:r>
-              <a:rPr sz="1250" b="0" lang="zh-CN" altLang="en-US">
-                <a:solidFill>
-                  <a:srgbClr val="F5F5F5">
-                    <a:alpha val="70000"/>
-                  </a:srgbClr>
-                </a:solidFill>
-                <a:latin typeface="微软雅黑"/>
-                <a:ea typeface="微软雅黑"/>
-                <a:cs typeface="微软雅黑"/>
-              </a:rPr>
-              <a:t> </a:t>
-            </a:r>
-            <a:r>
-              <a:rPr sz="1250" b="0" lang="zh-CN" altLang="en-US">
-                <a:solidFill>
-                  <a:srgbClr val="F5F5F5">
-                    <a:alpha val="70000"/>
-                  </a:srgbClr>
-                </a:solidFill>
-                <a:latin typeface="Consolas"/>
-                <a:ea typeface="微软雅黑"/>
-                <a:cs typeface="微软雅黑"/>
-              </a:rPr>
-              <a:t>·</a:t>
-            </a:r>
-            <a:r>
-              <a:rPr sz="1250" b="0" lang="zh-CN" altLang="en-US">
-                <a:solidFill>
-                  <a:srgbClr val="F5F5F5">
-                    <a:alpha val="70000"/>
-                  </a:srgbClr>
-                </a:solidFill>
-                <a:latin typeface="微软雅黑"/>
-                <a:ea typeface="微软雅黑"/>
-                <a:cs typeface="微软雅黑"/>
-              </a:rPr>
-              <a:t> </a:t>
-            </a:r>
-            <a:r>
-              <a:rPr sz="1250" b="0" lang="zh-CN" altLang="en-US">
-                <a:solidFill>
-                  <a:srgbClr val="F5F5F5">
-                    <a:alpha val="70000"/>
-                  </a:srgbClr>
-                </a:solidFill>
-                <a:latin typeface="Consolas"/>
-                <a:ea typeface="微软雅黑"/>
-                <a:cs typeface="微软雅黑"/>
-              </a:rPr>
-              <a:t>30</a:t>
-            </a:r>
-            <a:r>
-              <a:rPr sz="1250" b="0" lang="zh-CN" altLang="en-US">
-                <a:solidFill>
-                  <a:srgbClr val="F5F5F5">
-                    <a:alpha val="70000"/>
-                  </a:srgbClr>
-                </a:solidFill>
-                <a:latin typeface="微软雅黑"/>
-                <a:ea typeface="微软雅黑"/>
-                <a:cs typeface="微软雅黑"/>
-              </a:rPr>
-              <a:t> </a:t>
-            </a:r>
-            <a:r>
-              <a:rPr sz="1250" b="0" lang="zh-CN" altLang="en-US">
-                <a:solidFill>
-                  <a:srgbClr val="F5F5F5">
-                    <a:alpha val="70000"/>
-                  </a:srgbClr>
-                </a:solidFill>
-                <a:latin typeface="Consolas"/>
-                <a:ea typeface="微软雅黑"/>
-                <a:cs typeface="微软雅黑"/>
-              </a:rPr>
-              <a:t>个规格</a:t>
             </a:r>
           </a:p>
         </p:txBody>
@@ -16654,8 +16896,8 @@
         </p:nvSpPr>
         <p:spPr>
           <a:xfrm>
-            <a:off x="9537700" y="3987800"/>
-            <a:ext cx="2044700" cy="520700"/>
+            <a:off x="9918700" y="3733800"/>
+            <a:ext cx="1663700" cy="260350"/>
           </a:xfrm>
           <a:prstGeom prst="rect">
             <a:avLst/>
@@ -16670,37 +16912,37 @@
           <a:p>
             <a:pPr algn="l">
               <a:lnSpc>
-                <a:spcPts val="1625"/>
-              </a:lnSpc>
-            </a:pPr>
-            <a:r>
-              <a:rPr sz="1250" b="0" lang="zh-CN" altLang="en-US">
-                <a:solidFill>
-                  <a:srgbClr val="F5F5F5">
-                    <a:alpha val="70000"/>
-                  </a:srgbClr>
-                </a:solidFill>
-                <a:latin typeface="Consolas"/>
-                <a:ea typeface="微软雅黑"/>
-                <a:cs typeface="微软雅黑"/>
-              </a:rPr>
-              <a:t>12</a:t>
-            </a:r>
-            <a:r>
-              <a:rPr sz="1250" b="0" lang="zh-CN" altLang="en-US">
-                <a:solidFill>
-                  <a:srgbClr val="F5F5F5">
-                    <a:alpha val="70000"/>
-                  </a:srgbClr>
-                </a:solidFill>
-                <a:latin typeface="微软雅黑"/>
-                <a:ea typeface="微软雅黑"/>
-                <a:cs typeface="微软雅黑"/>
-              </a:rPr>
-              <a:t> </a:t>
-            </a:r>
-            <a:r>
-              <a:rPr sz="1250" b="0" lang="zh-CN" altLang="en-US">
+                <a:spcPts val="1439"/>
+              </a:lnSpc>
+            </a:pPr>
+            <a:r>
+              <a:rPr sz="1200" b="0" lang="zh-CN" altLang="en-US">
+                <a:solidFill>
+                  <a:srgbClr val="F5F5F5">
+                    <a:alpha val="70000"/>
+                  </a:srgbClr>
+                </a:solidFill>
+                <a:latin typeface="Consolas"/>
+                <a:ea typeface="微软雅黑"/>
+                <a:cs typeface="微软雅黑"/>
+              </a:rPr>
+              <a:t>1</a:t>
+            </a:r>
+            <a:r>
+              <a:rPr sz="1200" b="0" lang="zh-CN" altLang="en-US">
+                <a:solidFill>
+                  <a:srgbClr val="F5F5F5">
+                    <a:alpha val="70000"/>
+                  </a:srgbClr>
+                </a:solidFill>
+                <a:latin typeface="微软雅黑"/>
+                <a:ea typeface="微软雅黑"/>
+                <a:cs typeface="微软雅黑"/>
+              </a:rPr>
+              <a:t> </a:t>
+            </a:r>
+            <a:r>
+              <a:rPr sz="1200" b="0" lang="zh-CN" altLang="en-US">
                 <a:solidFill>
                   <a:srgbClr val="F5F5F5">
                     <a:alpha val="70000"/>
@@ -16723,7 +16965,7 @@
         </p:nvSpPr>
         <p:spPr>
           <a:xfrm>
-            <a:off x="4203700" y="4508500"/>
+            <a:off x="4203700" y="3994150"/>
             <a:ext cx="7378700" cy="6350"/>
           </a:xfrm>
           <a:prstGeom prst="rect">
@@ -16754,8 +16996,8 @@
         </p:nvSpPr>
         <p:spPr>
           <a:xfrm>
-            <a:off x="4203700" y="4508500"/>
-            <a:ext cx="3175000" cy="520700"/>
+            <a:off x="4203700" y="3994150"/>
+            <a:ext cx="3810000" cy="260350"/>
           </a:xfrm>
           <a:prstGeom prst="rect">
             <a:avLst/>
@@ -16770,11 +17012,11 @@
           <a:p>
             <a:pPr algn="l">
               <a:lnSpc>
-                <a:spcPts val="1690"/>
-              </a:lnSpc>
-            </a:pPr>
-            <a:r>
-              <a:rPr sz="1300" b="1" lang="zh-CN" altLang="en-US">
+                <a:spcPts val="1439"/>
+              </a:lnSpc>
+            </a:pPr>
+            <a:r>
+              <a:rPr sz="1200" b="1" lang="zh-CN" altLang="en-US">
                 <a:solidFill>
                   <a:srgbClr val="F5F5F5"/>
                 </a:solidFill>
@@ -16782,7 +17024,7 @@
                 <a:ea typeface="微软雅黑"/>
                 <a:cs typeface="微软雅黑"/>
               </a:rPr>
-              <a:t>升空尾缀</a:t>
+              <a:t>冠</a:t>
             </a:r>
           </a:p>
         </p:txBody>
@@ -16795,8 +17037,8 @@
         </p:nvSpPr>
         <p:spPr>
           <a:xfrm>
-            <a:off x="7505700" y="4508500"/>
-            <a:ext cx="1968500" cy="520700"/>
+            <a:off x="8013700" y="3994150"/>
+            <a:ext cx="1905000" cy="260350"/>
           </a:xfrm>
           <a:prstGeom prst="rect">
             <a:avLst/>
@@ -16811,47 +17053,47 @@
           <a:p>
             <a:pPr algn="l">
               <a:lnSpc>
-                <a:spcPts val="1625"/>
-              </a:lnSpc>
-            </a:pPr>
-            <a:r>
-              <a:rPr sz="1250" b="0" lang="zh-CN" altLang="en-US">
-                <a:solidFill>
-                  <a:srgbClr val="F5F5F5">
-                    <a:alpha val="70000"/>
-                  </a:srgbClr>
-                </a:solidFill>
-                <a:latin typeface="Consolas"/>
-                <a:ea typeface="微软雅黑"/>
-                <a:cs typeface="微软雅黑"/>
-              </a:rPr>
-              <a:t>6</a:t>
-            </a:r>
-            <a:r>
-              <a:rPr sz="1250" b="0" lang="zh-CN" altLang="en-US">
-                <a:solidFill>
-                  <a:srgbClr val="F5F5F5">
-                    <a:alpha val="70000"/>
-                  </a:srgbClr>
-                </a:solidFill>
-                <a:latin typeface="微软雅黑"/>
-                <a:ea typeface="微软雅黑"/>
-                <a:cs typeface="微软雅黑"/>
-              </a:rPr>
-              <a:t> </a:t>
-            </a:r>
-            <a:r>
-              <a:rPr sz="1250" b="0" lang="zh-CN" altLang="en-US">
-                <a:solidFill>
-                  <a:srgbClr val="F5F5F5">
-                    <a:alpha val="70000"/>
-                  </a:srgbClr>
-                </a:solidFill>
-                <a:latin typeface="Consolas"/>
-                <a:ea typeface="微软雅黑"/>
-                <a:cs typeface="微软雅黑"/>
-              </a:rPr>
-              <a:t>档</a:t>
+                <a:spcPts val="1439"/>
+              </a:lnSpc>
+            </a:pPr>
+            <a:r>
+              <a:rPr sz="1200" b="0" lang="zh-CN" altLang="en-US">
+                <a:solidFill>
+                  <a:srgbClr val="F5F5F5">
+                    <a:alpha val="70000"/>
+                  </a:srgbClr>
+                </a:solidFill>
+                <a:latin typeface="Consolas"/>
+                <a:ea typeface="微软雅黑"/>
+                <a:cs typeface="微软雅黑"/>
+              </a:rPr>
+              <a:t>3</a:t>
+            </a:r>
+            <a:r>
+              <a:rPr sz="1200" b="0" lang="zh-CN" altLang="en-US">
+                <a:solidFill>
+                  <a:srgbClr val="F5F5F5">
+                    <a:alpha val="70000"/>
+                  </a:srgbClr>
+                </a:solidFill>
+                <a:latin typeface="微软雅黑"/>
+                <a:ea typeface="微软雅黑"/>
+                <a:cs typeface="微软雅黑"/>
+              </a:rPr>
+              <a:t> </a:t>
+            </a:r>
+            <a:r>
+              <a:rPr sz="1200" b="0" lang="zh-CN" altLang="en-US">
+                <a:solidFill>
+                  <a:srgbClr val="F5F5F5">
+                    <a:alpha val="70000"/>
+                  </a:srgbClr>
+                </a:solidFill>
+                <a:latin typeface="Consolas"/>
+                <a:ea typeface="微软雅黑"/>
+                <a:cs typeface="微软雅黑"/>
+              </a:rPr>
+              <a:t>种</a:t>
             </a:r>
           </a:p>
         </p:txBody>
@@ -16864,8 +17106,8 @@
         </p:nvSpPr>
         <p:spPr>
           <a:xfrm>
-            <a:off x="9537700" y="4508500"/>
-            <a:ext cx="2044700" cy="520700"/>
+            <a:off x="9918700" y="3994150"/>
+            <a:ext cx="1663700" cy="260350"/>
           </a:xfrm>
           <a:prstGeom prst="rect">
             <a:avLst/>
@@ -16880,47 +17122,47 @@
           <a:p>
             <a:pPr algn="l">
               <a:lnSpc>
-                <a:spcPts val="1625"/>
-              </a:lnSpc>
-            </a:pPr>
-            <a:r>
-              <a:rPr sz="1250" b="0" lang="zh-CN" altLang="en-US">
-                <a:solidFill>
-                  <a:srgbClr val="F5F5F5">
-                    <a:alpha val="70000"/>
-                  </a:srgbClr>
-                </a:solidFill>
-                <a:latin typeface="Consolas"/>
-                <a:ea typeface="微软雅黑"/>
-                <a:cs typeface="微软雅黑"/>
-              </a:rPr>
-              <a:t>6</a:t>
-            </a:r>
-            <a:r>
-              <a:rPr sz="1250" b="0" lang="zh-CN" altLang="en-US">
-                <a:solidFill>
-                  <a:srgbClr val="F5F5F5">
-                    <a:alpha val="70000"/>
-                  </a:srgbClr>
-                </a:solidFill>
-                <a:latin typeface="微软雅黑"/>
-                <a:ea typeface="微软雅黑"/>
-                <a:cs typeface="微软雅黑"/>
-              </a:rPr>
-              <a:t> </a:t>
-            </a:r>
-            <a:r>
-              <a:rPr sz="1250" b="0" lang="zh-CN" altLang="en-US">
-                <a:solidFill>
-                  <a:srgbClr val="F5F5F5">
-                    <a:alpha val="70000"/>
-                  </a:srgbClr>
-                </a:solidFill>
-                <a:latin typeface="Consolas"/>
-                <a:ea typeface="微软雅黑"/>
-                <a:cs typeface="微软雅黑"/>
-              </a:rPr>
-              <a:t>档</a:t>
+                <a:spcPts val="1439"/>
+              </a:lnSpc>
+            </a:pPr>
+            <a:r>
+              <a:rPr sz="1200" b="0" lang="zh-CN" altLang="en-US">
+                <a:solidFill>
+                  <a:srgbClr val="F5F5F5">
+                    <a:alpha val="70000"/>
+                  </a:srgbClr>
+                </a:solidFill>
+                <a:latin typeface="Consolas"/>
+                <a:ea typeface="微软雅黑"/>
+                <a:cs typeface="微软雅黑"/>
+              </a:rPr>
+              <a:t>3</a:t>
+            </a:r>
+            <a:r>
+              <a:rPr sz="1200" b="0" lang="zh-CN" altLang="en-US">
+                <a:solidFill>
+                  <a:srgbClr val="F5F5F5">
+                    <a:alpha val="70000"/>
+                  </a:srgbClr>
+                </a:solidFill>
+                <a:latin typeface="微软雅黑"/>
+                <a:ea typeface="微软雅黑"/>
+                <a:cs typeface="微软雅黑"/>
+              </a:rPr>
+              <a:t> </a:t>
+            </a:r>
+            <a:r>
+              <a:rPr sz="1200" b="0" lang="zh-CN" altLang="en-US">
+                <a:solidFill>
+                  <a:srgbClr val="F5F5F5">
+                    <a:alpha val="70000"/>
+                  </a:srgbClr>
+                </a:solidFill>
+                <a:latin typeface="Consolas"/>
+                <a:ea typeface="微软雅黑"/>
+                <a:cs typeface="微软雅黑"/>
+              </a:rPr>
+              <a:t>种</a:t>
             </a:r>
           </a:p>
         </p:txBody>
@@ -16933,7 +17175,7 @@
         </p:nvSpPr>
         <p:spPr>
           <a:xfrm>
-            <a:off x="4203700" y="5029200"/>
+            <a:off x="4203700" y="4254500"/>
             <a:ext cx="7378700" cy="6350"/>
           </a:xfrm>
           <a:prstGeom prst="rect">
@@ -16964,8 +17206,8 @@
         </p:nvSpPr>
         <p:spPr>
           <a:xfrm>
-            <a:off x="4203700" y="5029200"/>
-            <a:ext cx="3175000" cy="520700"/>
+            <a:off x="4203700" y="4254500"/>
+            <a:ext cx="3810000" cy="260350"/>
           </a:xfrm>
           <a:prstGeom prst="rect">
             <a:avLst/>
@@ -16980,11 +17222,11 @@
           <a:p>
             <a:pPr algn="l">
               <a:lnSpc>
-                <a:spcPts val="1690"/>
-              </a:lnSpc>
-            </a:pPr>
-            <a:r>
-              <a:rPr sz="1300" b="1" lang="zh-CN" altLang="en-US">
+                <a:spcPts val="1439"/>
+              </a:lnSpc>
+            </a:pPr>
+            <a:r>
+              <a:rPr sz="1200" b="1" lang="zh-CN" altLang="en-US">
                 <a:solidFill>
                   <a:srgbClr val="F5F5F5"/>
                 </a:solidFill>
@@ -16992,7 +17234,7 @@
                 <a:ea typeface="微软雅黑"/>
                 <a:cs typeface="微软雅黑"/>
               </a:rPr>
-              <a:t>窜天猴</a:t>
+              <a:t>柳</a:t>
             </a:r>
           </a:p>
         </p:txBody>
@@ -17005,8 +17247,8 @@
         </p:nvSpPr>
         <p:spPr>
           <a:xfrm>
-            <a:off x="7505700" y="5029200"/>
-            <a:ext cx="1968500" cy="520700"/>
+            <a:off x="8013700" y="4254500"/>
+            <a:ext cx="1905000" cy="260350"/>
           </a:xfrm>
           <a:prstGeom prst="rect">
             <a:avLst/>
@@ -17021,11 +17263,11 @@
           <a:p>
             <a:pPr algn="l">
               <a:lnSpc>
-                <a:spcPts val="1625"/>
-              </a:lnSpc>
-            </a:pPr>
-            <a:r>
-              <a:rPr sz="1250" b="0" lang="zh-CN" altLang="en-US">
+                <a:spcPts val="1439"/>
+              </a:lnSpc>
+            </a:pPr>
+            <a:r>
+              <a:rPr sz="1200" b="0" lang="zh-CN" altLang="en-US">
                 <a:solidFill>
                   <a:srgbClr val="F5F5F5">
                     <a:alpha val="70000"/>
@@ -17038,108 +17280,30 @@
               <a:t>1</a:t>
             </a:r>
             <a:r>
-              <a:rPr sz="1250" b="0" lang="zh-CN" altLang="en-US">
-                <a:solidFill>
-                  <a:srgbClr val="F5F5F5">
-                    <a:alpha val="70000"/>
-                  </a:srgbClr>
-                </a:solidFill>
-                <a:latin typeface="微软雅黑"/>
-                <a:ea typeface="微软雅黑"/>
-                <a:cs typeface="微软雅黑"/>
-              </a:rPr>
-              <a:t> </a:t>
-            </a:r>
-            <a:r>
-              <a:rPr sz="1250" b="0" lang="zh-CN" altLang="en-US">
-                <a:solidFill>
-                  <a:srgbClr val="F5F5F5">
-                    <a:alpha val="70000"/>
-                  </a:srgbClr>
-                </a:solidFill>
-                <a:latin typeface="Consolas"/>
-                <a:ea typeface="微软雅黑"/>
-                <a:cs typeface="微软雅黑"/>
-              </a:rPr>
-              <a:t>套</a:t>
-            </a:r>
-            <a:r>
-              <a:rPr sz="1250" b="0" lang="zh-CN" altLang="en-US">
-                <a:solidFill>
-                  <a:srgbClr val="F5F5F5">
-                    <a:alpha val="70000"/>
-                  </a:srgbClr>
-                </a:solidFill>
-                <a:latin typeface="微软雅黑"/>
-                <a:ea typeface="微软雅黑"/>
-                <a:cs typeface="微软雅黑"/>
-              </a:rPr>
-              <a:t> </a:t>
-            </a:r>
-            <a:r>
-              <a:rPr sz="1250" b="0" lang="zh-CN" altLang="en-US">
-                <a:solidFill>
-                  <a:srgbClr val="F5F5F5">
-                    <a:alpha val="70000"/>
-                  </a:srgbClr>
-                </a:solidFill>
-                <a:latin typeface="Consolas"/>
-                <a:ea typeface="微软雅黑"/>
-                <a:cs typeface="微软雅黑"/>
-              </a:rPr>
-              <a:t>·</a:t>
-            </a:r>
-            <a:r>
-              <a:rPr sz="1250" b="0" lang="zh-CN" altLang="en-US">
-                <a:solidFill>
-                  <a:srgbClr val="F5F5F5">
-                    <a:alpha val="70000"/>
-                  </a:srgbClr>
-                </a:solidFill>
-                <a:latin typeface="微软雅黑"/>
-                <a:ea typeface="微软雅黑"/>
-                <a:cs typeface="微软雅黑"/>
-              </a:rPr>
-              <a:t> </a:t>
-            </a:r>
-            <a:r>
-              <a:rPr sz="1250" b="0" lang="zh-CN" altLang="en-US">
-                <a:solidFill>
-                  <a:srgbClr val="F5F5F5">
-                    <a:alpha val="70000"/>
-                  </a:srgbClr>
-                </a:solidFill>
-                <a:latin typeface="Consolas"/>
-                <a:ea typeface="微软雅黑"/>
-                <a:cs typeface="微软雅黑"/>
-              </a:rPr>
-              <a:t>7</a:t>
-            </a:r>
-            <a:r>
-              <a:rPr sz="1250" b="0" lang="zh-CN" altLang="en-US">
-                <a:solidFill>
-                  <a:srgbClr val="F5F5F5">
-                    <a:alpha val="70000"/>
-                  </a:srgbClr>
-                </a:solidFill>
-                <a:latin typeface="微软雅黑"/>
-                <a:ea typeface="微软雅黑"/>
-                <a:cs typeface="微软雅黑"/>
-              </a:rPr>
-              <a:t> </a:t>
-            </a:r>
-            <a:r>
-              <a:rPr sz="1250" b="0" lang="zh-CN" altLang="en-US">
-                <a:solidFill>
-                  <a:srgbClr val="F5F5F5">
-                    <a:alpha val="70000"/>
-                  </a:srgbClr>
-                </a:solidFill>
-                <a:latin typeface="Consolas"/>
-                <a:ea typeface="微软雅黑"/>
-                <a:cs typeface="微软雅黑"/>
-              </a:rPr>
-              <a:t>个组件</a:t>
+              <a:rPr sz="1200" b="0" lang="zh-CN" altLang="en-US">
+                <a:solidFill>
+                  <a:srgbClr val="F5F5F5">
+                    <a:alpha val="70000"/>
+                  </a:srgbClr>
+                </a:solidFill>
+                <a:latin typeface="微软雅黑"/>
+                <a:ea typeface="微软雅黑"/>
+                <a:cs typeface="微软雅黑"/>
+              </a:rPr>
+              <a:t> </a:t>
+            </a:r>
+            <a:r>
+              <a:rPr sz="1200" b="0" lang="zh-CN" altLang="en-US">
+                <a:solidFill>
+                  <a:srgbClr val="F5F5F5">
+                    <a:alpha val="70000"/>
+                  </a:srgbClr>
+                </a:solidFill>
+                <a:latin typeface="Consolas"/>
+                <a:ea typeface="微软雅黑"/>
+                <a:cs typeface="微软雅黑"/>
+              </a:rPr>
+              <a:t>种</a:t>
             </a:r>
           </a:p>
         </p:txBody>
@@ -17152,8 +17316,8 @@
         </p:nvSpPr>
         <p:spPr>
           <a:xfrm>
-            <a:off x="9537700" y="5029200"/>
-            <a:ext cx="2044700" cy="520700"/>
+            <a:off x="9918700" y="4254500"/>
+            <a:ext cx="1663700" cy="260350"/>
           </a:xfrm>
           <a:prstGeom prst="rect">
             <a:avLst/>
@@ -17168,11 +17332,11 @@
           <a:p>
             <a:pPr algn="l">
               <a:lnSpc>
-                <a:spcPts val="1625"/>
-              </a:lnSpc>
-            </a:pPr>
-            <a:r>
-              <a:rPr sz="1250" b="0" lang="zh-CN" altLang="en-US">
+                <a:spcPts val="1439"/>
+              </a:lnSpc>
+            </a:pPr>
+            <a:r>
+              <a:rPr sz="1200" b="0" lang="zh-CN" altLang="en-US">
                 <a:solidFill>
                   <a:srgbClr val="F5F5F5">
                     <a:alpha val="70000"/>
@@ -17185,108 +17349,30 @@
               <a:t>1</a:t>
             </a:r>
             <a:r>
-              <a:rPr sz="1250" b="0" lang="zh-CN" altLang="en-US">
-                <a:solidFill>
-                  <a:srgbClr val="F5F5F5">
-                    <a:alpha val="70000"/>
-                  </a:srgbClr>
-                </a:solidFill>
-                <a:latin typeface="微软雅黑"/>
-                <a:ea typeface="微软雅黑"/>
-                <a:cs typeface="微软雅黑"/>
-              </a:rPr>
-              <a:t> </a:t>
-            </a:r>
-            <a:r>
-              <a:rPr sz="1250" b="0" lang="zh-CN" altLang="en-US">
-                <a:solidFill>
-                  <a:srgbClr val="F5F5F5">
-                    <a:alpha val="70000"/>
-                  </a:srgbClr>
-                </a:solidFill>
-                <a:latin typeface="Consolas"/>
-                <a:ea typeface="微软雅黑"/>
-                <a:cs typeface="微软雅黑"/>
-              </a:rPr>
-              <a:t>套</a:t>
-            </a:r>
-            <a:r>
-              <a:rPr sz="1250" b="0" lang="zh-CN" altLang="en-US">
-                <a:solidFill>
-                  <a:srgbClr val="F5F5F5">
-                    <a:alpha val="70000"/>
-                  </a:srgbClr>
-                </a:solidFill>
-                <a:latin typeface="微软雅黑"/>
-                <a:ea typeface="微软雅黑"/>
-                <a:cs typeface="微软雅黑"/>
-              </a:rPr>
-              <a:t> </a:t>
-            </a:r>
-            <a:r>
-              <a:rPr sz="1250" b="0" lang="zh-CN" altLang="en-US">
-                <a:solidFill>
-                  <a:srgbClr val="F5F5F5">
-                    <a:alpha val="70000"/>
-                  </a:srgbClr>
-                </a:solidFill>
-                <a:latin typeface="Consolas"/>
-                <a:ea typeface="微软雅黑"/>
-                <a:cs typeface="微软雅黑"/>
-              </a:rPr>
-              <a:t>·</a:t>
-            </a:r>
-            <a:r>
-              <a:rPr sz="1250" b="0" lang="zh-CN" altLang="en-US">
-                <a:solidFill>
-                  <a:srgbClr val="F5F5F5">
-                    <a:alpha val="70000"/>
-                  </a:srgbClr>
-                </a:solidFill>
-                <a:latin typeface="微软雅黑"/>
-                <a:ea typeface="微软雅黑"/>
-                <a:cs typeface="微软雅黑"/>
-              </a:rPr>
-              <a:t> </a:t>
-            </a:r>
-            <a:r>
-              <a:rPr sz="1250" b="0" lang="zh-CN" altLang="en-US">
-                <a:solidFill>
-                  <a:srgbClr val="F5F5F5">
-                    <a:alpha val="70000"/>
-                  </a:srgbClr>
-                </a:solidFill>
-                <a:latin typeface="Consolas"/>
-                <a:ea typeface="微软雅黑"/>
-                <a:cs typeface="微软雅黑"/>
-              </a:rPr>
-              <a:t>6</a:t>
-            </a:r>
-            <a:r>
-              <a:rPr sz="1250" b="0" lang="zh-CN" altLang="en-US">
-                <a:solidFill>
-                  <a:srgbClr val="F5F5F5">
-                    <a:alpha val="70000"/>
-                  </a:srgbClr>
-                </a:solidFill>
-                <a:latin typeface="微软雅黑"/>
-                <a:ea typeface="微软雅黑"/>
-                <a:cs typeface="微软雅黑"/>
-              </a:rPr>
-              <a:t> </a:t>
-            </a:r>
-            <a:r>
-              <a:rPr sz="1250" b="0" lang="zh-CN" altLang="en-US">
-                <a:solidFill>
-                  <a:srgbClr val="F5F5F5">
-                    <a:alpha val="70000"/>
-                  </a:srgbClr>
-                </a:solidFill>
-                <a:latin typeface="Consolas"/>
-                <a:ea typeface="微软雅黑"/>
-                <a:cs typeface="微软雅黑"/>
-              </a:rPr>
-              <a:t>个组件</a:t>
+              <a:rPr sz="1200" b="0" lang="zh-CN" altLang="en-US">
+                <a:solidFill>
+                  <a:srgbClr val="F5F5F5">
+                    <a:alpha val="70000"/>
+                  </a:srgbClr>
+                </a:solidFill>
+                <a:latin typeface="微软雅黑"/>
+                <a:ea typeface="微软雅黑"/>
+                <a:cs typeface="微软雅黑"/>
+              </a:rPr>
+              <a:t> </a:t>
+            </a:r>
+            <a:r>
+              <a:rPr sz="1200" b="0" lang="zh-CN" altLang="en-US">
+                <a:solidFill>
+                  <a:srgbClr val="F5F5F5">
+                    <a:alpha val="70000"/>
+                  </a:srgbClr>
+                </a:solidFill>
+                <a:latin typeface="Consolas"/>
+                <a:ea typeface="微软雅黑"/>
+                <a:cs typeface="微软雅黑"/>
+              </a:rPr>
+              <a:t>种</a:t>
             </a:r>
           </a:p>
         </p:txBody>
@@ -17299,7 +17385,7 @@
         </p:nvSpPr>
         <p:spPr>
           <a:xfrm>
-            <a:off x="4203700" y="5549900"/>
+            <a:off x="4203700" y="4514850"/>
             <a:ext cx="7378700" cy="6350"/>
           </a:xfrm>
           <a:prstGeom prst="rect">
@@ -17330,8 +17416,8 @@
         </p:nvSpPr>
         <p:spPr>
           <a:xfrm>
-            <a:off x="4203700" y="5549900"/>
-            <a:ext cx="3175000" cy="520700"/>
+            <a:off x="4203700" y="4514850"/>
+            <a:ext cx="3810000" cy="260350"/>
           </a:xfrm>
           <a:prstGeom prst="rect">
             <a:avLst/>
@@ -17346,11 +17432,11 @@
           <a:p>
             <a:pPr algn="l">
               <a:lnSpc>
-                <a:spcPts val="1690"/>
-              </a:lnSpc>
-            </a:pPr>
-            <a:r>
-              <a:rPr sz="1300" b="1" lang="zh-CN" altLang="en-US">
+                <a:spcPts val="1439"/>
+              </a:lnSpc>
+            </a:pPr>
+            <a:r>
+              <a:rPr sz="1200" b="1" lang="zh-CN" altLang="en-US">
                 <a:solidFill>
                   <a:srgbClr val="F5F5F5"/>
                 </a:solidFill>
@@ -17358,7 +17444,7 @@
                 <a:ea typeface="微软雅黑"/>
                 <a:cs typeface="微软雅黑"/>
               </a:rPr>
-              <a:t>引用贴图</a:t>
+              <a:t>扇形</a:t>
             </a:r>
           </a:p>
         </p:txBody>
@@ -17371,8 +17457,8 @@
         </p:nvSpPr>
         <p:spPr>
           <a:xfrm>
-            <a:off x="7505700" y="5549900"/>
-            <a:ext cx="1968500" cy="520700"/>
+            <a:off x="8013700" y="4514850"/>
+            <a:ext cx="1905000" cy="260350"/>
           </a:xfrm>
           <a:prstGeom prst="rect">
             <a:avLst/>
@@ -17387,47 +17473,125 @@
           <a:p>
             <a:pPr algn="l">
               <a:lnSpc>
-                <a:spcPts val="1625"/>
-              </a:lnSpc>
-            </a:pPr>
-            <a:r>
-              <a:rPr sz="1250" b="0" lang="zh-CN" altLang="en-US">
-                <a:solidFill>
-                  <a:srgbClr val="F5F5F5">
-                    <a:alpha val="70000"/>
-                  </a:srgbClr>
-                </a:solidFill>
-                <a:latin typeface="Consolas"/>
-                <a:ea typeface="微软雅黑"/>
-                <a:cs typeface="微软雅黑"/>
-              </a:rPr>
-              <a:t>212</a:t>
-            </a:r>
-            <a:r>
-              <a:rPr sz="1250" b="0" lang="zh-CN" altLang="en-US">
-                <a:solidFill>
-                  <a:srgbClr val="F5F5F5">
-                    <a:alpha val="70000"/>
-                  </a:srgbClr>
-                </a:solidFill>
-                <a:latin typeface="微软雅黑"/>
-                <a:ea typeface="微软雅黑"/>
-                <a:cs typeface="微软雅黑"/>
-              </a:rPr>
-              <a:t> </a:t>
-            </a:r>
-            <a:r>
-              <a:rPr sz="1250" b="0" lang="zh-CN" altLang="en-US">
-                <a:solidFill>
-                  <a:srgbClr val="F5F5F5">
-                    <a:alpha val="70000"/>
-                  </a:srgbClr>
-                </a:solidFill>
-                <a:latin typeface="Consolas"/>
-                <a:ea typeface="微软雅黑"/>
-                <a:cs typeface="微软雅黑"/>
-              </a:rPr>
-              <a:t>张（两个平台合计）</a:t>
+                <a:spcPts val="1439"/>
+              </a:lnSpc>
+            </a:pPr>
+            <a:r>
+              <a:rPr sz="1200" b="0" lang="zh-CN" altLang="en-US">
+                <a:solidFill>
+                  <a:srgbClr val="F5F5F5">
+                    <a:alpha val="70000"/>
+                  </a:srgbClr>
+                </a:solidFill>
+                <a:latin typeface="Consolas"/>
+                <a:ea typeface="微软雅黑"/>
+                <a:cs typeface="微软雅黑"/>
+              </a:rPr>
+              <a:t>1</a:t>
+            </a:r>
+            <a:r>
+              <a:rPr sz="1200" b="0" lang="zh-CN" altLang="en-US">
+                <a:solidFill>
+                  <a:srgbClr val="F5F5F5">
+                    <a:alpha val="70000"/>
+                  </a:srgbClr>
+                </a:solidFill>
+                <a:latin typeface="微软雅黑"/>
+                <a:ea typeface="微软雅黑"/>
+                <a:cs typeface="微软雅黑"/>
+              </a:rPr>
+              <a:t> </a:t>
+            </a:r>
+            <a:r>
+              <a:rPr sz="1200" b="0" lang="zh-CN" altLang="en-US">
+                <a:solidFill>
+                  <a:srgbClr val="F5F5F5">
+                    <a:alpha val="70000"/>
+                  </a:srgbClr>
+                </a:solidFill>
+                <a:latin typeface="Consolas"/>
+                <a:ea typeface="微软雅黑"/>
+                <a:cs typeface="微软雅黑"/>
+              </a:rPr>
+              <a:t>种</a:t>
+            </a:r>
+            <a:r>
+              <a:rPr sz="1200" b="0" lang="zh-CN" altLang="en-US">
+                <a:solidFill>
+                  <a:srgbClr val="F5F5F5">
+                    <a:alpha val="70000"/>
+                  </a:srgbClr>
+                </a:solidFill>
+                <a:latin typeface="微软雅黑"/>
+                <a:ea typeface="微软雅黑"/>
+                <a:cs typeface="微软雅黑"/>
+              </a:rPr>
+              <a:t> </a:t>
+            </a:r>
+            <a:r>
+              <a:rPr sz="1200" b="0" lang="zh-CN" altLang="en-US">
+                <a:solidFill>
+                  <a:srgbClr val="F5F5F5">
+                    <a:alpha val="70000"/>
+                  </a:srgbClr>
+                </a:solidFill>
+                <a:latin typeface="Consolas"/>
+                <a:ea typeface="微软雅黑"/>
+                <a:cs typeface="微软雅黑"/>
+              </a:rPr>
+              <a:t>·</a:t>
+            </a:r>
+            <a:r>
+              <a:rPr sz="1200" b="0" lang="zh-CN" altLang="en-US">
+                <a:solidFill>
+                  <a:srgbClr val="F5F5F5">
+                    <a:alpha val="70000"/>
+                  </a:srgbClr>
+                </a:solidFill>
+                <a:latin typeface="微软雅黑"/>
+                <a:ea typeface="微软雅黑"/>
+                <a:cs typeface="微软雅黑"/>
+              </a:rPr>
+              <a:t> </a:t>
+            </a:r>
+            <a:r>
+              <a:rPr sz="1200" b="0" lang="zh-CN" altLang="en-US">
+                <a:solidFill>
+                  <a:srgbClr val="F5F5F5">
+                    <a:alpha val="70000"/>
+                  </a:srgbClr>
+                </a:solidFill>
+                <a:latin typeface="Consolas"/>
+                <a:ea typeface="微软雅黑"/>
+                <a:cs typeface="微软雅黑"/>
+              </a:rPr>
+              <a:t>金锦冠，4</a:t>
+            </a:r>
+            <a:r>
+              <a:rPr sz="1200" b="0" lang="zh-CN" altLang="en-US">
+                <a:solidFill>
+                  <a:srgbClr val="F5F5F5">
+                    <a:alpha val="70000"/>
+                  </a:srgbClr>
+                </a:solidFill>
+                <a:latin typeface="微软雅黑"/>
+                <a:ea typeface="微软雅黑"/>
+                <a:cs typeface="微软雅黑"/>
+              </a:rPr>
+              <a:t> </a:t>
+            </a:r>
+            <a:r>
+              <a:rPr sz="1200" b="0" lang="zh-CN" altLang="en-US">
+                <a:solidFill>
+                  <a:srgbClr val="F5F5F5">
+                    <a:alpha val="70000"/>
+                  </a:srgbClr>
+                </a:solidFill>
+                <a:latin typeface="Consolas"/>
+                <a:ea typeface="微软雅黑"/>
+                <a:cs typeface="微软雅黑"/>
+              </a:rPr>
+              <a:t>段</a:t>
             </a:r>
           </a:p>
         </p:txBody>
@@ -17440,8 +17604,8 @@
         </p:nvSpPr>
         <p:spPr>
           <a:xfrm>
-            <a:off x="9537700" y="5549900"/>
-            <a:ext cx="2044700" cy="520700"/>
+            <a:off x="9918700" y="4514850"/>
+            <a:ext cx="1663700" cy="260350"/>
           </a:xfrm>
           <a:prstGeom prst="rect">
             <a:avLst/>
@@ -17456,9 +17620,1170 @@
           <a:p>
             <a:pPr algn="l">
               <a:lnSpc>
-                <a:spcPts val="1625"/>
-              </a:lnSpc>
-            </a:pPr>
+                <a:spcPts val="1439"/>
+              </a:lnSpc>
+            </a:pPr>
+            <a:r>
+              <a:rPr sz="1200" b="0" lang="zh-CN" altLang="en-US">
+                <a:solidFill>
+                  <a:srgbClr val="F5F5F5">
+                    <a:alpha val="70000"/>
+                  </a:srgbClr>
+                </a:solidFill>
+                <a:latin typeface="Consolas"/>
+                <a:ea typeface="微软雅黑"/>
+                <a:cs typeface="微软雅黑"/>
+              </a:rPr>
+              <a:t>—</a:t>
+            </a:r>
+          </a:p>
+        </p:txBody>
+      </p:sp>
+      <p:sp>
+        <p:nvSpPr>
+          <p:cNvPr id="43" name="Rectangle 42"/>
+          <p:cNvSpPr/>
+          <p:nvPr/>
+        </p:nvSpPr>
+        <p:spPr>
+          <a:xfrm>
+            <a:off x="4203700" y="4775200"/>
+            <a:ext cx="7378700" cy="6350"/>
+          </a:xfrm>
+          <a:prstGeom prst="rect">
+            <a:avLst/>
+          </a:prstGeom>
+          <a:solidFill>
+            <a:srgbClr val="F5F5F5">
+              <a:alpha val="10000"/>
+            </a:srgbClr>
+          </a:solidFill>
+          <a:ln>
+            <a:noFill/>
+          </a:ln>
+        </p:spPr>
+        <p:txBody>
+          <a:bodyPr rtlCol="0" anchor="ctr"/>
+          <a:lstStyle/>
+          <a:p>
+            <a:pPr algn="ctr"/>
+          </a:p>
+        </p:txBody>
+      </p:sp>
+      <p:sp>
+        <p:nvSpPr>
+          <p:cNvPr id="44" name="TextBox 43"/>
+          <p:cNvSpPr txBox="1"/>
+          <p:nvPr/>
+        </p:nvSpPr>
+        <p:spPr>
+          <a:xfrm>
+            <a:off x="4203700" y="4775200"/>
+            <a:ext cx="3810000" cy="260350"/>
+          </a:xfrm>
+          <a:prstGeom prst="rect">
+            <a:avLst/>
+          </a:prstGeom>
+          <a:noFill/>
+        </p:spPr>
+        <p:txBody>
+          <a:bodyPr wrap="square" lIns="0" rIns="0" tIns="0" bIns="0" anchor="ctr">
+            <a:noAutofit/>
+          </a:bodyPr>
+          <a:lstStyle/>
+          <a:p>
+            <a:pPr algn="l">
+              <a:lnSpc>
+                <a:spcPts val="1439"/>
+              </a:lnSpc>
+            </a:pPr>
+            <a:r>
+              <a:rPr sz="1200" b="1" lang="zh-CN" altLang="en-US">
+                <a:solidFill>
+                  <a:srgbClr val="F5F5F5"/>
+                </a:solidFill>
+                <a:latin typeface="Consolas"/>
+                <a:ea typeface="微软雅黑"/>
+                <a:cs typeface="微软雅黑"/>
+              </a:rPr>
+              <a:t>彗星</a:t>
+            </a:r>
+          </a:p>
+        </p:txBody>
+      </p:sp>
+      <p:sp>
+        <p:nvSpPr>
+          <p:cNvPr id="45" name="TextBox 44"/>
+          <p:cNvSpPr txBox="1"/>
+          <p:nvPr/>
+        </p:nvSpPr>
+        <p:spPr>
+          <a:xfrm>
+            <a:off x="8013700" y="4775200"/>
+            <a:ext cx="1905000" cy="260350"/>
+          </a:xfrm>
+          <a:prstGeom prst="rect">
+            <a:avLst/>
+          </a:prstGeom>
+          <a:noFill/>
+        </p:spPr>
+        <p:txBody>
+          <a:bodyPr wrap="square" lIns="0" rIns="0" tIns="0" bIns="0" anchor="ctr">
+            <a:noAutofit/>
+          </a:bodyPr>
+          <a:lstStyle/>
+          <a:p>
+            <a:pPr algn="l">
+              <a:lnSpc>
+                <a:spcPts val="1439"/>
+              </a:lnSpc>
+            </a:pPr>
+            <a:r>
+              <a:rPr sz="1200" b="0" lang="zh-CN" altLang="en-US">
+                <a:solidFill>
+                  <a:srgbClr val="F5F5F5">
+                    <a:alpha val="70000"/>
+                  </a:srgbClr>
+                </a:solidFill>
+                <a:latin typeface="Consolas"/>
+                <a:ea typeface="微软雅黑"/>
+                <a:cs typeface="微软雅黑"/>
+              </a:rPr>
+              <a:t>5</a:t>
+            </a:r>
+            <a:r>
+              <a:rPr sz="1200" b="0" lang="zh-CN" altLang="en-US">
+                <a:solidFill>
+                  <a:srgbClr val="F5F5F5">
+                    <a:alpha val="70000"/>
+                  </a:srgbClr>
+                </a:solidFill>
+                <a:latin typeface="微软雅黑"/>
+                <a:ea typeface="微软雅黑"/>
+                <a:cs typeface="微软雅黑"/>
+              </a:rPr>
+              <a:t> </a:t>
+            </a:r>
+            <a:r>
+              <a:rPr sz="1200" b="0" lang="zh-CN" altLang="en-US">
+                <a:solidFill>
+                  <a:srgbClr val="F5F5F5">
+                    <a:alpha val="70000"/>
+                  </a:srgbClr>
+                </a:solidFill>
+                <a:latin typeface="Consolas"/>
+                <a:ea typeface="微软雅黑"/>
+                <a:cs typeface="微软雅黑"/>
+              </a:rPr>
+              <a:t>种</a:t>
+            </a:r>
+          </a:p>
+        </p:txBody>
+      </p:sp>
+      <p:sp>
+        <p:nvSpPr>
+          <p:cNvPr id="46" name="TextBox 45"/>
+          <p:cNvSpPr txBox="1"/>
+          <p:nvPr/>
+        </p:nvSpPr>
+        <p:spPr>
+          <a:xfrm>
+            <a:off x="9918700" y="4775200"/>
+            <a:ext cx="1663700" cy="260350"/>
+          </a:xfrm>
+          <a:prstGeom prst="rect">
+            <a:avLst/>
+          </a:prstGeom>
+          <a:noFill/>
+        </p:spPr>
+        <p:txBody>
+          <a:bodyPr wrap="square" lIns="0" rIns="0" tIns="0" bIns="0" anchor="ctr">
+            <a:noAutofit/>
+          </a:bodyPr>
+          <a:lstStyle/>
+          <a:p>
+            <a:pPr algn="l">
+              <a:lnSpc>
+                <a:spcPts val="1439"/>
+              </a:lnSpc>
+            </a:pPr>
+            <a:r>
+              <a:rPr sz="1200" b="0" lang="zh-CN" altLang="en-US">
+                <a:solidFill>
+                  <a:srgbClr val="F5F5F5">
+                    <a:alpha val="70000"/>
+                  </a:srgbClr>
+                </a:solidFill>
+                <a:latin typeface="Consolas"/>
+                <a:ea typeface="微软雅黑"/>
+                <a:cs typeface="微软雅黑"/>
+              </a:rPr>
+              <a:t>2</a:t>
+            </a:r>
+            <a:r>
+              <a:rPr sz="1200" b="0" lang="zh-CN" altLang="en-US">
+                <a:solidFill>
+                  <a:srgbClr val="F5F5F5">
+                    <a:alpha val="70000"/>
+                  </a:srgbClr>
+                </a:solidFill>
+                <a:latin typeface="微软雅黑"/>
+                <a:ea typeface="微软雅黑"/>
+                <a:cs typeface="微软雅黑"/>
+              </a:rPr>
+              <a:t> </a:t>
+            </a:r>
+            <a:r>
+              <a:rPr sz="1200" b="0" lang="zh-CN" altLang="en-US">
+                <a:solidFill>
+                  <a:srgbClr val="F5F5F5">
+                    <a:alpha val="70000"/>
+                  </a:srgbClr>
+                </a:solidFill>
+                <a:latin typeface="Consolas"/>
+                <a:ea typeface="微软雅黑"/>
+                <a:cs typeface="微软雅黑"/>
+              </a:rPr>
+              <a:t>种</a:t>
+            </a:r>
+          </a:p>
+        </p:txBody>
+      </p:sp>
+      <p:sp>
+        <p:nvSpPr>
+          <p:cNvPr id="47" name="Rectangle 46"/>
+          <p:cNvSpPr/>
+          <p:nvPr/>
+        </p:nvSpPr>
+        <p:spPr>
+          <a:xfrm>
+            <a:off x="4203700" y="5035550"/>
+            <a:ext cx="7378700" cy="6350"/>
+          </a:xfrm>
+          <a:prstGeom prst="rect">
+            <a:avLst/>
+          </a:prstGeom>
+          <a:solidFill>
+            <a:srgbClr val="F5F5F5">
+              <a:alpha val="10000"/>
+            </a:srgbClr>
+          </a:solidFill>
+          <a:ln>
+            <a:noFill/>
+          </a:ln>
+        </p:spPr>
+        <p:txBody>
+          <a:bodyPr rtlCol="0" anchor="ctr"/>
+          <a:lstStyle/>
+          <a:p>
+            <a:pPr algn="ctr"/>
+          </a:p>
+        </p:txBody>
+      </p:sp>
+      <p:sp>
+        <p:nvSpPr>
+          <p:cNvPr id="48" name="TextBox 47"/>
+          <p:cNvSpPr txBox="1"/>
+          <p:nvPr/>
+        </p:nvSpPr>
+        <p:spPr>
+          <a:xfrm>
+            <a:off x="4203700" y="5035550"/>
+            <a:ext cx="3810000" cy="260350"/>
+          </a:xfrm>
+          <a:prstGeom prst="rect">
+            <a:avLst/>
+          </a:prstGeom>
+          <a:noFill/>
+        </p:spPr>
+        <p:txBody>
+          <a:bodyPr wrap="square" lIns="0" rIns="0" tIns="0" bIns="0" anchor="ctr">
+            <a:noAutofit/>
+          </a:bodyPr>
+          <a:lstStyle/>
+          <a:p>
+            <a:pPr algn="l">
+              <a:lnSpc>
+                <a:spcPts val="1439"/>
+              </a:lnSpc>
+            </a:pPr>
+            <a:r>
+              <a:rPr sz="1200" b="1" lang="zh-CN" altLang="en-US">
+                <a:solidFill>
+                  <a:srgbClr val="F5F5F5"/>
+                </a:solidFill>
+                <a:latin typeface="Consolas"/>
+                <a:ea typeface="微软雅黑"/>
+                <a:cs typeface="微软雅黑"/>
+              </a:rPr>
+              <a:t>特殊星效（爆裂、分裂、辉星、点灭）</a:t>
+            </a:r>
+          </a:p>
+        </p:txBody>
+      </p:sp>
+      <p:sp>
+        <p:nvSpPr>
+          <p:cNvPr id="49" name="TextBox 48"/>
+          <p:cNvSpPr txBox="1"/>
+          <p:nvPr/>
+        </p:nvSpPr>
+        <p:spPr>
+          <a:xfrm>
+            <a:off x="8013700" y="5035550"/>
+            <a:ext cx="1905000" cy="260350"/>
+          </a:xfrm>
+          <a:prstGeom prst="rect">
+            <a:avLst/>
+          </a:prstGeom>
+          <a:noFill/>
+        </p:spPr>
+        <p:txBody>
+          <a:bodyPr wrap="square" lIns="0" rIns="0" tIns="0" bIns="0" anchor="ctr">
+            <a:noAutofit/>
+          </a:bodyPr>
+          <a:lstStyle/>
+          <a:p>
+            <a:pPr algn="l">
+              <a:lnSpc>
+                <a:spcPts val="1439"/>
+              </a:lnSpc>
+            </a:pPr>
+            <a:r>
+              <a:rPr sz="1200" b="0" lang="zh-CN" altLang="en-US">
+                <a:solidFill>
+                  <a:srgbClr val="F5F5F5">
+                    <a:alpha val="70000"/>
+                  </a:srgbClr>
+                </a:solidFill>
+                <a:latin typeface="Consolas"/>
+                <a:ea typeface="微软雅黑"/>
+                <a:cs typeface="微软雅黑"/>
+              </a:rPr>
+              <a:t>6</a:t>
+            </a:r>
+            <a:r>
+              <a:rPr sz="1200" b="0" lang="zh-CN" altLang="en-US">
+                <a:solidFill>
+                  <a:srgbClr val="F5F5F5">
+                    <a:alpha val="70000"/>
+                  </a:srgbClr>
+                </a:solidFill>
+                <a:latin typeface="微软雅黑"/>
+                <a:ea typeface="微软雅黑"/>
+                <a:cs typeface="微软雅黑"/>
+              </a:rPr>
+              <a:t> </a:t>
+            </a:r>
+            <a:r>
+              <a:rPr sz="1200" b="0" lang="zh-CN" altLang="en-US">
+                <a:solidFill>
+                  <a:srgbClr val="F5F5F5">
+                    <a:alpha val="70000"/>
+                  </a:srgbClr>
+                </a:solidFill>
+                <a:latin typeface="Consolas"/>
+                <a:ea typeface="微软雅黑"/>
+                <a:cs typeface="微软雅黑"/>
+              </a:rPr>
+              <a:t>种</a:t>
+            </a:r>
+          </a:p>
+        </p:txBody>
+      </p:sp>
+      <p:sp>
+        <p:nvSpPr>
+          <p:cNvPr id="50" name="TextBox 49"/>
+          <p:cNvSpPr txBox="1"/>
+          <p:nvPr/>
+        </p:nvSpPr>
+        <p:spPr>
+          <a:xfrm>
+            <a:off x="9918700" y="5035550"/>
+            <a:ext cx="1663700" cy="260350"/>
+          </a:xfrm>
+          <a:prstGeom prst="rect">
+            <a:avLst/>
+          </a:prstGeom>
+          <a:noFill/>
+        </p:spPr>
+        <p:txBody>
+          <a:bodyPr wrap="square" lIns="0" rIns="0" tIns="0" bIns="0" anchor="ctr">
+            <a:noAutofit/>
+          </a:bodyPr>
+          <a:lstStyle/>
+          <a:p>
+            <a:pPr algn="l">
+              <a:lnSpc>
+                <a:spcPts val="1439"/>
+              </a:lnSpc>
+            </a:pPr>
+            <a:r>
+              <a:rPr sz="1200" b="0" lang="zh-CN" altLang="en-US">
+                <a:solidFill>
+                  <a:srgbClr val="F5F5F5">
+                    <a:alpha val="70000"/>
+                  </a:srgbClr>
+                </a:solidFill>
+                <a:latin typeface="Consolas"/>
+                <a:ea typeface="微软雅黑"/>
+                <a:cs typeface="微软雅黑"/>
+              </a:rPr>
+              <a:t>5</a:t>
+            </a:r>
+            <a:r>
+              <a:rPr sz="1200" b="0" lang="zh-CN" altLang="en-US">
+                <a:solidFill>
+                  <a:srgbClr val="F5F5F5">
+                    <a:alpha val="70000"/>
+                  </a:srgbClr>
+                </a:solidFill>
+                <a:latin typeface="微软雅黑"/>
+                <a:ea typeface="微软雅黑"/>
+                <a:cs typeface="微软雅黑"/>
+              </a:rPr>
+              <a:t> </a:t>
+            </a:r>
+            <a:r>
+              <a:rPr sz="1200" b="0" lang="zh-CN" altLang="en-US">
+                <a:solidFill>
+                  <a:srgbClr val="F5F5F5">
+                    <a:alpha val="70000"/>
+                  </a:srgbClr>
+                </a:solidFill>
+                <a:latin typeface="Consolas"/>
+                <a:ea typeface="微软雅黑"/>
+                <a:cs typeface="微软雅黑"/>
+              </a:rPr>
+              <a:t>种</a:t>
+            </a:r>
+          </a:p>
+        </p:txBody>
+      </p:sp>
+      <p:sp>
+        <p:nvSpPr>
+          <p:cNvPr id="51" name="Rectangle 50"/>
+          <p:cNvSpPr/>
+          <p:nvPr/>
+        </p:nvSpPr>
+        <p:spPr>
+          <a:xfrm>
+            <a:off x="4203700" y="5295900"/>
+            <a:ext cx="7378700" cy="6350"/>
+          </a:xfrm>
+          <a:prstGeom prst="rect">
+            <a:avLst/>
+          </a:prstGeom>
+          <a:solidFill>
+            <a:srgbClr val="F5F5F5">
+              <a:alpha val="10000"/>
+            </a:srgbClr>
+          </a:solidFill>
+          <a:ln>
+            <a:noFill/>
+          </a:ln>
+        </p:spPr>
+        <p:txBody>
+          <a:bodyPr rtlCol="0" anchor="ctr"/>
+          <a:lstStyle/>
+          <a:p>
+            <a:pPr algn="ctr"/>
+          </a:p>
+        </p:txBody>
+      </p:sp>
+      <p:sp>
+        <p:nvSpPr>
+          <p:cNvPr id="52" name="TextBox 51"/>
+          <p:cNvSpPr txBox="1"/>
+          <p:nvPr/>
+        </p:nvSpPr>
+        <p:spPr>
+          <a:xfrm>
+            <a:off x="4203700" y="5295900"/>
+            <a:ext cx="3810000" cy="260350"/>
+          </a:xfrm>
+          <a:prstGeom prst="rect">
+            <a:avLst/>
+          </a:prstGeom>
+          <a:noFill/>
+        </p:spPr>
+        <p:txBody>
+          <a:bodyPr wrap="square" lIns="0" rIns="0" tIns="0" bIns="0" anchor="ctr">
+            <a:noAutofit/>
+          </a:bodyPr>
+          <a:lstStyle/>
+          <a:p>
+            <a:pPr algn="l">
+              <a:lnSpc>
+                <a:spcPts val="1439"/>
+              </a:lnSpc>
+            </a:pPr>
+            <a:r>
+              <a:rPr sz="1200" b="1" lang="zh-CN" altLang="en-US">
+                <a:solidFill>
+                  <a:srgbClr val="F5F5F5"/>
+                </a:solidFill>
+                <a:latin typeface="Consolas"/>
+                <a:ea typeface="微软雅黑"/>
+                <a:cs typeface="微软雅黑"/>
+              </a:rPr>
+              <a:t>升空尾缀</a:t>
+            </a:r>
+          </a:p>
+        </p:txBody>
+      </p:sp>
+      <p:sp>
+        <p:nvSpPr>
+          <p:cNvPr id="53" name="TextBox 52"/>
+          <p:cNvSpPr txBox="1"/>
+          <p:nvPr/>
+        </p:nvSpPr>
+        <p:spPr>
+          <a:xfrm>
+            <a:off x="8013700" y="5295900"/>
+            <a:ext cx="1905000" cy="260350"/>
+          </a:xfrm>
+          <a:prstGeom prst="rect">
+            <a:avLst/>
+          </a:prstGeom>
+          <a:noFill/>
+        </p:spPr>
+        <p:txBody>
+          <a:bodyPr wrap="square" lIns="0" rIns="0" tIns="0" bIns="0" anchor="ctr">
+            <a:noAutofit/>
+          </a:bodyPr>
+          <a:lstStyle/>
+          <a:p>
+            <a:pPr algn="l">
+              <a:lnSpc>
+                <a:spcPts val="1439"/>
+              </a:lnSpc>
+            </a:pPr>
+            <a:r>
+              <a:rPr sz="1200" b="0" lang="zh-CN" altLang="en-US">
+                <a:solidFill>
+                  <a:srgbClr val="F5F5F5">
+                    <a:alpha val="70000"/>
+                  </a:srgbClr>
+                </a:solidFill>
+                <a:latin typeface="Consolas"/>
+                <a:ea typeface="微软雅黑"/>
+                <a:cs typeface="微软雅黑"/>
+              </a:rPr>
+              <a:t>6</a:t>
+            </a:r>
+            <a:r>
+              <a:rPr sz="1200" b="0" lang="zh-CN" altLang="en-US">
+                <a:solidFill>
+                  <a:srgbClr val="F5F5F5">
+                    <a:alpha val="70000"/>
+                  </a:srgbClr>
+                </a:solidFill>
+                <a:latin typeface="微软雅黑"/>
+                <a:ea typeface="微软雅黑"/>
+                <a:cs typeface="微软雅黑"/>
+              </a:rPr>
+              <a:t> </a:t>
+            </a:r>
+            <a:r>
+              <a:rPr sz="1200" b="0" lang="zh-CN" altLang="en-US">
+                <a:solidFill>
+                  <a:srgbClr val="F5F5F5">
+                    <a:alpha val="70000"/>
+                  </a:srgbClr>
+                </a:solidFill>
+                <a:latin typeface="Consolas"/>
+                <a:ea typeface="微软雅黑"/>
+                <a:cs typeface="微软雅黑"/>
+              </a:rPr>
+              <a:t>档</a:t>
+            </a:r>
+          </a:p>
+        </p:txBody>
+      </p:sp>
+      <p:sp>
+        <p:nvSpPr>
+          <p:cNvPr id="54" name="TextBox 53"/>
+          <p:cNvSpPr txBox="1"/>
+          <p:nvPr/>
+        </p:nvSpPr>
+        <p:spPr>
+          <a:xfrm>
+            <a:off x="9918700" y="5295900"/>
+            <a:ext cx="1663700" cy="260350"/>
+          </a:xfrm>
+          <a:prstGeom prst="rect">
+            <a:avLst/>
+          </a:prstGeom>
+          <a:noFill/>
+        </p:spPr>
+        <p:txBody>
+          <a:bodyPr wrap="square" lIns="0" rIns="0" tIns="0" bIns="0" anchor="ctr">
+            <a:noAutofit/>
+          </a:bodyPr>
+          <a:lstStyle/>
+          <a:p>
+            <a:pPr algn="l">
+              <a:lnSpc>
+                <a:spcPts val="1439"/>
+              </a:lnSpc>
+            </a:pPr>
+            <a:r>
+              <a:rPr sz="1200" b="0" lang="zh-CN" altLang="en-US">
+                <a:solidFill>
+                  <a:srgbClr val="F5F5F5">
+                    <a:alpha val="70000"/>
+                  </a:srgbClr>
+                </a:solidFill>
+                <a:latin typeface="Consolas"/>
+                <a:ea typeface="微软雅黑"/>
+                <a:cs typeface="微软雅黑"/>
+              </a:rPr>
+              <a:t>6</a:t>
+            </a:r>
+            <a:r>
+              <a:rPr sz="1200" b="0" lang="zh-CN" altLang="en-US">
+                <a:solidFill>
+                  <a:srgbClr val="F5F5F5">
+                    <a:alpha val="70000"/>
+                  </a:srgbClr>
+                </a:solidFill>
+                <a:latin typeface="微软雅黑"/>
+                <a:ea typeface="微软雅黑"/>
+                <a:cs typeface="微软雅黑"/>
+              </a:rPr>
+              <a:t> </a:t>
+            </a:r>
+            <a:r>
+              <a:rPr sz="1200" b="0" lang="zh-CN" altLang="en-US">
+                <a:solidFill>
+                  <a:srgbClr val="F5F5F5">
+                    <a:alpha val="70000"/>
+                  </a:srgbClr>
+                </a:solidFill>
+                <a:latin typeface="Consolas"/>
+                <a:ea typeface="微软雅黑"/>
+                <a:cs typeface="微软雅黑"/>
+              </a:rPr>
+              <a:t>档</a:t>
+            </a:r>
+          </a:p>
+        </p:txBody>
+      </p:sp>
+      <p:sp>
+        <p:nvSpPr>
+          <p:cNvPr id="55" name="Rectangle 54"/>
+          <p:cNvSpPr/>
+          <p:nvPr/>
+        </p:nvSpPr>
+        <p:spPr>
+          <a:xfrm>
+            <a:off x="4203700" y="5556250"/>
+            <a:ext cx="7378700" cy="6350"/>
+          </a:xfrm>
+          <a:prstGeom prst="rect">
+            <a:avLst/>
+          </a:prstGeom>
+          <a:solidFill>
+            <a:srgbClr val="F5F5F5">
+              <a:alpha val="10000"/>
+            </a:srgbClr>
+          </a:solidFill>
+          <a:ln>
+            <a:noFill/>
+          </a:ln>
+        </p:spPr>
+        <p:txBody>
+          <a:bodyPr rtlCol="0" anchor="ctr"/>
+          <a:lstStyle/>
+          <a:p>
+            <a:pPr algn="ctr"/>
+          </a:p>
+        </p:txBody>
+      </p:sp>
+      <p:sp>
+        <p:nvSpPr>
+          <p:cNvPr id="56" name="TextBox 55"/>
+          <p:cNvSpPr txBox="1"/>
+          <p:nvPr/>
+        </p:nvSpPr>
+        <p:spPr>
+          <a:xfrm>
+            <a:off x="4203700" y="5556250"/>
+            <a:ext cx="3810000" cy="260350"/>
+          </a:xfrm>
+          <a:prstGeom prst="rect">
+            <a:avLst/>
+          </a:prstGeom>
+          <a:noFill/>
+        </p:spPr>
+        <p:txBody>
+          <a:bodyPr wrap="square" lIns="0" rIns="0" tIns="0" bIns="0" anchor="ctr">
+            <a:noAutofit/>
+          </a:bodyPr>
+          <a:lstStyle/>
+          <a:p>
+            <a:pPr algn="l">
+              <a:lnSpc>
+                <a:spcPts val="1439"/>
+              </a:lnSpc>
+            </a:pPr>
+            <a:r>
+              <a:rPr sz="1200" b="1" lang="zh-CN" altLang="en-US">
+                <a:solidFill>
+                  <a:srgbClr val="F5F5F5"/>
+                </a:solidFill>
+                <a:latin typeface="Consolas"/>
+                <a:ea typeface="微软雅黑"/>
+                <a:cs typeface="微软雅黑"/>
+              </a:rPr>
+              <a:t>窜天猴</a:t>
+            </a:r>
+          </a:p>
+        </p:txBody>
+      </p:sp>
+      <p:sp>
+        <p:nvSpPr>
+          <p:cNvPr id="57" name="TextBox 56"/>
+          <p:cNvSpPr txBox="1"/>
+          <p:nvPr/>
+        </p:nvSpPr>
+        <p:spPr>
+          <a:xfrm>
+            <a:off x="8013700" y="5556250"/>
+            <a:ext cx="1905000" cy="260350"/>
+          </a:xfrm>
+          <a:prstGeom prst="rect">
+            <a:avLst/>
+          </a:prstGeom>
+          <a:noFill/>
+        </p:spPr>
+        <p:txBody>
+          <a:bodyPr wrap="square" lIns="0" rIns="0" tIns="0" bIns="0" anchor="ctr">
+            <a:noAutofit/>
+          </a:bodyPr>
+          <a:lstStyle/>
+          <a:p>
+            <a:pPr algn="l">
+              <a:lnSpc>
+                <a:spcPts val="1439"/>
+              </a:lnSpc>
+            </a:pPr>
+            <a:r>
+              <a:rPr sz="1200" b="0" lang="zh-CN" altLang="en-US">
+                <a:solidFill>
+                  <a:srgbClr val="F5F5F5">
+                    <a:alpha val="70000"/>
+                  </a:srgbClr>
+                </a:solidFill>
+                <a:latin typeface="Consolas"/>
+                <a:ea typeface="微软雅黑"/>
+                <a:cs typeface="微软雅黑"/>
+              </a:rPr>
+              <a:t>7</a:t>
+            </a:r>
+            <a:r>
+              <a:rPr sz="1200" b="0" lang="zh-CN" altLang="en-US">
+                <a:solidFill>
+                  <a:srgbClr val="F5F5F5">
+                    <a:alpha val="70000"/>
+                  </a:srgbClr>
+                </a:solidFill>
+                <a:latin typeface="微软雅黑"/>
+                <a:ea typeface="微软雅黑"/>
+                <a:cs typeface="微软雅黑"/>
+              </a:rPr>
+              <a:t> </a:t>
+            </a:r>
+            <a:r>
+              <a:rPr sz="1200" b="0" lang="zh-CN" altLang="en-US">
+                <a:solidFill>
+                  <a:srgbClr val="F5F5F5">
+                    <a:alpha val="70000"/>
+                  </a:srgbClr>
+                </a:solidFill>
+                <a:latin typeface="Consolas"/>
+                <a:ea typeface="微软雅黑"/>
+                <a:cs typeface="微软雅黑"/>
+              </a:rPr>
+              <a:t>个组件</a:t>
+            </a:r>
+          </a:p>
+        </p:txBody>
+      </p:sp>
+      <p:sp>
+        <p:nvSpPr>
+          <p:cNvPr id="58" name="TextBox 57"/>
+          <p:cNvSpPr txBox="1"/>
+          <p:nvPr/>
+        </p:nvSpPr>
+        <p:spPr>
+          <a:xfrm>
+            <a:off x="9918700" y="5556250"/>
+            <a:ext cx="1663700" cy="260350"/>
+          </a:xfrm>
+          <a:prstGeom prst="rect">
+            <a:avLst/>
+          </a:prstGeom>
+          <a:noFill/>
+        </p:spPr>
+        <p:txBody>
+          <a:bodyPr wrap="square" lIns="0" rIns="0" tIns="0" bIns="0" anchor="ctr">
+            <a:noAutofit/>
+          </a:bodyPr>
+          <a:lstStyle/>
+          <a:p>
+            <a:pPr algn="l">
+              <a:lnSpc>
+                <a:spcPts val="1439"/>
+              </a:lnSpc>
+            </a:pPr>
+            <a:r>
+              <a:rPr sz="1200" b="0" lang="zh-CN" altLang="en-US">
+                <a:solidFill>
+                  <a:srgbClr val="F5F5F5">
+                    <a:alpha val="70000"/>
+                  </a:srgbClr>
+                </a:solidFill>
+                <a:latin typeface="Consolas"/>
+                <a:ea typeface="微软雅黑"/>
+                <a:cs typeface="微软雅黑"/>
+              </a:rPr>
+              <a:t>6</a:t>
+            </a:r>
+            <a:r>
+              <a:rPr sz="1200" b="0" lang="zh-CN" altLang="en-US">
+                <a:solidFill>
+                  <a:srgbClr val="F5F5F5">
+                    <a:alpha val="70000"/>
+                  </a:srgbClr>
+                </a:solidFill>
+                <a:latin typeface="微软雅黑"/>
+                <a:ea typeface="微软雅黑"/>
+                <a:cs typeface="微软雅黑"/>
+              </a:rPr>
+              <a:t> </a:t>
+            </a:r>
+            <a:r>
+              <a:rPr sz="1200" b="0" lang="zh-CN" altLang="en-US">
+                <a:solidFill>
+                  <a:srgbClr val="F5F5F5">
+                    <a:alpha val="70000"/>
+                  </a:srgbClr>
+                </a:solidFill>
+                <a:latin typeface="Consolas"/>
+                <a:ea typeface="微软雅黑"/>
+                <a:cs typeface="微软雅黑"/>
+              </a:rPr>
+              <a:t>个组件</a:t>
+            </a:r>
+          </a:p>
+        </p:txBody>
+      </p:sp>
+      <p:sp>
+        <p:nvSpPr>
+          <p:cNvPr id="59" name="Rectangle 58"/>
+          <p:cNvSpPr/>
+          <p:nvPr/>
+        </p:nvSpPr>
+        <p:spPr>
+          <a:xfrm>
+            <a:off x="4203700" y="5816600"/>
+            <a:ext cx="7378700" cy="6350"/>
+          </a:xfrm>
+          <a:prstGeom prst="rect">
+            <a:avLst/>
+          </a:prstGeom>
+          <a:solidFill>
+            <a:srgbClr val="F5F5F5">
+              <a:alpha val="10000"/>
+            </a:srgbClr>
+          </a:solidFill>
+          <a:ln>
+            <a:noFill/>
+          </a:ln>
+        </p:spPr>
+        <p:txBody>
+          <a:bodyPr rtlCol="0" anchor="ctr"/>
+          <a:lstStyle/>
+          <a:p>
+            <a:pPr algn="ctr"/>
+          </a:p>
+        </p:txBody>
+      </p:sp>
+      <p:sp>
+        <p:nvSpPr>
+          <p:cNvPr id="60" name="TextBox 59"/>
+          <p:cNvSpPr txBox="1"/>
+          <p:nvPr/>
+        </p:nvSpPr>
+        <p:spPr>
+          <a:xfrm>
+            <a:off x="4203700" y="5867400"/>
+            <a:ext cx="7378700" cy="190500"/>
+          </a:xfrm>
+          <a:prstGeom prst="rect">
+            <a:avLst/>
+          </a:prstGeom>
+          <a:noFill/>
+        </p:spPr>
+        <p:txBody>
+          <a:bodyPr wrap="square" lIns="0" rIns="0" tIns="0" bIns="0" anchor="t">
+            <a:noAutofit/>
+          </a:bodyPr>
+          <a:lstStyle/>
+          <a:p>
+            <a:pPr algn="l">
+              <a:lnSpc>
+                <a:spcPts val="1200"/>
+              </a:lnSpc>
+            </a:pPr>
+            <a:r>
+              <a:rPr sz="1000" b="0" lang="zh-CN" altLang="en-US">
+                <a:solidFill>
+                  <a:srgbClr val="F5F5F5">
+                    <a:alpha val="40000"/>
+                  </a:srgbClr>
+                </a:solidFill>
+                <a:latin typeface="Consolas"/>
+                <a:ea typeface="微软雅黑"/>
+                <a:cs typeface="微软雅黑"/>
+              </a:rPr>
+              <a:t>另</a:t>
+            </a:r>
+            <a:r>
+              <a:rPr sz="1000" b="0" lang="zh-CN" altLang="en-US">
+                <a:solidFill>
+                  <a:srgbClr val="F5F5F5">
+                    <a:alpha val="40000"/>
+                  </a:srgbClr>
+                </a:solidFill>
+                <a:latin typeface="微软雅黑"/>
+                <a:ea typeface="微软雅黑"/>
+                <a:cs typeface="微软雅黑"/>
+              </a:rPr>
+              <a:t> </a:t>
+            </a:r>
+            <a:r>
+              <a:rPr sz="1000" b="0" lang="zh-CN" altLang="en-US">
+                <a:solidFill>
+                  <a:srgbClr val="F5F5F5">
+                    <a:alpha val="40000"/>
+                  </a:srgbClr>
+                </a:solidFill>
+                <a:latin typeface="Consolas"/>
+                <a:ea typeface="微软雅黑"/>
+                <a:cs typeface="微软雅黑"/>
+              </a:rPr>
+              <a:t>1</a:t>
+            </a:r>
+            <a:r>
+              <a:rPr sz="1000" b="0" lang="zh-CN" altLang="en-US">
+                <a:solidFill>
+                  <a:srgbClr val="F5F5F5">
+                    <a:alpha val="40000"/>
+                  </a:srgbClr>
+                </a:solidFill>
+                <a:latin typeface="微软雅黑"/>
+                <a:ea typeface="微软雅黑"/>
+                <a:cs typeface="微软雅黑"/>
+              </a:rPr>
+              <a:t> </a:t>
+            </a:r>
+            <a:r>
+              <a:rPr sz="1000" b="0" lang="zh-CN" altLang="en-US">
+                <a:solidFill>
+                  <a:srgbClr val="F5F5F5">
+                    <a:alpha val="40000"/>
+                  </a:srgbClr>
+                </a:solidFill>
+                <a:latin typeface="Consolas"/>
+                <a:ea typeface="微软雅黑"/>
+                <a:cs typeface="微软雅黑"/>
+              </a:rPr>
+              <a:t>种（彩千轮）形态未定；PC</a:t>
+            </a:r>
+            <a:r>
+              <a:rPr sz="1000" b="0" lang="zh-CN" altLang="en-US">
+                <a:solidFill>
+                  <a:srgbClr val="F5F5F5">
+                    <a:alpha val="40000"/>
+                  </a:srgbClr>
+                </a:solidFill>
+                <a:latin typeface="微软雅黑"/>
+                <a:ea typeface="微软雅黑"/>
+                <a:cs typeface="微软雅黑"/>
+              </a:rPr>
+              <a:t> </a:t>
+            </a:r>
+            <a:r>
+              <a:rPr sz="1000" b="0" lang="zh-CN" altLang="en-US">
+                <a:solidFill>
+                  <a:srgbClr val="F5F5F5">
+                    <a:alpha val="40000"/>
+                  </a:srgbClr>
+                </a:solidFill>
+                <a:latin typeface="Consolas"/>
+                <a:ea typeface="微软雅黑"/>
+                <a:cs typeface="微软雅黑"/>
+              </a:rPr>
+              <a:t>开花合计</a:t>
+            </a:r>
+            <a:r>
+              <a:rPr sz="1000" b="0" lang="zh-CN" altLang="en-US">
+                <a:solidFill>
+                  <a:srgbClr val="F5F5F5">
+                    <a:alpha val="40000"/>
+                  </a:srgbClr>
+                </a:solidFill>
+                <a:latin typeface="微软雅黑"/>
+                <a:ea typeface="微软雅黑"/>
+                <a:cs typeface="微软雅黑"/>
+              </a:rPr>
+              <a:t> </a:t>
+            </a:r>
+            <a:r>
+              <a:rPr sz="1000" b="0" lang="zh-CN" altLang="en-US">
+                <a:solidFill>
+                  <a:srgbClr val="F5F5F5">
+                    <a:alpha val="40000"/>
+                  </a:srgbClr>
+                </a:solidFill>
+                <a:latin typeface="Consolas"/>
+                <a:ea typeface="微软雅黑"/>
+                <a:cs typeface="微软雅黑"/>
+              </a:rPr>
+              <a:t>26</a:t>
+            </a:r>
+            <a:r>
+              <a:rPr sz="1000" b="0" lang="zh-CN" altLang="en-US">
+                <a:solidFill>
+                  <a:srgbClr val="F5F5F5">
+                    <a:alpha val="40000"/>
+                  </a:srgbClr>
+                </a:solidFill>
+                <a:latin typeface="微软雅黑"/>
+                <a:ea typeface="微软雅黑"/>
+                <a:cs typeface="微软雅黑"/>
+              </a:rPr>
+              <a:t> </a:t>
+            </a:r>
+            <a:r>
+              <a:rPr sz="1000" b="0" lang="zh-CN" altLang="en-US">
+                <a:solidFill>
+                  <a:srgbClr val="F5F5F5">
+                    <a:alpha val="40000"/>
+                  </a:srgbClr>
+                </a:solidFill>
+                <a:latin typeface="Consolas"/>
+                <a:ea typeface="微软雅黑"/>
+                <a:cs typeface="微软雅黑"/>
+              </a:rPr>
+              <a:t>种，手游</a:t>
+            </a:r>
+            <a:r>
+              <a:rPr sz="1000" b="0" lang="zh-CN" altLang="en-US">
+                <a:solidFill>
+                  <a:srgbClr val="F5F5F5">
+                    <a:alpha val="40000"/>
+                  </a:srgbClr>
+                </a:solidFill>
+                <a:latin typeface="微软雅黑"/>
+                <a:ea typeface="微软雅黑"/>
+                <a:cs typeface="微软雅黑"/>
+              </a:rPr>
+              <a:t> </a:t>
+            </a:r>
+            <a:r>
+              <a:rPr sz="1000" b="0" lang="zh-CN" altLang="en-US">
+                <a:solidFill>
+                  <a:srgbClr val="F5F5F5">
+                    <a:alpha val="40000"/>
+                  </a:srgbClr>
+                </a:solidFill>
+                <a:latin typeface="Consolas"/>
+                <a:ea typeface="微软雅黑"/>
+                <a:cs typeface="微软雅黑"/>
+              </a:rPr>
+              <a:t>12</a:t>
+            </a:r>
+            <a:r>
+              <a:rPr sz="1000" b="0" lang="zh-CN" altLang="en-US">
+                <a:solidFill>
+                  <a:srgbClr val="F5F5F5">
+                    <a:alpha val="40000"/>
+                  </a:srgbClr>
+                </a:solidFill>
+                <a:latin typeface="微软雅黑"/>
+                <a:ea typeface="微软雅黑"/>
+                <a:cs typeface="微软雅黑"/>
+              </a:rPr>
+              <a:t> </a:t>
+            </a:r>
+            <a:r>
+              <a:rPr sz="1000" b="0" lang="zh-CN" altLang="en-US">
+                <a:solidFill>
+                  <a:srgbClr val="F5F5F5">
+                    <a:alpha val="40000"/>
+                  </a:srgbClr>
+                </a:solidFill>
+                <a:latin typeface="Consolas"/>
+                <a:ea typeface="微软雅黑"/>
+                <a:cs typeface="微软雅黑"/>
+              </a:rPr>
+              <a:t>种；共引用</a:t>
+            </a:r>
+            <a:r>
+              <a:rPr sz="1000" b="0" lang="zh-CN" altLang="en-US">
+                <a:solidFill>
+                  <a:srgbClr val="F5F5F5">
+                    <a:alpha val="40000"/>
+                  </a:srgbClr>
+                </a:solidFill>
+                <a:latin typeface="微软雅黑"/>
+                <a:ea typeface="微软雅黑"/>
+                <a:cs typeface="微软雅黑"/>
+              </a:rPr>
+              <a:t> </a:t>
+            </a:r>
+            <a:r>
+              <a:rPr sz="1000" b="0" lang="zh-CN" altLang="en-US">
+                <a:solidFill>
+                  <a:srgbClr val="F5F5F5">
+                    <a:alpha val="40000"/>
+                  </a:srgbClr>
+                </a:solidFill>
+                <a:latin typeface="Consolas"/>
+                <a:ea typeface="微软雅黑"/>
+                <a:cs typeface="微软雅黑"/>
+              </a:rPr>
+              <a:t>212</a:t>
+            </a:r>
+            <a:r>
+              <a:rPr sz="1000" b="0" lang="zh-CN" altLang="en-US">
+                <a:solidFill>
+                  <a:srgbClr val="F5F5F5">
+                    <a:alpha val="40000"/>
+                  </a:srgbClr>
+                </a:solidFill>
+                <a:latin typeface="微软雅黑"/>
+                <a:ea typeface="微软雅黑"/>
+                <a:cs typeface="微软雅黑"/>
+              </a:rPr>
+              <a:t> </a:t>
+            </a:r>
+            <a:r>
+              <a:rPr sz="1000" b="0" lang="zh-CN" altLang="en-US">
+                <a:solidFill>
+                  <a:srgbClr val="F5F5F5">
+                    <a:alpha val="40000"/>
+                  </a:srgbClr>
+                </a:solidFill>
+                <a:latin typeface="Consolas"/>
+                <a:ea typeface="微软雅黑"/>
+                <a:cs typeface="微软雅黑"/>
+              </a:rPr>
+              <a:t>张贴图</a:t>
+            </a:r>
           </a:p>
         </p:txBody>
       </p:sp>
@@ -18326,68 +19651,54 @@
           </a:p>
         </p:txBody>
       </p:sp>
-      <p:sp>
-        <p:nvSpPr>
-          <p:cNvPr id="14" name="Rectangle 13"/>
-          <p:cNvSpPr/>
-          <p:nvPr/>
-        </p:nvSpPr>
+      <p:pic>
+        <p:nvPicPr>
+          <p:cNvPr id="14" name="Picture 13" descr="p14_ue_a.jpg"/>
+          <p:cNvPicPr>
+            <a:picLocks noChangeAspect="1"/>
+          </p:cNvPicPr>
+          <p:nvPr/>
+        </p:nvPicPr>
+        <p:blipFill>
+          <a:blip r:embed="rId2"/>
+          <a:stretch>
+            <a:fillRect/>
+          </a:stretch>
+        </p:blipFill>
         <p:spPr>
           <a:xfrm>
             <a:off x="7315200" y="1358900"/>
-            <a:ext cx="4267200" cy="4711700"/>
-          </a:xfrm>
-          <a:prstGeom prst="rect">
-            <a:avLst/>
-          </a:prstGeom>
-          <a:solidFill>
-            <a:srgbClr val="161616"/>
-          </a:solidFill>
-          <a:ln w="6350">
-            <a:solidFill>
-              <a:srgbClr val="F5F5F5">
-                <a:alpha val="8000"/>
-              </a:srgbClr>
-            </a:solidFill>
-          </a:ln>
-        </p:spPr>
-        <p:txBody>
-          <a:bodyPr rtlCol="0" anchor="ctr"/>
-          <a:lstStyle/>
-          <a:p>
-            <a:pPr algn="ctr"/>
-          </a:p>
-        </p:txBody>
-      </p:sp>
-      <p:sp>
-        <p:nvSpPr>
-          <p:cNvPr id="15" name="Rectangle 14"/>
-          <p:cNvSpPr/>
-          <p:nvPr/>
-        </p:nvSpPr>
-        <p:spPr>
-          <a:xfrm>
-            <a:off x="7315200" y="1358900"/>
-            <a:ext cx="38100" cy="4711700"/>
-          </a:xfrm>
-          <a:prstGeom prst="rect">
-            <a:avLst/>
-          </a:prstGeom>
-          <a:solidFill>
-            <a:srgbClr val="0FF796"/>
-          </a:solidFill>
-          <a:ln>
-            <a:noFill/>
-          </a:ln>
-        </p:spPr>
-        <p:txBody>
-          <a:bodyPr rtlCol="0" anchor="ctr"/>
-          <a:lstStyle/>
-          <a:p>
-            <a:pPr algn="ctr"/>
-          </a:p>
-        </p:txBody>
-      </p:sp>
+            <a:ext cx="4267200" cy="1905000"/>
+          </a:xfrm>
+          <a:prstGeom prst="rect">
+            <a:avLst/>
+          </a:prstGeom>
+        </p:spPr>
+      </p:pic>
+      <p:pic>
+        <p:nvPicPr>
+          <p:cNvPr id="15" name="Picture 14" descr="p14_ue_b.jpg"/>
+          <p:cNvPicPr>
+            <a:picLocks noChangeAspect="1"/>
+          </p:cNvPicPr>
+          <p:nvPr/>
+        </p:nvPicPr>
+        <p:blipFill>
+          <a:blip r:embed="rId3"/>
+          <a:stretch>
+            <a:fillRect/>
+          </a:stretch>
+        </p:blipFill>
+        <p:spPr>
+          <a:xfrm>
+            <a:off x="7315200" y="3340100"/>
+            <a:ext cx="4267200" cy="1905000"/>
+          </a:xfrm>
+          <a:prstGeom prst="rect">
+            <a:avLst/>
+          </a:prstGeom>
+        </p:spPr>
+      </p:pic>
       <p:sp>
         <p:nvSpPr>
           <p:cNvPr id="16" name="TextBox 15"/>
@@ -18396,8 +19707,8 @@
         </p:nvSpPr>
         <p:spPr>
           <a:xfrm>
-            <a:off x="7594600" y="1587500"/>
-            <a:ext cx="3810000" cy="317500"/>
+            <a:off x="7315200" y="5308600"/>
+            <a:ext cx="4267200" cy="190500"/>
           </a:xfrm>
           <a:prstGeom prst="rect">
             <a:avLst/>
@@ -18412,62 +19723,217 @@
           <a:p>
             <a:pPr algn="l">
               <a:lnSpc>
-                <a:spcPts val="2080"/>
-              </a:lnSpc>
-            </a:pPr>
-            <a:r>
-              <a:rPr sz="1600" b="1" lang="zh-CN" altLang="en-US">
-                <a:solidFill>
-                  <a:srgbClr val="F5F5F5"/>
-                </a:solidFill>
-                <a:latin typeface="Consolas"/>
-                <a:ea typeface="微软雅黑"/>
-                <a:cs typeface="微软雅黑"/>
-              </a:rPr>
-              <a:t>之后都写进了导入器</a:t>
-            </a:r>
-          </a:p>
-        </p:txBody>
-      </p:sp>
-      <p:sp>
-        <p:nvSpPr>
-          <p:cNvPr id="17" name="Rectangle 16"/>
-          <p:cNvSpPr/>
-          <p:nvPr/>
-        </p:nvSpPr>
-        <p:spPr>
-          <a:xfrm>
-            <a:off x="7594600" y="2247900"/>
-            <a:ext cx="76200" cy="76200"/>
-          </a:xfrm>
-          <a:prstGeom prst="rect">
-            <a:avLst/>
-          </a:prstGeom>
-          <a:solidFill>
-            <a:srgbClr val="0FF796"/>
-          </a:solidFill>
-          <a:ln>
-            <a:noFill/>
-          </a:ln>
-        </p:spPr>
-        <p:txBody>
-          <a:bodyPr rtlCol="0" anchor="ctr"/>
-          <a:lstStyle/>
-          <a:p>
-            <a:pPr algn="ctr"/>
-          </a:p>
-        </p:txBody>
-      </p:sp>
-      <p:sp>
-        <p:nvSpPr>
-          <p:cNvPr id="18" name="TextBox 17"/>
+                <a:spcPts val="1200"/>
+              </a:lnSpc>
+            </a:pPr>
+            <a:r>
+              <a:rPr sz="1000" b="0" lang="zh-CN" altLang="en-US">
+                <a:solidFill>
+                  <a:srgbClr val="F5F5F5">
+                    <a:alpha val="55000"/>
+                  </a:srgbClr>
+                </a:solidFill>
+                <a:latin typeface="Consolas"/>
+                <a:ea typeface="微软雅黑"/>
+                <a:cs typeface="微软雅黑"/>
+              </a:rPr>
+              <a:t>UE</a:t>
+            </a:r>
+            <a:r>
+              <a:rPr sz="1000" b="0" lang="zh-CN" altLang="en-US">
+                <a:solidFill>
+                  <a:srgbClr val="F5F5F5">
+                    <a:alpha val="55000"/>
+                  </a:srgbClr>
+                </a:solidFill>
+                <a:latin typeface="微软雅黑"/>
+                <a:ea typeface="微软雅黑"/>
+                <a:cs typeface="微软雅黑"/>
+              </a:rPr>
+              <a:t> </a:t>
+            </a:r>
+            <a:r>
+              <a:rPr sz="1000" b="0" lang="zh-CN" altLang="en-US">
+                <a:solidFill>
+                  <a:srgbClr val="F5F5F5">
+                    <a:alpha val="55000"/>
+                  </a:srgbClr>
+                </a:solidFill>
+                <a:latin typeface="Consolas"/>
+                <a:ea typeface="微软雅黑"/>
+                <a:cs typeface="微软雅黑"/>
+              </a:rPr>
+              <a:t>4.24</a:t>
+            </a:r>
+            <a:r>
+              <a:rPr sz="1000" b="0" lang="zh-CN" altLang="en-US">
+                <a:solidFill>
+                  <a:srgbClr val="F5F5F5">
+                    <a:alpha val="55000"/>
+                  </a:srgbClr>
+                </a:solidFill>
+                <a:latin typeface="微软雅黑"/>
+                <a:ea typeface="微软雅黑"/>
+                <a:cs typeface="微软雅黑"/>
+              </a:rPr>
+              <a:t> </a:t>
+            </a:r>
+            <a:r>
+              <a:rPr sz="1000" b="0" lang="zh-CN" altLang="en-US">
+                <a:solidFill>
+                  <a:srgbClr val="F5F5F5">
+                    <a:alpha val="55000"/>
+                  </a:srgbClr>
+                </a:solidFill>
+                <a:latin typeface="Consolas"/>
+                <a:ea typeface="微软雅黑"/>
+                <a:cs typeface="微软雅黑"/>
+              </a:rPr>
+              <a:t>实播</a:t>
+            </a:r>
+            <a:r>
+              <a:rPr sz="1000" b="0" lang="zh-CN" altLang="en-US">
+                <a:solidFill>
+                  <a:srgbClr val="F5F5F5">
+                    <a:alpha val="55000"/>
+                  </a:srgbClr>
+                </a:solidFill>
+                <a:latin typeface="微软雅黑"/>
+                <a:ea typeface="微软雅黑"/>
+                <a:cs typeface="微软雅黑"/>
+              </a:rPr>
+              <a:t> </a:t>
+            </a:r>
+            <a:r>
+              <a:rPr sz="1000" b="0" lang="zh-CN" altLang="en-US">
+                <a:solidFill>
+                  <a:srgbClr val="F5F5F5">
+                    <a:alpha val="55000"/>
+                  </a:srgbClr>
+                </a:solidFill>
+                <a:latin typeface="Consolas"/>
+                <a:ea typeface="微软雅黑"/>
+                <a:cs typeface="微软雅黑"/>
+              </a:rPr>
+              <a:t>·</a:t>
+            </a:r>
+            <a:r>
+              <a:rPr sz="1000" b="0" lang="zh-CN" altLang="en-US">
+                <a:solidFill>
+                  <a:srgbClr val="F5F5F5">
+                    <a:alpha val="55000"/>
+                  </a:srgbClr>
+                </a:solidFill>
+                <a:latin typeface="微软雅黑"/>
+                <a:ea typeface="微软雅黑"/>
+                <a:cs typeface="微软雅黑"/>
+              </a:rPr>
+              <a:t> </a:t>
+            </a:r>
+            <a:r>
+              <a:rPr sz="1000" b="0" lang="zh-CN" altLang="en-US">
+                <a:solidFill>
+                  <a:srgbClr val="F5F5F5">
+                    <a:alpha val="55000"/>
+                  </a:srgbClr>
+                </a:solidFill>
+                <a:latin typeface="Consolas"/>
+                <a:ea typeface="微软雅黑"/>
+                <a:cs typeface="微软雅黑"/>
+              </a:rPr>
+              <a:t>10-16</a:t>
+            </a:r>
+            <a:r>
+              <a:rPr sz="1000" b="0" lang="zh-CN" altLang="en-US">
+                <a:solidFill>
+                  <a:srgbClr val="F5F5F5">
+                    <a:alpha val="55000"/>
+                  </a:srgbClr>
+                </a:solidFill>
+                <a:latin typeface="微软雅黑"/>
+                <a:ea typeface="微软雅黑"/>
+                <a:cs typeface="微软雅黑"/>
+              </a:rPr>
+              <a:t> </a:t>
+            </a:r>
+            <a:r>
+              <a:rPr sz="1000" b="0" lang="zh-CN" altLang="en-US">
+                <a:solidFill>
+                  <a:srgbClr val="F5F5F5">
+                    <a:alpha val="55000"/>
+                  </a:srgbClr>
+                </a:solidFill>
+                <a:latin typeface="Consolas"/>
+                <a:ea typeface="微软雅黑"/>
+                <a:cs typeface="微软雅黑"/>
+              </a:rPr>
+              <a:t>修正后</a:t>
+            </a:r>
+            <a:r>
+              <a:rPr sz="1000" b="0" lang="zh-CN" altLang="en-US">
+                <a:solidFill>
+                  <a:srgbClr val="F5F5F5">
+                    <a:alpha val="55000"/>
+                  </a:srgbClr>
+                </a:solidFill>
+                <a:latin typeface="微软雅黑"/>
+                <a:ea typeface="微软雅黑"/>
+                <a:cs typeface="微软雅黑"/>
+              </a:rPr>
+              <a:t> </a:t>
+            </a:r>
+            <a:r>
+              <a:rPr sz="1000" b="0" lang="zh-CN" altLang="en-US">
+                <a:solidFill>
+                  <a:srgbClr val="F5F5F5">
+                    <a:alpha val="55000"/>
+                  </a:srgbClr>
+                </a:solidFill>
+                <a:latin typeface="Consolas"/>
+                <a:ea typeface="微软雅黑"/>
+                <a:cs typeface="微软雅黑"/>
+              </a:rPr>
+              <a:t>·</a:t>
+            </a:r>
+            <a:r>
+              <a:rPr sz="1000" b="0" lang="zh-CN" altLang="en-US">
+                <a:solidFill>
+                  <a:srgbClr val="F5F5F5">
+                    <a:alpha val="55000"/>
+                  </a:srgbClr>
+                </a:solidFill>
+                <a:latin typeface="微软雅黑"/>
+                <a:ea typeface="微软雅黑"/>
+                <a:cs typeface="微软雅黑"/>
+              </a:rPr>
+              <a:t> </a:t>
+            </a:r>
+            <a:r>
+              <a:rPr sz="1000" b="0" lang="zh-CN" altLang="en-US">
+                <a:solidFill>
+                  <a:srgbClr val="F5F5F5">
+                    <a:alpha val="55000"/>
+                  </a:srgbClr>
+                </a:solidFill>
+                <a:latin typeface="Consolas"/>
+                <a:ea typeface="微软雅黑"/>
+                <a:cs typeface="微软雅黑"/>
+              </a:rPr>
+              <a:t>爆裂星、金垂柳</a:t>
+            </a:r>
+          </a:p>
+        </p:txBody>
+      </p:sp>
+      <p:sp>
+        <p:nvSpPr>
+          <p:cNvPr id="17" name="TextBox 16"/>
           <p:cNvSpPr txBox="1"/>
           <p:nvPr/>
         </p:nvSpPr>
         <p:spPr>
           <a:xfrm>
-            <a:off x="7785100" y="2159000"/>
-            <a:ext cx="3429000" cy="279400"/>
+            <a:off x="7315200" y="5588000"/>
+            <a:ext cx="4267200" cy="508000"/>
           </a:xfrm>
           <a:prstGeom prst="rect">
             <a:avLst/>
@@ -18482,347 +19948,37 @@
           <a:p>
             <a:pPr algn="l">
               <a:lnSpc>
-                <a:spcPts val="1820"/>
-              </a:lnSpc>
-            </a:pPr>
-            <a:r>
-              <a:rPr sz="1400" b="1" lang="zh-CN" altLang="en-US">
-                <a:solidFill>
-                  <a:srgbClr val="F5F5F5"/>
-                </a:solidFill>
-                <a:latin typeface="Consolas"/>
-                <a:ea typeface="微软雅黑"/>
-                <a:cs typeface="微软雅黑"/>
-              </a:rPr>
-              <a:t>导出时</a:t>
-            </a:r>
-          </a:p>
-        </p:txBody>
-      </p:sp>
-      <p:sp>
-        <p:nvSpPr>
-          <p:cNvPr id="19" name="TextBox 18"/>
-          <p:cNvSpPr txBox="1"/>
-          <p:nvPr/>
-        </p:nvSpPr>
-        <p:spPr>
-          <a:xfrm>
-            <a:off x="7785100" y="2451100"/>
-            <a:ext cx="3429000" cy="279400"/>
-          </a:xfrm>
-          <a:prstGeom prst="rect">
-            <a:avLst/>
-          </a:prstGeom>
-          <a:noFill/>
-        </p:spPr>
-        <p:txBody>
-          <a:bodyPr wrap="square" lIns="0" rIns="0" tIns="0" bIns="0" anchor="t">
-            <a:noAutofit/>
-          </a:bodyPr>
-          <a:lstStyle/>
+                <a:spcPts val="1875"/>
+              </a:lnSpc>
+            </a:pPr>
+            <a:r>
+              <a:rPr sz="1250" b="0" lang="zh-CN" altLang="en-US">
+                <a:solidFill>
+                  <a:srgbClr val="0FF796"/>
+                </a:solidFill>
+                <a:latin typeface="Consolas"/>
+                <a:ea typeface="微软雅黑"/>
+                <a:cs typeface="微软雅黑"/>
+              </a:rPr>
+              <a:t>之后这些都写进了导入器，</a:t>
+            </a:r>
+          </a:p>
           <a:p>
             <a:pPr algn="l">
               <a:lnSpc>
-                <a:spcPts val="1750"/>
+                <a:spcPts val="1875"/>
               </a:lnSpc>
             </a:pPr>
             <a:r>
               <a:rPr sz="1250" b="0" lang="zh-CN" altLang="en-US">
                 <a:solidFill>
-                  <a:srgbClr val="F5F5F5">
-                    <a:alpha val="70000"/>
-                  </a:srgbClr>
-                </a:solidFill>
-                <a:latin typeface="Consolas"/>
-                <a:ea typeface="微软雅黑"/>
-                <a:cs typeface="微软雅黑"/>
-              </a:rPr>
-              <a:t>按平台写好设置</a:t>
-            </a:r>
-          </a:p>
-        </p:txBody>
-      </p:sp>
-      <p:sp>
-        <p:nvSpPr>
-          <p:cNvPr id="20" name="Rectangle 19"/>
-          <p:cNvSpPr/>
-          <p:nvPr/>
-        </p:nvSpPr>
-        <p:spPr>
-          <a:xfrm>
-            <a:off x="7594600" y="3073400"/>
-            <a:ext cx="76200" cy="76200"/>
-          </a:xfrm>
-          <a:prstGeom prst="rect">
-            <a:avLst/>
-          </a:prstGeom>
-          <a:solidFill>
-            <a:srgbClr val="0FF796"/>
-          </a:solidFill>
-          <a:ln>
-            <a:noFill/>
-          </a:ln>
-        </p:spPr>
-        <p:txBody>
-          <a:bodyPr rtlCol="0" anchor="ctr"/>
-          <a:lstStyle/>
-          <a:p>
-            <a:pPr algn="ctr"/>
-          </a:p>
-        </p:txBody>
-      </p:sp>
-      <p:sp>
-        <p:nvSpPr>
-          <p:cNvPr id="21" name="TextBox 20"/>
-          <p:cNvSpPr txBox="1"/>
-          <p:nvPr/>
-        </p:nvSpPr>
-        <p:spPr>
-          <a:xfrm>
-            <a:off x="7785100" y="2984500"/>
-            <a:ext cx="3429000" cy="279400"/>
-          </a:xfrm>
-          <a:prstGeom prst="rect">
-            <a:avLst/>
-          </a:prstGeom>
-          <a:noFill/>
-        </p:spPr>
-        <p:txBody>
-          <a:bodyPr wrap="square" lIns="0" rIns="0" tIns="0" bIns="0" anchor="t">
-            <a:noAutofit/>
-          </a:bodyPr>
-          <a:lstStyle/>
-          <a:p>
-            <a:pPr algn="l">
-              <a:lnSpc>
-                <a:spcPts val="1820"/>
-              </a:lnSpc>
-            </a:pPr>
-            <a:r>
-              <a:rPr sz="1400" b="1" lang="zh-CN" altLang="en-US">
-                <a:solidFill>
-                  <a:srgbClr val="F5F5F5"/>
-                </a:solidFill>
-                <a:latin typeface="Consolas"/>
-                <a:ea typeface="微软雅黑"/>
-                <a:cs typeface="微软雅黑"/>
-              </a:rPr>
-              <a:t>导入时</a:t>
-            </a:r>
-          </a:p>
-        </p:txBody>
-      </p:sp>
-      <p:sp>
-        <p:nvSpPr>
-          <p:cNvPr id="22" name="TextBox 21"/>
-          <p:cNvSpPr txBox="1"/>
-          <p:nvPr/>
-        </p:nvSpPr>
-        <p:spPr>
-          <a:xfrm>
-            <a:off x="7785100" y="3276600"/>
-            <a:ext cx="3429000" cy="279400"/>
-          </a:xfrm>
-          <a:prstGeom prst="rect">
-            <a:avLst/>
-          </a:prstGeom>
-          <a:noFill/>
-        </p:spPr>
-        <p:txBody>
-          <a:bodyPr wrap="square" lIns="0" rIns="0" tIns="0" bIns="0" anchor="t">
-            <a:noAutofit/>
-          </a:bodyPr>
-          <a:lstStyle/>
-          <a:p>
-            <a:pPr algn="l">
-              <a:lnSpc>
-                <a:spcPts val="1750"/>
-              </a:lnSpc>
-            </a:pPr>
-            <a:r>
-              <a:rPr sz="1250" b="0" lang="zh-CN" altLang="en-US">
-                <a:solidFill>
-                  <a:srgbClr val="F5F5F5">
-                    <a:alpha val="70000"/>
-                  </a:srgbClr>
-                </a:solidFill>
-                <a:latin typeface="Consolas"/>
-                <a:ea typeface="微软雅黑"/>
-                <a:cs typeface="微软雅黑"/>
-              </a:rPr>
-              <a:t>按包写入，再读回核对</a:t>
-            </a:r>
-          </a:p>
-        </p:txBody>
-      </p:sp>
-      <p:sp>
-        <p:nvSpPr>
-          <p:cNvPr id="23" name="Rectangle 22"/>
-          <p:cNvSpPr/>
-          <p:nvPr/>
-        </p:nvSpPr>
-        <p:spPr>
-          <a:xfrm>
-            <a:off x="7594600" y="3898900"/>
-            <a:ext cx="76200" cy="76200"/>
-          </a:xfrm>
-          <a:prstGeom prst="rect">
-            <a:avLst/>
-          </a:prstGeom>
-          <a:solidFill>
-            <a:srgbClr val="0FF796"/>
-          </a:solidFill>
-          <a:ln>
-            <a:noFill/>
-          </a:ln>
-        </p:spPr>
-        <p:txBody>
-          <a:bodyPr rtlCol="0" anchor="ctr"/>
-          <a:lstStyle/>
-          <a:p>
-            <a:pPr algn="ctr"/>
-          </a:p>
-        </p:txBody>
-      </p:sp>
-      <p:sp>
-        <p:nvSpPr>
-          <p:cNvPr id="24" name="TextBox 23"/>
-          <p:cNvSpPr txBox="1"/>
-          <p:nvPr/>
-        </p:nvSpPr>
-        <p:spPr>
-          <a:xfrm>
-            <a:off x="7785100" y="3810000"/>
-            <a:ext cx="3429000" cy="279400"/>
-          </a:xfrm>
-          <a:prstGeom prst="rect">
-            <a:avLst/>
-          </a:prstGeom>
-          <a:noFill/>
-        </p:spPr>
-        <p:txBody>
-          <a:bodyPr wrap="square" lIns="0" rIns="0" tIns="0" bIns="0" anchor="t">
-            <a:noAutofit/>
-          </a:bodyPr>
-          <a:lstStyle/>
-          <a:p>
-            <a:pPr algn="l">
-              <a:lnSpc>
-                <a:spcPts val="1820"/>
-              </a:lnSpc>
-            </a:pPr>
-            <a:r>
-              <a:rPr sz="1400" b="1" lang="zh-CN" altLang="en-US">
-                <a:solidFill>
-                  <a:srgbClr val="F5F5F5"/>
-                </a:solidFill>
-                <a:latin typeface="Consolas"/>
-                <a:ea typeface="微软雅黑"/>
-                <a:cs typeface="微软雅黑"/>
-              </a:rPr>
-              <a:t>共享贴图</a:t>
-            </a:r>
-          </a:p>
-        </p:txBody>
-      </p:sp>
-      <p:sp>
-        <p:nvSpPr>
-          <p:cNvPr id="25" name="TextBox 24"/>
-          <p:cNvSpPr txBox="1"/>
-          <p:nvPr/>
-        </p:nvSpPr>
-        <p:spPr>
-          <a:xfrm>
-            <a:off x="7785100" y="4102100"/>
-            <a:ext cx="3429000" cy="279400"/>
-          </a:xfrm>
-          <a:prstGeom prst="rect">
-            <a:avLst/>
-          </a:prstGeom>
-          <a:noFill/>
-        </p:spPr>
-        <p:txBody>
-          <a:bodyPr wrap="square" lIns="0" rIns="0" tIns="0" bIns="0" anchor="t">
-            <a:noAutofit/>
-          </a:bodyPr>
-          <a:lstStyle/>
-          <a:p>
-            <a:pPr algn="l">
-              <a:lnSpc>
-                <a:spcPts val="1750"/>
-              </a:lnSpc>
-            </a:pPr>
-            <a:r>
-              <a:rPr sz="1250" b="0" lang="zh-CN" altLang="en-US">
-                <a:solidFill>
-                  <a:srgbClr val="F5F5F5">
-                    <a:alpha val="70000"/>
-                  </a:srgbClr>
-                </a:solidFill>
-                <a:latin typeface="Consolas"/>
-                <a:ea typeface="微软雅黑"/>
-                <a:cs typeface="微软雅黑"/>
-              </a:rPr>
-              <a:t>单独列出来问，不跟着改</a:t>
-            </a:r>
-          </a:p>
-        </p:txBody>
-      </p:sp>
-      <p:sp>
-        <p:nvSpPr>
-          <p:cNvPr id="26" name="TextBox 25"/>
-          <p:cNvSpPr txBox="1"/>
-          <p:nvPr/>
-        </p:nvSpPr>
-        <p:spPr>
-          <a:xfrm>
-            <a:off x="7594600" y="4953000"/>
-            <a:ext cx="3708400" cy="762000"/>
-          </a:xfrm>
-          <a:prstGeom prst="rect">
-            <a:avLst/>
-          </a:prstGeom>
-          <a:noFill/>
-        </p:spPr>
-        <p:txBody>
-          <a:bodyPr wrap="square" lIns="0" rIns="0" tIns="0" bIns="0" anchor="t">
-            <a:noAutofit/>
-          </a:bodyPr>
-          <a:lstStyle/>
-          <a:p>
-            <a:pPr algn="l">
-              <a:lnSpc>
-                <a:spcPts val="2080"/>
-              </a:lnSpc>
-            </a:pPr>
-            <a:r>
-              <a:rPr sz="1300" b="0" lang="zh-CN" altLang="en-US">
-                <a:solidFill>
                   <a:srgbClr val="0FF796"/>
                 </a:solidFill>
                 <a:latin typeface="Consolas"/>
                 <a:ea typeface="微软雅黑"/>
                 <a:cs typeface="微软雅黑"/>
               </a:rPr>
-              <a:t>新资源导入时自动按规范设置，</a:t>
-            </a:r>
-          </a:p>
-          <a:p>
-            <a:pPr algn="l">
-              <a:lnSpc>
-                <a:spcPts val="2080"/>
-              </a:lnSpc>
-            </a:pPr>
-            <a:r>
-              <a:rPr sz="1300" b="0" lang="zh-CN" altLang="en-US">
-                <a:solidFill>
-                  <a:srgbClr val="0FF796"/>
-                </a:solidFill>
-                <a:latin typeface="Consolas"/>
-                <a:ea typeface="微软雅黑"/>
-                <a:cs typeface="微软雅黑"/>
-              </a:rPr>
-              <a:t>不用每次靠人记</a:t>
+              <a:t>新资源导入时自动按规范设置</a:t>
             </a:r>
           </a:p>
         </p:txBody>
@@ -43841,8 +44997,8 @@
         </p:nvSpPr>
         <p:spPr>
           <a:xfrm>
-            <a:off x="609600" y="5143500"/>
-            <a:ext cx="2552700" cy="279400"/>
+            <a:off x="609600" y="6096000"/>
+            <a:ext cx="10972800" cy="190500"/>
           </a:xfrm>
           <a:prstGeom prst="rect">
             <a:avLst/>
@@ -43857,19 +45013,229 @@
           <a:p>
             <a:pPr algn="l">
               <a:lnSpc>
-                <a:spcPts val="1820"/>
-              </a:lnSpc>
-            </a:pPr>
-            <a:r>
-              <a:rPr sz="1400" b="1" lang="zh-CN" altLang="en-US">
-                <a:solidFill>
-                  <a:srgbClr val="0FF796"/>
-                </a:solidFill>
-                <a:latin typeface="Consolas"/>
-                <a:ea typeface="微软雅黑"/>
-                <a:cs typeface="微软雅黑"/>
-              </a:rPr>
-              <a:t>烘完收紧</a:t>
+                <a:spcPts val="1200"/>
+              </a:lnSpc>
+            </a:pPr>
+            <a:r>
+              <a:rPr sz="1000" b="0" lang="zh-CN" altLang="en-US">
+                <a:solidFill>
+                  <a:srgbClr val="F5F5F5">
+                    <a:alpha val="40000"/>
+                  </a:srgbClr>
+                </a:solidFill>
+                <a:latin typeface="Consolas"/>
+                <a:ea typeface="微软雅黑"/>
+                <a:cs typeface="微软雅黑"/>
+              </a:rPr>
+              <a:t>正式资源中有交付记录的</a:t>
+            </a:r>
+            <a:r>
+              <a:rPr sz="1000" b="0" lang="zh-CN" altLang="en-US">
+                <a:solidFill>
+                  <a:srgbClr val="F5F5F5">
+                    <a:alpha val="40000"/>
+                  </a:srgbClr>
+                </a:solidFill>
+                <a:latin typeface="微软雅黑"/>
+                <a:ea typeface="微软雅黑"/>
+                <a:cs typeface="微软雅黑"/>
+              </a:rPr>
+              <a:t> </a:t>
+            </a:r>
+            <a:r>
+              <a:rPr sz="1000" b="0" lang="zh-CN" altLang="en-US">
+                <a:solidFill>
+                  <a:srgbClr val="F5F5F5">
+                    <a:alpha val="40000"/>
+                  </a:srgbClr>
+                </a:solidFill>
+                <a:latin typeface="Consolas"/>
+                <a:ea typeface="微软雅黑"/>
+                <a:cs typeface="微软雅黑"/>
+              </a:rPr>
+              <a:t>17</a:t>
+            </a:r>
+            <a:r>
+              <a:rPr sz="1000" b="0" lang="zh-CN" altLang="en-US">
+                <a:solidFill>
+                  <a:srgbClr val="F5F5F5">
+                    <a:alpha val="40000"/>
+                  </a:srgbClr>
+                </a:solidFill>
+                <a:latin typeface="微软雅黑"/>
+                <a:ea typeface="微软雅黑"/>
+                <a:cs typeface="微软雅黑"/>
+              </a:rPr>
+              <a:t> </a:t>
+            </a:r>
+            <a:r>
+              <a:rPr sz="1000" b="0" lang="zh-CN" altLang="en-US">
+                <a:solidFill>
+                  <a:srgbClr val="F5F5F5">
+                    <a:alpha val="40000"/>
+                  </a:srgbClr>
+                </a:solidFill>
+                <a:latin typeface="Consolas"/>
+                <a:ea typeface="微软雅黑"/>
+                <a:cs typeface="微软雅黑"/>
+              </a:rPr>
+              <a:t>组：固定</a:t>
+            </a:r>
+            <a:r>
+              <a:rPr sz="1000" b="0" lang="zh-CN" altLang="en-US">
+                <a:solidFill>
+                  <a:srgbClr val="F5F5F5">
+                    <a:alpha val="40000"/>
+                  </a:srgbClr>
+                </a:solidFill>
+                <a:latin typeface="微软雅黑"/>
+                <a:ea typeface="微软雅黑"/>
+                <a:cs typeface="微软雅黑"/>
+              </a:rPr>
+              <a:t> </a:t>
+            </a:r>
+            <a:r>
+              <a:rPr sz="1000" b="0" lang="zh-CN" altLang="en-US">
+                <a:solidFill>
+                  <a:srgbClr val="F5F5F5">
+                    <a:alpha val="40000"/>
+                  </a:srgbClr>
+                </a:solidFill>
+                <a:latin typeface="Consolas"/>
+                <a:ea typeface="微软雅黑"/>
+                <a:cs typeface="微软雅黑"/>
+              </a:rPr>
+              <a:t>10</a:t>
+            </a:r>
+            <a:r>
+              <a:rPr sz="1000" b="0" lang="zh-CN" altLang="en-US">
+                <a:solidFill>
+                  <a:srgbClr val="F5F5F5">
+                    <a:alpha val="40000"/>
+                  </a:srgbClr>
+                </a:solidFill>
+                <a:latin typeface="微软雅黑"/>
+                <a:ea typeface="微软雅黑"/>
+                <a:cs typeface="微软雅黑"/>
+              </a:rPr>
+              <a:t> </a:t>
+            </a:r>
+            <a:r>
+              <a:rPr sz="1000" b="0" lang="zh-CN" altLang="en-US">
+                <a:solidFill>
+                  <a:srgbClr val="F5F5F5">
+                    <a:alpha val="40000"/>
+                  </a:srgbClr>
+                </a:solidFill>
+                <a:latin typeface="Consolas"/>
+                <a:ea typeface="微软雅黑"/>
+                <a:cs typeface="微软雅黑"/>
+              </a:rPr>
+              <a:t>组、随开花放大</a:t>
+            </a:r>
+            <a:r>
+              <a:rPr sz="1000" b="0" lang="zh-CN" altLang="en-US">
+                <a:solidFill>
+                  <a:srgbClr val="F5F5F5">
+                    <a:alpha val="40000"/>
+                  </a:srgbClr>
+                </a:solidFill>
+                <a:latin typeface="微软雅黑"/>
+                <a:ea typeface="微软雅黑"/>
+                <a:cs typeface="微软雅黑"/>
+              </a:rPr>
+              <a:t> </a:t>
+            </a:r>
+            <a:r>
+              <a:rPr sz="1000" b="0" lang="zh-CN" altLang="en-US">
+                <a:solidFill>
+                  <a:srgbClr val="F5F5F5">
+                    <a:alpha val="40000"/>
+                  </a:srgbClr>
+                </a:solidFill>
+                <a:latin typeface="Consolas"/>
+                <a:ea typeface="微软雅黑"/>
+                <a:cs typeface="微软雅黑"/>
+              </a:rPr>
+              <a:t>5</a:t>
+            </a:r>
+            <a:r>
+              <a:rPr sz="1000" b="0" lang="zh-CN" altLang="en-US">
+                <a:solidFill>
+                  <a:srgbClr val="F5F5F5">
+                    <a:alpha val="40000"/>
+                  </a:srgbClr>
+                </a:solidFill>
+                <a:latin typeface="微软雅黑"/>
+                <a:ea typeface="微软雅黑"/>
+                <a:cs typeface="微软雅黑"/>
+              </a:rPr>
+              <a:t> </a:t>
+            </a:r>
+            <a:r>
+              <a:rPr sz="1000" b="0" lang="zh-CN" altLang="en-US">
+                <a:solidFill>
+                  <a:srgbClr val="F5F5F5">
+                    <a:alpha val="40000"/>
+                  </a:srgbClr>
+                </a:solidFill>
+                <a:latin typeface="Consolas"/>
+                <a:ea typeface="微软雅黑"/>
+                <a:cs typeface="微软雅黑"/>
+              </a:rPr>
+              <a:t>组、锚点</a:t>
+            </a:r>
+            <a:r>
+              <a:rPr sz="1000" b="0" lang="zh-CN" altLang="en-US">
+                <a:solidFill>
+                  <a:srgbClr val="F5F5F5">
+                    <a:alpha val="40000"/>
+                  </a:srgbClr>
+                </a:solidFill>
+                <a:latin typeface="微软雅黑"/>
+                <a:ea typeface="微软雅黑"/>
+                <a:cs typeface="微软雅黑"/>
+              </a:rPr>
+              <a:t> </a:t>
+            </a:r>
+            <a:r>
+              <a:rPr sz="1000" b="0" lang="zh-CN" altLang="en-US">
+                <a:solidFill>
+                  <a:srgbClr val="F5F5F5">
+                    <a:alpha val="40000"/>
+                  </a:srgbClr>
+                </a:solidFill>
+                <a:latin typeface="Consolas"/>
+                <a:ea typeface="微软雅黑"/>
+                <a:cs typeface="微软雅黑"/>
+              </a:rPr>
+              <a:t>2</a:t>
+            </a:r>
+            <a:r>
+              <a:rPr sz="1000" b="0" lang="zh-CN" altLang="en-US">
+                <a:solidFill>
+                  <a:srgbClr val="F5F5F5">
+                    <a:alpha val="40000"/>
+                  </a:srgbClr>
+                </a:solidFill>
+                <a:latin typeface="微软雅黑"/>
+                <a:ea typeface="微软雅黑"/>
+                <a:cs typeface="微软雅黑"/>
+              </a:rPr>
+              <a:t> </a:t>
+            </a:r>
+            <a:r>
+              <a:rPr sz="1000" b="0" lang="zh-CN" altLang="en-US">
+                <a:solidFill>
+                  <a:srgbClr val="F5F5F5">
+                    <a:alpha val="40000"/>
+                  </a:srgbClr>
+                </a:solidFill>
+                <a:latin typeface="Consolas"/>
+                <a:ea typeface="微软雅黑"/>
+                <a:cs typeface="微软雅黑"/>
+              </a:rPr>
+              <a:t>组</a:t>
             </a:r>
           </a:p>
         </p:txBody>
@@ -43882,8 +45248,8 @@
         </p:nvSpPr>
         <p:spPr>
           <a:xfrm>
-            <a:off x="609600" y="5448300"/>
-            <a:ext cx="2552700" cy="698500"/>
+            <a:off x="609600" y="5143500"/>
+            <a:ext cx="2552700" cy="279400"/>
           </a:xfrm>
           <a:prstGeom prst="rect">
             <a:avLst/>
@@ -43898,35 +45264,19 @@
           <a:p>
             <a:pPr algn="l">
               <a:lnSpc>
-                <a:spcPts val="1860"/>
-              </a:lnSpc>
-            </a:pPr>
-            <a:r>
-              <a:rPr sz="1200" b="0" lang="zh-CN" altLang="en-US">
-                <a:solidFill>
-                  <a:srgbClr val="F5F5F5">
-                    <a:alpha val="70000"/>
-                  </a:srgbClr>
-                </a:solidFill>
-                <a:latin typeface="Consolas"/>
-                <a:ea typeface="微软雅黑"/>
-                <a:cs typeface="微软雅黑"/>
-              </a:rPr>
-              <a:t>按每帧实际内容再收一次；</a:t>
-            </a:r>
-            <a:br/>
-            <a:r>
-              <a:rPr sz="1200" b="0" lang="zh-CN" altLang="en-US">
-                <a:solidFill>
-                  <a:srgbClr val="F5F5F5">
-                    <a:alpha val="70000"/>
-                  </a:srgbClr>
-                </a:solidFill>
-                <a:latin typeface="Consolas"/>
-                <a:ea typeface="微软雅黑"/>
-                <a:cs typeface="微软雅黑"/>
-              </a:rPr>
-              <a:t>几乎全黑的帧不收</a:t>
+                <a:spcPts val="1820"/>
+              </a:lnSpc>
+            </a:pPr>
+            <a:r>
+              <a:rPr sz="1400" b="1" lang="zh-CN" altLang="en-US">
+                <a:solidFill>
+                  <a:srgbClr val="0FF796"/>
+                </a:solidFill>
+                <a:latin typeface="Consolas"/>
+                <a:ea typeface="微软雅黑"/>
+                <a:cs typeface="微软雅黑"/>
+              </a:rPr>
+              <a:t>烘完收紧</a:t>
             </a:r>
           </a:p>
         </p:txBody>
@@ -43939,8 +45289,8 @@
         </p:nvSpPr>
         <p:spPr>
           <a:xfrm>
-            <a:off x="3416300" y="5143500"/>
-            <a:ext cx="2552700" cy="279400"/>
+            <a:off x="609600" y="5448300"/>
+            <a:ext cx="2552700" cy="698500"/>
           </a:xfrm>
           <a:prstGeom prst="rect">
             <a:avLst/>
@@ -43955,19 +45305,35 @@
           <a:p>
             <a:pPr algn="l">
               <a:lnSpc>
-                <a:spcPts val="1820"/>
-              </a:lnSpc>
-            </a:pPr>
-            <a:r>
-              <a:rPr sz="1400" b="1" lang="zh-CN" altLang="en-US">
-                <a:solidFill>
-                  <a:srgbClr val="0FF796"/>
-                </a:solidFill>
-                <a:latin typeface="Consolas"/>
-                <a:ea typeface="微软雅黑"/>
-                <a:cs typeface="微软雅黑"/>
-              </a:rPr>
-              <a:t>曲线精简</a:t>
+                <a:spcPts val="1860"/>
+              </a:lnSpc>
+            </a:pPr>
+            <a:r>
+              <a:rPr sz="1200" b="0" lang="zh-CN" altLang="en-US">
+                <a:solidFill>
+                  <a:srgbClr val="F5F5F5">
+                    <a:alpha val="70000"/>
+                  </a:srgbClr>
+                </a:solidFill>
+                <a:latin typeface="Consolas"/>
+                <a:ea typeface="微软雅黑"/>
+                <a:cs typeface="微软雅黑"/>
+              </a:rPr>
+              <a:t>按每帧实际内容再收一次；</a:t>
+            </a:r>
+            <a:br/>
+            <a:r>
+              <a:rPr sz="1200" b="0" lang="zh-CN" altLang="en-US">
+                <a:solidFill>
+                  <a:srgbClr val="F5F5F5">
+                    <a:alpha val="70000"/>
+                  </a:srgbClr>
+                </a:solidFill>
+                <a:latin typeface="Consolas"/>
+                <a:ea typeface="微软雅黑"/>
+                <a:cs typeface="微软雅黑"/>
+              </a:rPr>
+              <a:t>几乎全黑的帧不收</a:t>
             </a:r>
           </a:p>
         </p:txBody>
@@ -43980,8 +45346,8 @@
         </p:nvSpPr>
         <p:spPr>
           <a:xfrm>
-            <a:off x="3416300" y="5448300"/>
-            <a:ext cx="2552700" cy="698500"/>
+            <a:off x="3416300" y="5143500"/>
+            <a:ext cx="2552700" cy="279400"/>
           </a:xfrm>
           <a:prstGeom prst="rect">
             <a:avLst/>
@@ -43996,87 +45362,19 @@
           <a:p>
             <a:pPr algn="l">
               <a:lnSpc>
-                <a:spcPts val="1860"/>
-              </a:lnSpc>
-            </a:pPr>
-            <a:r>
-              <a:rPr sz="1200" b="0" lang="zh-CN" altLang="en-US">
-                <a:solidFill>
-                  <a:srgbClr val="F5F5F5">
-                    <a:alpha val="70000"/>
-                  </a:srgbClr>
-                </a:solidFill>
-                <a:latin typeface="Consolas"/>
-                <a:ea typeface="微软雅黑"/>
-                <a:cs typeface="微软雅黑"/>
-              </a:rPr>
-              <a:t>面片大小最多分</a:t>
-            </a:r>
-            <a:r>
-              <a:rPr sz="1200" b="0" lang="zh-CN" altLang="en-US">
-                <a:solidFill>
-                  <a:srgbClr val="F5F5F5">
-                    <a:alpha val="70000"/>
-                  </a:srgbClr>
-                </a:solidFill>
-                <a:latin typeface="微软雅黑"/>
-                <a:ea typeface="微软雅黑"/>
-                <a:cs typeface="微软雅黑"/>
-              </a:rPr>
-              <a:t> </a:t>
-            </a:r>
-            <a:r>
-              <a:rPr sz="1200" b="0" lang="zh-CN" altLang="en-US">
-                <a:solidFill>
-                  <a:srgbClr val="F5F5F5">
-                    <a:alpha val="70000"/>
-                  </a:srgbClr>
-                </a:solidFill>
-                <a:latin typeface="Consolas"/>
-                <a:ea typeface="微软雅黑"/>
-                <a:cs typeface="微软雅黑"/>
-              </a:rPr>
-              <a:t>12</a:t>
-            </a:r>
-            <a:r>
-              <a:rPr sz="1200" b="0" lang="zh-CN" altLang="en-US">
-                <a:solidFill>
-                  <a:srgbClr val="F5F5F5">
-                    <a:alpha val="70000"/>
-                  </a:srgbClr>
-                </a:solidFill>
-                <a:latin typeface="微软雅黑"/>
-                <a:ea typeface="微软雅黑"/>
-                <a:cs typeface="微软雅黑"/>
-              </a:rPr>
-              <a:t> </a:t>
-            </a:r>
-            <a:r>
-              <a:rPr sz="1200" b="0" lang="zh-CN" altLang="en-US">
-                <a:solidFill>
-                  <a:srgbClr val="F5F5F5">
-                    <a:alpha val="70000"/>
-                  </a:srgbClr>
-                </a:solidFill>
-                <a:latin typeface="Consolas"/>
-                <a:ea typeface="微软雅黑"/>
-                <a:cs typeface="微软雅黑"/>
-              </a:rPr>
-              <a:t>级；</a:t>
-            </a:r>
-            <a:br/>
-            <a:r>
-              <a:rPr sz="1200" b="0" lang="zh-CN" altLang="en-US">
-                <a:solidFill>
-                  <a:srgbClr val="F5F5F5">
-                    <a:alpha val="70000"/>
-                  </a:srgbClr>
-                </a:solidFill>
-                <a:latin typeface="Consolas"/>
-                <a:ea typeface="微软雅黑"/>
-                <a:cs typeface="微软雅黑"/>
-              </a:rPr>
-              <a:t>曲线点从近百个减到二十几个</a:t>
+                <a:spcPts val="1820"/>
+              </a:lnSpc>
+            </a:pPr>
+            <a:r>
+              <a:rPr sz="1400" b="1" lang="zh-CN" altLang="en-US">
+                <a:solidFill>
+                  <a:srgbClr val="0FF796"/>
+                </a:solidFill>
+                <a:latin typeface="Consolas"/>
+                <a:ea typeface="微软雅黑"/>
+                <a:cs typeface="微软雅黑"/>
+              </a:rPr>
+              <a:t>曲线精简</a:t>
             </a:r>
           </a:p>
         </p:txBody>
@@ -44089,8 +45387,8 @@
         </p:nvSpPr>
         <p:spPr>
           <a:xfrm>
-            <a:off x="6223000" y="5143500"/>
-            <a:ext cx="2552700" cy="279400"/>
+            <a:off x="3416300" y="5448300"/>
+            <a:ext cx="2552700" cy="698500"/>
           </a:xfrm>
           <a:prstGeom prst="rect">
             <a:avLst/>
@@ -44105,19 +45403,87 @@
           <a:p>
             <a:pPr algn="l">
               <a:lnSpc>
-                <a:spcPts val="1820"/>
-              </a:lnSpc>
-            </a:pPr>
-            <a:r>
-              <a:rPr sz="1400" b="1" lang="zh-CN" altLang="en-US">
-                <a:solidFill>
-                  <a:srgbClr val="0FF796"/>
-                </a:solidFill>
-                <a:latin typeface="Consolas"/>
-                <a:ea typeface="微软雅黑"/>
-                <a:cs typeface="微软雅黑"/>
-              </a:rPr>
-              <a:t>帧数分配</a:t>
+                <a:spcPts val="1860"/>
+              </a:lnSpc>
+            </a:pPr>
+            <a:r>
+              <a:rPr sz="1200" b="0" lang="zh-CN" altLang="en-US">
+                <a:solidFill>
+                  <a:srgbClr val="F5F5F5">
+                    <a:alpha val="70000"/>
+                  </a:srgbClr>
+                </a:solidFill>
+                <a:latin typeface="Consolas"/>
+                <a:ea typeface="微软雅黑"/>
+                <a:cs typeface="微软雅黑"/>
+              </a:rPr>
+              <a:t>面片大小最多分</a:t>
+            </a:r>
+            <a:r>
+              <a:rPr sz="1200" b="0" lang="zh-CN" altLang="en-US">
+                <a:solidFill>
+                  <a:srgbClr val="F5F5F5">
+                    <a:alpha val="70000"/>
+                  </a:srgbClr>
+                </a:solidFill>
+                <a:latin typeface="微软雅黑"/>
+                <a:ea typeface="微软雅黑"/>
+                <a:cs typeface="微软雅黑"/>
+              </a:rPr>
+              <a:t> </a:t>
+            </a:r>
+            <a:r>
+              <a:rPr sz="1200" b="0" lang="zh-CN" altLang="en-US">
+                <a:solidFill>
+                  <a:srgbClr val="F5F5F5">
+                    <a:alpha val="70000"/>
+                  </a:srgbClr>
+                </a:solidFill>
+                <a:latin typeface="Consolas"/>
+                <a:ea typeface="微软雅黑"/>
+                <a:cs typeface="微软雅黑"/>
+              </a:rPr>
+              <a:t>12</a:t>
+            </a:r>
+            <a:r>
+              <a:rPr sz="1200" b="0" lang="zh-CN" altLang="en-US">
+                <a:solidFill>
+                  <a:srgbClr val="F5F5F5">
+                    <a:alpha val="70000"/>
+                  </a:srgbClr>
+                </a:solidFill>
+                <a:latin typeface="微软雅黑"/>
+                <a:ea typeface="微软雅黑"/>
+                <a:cs typeface="微软雅黑"/>
+              </a:rPr>
+              <a:t> </a:t>
+            </a:r>
+            <a:r>
+              <a:rPr sz="1200" b="0" lang="zh-CN" altLang="en-US">
+                <a:solidFill>
+                  <a:srgbClr val="F5F5F5">
+                    <a:alpha val="70000"/>
+                  </a:srgbClr>
+                </a:solidFill>
+                <a:latin typeface="Consolas"/>
+                <a:ea typeface="微软雅黑"/>
+                <a:cs typeface="微软雅黑"/>
+              </a:rPr>
+              <a:t>级；</a:t>
+            </a:r>
+            <a:br/>
+            <a:r>
+              <a:rPr sz="1200" b="0" lang="zh-CN" altLang="en-US">
+                <a:solidFill>
+                  <a:srgbClr val="F5F5F5">
+                    <a:alpha val="70000"/>
+                  </a:srgbClr>
+                </a:solidFill>
+                <a:latin typeface="Consolas"/>
+                <a:ea typeface="微软雅黑"/>
+                <a:cs typeface="微软雅黑"/>
+              </a:rPr>
+              <a:t>曲线点从近百个减到二十几个</a:t>
             </a:r>
           </a:p>
         </p:txBody>
@@ -44130,8 +45496,8 @@
         </p:nvSpPr>
         <p:spPr>
           <a:xfrm>
-            <a:off x="6223000" y="5448300"/>
-            <a:ext cx="2552700" cy="698500"/>
+            <a:off x="6223000" y="5143500"/>
+            <a:ext cx="2552700" cy="279400"/>
           </a:xfrm>
           <a:prstGeom prst="rect">
             <a:avLst/>
@@ -44146,35 +45512,19 @@
           <a:p>
             <a:pPr algn="l">
               <a:lnSpc>
-                <a:spcPts val="1860"/>
-              </a:lnSpc>
-            </a:pPr>
-            <a:r>
-              <a:rPr sz="1200" b="0" lang="zh-CN" altLang="en-US">
-                <a:solidFill>
-                  <a:srgbClr val="F5F5F5">
-                    <a:alpha val="70000"/>
-                  </a:srgbClr>
-                </a:solidFill>
-                <a:latin typeface="Consolas"/>
-                <a:ea typeface="微软雅黑"/>
-                <a:cs typeface="微软雅黑"/>
-              </a:rPr>
-              <a:t>动得快的阶段帧给得密，</a:t>
-            </a:r>
-            <a:br/>
-            <a:r>
-              <a:rPr sz="1200" b="0" lang="zh-CN" altLang="en-US">
-                <a:solidFill>
-                  <a:srgbClr val="F5F5F5">
-                    <a:alpha val="70000"/>
-                  </a:srgbClr>
-                </a:solidFill>
-                <a:latin typeface="Consolas"/>
-                <a:ea typeface="微软雅黑"/>
-                <a:cs typeface="微软雅黑"/>
-              </a:rPr>
-              <a:t>慢的阶段少给</a:t>
+                <a:spcPts val="1820"/>
+              </a:lnSpc>
+            </a:pPr>
+            <a:r>
+              <a:rPr sz="1400" b="1" lang="zh-CN" altLang="en-US">
+                <a:solidFill>
+                  <a:srgbClr val="0FF796"/>
+                </a:solidFill>
+                <a:latin typeface="Consolas"/>
+                <a:ea typeface="微软雅黑"/>
+                <a:cs typeface="微软雅黑"/>
+              </a:rPr>
+              <a:t>帧数分配</a:t>
             </a:r>
           </a:p>
         </p:txBody>
@@ -44187,8 +45537,8 @@
         </p:nvSpPr>
         <p:spPr>
           <a:xfrm>
-            <a:off x="9029700" y="5143500"/>
-            <a:ext cx="2552700" cy="279400"/>
+            <a:off x="6223000" y="5448300"/>
+            <a:ext cx="2552700" cy="698500"/>
           </a:xfrm>
           <a:prstGeom prst="rect">
             <a:avLst/>
@@ -44203,6 +45553,63 @@
           <a:p>
             <a:pPr algn="l">
               <a:lnSpc>
+                <a:spcPts val="1860"/>
+              </a:lnSpc>
+            </a:pPr>
+            <a:r>
+              <a:rPr sz="1200" b="0" lang="zh-CN" altLang="en-US">
+                <a:solidFill>
+                  <a:srgbClr val="F5F5F5">
+                    <a:alpha val="70000"/>
+                  </a:srgbClr>
+                </a:solidFill>
+                <a:latin typeface="Consolas"/>
+                <a:ea typeface="微软雅黑"/>
+                <a:cs typeface="微软雅黑"/>
+              </a:rPr>
+              <a:t>动得快的阶段帧给得密，</a:t>
+            </a:r>
+            <a:br/>
+            <a:r>
+              <a:rPr sz="1200" b="0" lang="zh-CN" altLang="en-US">
+                <a:solidFill>
+                  <a:srgbClr val="F5F5F5">
+                    <a:alpha val="70000"/>
+                  </a:srgbClr>
+                </a:solidFill>
+                <a:latin typeface="Consolas"/>
+                <a:ea typeface="微软雅黑"/>
+                <a:cs typeface="微软雅黑"/>
+              </a:rPr>
+              <a:t>慢的阶段少给</a:t>
+            </a:r>
+          </a:p>
+        </p:txBody>
+      </p:sp>
+      <p:sp>
+        <p:nvSpPr>
+          <p:cNvPr id="30" name="TextBox 29"/>
+          <p:cNvSpPr txBox="1"/>
+          <p:nvPr/>
+        </p:nvSpPr>
+        <p:spPr>
+          <a:xfrm>
+            <a:off x="9029700" y="5143500"/>
+            <a:ext cx="2552700" cy="279400"/>
+          </a:xfrm>
+          <a:prstGeom prst="rect">
+            <a:avLst/>
+          </a:prstGeom>
+          <a:noFill/>
+        </p:spPr>
+        <p:txBody>
+          <a:bodyPr wrap="square" lIns="0" rIns="0" tIns="0" bIns="0" anchor="t">
+            <a:noAutofit/>
+          </a:bodyPr>
+          <a:lstStyle/>
+          <a:p>
+            <a:pPr algn="l">
+              <a:lnSpc>
                 <a:spcPts val="1820"/>
               </a:lnSpc>
             </a:pPr>
@@ -44222,7 +45629,7 @@
       </p:sp>
       <p:sp>
         <p:nvSpPr>
-          <p:cNvPr id="30" name="TextBox 29"/>
+          <p:cNvPr id="31" name="TextBox 30"/>
           <p:cNvSpPr txBox="1"/>
           <p:nvPr/>
         </p:nvSpPr>

--- a/协作/提示词/分享PPT交接_2026-10-29/第三版交付/烟花秀AI全流程_第三版.pptx
+++ b/协作/提示词/分享PPT交接_2026-10-29/第三版交付/烟花秀AI全流程_第三版.pptx
@@ -8383,8 +8383,8 @@
         </p:nvSpPr>
         <p:spPr>
           <a:xfrm>
-            <a:off x="863600" y="2984500"/>
-            <a:ext cx="6400800" cy="825500"/>
+            <a:off x="863600" y="3302000"/>
+            <a:ext cx="6400800" cy="698500"/>
           </a:xfrm>
           <a:prstGeom prst="rect">
             <a:avLst/>
@@ -8418,8 +8418,8 @@
         </p:nvSpPr>
         <p:spPr>
           <a:xfrm>
-            <a:off x="965200" y="3073400"/>
-            <a:ext cx="2540000" cy="215900"/>
+            <a:off x="965200" y="3390900"/>
+            <a:ext cx="3810000" cy="215900"/>
           </a:xfrm>
           <a:prstGeom prst="rect">
             <a:avLst/>
@@ -8434,11 +8434,11 @@
           <a:p>
             <a:pPr algn="l">
               <a:lnSpc>
-                <a:spcPts val="1320"/>
-              </a:lnSpc>
-            </a:pPr>
-            <a:r>
-              <a:rPr sz="1100" b="0" lang="zh-CN" altLang="en-US">
+                <a:spcPts val="1200"/>
+              </a:lnSpc>
+            </a:pPr>
+            <a:r>
+              <a:rPr sz="1000" b="0" lang="zh-CN" altLang="en-US">
                 <a:solidFill>
                   <a:srgbClr val="F5F5F5">
                     <a:alpha val="55000"/>
@@ -8451,7 +8451,7 @@
               <a:t>坝体</a:t>
             </a:r>
             <a:r>
-              <a:rPr sz="1100" b="0" lang="zh-CN" altLang="en-US">
+              <a:rPr sz="1000" b="0" lang="zh-CN" altLang="en-US">
                 <a:solidFill>
                   <a:srgbClr val="F5F5F5">
                     <a:alpha val="55000"/>
@@ -8464,7 +8464,7 @@
               <a:t> </a:t>
             </a:r>
             <a:r>
-              <a:rPr sz="1100" b="0" lang="zh-CN" altLang="en-US">
+              <a:rPr sz="1000" b="0" lang="zh-CN" altLang="en-US">
                 <a:solidFill>
                   <a:srgbClr val="F5F5F5">
                     <a:alpha val="55000"/>
@@ -8477,7 +8477,7 @@
               <a:t>·</a:t>
             </a:r>
             <a:r>
-              <a:rPr sz="1100" b="0" lang="zh-CN" altLang="en-US">
+              <a:rPr sz="1000" b="0" lang="zh-CN" altLang="en-US">
                 <a:solidFill>
                   <a:srgbClr val="F5F5F5">
                     <a:alpha val="55000"/>
@@ -8490,7 +8490,7 @@
               <a:t> </a:t>
             </a:r>
             <a:r>
-              <a:rPr sz="1100" b="0" lang="zh-CN" altLang="en-US">
+              <a:rPr sz="1000" b="0" lang="zh-CN" altLang="en-US">
                 <a:solidFill>
                   <a:srgbClr val="F5F5F5">
                     <a:alpha val="55000"/>
@@ -8503,7 +8503,7 @@
               <a:t>宽约</a:t>
             </a:r>
             <a:r>
-              <a:rPr sz="1100" b="0" lang="zh-CN" altLang="en-US">
+              <a:rPr sz="1000" b="0" lang="zh-CN" altLang="en-US">
                 <a:solidFill>
                   <a:srgbClr val="F5F5F5">
                     <a:alpha val="55000"/>
@@ -8516,7 +8516,7 @@
               <a:t> </a:t>
             </a:r>
             <a:r>
-              <a:rPr sz="1100" b="0" lang="zh-CN" altLang="en-US">
+              <a:rPr sz="1000" b="0" lang="zh-CN" altLang="en-US">
                 <a:solidFill>
                   <a:srgbClr val="F5F5F5">
                     <a:alpha val="55000"/>
@@ -8529,7 +8529,7 @@
               <a:t>800</a:t>
             </a:r>
             <a:r>
-              <a:rPr sz="1100" b="0" lang="zh-CN" altLang="en-US">
+              <a:rPr sz="1000" b="0" lang="zh-CN" altLang="en-US">
                 <a:solidFill>
                   <a:srgbClr val="F5F5F5">
                     <a:alpha val="55000"/>
@@ -8542,7 +8542,7 @@
               <a:t> </a:t>
             </a:r>
             <a:r>
-              <a:rPr sz="1100" b="0" lang="zh-CN" altLang="en-US">
+              <a:rPr sz="1000" b="0" lang="zh-CN" altLang="en-US">
                 <a:solidFill>
                   <a:srgbClr val="F5F5F5">
                     <a:alpha val="55000"/>
@@ -8555,7 +8555,7 @@
               <a:t>m、高约</a:t>
             </a:r>
             <a:r>
-              <a:rPr sz="1100" b="0" lang="zh-CN" altLang="en-US">
+              <a:rPr sz="1000" b="0" lang="zh-CN" altLang="en-US">
                 <a:solidFill>
                   <a:srgbClr val="F5F5F5">
                     <a:alpha val="55000"/>
@@ -8568,7 +8568,7 @@
               <a:t> </a:t>
             </a:r>
             <a:r>
-              <a:rPr sz="1100" b="0" lang="zh-CN" altLang="en-US">
+              <a:rPr sz="1000" b="0" lang="zh-CN" altLang="en-US">
                 <a:solidFill>
                   <a:srgbClr val="F5F5F5">
                     <a:alpha val="55000"/>
@@ -8581,7 +8581,7 @@
               <a:t>150</a:t>
             </a:r>
             <a:r>
-              <a:rPr sz="1100" b="0" lang="zh-CN" altLang="en-US">
+              <a:rPr sz="1000" b="0" lang="zh-CN" altLang="en-US">
                 <a:solidFill>
                   <a:srgbClr val="F5F5F5">
                     <a:alpha val="55000"/>
@@ -8594,7 +8594,7 @@
               <a:t> </a:t>
             </a:r>
             <a:r>
-              <a:rPr sz="1100" b="0" lang="zh-CN" altLang="en-US">
+              <a:rPr sz="1000" b="0" lang="zh-CN" altLang="en-US">
                 <a:solidFill>
                   <a:srgbClr val="F5F5F5">
                     <a:alpha val="55000"/>
@@ -8604,7 +8604,7 @@
                 <a:ea typeface="微软雅黑"/>
                 <a:cs typeface="微软雅黑"/>
               </a:rPr>
-              <a:t>m</a:t>
+              <a:t>m（高度线为示意，不按比例）</a:t>
             </a:r>
           </a:p>
         </p:txBody>
@@ -8617,7 +8617,7 @@
         </p:nvSpPr>
         <p:spPr>
           <a:xfrm>
-            <a:off x="793750" y="2819400"/>
+            <a:off x="793750" y="3136900"/>
             <a:ext cx="139700" cy="139700"/>
           </a:xfrm>
           <a:prstGeom prst="ellipse">
@@ -8646,7 +8646,7 @@
         </p:nvSpPr>
         <p:spPr>
           <a:xfrm>
-            <a:off x="1219200" y="2844800"/>
+            <a:off x="1219200" y="3162300"/>
             <a:ext cx="88900" cy="88900"/>
           </a:xfrm>
           <a:prstGeom prst="ellipse">
@@ -8677,7 +8677,7 @@
         </p:nvSpPr>
         <p:spPr>
           <a:xfrm>
-            <a:off x="1593850" y="2819400"/>
+            <a:off x="1593850" y="3136900"/>
             <a:ext cx="139700" cy="139700"/>
           </a:xfrm>
           <a:prstGeom prst="ellipse">
@@ -8706,7 +8706,7 @@
         </p:nvSpPr>
         <p:spPr>
           <a:xfrm>
-            <a:off x="2019300" y="2844800"/>
+            <a:off x="2019300" y="3162300"/>
             <a:ext cx="88900" cy="88900"/>
           </a:xfrm>
           <a:prstGeom prst="ellipse">
@@ -8737,7 +8737,7 @@
         </p:nvSpPr>
         <p:spPr>
           <a:xfrm>
-            <a:off x="2393950" y="2819400"/>
+            <a:off x="2393950" y="3136900"/>
             <a:ext cx="139700" cy="139700"/>
           </a:xfrm>
           <a:prstGeom prst="ellipse">
@@ -8766,7 +8766,7 @@
         </p:nvSpPr>
         <p:spPr>
           <a:xfrm>
-            <a:off x="2819400" y="2844800"/>
+            <a:off x="2819400" y="3162300"/>
             <a:ext cx="88900" cy="88900"/>
           </a:xfrm>
           <a:prstGeom prst="ellipse">
@@ -8797,7 +8797,7 @@
         </p:nvSpPr>
         <p:spPr>
           <a:xfrm>
-            <a:off x="3194050" y="2819400"/>
+            <a:off x="3194050" y="3136900"/>
             <a:ext cx="139700" cy="139700"/>
           </a:xfrm>
           <a:prstGeom prst="ellipse">
@@ -8826,7 +8826,7 @@
         </p:nvSpPr>
         <p:spPr>
           <a:xfrm>
-            <a:off x="3619500" y="2844800"/>
+            <a:off x="3619500" y="3162300"/>
             <a:ext cx="88900" cy="88900"/>
           </a:xfrm>
           <a:prstGeom prst="ellipse">
@@ -8857,7 +8857,7 @@
         </p:nvSpPr>
         <p:spPr>
           <a:xfrm>
-            <a:off x="3994150" y="2819400"/>
+            <a:off x="3994150" y="3136900"/>
             <a:ext cx="139700" cy="139700"/>
           </a:xfrm>
           <a:prstGeom prst="ellipse">
@@ -8886,7 +8886,7 @@
         </p:nvSpPr>
         <p:spPr>
           <a:xfrm>
-            <a:off x="4419600" y="2844800"/>
+            <a:off x="4419600" y="3162300"/>
             <a:ext cx="88900" cy="88900"/>
           </a:xfrm>
           <a:prstGeom prst="ellipse">
@@ -8917,7 +8917,7 @@
         </p:nvSpPr>
         <p:spPr>
           <a:xfrm>
-            <a:off x="4794250" y="2819400"/>
+            <a:off x="4794250" y="3136900"/>
             <a:ext cx="139700" cy="139700"/>
           </a:xfrm>
           <a:prstGeom prst="ellipse">
@@ -8946,7 +8946,7 @@
         </p:nvSpPr>
         <p:spPr>
           <a:xfrm>
-            <a:off x="5219700" y="2844800"/>
+            <a:off x="5219700" y="3162300"/>
             <a:ext cx="88900" cy="88900"/>
           </a:xfrm>
           <a:prstGeom prst="ellipse">
@@ -8977,7 +8977,7 @@
         </p:nvSpPr>
         <p:spPr>
           <a:xfrm>
-            <a:off x="5594350" y="2819400"/>
+            <a:off x="5594350" y="3136900"/>
             <a:ext cx="139700" cy="139700"/>
           </a:xfrm>
           <a:prstGeom prst="ellipse">
@@ -9006,7 +9006,7 @@
         </p:nvSpPr>
         <p:spPr>
           <a:xfrm>
-            <a:off x="6019800" y="2844800"/>
+            <a:off x="6019800" y="3162300"/>
             <a:ext cx="88900" cy="88900"/>
           </a:xfrm>
           <a:prstGeom prst="ellipse">
@@ -9037,7 +9037,7 @@
         </p:nvSpPr>
         <p:spPr>
           <a:xfrm>
-            <a:off x="6394450" y="2819400"/>
+            <a:off x="6394450" y="3136900"/>
             <a:ext cx="139700" cy="139700"/>
           </a:xfrm>
           <a:prstGeom prst="ellipse">
@@ -9066,7 +9066,7 @@
         </p:nvSpPr>
         <p:spPr>
           <a:xfrm>
-            <a:off x="6819900" y="2844800"/>
+            <a:off x="6819900" y="3162300"/>
             <a:ext cx="88900" cy="88900"/>
           </a:xfrm>
           <a:prstGeom prst="ellipse">
@@ -9097,7 +9097,7 @@
         </p:nvSpPr>
         <p:spPr>
           <a:xfrm>
-            <a:off x="7194550" y="2819400"/>
+            <a:off x="7194550" y="3136900"/>
             <a:ext cx="139700" cy="139700"/>
           </a:xfrm>
           <a:prstGeom prst="ellipse">
@@ -9126,8 +9126,8 @@
         </p:nvSpPr>
         <p:spPr>
           <a:xfrm>
-            <a:off x="2433320" y="3568700"/>
-            <a:ext cx="3261360" cy="254000"/>
+            <a:off x="2433320" y="3771900"/>
+            <a:ext cx="3261360" cy="228600"/>
           </a:xfrm>
           <a:prstGeom prst="rect">
             <a:avLst/>
@@ -9157,7 +9157,7 @@
         </p:nvSpPr>
         <p:spPr>
           <a:xfrm>
-            <a:off x="2585720" y="3492500"/>
+            <a:off x="2585720" y="3695700"/>
             <a:ext cx="76200" cy="76200"/>
           </a:xfrm>
           <a:prstGeom prst="ellipse">
@@ -9188,7 +9188,7 @@
         </p:nvSpPr>
         <p:spPr>
           <a:xfrm>
-            <a:off x="3065780" y="3492500"/>
+            <a:off x="3065780" y="3695700"/>
             <a:ext cx="76200" cy="76200"/>
           </a:xfrm>
           <a:prstGeom prst="ellipse">
@@ -9219,7 +9219,7 @@
         </p:nvSpPr>
         <p:spPr>
           <a:xfrm>
-            <a:off x="3545840" y="3492500"/>
+            <a:off x="3545840" y="3695700"/>
             <a:ext cx="76200" cy="76200"/>
           </a:xfrm>
           <a:prstGeom prst="ellipse">
@@ -9250,7 +9250,7 @@
         </p:nvSpPr>
         <p:spPr>
           <a:xfrm>
-            <a:off x="4025900" y="3492500"/>
+            <a:off x="4025900" y="3695700"/>
             <a:ext cx="76200" cy="76200"/>
           </a:xfrm>
           <a:prstGeom prst="ellipse">
@@ -9281,7 +9281,7 @@
         </p:nvSpPr>
         <p:spPr>
           <a:xfrm>
-            <a:off x="4505960" y="3492500"/>
+            <a:off x="4505960" y="3695700"/>
             <a:ext cx="76200" cy="76200"/>
           </a:xfrm>
           <a:prstGeom prst="ellipse">
@@ -9312,7 +9312,7 @@
         </p:nvSpPr>
         <p:spPr>
           <a:xfrm>
-            <a:off x="4986020" y="3492500"/>
+            <a:off x="4986020" y="3695700"/>
             <a:ext cx="76200" cy="76200"/>
           </a:xfrm>
           <a:prstGeom prst="ellipse">
@@ -9343,7 +9343,7 @@
         </p:nvSpPr>
         <p:spPr>
           <a:xfrm>
-            <a:off x="5466080" y="3492500"/>
+            <a:off x="5466080" y="3695700"/>
             <a:ext cx="76200" cy="76200"/>
           </a:xfrm>
           <a:prstGeom prst="ellipse">
@@ -9366,15 +9366,595 @@
           </a:p>
         </p:txBody>
       </p:sp>
-      <p:sp>
-        <p:nvSpPr>
-          <p:cNvPr id="34" name="Oval 33"/>
+      <p:cxnSp>
+        <p:nvCxnSpPr>
+          <p:cNvPr id="34" name="Connector 33"/>
+          <p:cNvCxnSpPr/>
+          <p:nvPr/>
+        </p:nvCxnSpPr>
+        <p:spPr>
+          <a:xfrm>
+            <a:off x="863600" y="2660650"/>
+            <a:ext cx="6400800" cy="0"/>
+          </a:xfrm>
+          <a:prstGeom prst="line">
+            <a:avLst/>
+          </a:prstGeom>
+          <a:ln w="6350">
+            <a:solidFill>
+              <a:srgbClr val="F5F5F5">
+                <a:alpha val="18000"/>
+              </a:srgbClr>
+            </a:solidFill>
+            <a:prstDash val="dash"/>
+          </a:ln>
+        </p:spPr>
+      </p:cxnSp>
+      <p:sp>
+        <p:nvSpPr>
+          <p:cNvPr id="35" name="TextBox 34"/>
+          <p:cNvSpPr txBox="1"/>
+          <p:nvPr/>
+        </p:nvSpPr>
+        <p:spPr>
+          <a:xfrm>
+            <a:off x="5867400" y="2444750"/>
+            <a:ext cx="1397000" cy="190500"/>
+          </a:xfrm>
+          <a:prstGeom prst="rect">
+            <a:avLst/>
+          </a:prstGeom>
+          <a:noFill/>
+        </p:spPr>
+        <p:txBody>
+          <a:bodyPr wrap="square" lIns="0" rIns="0" tIns="0" bIns="0" anchor="t">
+            <a:noAutofit/>
+          </a:bodyPr>
+          <a:lstStyle/>
+          <a:p>
+            <a:pPr algn="r">
+              <a:lnSpc>
+                <a:spcPts val="1080"/>
+              </a:lnSpc>
+            </a:pPr>
+            <a:r>
+              <a:rPr sz="900" b="0" lang="zh-CN" altLang="en-US">
+                <a:solidFill>
+                  <a:srgbClr val="F5F5F5">
+                    <a:alpha val="55000"/>
+                  </a:srgbClr>
+                </a:solidFill>
+                <a:latin typeface="Consolas"/>
+                <a:ea typeface="微软雅黑"/>
+                <a:cs typeface="微软雅黑"/>
+              </a:rPr>
+              <a:t>S</a:t>
+            </a:r>
+            <a:r>
+              <a:rPr sz="900" b="0" lang="zh-CN" altLang="en-US">
+                <a:solidFill>
+                  <a:srgbClr val="F5F5F5">
+                    <a:alpha val="55000"/>
+                  </a:srgbClr>
+                </a:solidFill>
+                <a:latin typeface="微软雅黑"/>
+                <a:ea typeface="微软雅黑"/>
+                <a:cs typeface="微软雅黑"/>
+              </a:rPr>
+              <a:t> </a:t>
+            </a:r>
+            <a:r>
+              <a:rPr sz="900" b="0" lang="zh-CN" altLang="en-US">
+                <a:solidFill>
+                  <a:srgbClr val="F5F5F5">
+                    <a:alpha val="55000"/>
+                  </a:srgbClr>
+                </a:solidFill>
+                <a:latin typeface="Consolas"/>
+                <a:ea typeface="微软雅黑"/>
+                <a:cs typeface="微软雅黑"/>
+              </a:rPr>
+              <a:t>开花高度</a:t>
+            </a:r>
+            <a:r>
+              <a:rPr sz="900" b="0" lang="zh-CN" altLang="en-US">
+                <a:solidFill>
+                  <a:srgbClr val="F5F5F5">
+                    <a:alpha val="55000"/>
+                  </a:srgbClr>
+                </a:solidFill>
+                <a:latin typeface="微软雅黑"/>
+                <a:ea typeface="微软雅黑"/>
+                <a:cs typeface="微软雅黑"/>
+              </a:rPr>
+              <a:t> </a:t>
+            </a:r>
+            <a:r>
+              <a:rPr sz="900" b="0" lang="zh-CN" altLang="en-US">
+                <a:solidFill>
+                  <a:srgbClr val="F5F5F5">
+                    <a:alpha val="55000"/>
+                  </a:srgbClr>
+                </a:solidFill>
+                <a:latin typeface="Consolas"/>
+                <a:ea typeface="微软雅黑"/>
+                <a:cs typeface="微软雅黑"/>
+              </a:rPr>
+              <a:t>+150</a:t>
+            </a:r>
+            <a:r>
+              <a:rPr sz="900" b="0" lang="zh-CN" altLang="en-US">
+                <a:solidFill>
+                  <a:srgbClr val="F5F5F5">
+                    <a:alpha val="55000"/>
+                  </a:srgbClr>
+                </a:solidFill>
+                <a:latin typeface="微软雅黑"/>
+                <a:ea typeface="微软雅黑"/>
+                <a:cs typeface="微软雅黑"/>
+              </a:rPr>
+              <a:t> </a:t>
+            </a:r>
+            <a:r>
+              <a:rPr sz="900" b="0" lang="zh-CN" altLang="en-US">
+                <a:solidFill>
+                  <a:srgbClr val="F5F5F5">
+                    <a:alpha val="55000"/>
+                  </a:srgbClr>
+                </a:solidFill>
+                <a:latin typeface="Consolas"/>
+                <a:ea typeface="微软雅黑"/>
+                <a:cs typeface="微软雅黑"/>
+              </a:rPr>
+              <a:t>m</a:t>
+            </a:r>
+          </a:p>
+        </p:txBody>
+      </p:sp>
+      <p:cxnSp>
+        <p:nvCxnSpPr>
+          <p:cNvPr id="36" name="Connector 35"/>
+          <p:cNvCxnSpPr/>
+          <p:nvPr/>
+        </p:nvCxnSpPr>
+        <p:spPr>
+          <a:xfrm>
+            <a:off x="863600" y="2470150"/>
+            <a:ext cx="6400800" cy="0"/>
+          </a:xfrm>
+          <a:prstGeom prst="line">
+            <a:avLst/>
+          </a:prstGeom>
+          <a:ln w="6350">
+            <a:solidFill>
+              <a:srgbClr val="F5F5F5">
+                <a:alpha val="18000"/>
+              </a:srgbClr>
+            </a:solidFill>
+            <a:prstDash val="dash"/>
+          </a:ln>
+        </p:spPr>
+      </p:cxnSp>
+      <p:sp>
+        <p:nvSpPr>
+          <p:cNvPr id="37" name="TextBox 36"/>
+          <p:cNvSpPr txBox="1"/>
+          <p:nvPr/>
+        </p:nvSpPr>
+        <p:spPr>
+          <a:xfrm>
+            <a:off x="5867400" y="2254250"/>
+            <a:ext cx="1397000" cy="190500"/>
+          </a:xfrm>
+          <a:prstGeom prst="rect">
+            <a:avLst/>
+          </a:prstGeom>
+          <a:noFill/>
+        </p:spPr>
+        <p:txBody>
+          <a:bodyPr wrap="square" lIns="0" rIns="0" tIns="0" bIns="0" anchor="t">
+            <a:noAutofit/>
+          </a:bodyPr>
+          <a:lstStyle/>
+          <a:p>
+            <a:pPr algn="r">
+              <a:lnSpc>
+                <a:spcPts val="1080"/>
+              </a:lnSpc>
+            </a:pPr>
+            <a:r>
+              <a:rPr sz="900" b="0" lang="zh-CN" altLang="en-US">
+                <a:solidFill>
+                  <a:srgbClr val="F5F5F5">
+                    <a:alpha val="55000"/>
+                  </a:srgbClr>
+                </a:solidFill>
+                <a:latin typeface="Consolas"/>
+                <a:ea typeface="微软雅黑"/>
+                <a:cs typeface="微软雅黑"/>
+              </a:rPr>
+              <a:t>M</a:t>
+            </a:r>
+            <a:r>
+              <a:rPr sz="900" b="0" lang="zh-CN" altLang="en-US">
+                <a:solidFill>
+                  <a:srgbClr val="F5F5F5">
+                    <a:alpha val="55000"/>
+                  </a:srgbClr>
+                </a:solidFill>
+                <a:latin typeface="微软雅黑"/>
+                <a:ea typeface="微软雅黑"/>
+                <a:cs typeface="微软雅黑"/>
+              </a:rPr>
+              <a:t> </a:t>
+            </a:r>
+            <a:r>
+              <a:rPr sz="900" b="0" lang="zh-CN" altLang="en-US">
+                <a:solidFill>
+                  <a:srgbClr val="F5F5F5">
+                    <a:alpha val="55000"/>
+                  </a:srgbClr>
+                </a:solidFill>
+                <a:latin typeface="Consolas"/>
+                <a:ea typeface="微软雅黑"/>
+                <a:cs typeface="微软雅黑"/>
+              </a:rPr>
+              <a:t>开花高度</a:t>
+            </a:r>
+            <a:r>
+              <a:rPr sz="900" b="0" lang="zh-CN" altLang="en-US">
+                <a:solidFill>
+                  <a:srgbClr val="F5F5F5">
+                    <a:alpha val="55000"/>
+                  </a:srgbClr>
+                </a:solidFill>
+                <a:latin typeface="微软雅黑"/>
+                <a:ea typeface="微软雅黑"/>
+                <a:cs typeface="微软雅黑"/>
+              </a:rPr>
+              <a:t> </a:t>
+            </a:r>
+            <a:r>
+              <a:rPr sz="900" b="0" lang="zh-CN" altLang="en-US">
+                <a:solidFill>
+                  <a:srgbClr val="F5F5F5">
+                    <a:alpha val="55000"/>
+                  </a:srgbClr>
+                </a:solidFill>
+                <a:latin typeface="Consolas"/>
+                <a:ea typeface="微软雅黑"/>
+                <a:cs typeface="微软雅黑"/>
+              </a:rPr>
+              <a:t>+210</a:t>
+            </a:r>
+            <a:r>
+              <a:rPr sz="900" b="0" lang="zh-CN" altLang="en-US">
+                <a:solidFill>
+                  <a:srgbClr val="F5F5F5">
+                    <a:alpha val="55000"/>
+                  </a:srgbClr>
+                </a:solidFill>
+                <a:latin typeface="微软雅黑"/>
+                <a:ea typeface="微软雅黑"/>
+                <a:cs typeface="微软雅黑"/>
+              </a:rPr>
+              <a:t> </a:t>
+            </a:r>
+            <a:r>
+              <a:rPr sz="900" b="0" lang="zh-CN" altLang="en-US">
+                <a:solidFill>
+                  <a:srgbClr val="F5F5F5">
+                    <a:alpha val="55000"/>
+                  </a:srgbClr>
+                </a:solidFill>
+                <a:latin typeface="Consolas"/>
+                <a:ea typeface="微软雅黑"/>
+                <a:cs typeface="微软雅黑"/>
+              </a:rPr>
+              <a:t>m</a:t>
+            </a:r>
+          </a:p>
+        </p:txBody>
+      </p:sp>
+      <p:cxnSp>
+        <p:nvCxnSpPr>
+          <p:cNvPr id="38" name="Connector 37"/>
+          <p:cNvCxnSpPr/>
+          <p:nvPr/>
+        </p:nvCxnSpPr>
+        <p:spPr>
+          <a:xfrm>
+            <a:off x="863600" y="2089150"/>
+            <a:ext cx="6400800" cy="0"/>
+          </a:xfrm>
+          <a:prstGeom prst="line">
+            <a:avLst/>
+          </a:prstGeom>
+          <a:ln w="6350">
+            <a:solidFill>
+              <a:srgbClr val="F5F5F5">
+                <a:alpha val="18000"/>
+              </a:srgbClr>
+            </a:solidFill>
+            <a:prstDash val="dash"/>
+          </a:ln>
+        </p:spPr>
+      </p:cxnSp>
+      <p:sp>
+        <p:nvSpPr>
+          <p:cNvPr id="39" name="TextBox 38"/>
+          <p:cNvSpPr txBox="1"/>
+          <p:nvPr/>
+        </p:nvSpPr>
+        <p:spPr>
+          <a:xfrm>
+            <a:off x="5867400" y="1873250"/>
+            <a:ext cx="1397000" cy="190500"/>
+          </a:xfrm>
+          <a:prstGeom prst="rect">
+            <a:avLst/>
+          </a:prstGeom>
+          <a:noFill/>
+        </p:spPr>
+        <p:txBody>
+          <a:bodyPr wrap="square" lIns="0" rIns="0" tIns="0" bIns="0" anchor="t">
+            <a:noAutofit/>
+          </a:bodyPr>
+          <a:lstStyle/>
+          <a:p>
+            <a:pPr algn="r">
+              <a:lnSpc>
+                <a:spcPts val="1080"/>
+              </a:lnSpc>
+            </a:pPr>
+            <a:r>
+              <a:rPr sz="900" b="0" lang="zh-CN" altLang="en-US">
+                <a:solidFill>
+                  <a:srgbClr val="F5F5F5">
+                    <a:alpha val="55000"/>
+                  </a:srgbClr>
+                </a:solidFill>
+                <a:latin typeface="Consolas"/>
+                <a:ea typeface="微软雅黑"/>
+                <a:cs typeface="微软雅黑"/>
+              </a:rPr>
+              <a:t>L</a:t>
+            </a:r>
+            <a:r>
+              <a:rPr sz="900" b="0" lang="zh-CN" altLang="en-US">
+                <a:solidFill>
+                  <a:srgbClr val="F5F5F5">
+                    <a:alpha val="55000"/>
+                  </a:srgbClr>
+                </a:solidFill>
+                <a:latin typeface="微软雅黑"/>
+                <a:ea typeface="微软雅黑"/>
+                <a:cs typeface="微软雅黑"/>
+              </a:rPr>
+              <a:t> </a:t>
+            </a:r>
+            <a:r>
+              <a:rPr sz="900" b="0" lang="zh-CN" altLang="en-US">
+                <a:solidFill>
+                  <a:srgbClr val="F5F5F5">
+                    <a:alpha val="55000"/>
+                  </a:srgbClr>
+                </a:solidFill>
+                <a:latin typeface="Consolas"/>
+                <a:ea typeface="微软雅黑"/>
+                <a:cs typeface="微软雅黑"/>
+              </a:rPr>
+              <a:t>开花高度</a:t>
+            </a:r>
+            <a:r>
+              <a:rPr sz="900" b="0" lang="zh-CN" altLang="en-US">
+                <a:solidFill>
+                  <a:srgbClr val="F5F5F5">
+                    <a:alpha val="55000"/>
+                  </a:srgbClr>
+                </a:solidFill>
+                <a:latin typeface="微软雅黑"/>
+                <a:ea typeface="微软雅黑"/>
+                <a:cs typeface="微软雅黑"/>
+              </a:rPr>
+              <a:t> </a:t>
+            </a:r>
+            <a:r>
+              <a:rPr sz="900" b="0" lang="zh-CN" altLang="en-US">
+                <a:solidFill>
+                  <a:srgbClr val="F5F5F5">
+                    <a:alpha val="55000"/>
+                  </a:srgbClr>
+                </a:solidFill>
+                <a:latin typeface="Consolas"/>
+                <a:ea typeface="微软雅黑"/>
+                <a:cs typeface="微软雅黑"/>
+              </a:rPr>
+              <a:t>+330</a:t>
+            </a:r>
+            <a:r>
+              <a:rPr sz="900" b="0" lang="zh-CN" altLang="en-US">
+                <a:solidFill>
+                  <a:srgbClr val="F5F5F5">
+                    <a:alpha val="55000"/>
+                  </a:srgbClr>
+                </a:solidFill>
+                <a:latin typeface="微软雅黑"/>
+                <a:ea typeface="微软雅黑"/>
+                <a:cs typeface="微软雅黑"/>
+              </a:rPr>
+              <a:t> </a:t>
+            </a:r>
+            <a:r>
+              <a:rPr sz="900" b="0" lang="zh-CN" altLang="en-US">
+                <a:solidFill>
+                  <a:srgbClr val="F5F5F5">
+                    <a:alpha val="55000"/>
+                  </a:srgbClr>
+                </a:solidFill>
+                <a:latin typeface="Consolas"/>
+                <a:ea typeface="微软雅黑"/>
+                <a:cs typeface="微软雅黑"/>
+              </a:rPr>
+              <a:t>m</a:t>
+            </a:r>
+          </a:p>
+        </p:txBody>
+      </p:sp>
+      <p:cxnSp>
+        <p:nvCxnSpPr>
+          <p:cNvPr id="40" name="Connector 39"/>
+          <p:cNvCxnSpPr/>
+          <p:nvPr/>
+        </p:nvCxnSpPr>
+        <p:spPr>
+          <a:xfrm>
+            <a:off x="863600" y="1866900"/>
+            <a:ext cx="6400800" cy="0"/>
+          </a:xfrm>
+          <a:prstGeom prst="line">
+            <a:avLst/>
+          </a:prstGeom>
+          <a:ln w="6350">
+            <a:solidFill>
+              <a:srgbClr val="F5F5F5">
+                <a:alpha val="18000"/>
+              </a:srgbClr>
+            </a:solidFill>
+            <a:prstDash val="dash"/>
+          </a:ln>
+        </p:spPr>
+      </p:cxnSp>
+      <p:sp>
+        <p:nvSpPr>
+          <p:cNvPr id="41" name="TextBox 40"/>
+          <p:cNvSpPr txBox="1"/>
+          <p:nvPr/>
+        </p:nvSpPr>
+        <p:spPr>
+          <a:xfrm>
+            <a:off x="5867400" y="1651000"/>
+            <a:ext cx="1397000" cy="190500"/>
+          </a:xfrm>
+          <a:prstGeom prst="rect">
+            <a:avLst/>
+          </a:prstGeom>
+          <a:noFill/>
+        </p:spPr>
+        <p:txBody>
+          <a:bodyPr wrap="square" lIns="0" rIns="0" tIns="0" bIns="0" anchor="t">
+            <a:noAutofit/>
+          </a:bodyPr>
+          <a:lstStyle/>
+          <a:p>
+            <a:pPr algn="r">
+              <a:lnSpc>
+                <a:spcPts val="1080"/>
+              </a:lnSpc>
+            </a:pPr>
+            <a:r>
+              <a:rPr sz="900" b="0" lang="zh-CN" altLang="en-US">
+                <a:solidFill>
+                  <a:srgbClr val="F5F5F5">
+                    <a:alpha val="55000"/>
+                  </a:srgbClr>
+                </a:solidFill>
+                <a:latin typeface="Consolas"/>
+                <a:ea typeface="微软雅黑"/>
+                <a:cs typeface="微软雅黑"/>
+              </a:rPr>
+              <a:t>主角</a:t>
+            </a:r>
+            <a:r>
+              <a:rPr sz="900" b="0" lang="zh-CN" altLang="en-US">
+                <a:solidFill>
+                  <a:srgbClr val="F5F5F5">
+                    <a:alpha val="55000"/>
+                  </a:srgbClr>
+                </a:solidFill>
+                <a:latin typeface="微软雅黑"/>
+                <a:ea typeface="微软雅黑"/>
+                <a:cs typeface="微软雅黑"/>
+              </a:rPr>
+              <a:t> </a:t>
+            </a:r>
+            <a:r>
+              <a:rPr sz="900" b="0" lang="zh-CN" altLang="en-US">
+                <a:solidFill>
+                  <a:srgbClr val="F5F5F5">
+                    <a:alpha val="55000"/>
+                  </a:srgbClr>
+                </a:solidFill>
+                <a:latin typeface="Consolas"/>
+                <a:ea typeface="微软雅黑"/>
+                <a:cs typeface="微软雅黑"/>
+              </a:rPr>
+              <a:t>开花高度</a:t>
+            </a:r>
+            <a:r>
+              <a:rPr sz="900" b="0" lang="zh-CN" altLang="en-US">
+                <a:solidFill>
+                  <a:srgbClr val="F5F5F5">
+                    <a:alpha val="55000"/>
+                  </a:srgbClr>
+                </a:solidFill>
+                <a:latin typeface="微软雅黑"/>
+                <a:ea typeface="微软雅黑"/>
+                <a:cs typeface="微软雅黑"/>
+              </a:rPr>
+              <a:t> </a:t>
+            </a:r>
+            <a:r>
+              <a:rPr sz="900" b="0" lang="zh-CN" altLang="en-US">
+                <a:solidFill>
+                  <a:srgbClr val="F5F5F5">
+                    <a:alpha val="55000"/>
+                  </a:srgbClr>
+                </a:solidFill>
+                <a:latin typeface="Consolas"/>
+                <a:ea typeface="微软雅黑"/>
+                <a:cs typeface="微软雅黑"/>
+              </a:rPr>
+              <a:t>+400</a:t>
+            </a:r>
+            <a:r>
+              <a:rPr sz="900" b="0" lang="zh-CN" altLang="en-US">
+                <a:solidFill>
+                  <a:srgbClr val="F5F5F5">
+                    <a:alpha val="55000"/>
+                  </a:srgbClr>
+                </a:solidFill>
+                <a:latin typeface="微软雅黑"/>
+                <a:ea typeface="微软雅黑"/>
+                <a:cs typeface="微软雅黑"/>
+              </a:rPr>
+              <a:t> </a:t>
+            </a:r>
+            <a:r>
+              <a:rPr sz="900" b="0" lang="zh-CN" altLang="en-US">
+                <a:solidFill>
+                  <a:srgbClr val="F5F5F5">
+                    <a:alpha val="55000"/>
+                  </a:srgbClr>
+                </a:solidFill>
+                <a:latin typeface="Consolas"/>
+                <a:ea typeface="微软雅黑"/>
+                <a:cs typeface="微软雅黑"/>
+              </a:rPr>
+              <a:t>m</a:t>
+            </a:r>
+          </a:p>
+        </p:txBody>
+      </p:sp>
+      <p:sp>
+        <p:nvSpPr>
+          <p:cNvPr id="42" name="Oval 41"/>
           <p:cNvSpPr/>
           <p:nvPr/>
         </p:nvSpPr>
         <p:spPr>
           <a:xfrm>
-            <a:off x="863600" y="4140200"/>
+            <a:off x="863600" y="4203700"/>
             <a:ext cx="101600" cy="101600"/>
           </a:xfrm>
           <a:prstGeom prst="ellipse">
@@ -9397,13 +9977,13 @@
       </p:sp>
       <p:sp>
         <p:nvSpPr>
-          <p:cNvPr id="35" name="TextBox 34"/>
+          <p:cNvPr id="43" name="TextBox 42"/>
           <p:cNvSpPr txBox="1"/>
           <p:nvPr/>
         </p:nvSpPr>
         <p:spPr>
           <a:xfrm>
-            <a:off x="1041400" y="4064000"/>
+            <a:off x="1041400" y="4127500"/>
             <a:ext cx="3810000" cy="254000"/>
           </a:xfrm>
           <a:prstGeom prst="rect">
@@ -9596,13 +10176,13 @@
       </p:sp>
       <p:sp>
         <p:nvSpPr>
-          <p:cNvPr id="36" name="Oval 35"/>
+          <p:cNvPr id="44" name="Oval 43"/>
           <p:cNvSpPr/>
           <p:nvPr/>
         </p:nvSpPr>
         <p:spPr>
           <a:xfrm>
-            <a:off x="863600" y="4419600"/>
+            <a:off x="863600" y="4483100"/>
             <a:ext cx="101600" cy="101600"/>
           </a:xfrm>
           <a:prstGeom prst="ellipse">
@@ -9627,13 +10207,13 @@
       </p:sp>
       <p:sp>
         <p:nvSpPr>
-          <p:cNvPr id="37" name="TextBox 36"/>
+          <p:cNvPr id="45" name="TextBox 44"/>
           <p:cNvSpPr txBox="1"/>
           <p:nvPr/>
         </p:nvSpPr>
         <p:spPr>
           <a:xfrm>
-            <a:off x="1041400" y="4343400"/>
+            <a:off x="1041400" y="4406900"/>
             <a:ext cx="3810000" cy="254000"/>
           </a:xfrm>
           <a:prstGeom prst="rect">
@@ -9774,13 +10354,13 @@
       </p:sp>
       <p:sp>
         <p:nvSpPr>
-          <p:cNvPr id="38" name="Oval 37"/>
+          <p:cNvPr id="46" name="Oval 45"/>
           <p:cNvSpPr/>
           <p:nvPr/>
         </p:nvSpPr>
         <p:spPr>
           <a:xfrm>
-            <a:off x="863600" y="4699000"/>
+            <a:off x="863600" y="4762500"/>
             <a:ext cx="101600" cy="101600"/>
           </a:xfrm>
           <a:prstGeom prst="ellipse">
@@ -9805,13 +10385,13 @@
       </p:sp>
       <p:sp>
         <p:nvSpPr>
-          <p:cNvPr id="39" name="TextBox 38"/>
+          <p:cNvPr id="47" name="TextBox 46"/>
           <p:cNvSpPr txBox="1"/>
           <p:nvPr/>
         </p:nvSpPr>
         <p:spPr>
           <a:xfrm>
-            <a:off x="1041400" y="4622800"/>
+            <a:off x="1041400" y="4686300"/>
             <a:ext cx="3810000" cy="254000"/>
           </a:xfrm>
           <a:prstGeom prst="rect">
@@ -9952,13 +10532,13 @@
       </p:sp>
       <p:sp>
         <p:nvSpPr>
-          <p:cNvPr id="40" name="TextBox 39"/>
+          <p:cNvPr id="48" name="TextBox 47"/>
           <p:cNvSpPr txBox="1"/>
           <p:nvPr/>
         </p:nvSpPr>
         <p:spPr>
           <a:xfrm>
-            <a:off x="5054600" y="4064000"/>
+            <a:off x="5054600" y="4127500"/>
             <a:ext cx="2413000" cy="635000"/>
           </a:xfrm>
           <a:prstGeom prst="rect">
@@ -10033,7 +10613,7 @@
       </p:sp>
       <p:sp>
         <p:nvSpPr>
-          <p:cNvPr id="41" name="TextBox 40"/>
+          <p:cNvPr id="49" name="TextBox 48"/>
           <p:cNvSpPr txBox="1"/>
           <p:nvPr/>
         </p:nvSpPr>
@@ -10118,7 +10698,7 @@
       </p:sp>
       <p:sp>
         <p:nvSpPr>
-          <p:cNvPr id="42" name="TextBox 41"/>
+          <p:cNvPr id="50" name="TextBox 49"/>
           <p:cNvSpPr txBox="1"/>
           <p:nvPr/>
         </p:nvSpPr>
@@ -10233,7 +10813,7 @@
       </p:sp>
       <p:sp>
         <p:nvSpPr>
-          <p:cNvPr id="43" name="TextBox 42"/>
+          <p:cNvPr id="51" name="TextBox 50"/>
           <p:cNvSpPr txBox="1"/>
           <p:nvPr/>
         </p:nvSpPr>
@@ -10276,7 +10856,7 @@
       </p:sp>
       <p:sp>
         <p:nvSpPr>
-          <p:cNvPr id="44" name="TextBox 43"/>
+          <p:cNvPr id="52" name="TextBox 51"/>
           <p:cNvSpPr txBox="1"/>
           <p:nvPr/>
         </p:nvSpPr>
@@ -10319,7 +10899,7 @@
       </p:sp>
       <p:sp>
         <p:nvSpPr>
-          <p:cNvPr id="45" name="TextBox 44"/>
+          <p:cNvPr id="53" name="TextBox 52"/>
           <p:cNvSpPr txBox="1"/>
           <p:nvPr/>
         </p:nvSpPr>
@@ -10362,7 +10942,7 @@
       </p:sp>
       <p:sp>
         <p:nvSpPr>
-          <p:cNvPr id="46" name="TextBox 45"/>
+          <p:cNvPr id="54" name="TextBox 53"/>
           <p:cNvSpPr txBox="1"/>
           <p:nvPr/>
         </p:nvSpPr>
@@ -10405,7 +10985,7 @@
       </p:sp>
       <p:sp>
         <p:nvSpPr>
-          <p:cNvPr id="47" name="Rectangle 46"/>
+          <p:cNvPr id="55" name="Rectangle 54"/>
           <p:cNvSpPr/>
           <p:nvPr/>
         </p:nvSpPr>
@@ -10436,7 +11016,7 @@
       </p:sp>
       <p:sp>
         <p:nvSpPr>
-          <p:cNvPr id="48" name="TextBox 47"/>
+          <p:cNvPr id="56" name="TextBox 55"/>
           <p:cNvSpPr txBox="1"/>
           <p:nvPr/>
         </p:nvSpPr>
@@ -10477,7 +11057,7 @@
       </p:sp>
       <p:sp>
         <p:nvSpPr>
-          <p:cNvPr id="49" name="TextBox 48"/>
+          <p:cNvPr id="57" name="TextBox 56"/>
           <p:cNvSpPr txBox="1"/>
           <p:nvPr/>
         </p:nvSpPr>
@@ -10546,7 +11126,7 @@
       </p:sp>
       <p:sp>
         <p:nvSpPr>
-          <p:cNvPr id="50" name="TextBox 49"/>
+          <p:cNvPr id="58" name="TextBox 57"/>
           <p:cNvSpPr txBox="1"/>
           <p:nvPr/>
         </p:nvSpPr>
@@ -10589,7 +11169,7 @@
       </p:sp>
       <p:sp>
         <p:nvSpPr>
-          <p:cNvPr id="51" name="TextBox 50"/>
+          <p:cNvPr id="59" name="TextBox 58"/>
           <p:cNvSpPr txBox="1"/>
           <p:nvPr/>
         </p:nvSpPr>
@@ -10658,7 +11238,7 @@
       </p:sp>
       <p:sp>
         <p:nvSpPr>
-          <p:cNvPr id="52" name="Rectangle 51"/>
+          <p:cNvPr id="60" name="Rectangle 59"/>
           <p:cNvSpPr/>
           <p:nvPr/>
         </p:nvSpPr>
@@ -10689,7 +11269,7 @@
       </p:sp>
       <p:sp>
         <p:nvSpPr>
-          <p:cNvPr id="53" name="TextBox 52"/>
+          <p:cNvPr id="61" name="TextBox 60"/>
           <p:cNvSpPr txBox="1"/>
           <p:nvPr/>
         </p:nvSpPr>
@@ -10730,7 +11310,7 @@
       </p:sp>
       <p:sp>
         <p:nvSpPr>
-          <p:cNvPr id="54" name="TextBox 53"/>
+          <p:cNvPr id="62" name="TextBox 61"/>
           <p:cNvSpPr txBox="1"/>
           <p:nvPr/>
         </p:nvSpPr>
@@ -10799,7 +11379,7 @@
       </p:sp>
       <p:sp>
         <p:nvSpPr>
-          <p:cNvPr id="55" name="TextBox 54"/>
+          <p:cNvPr id="63" name="TextBox 62"/>
           <p:cNvSpPr txBox="1"/>
           <p:nvPr/>
         </p:nvSpPr>
@@ -10842,7 +11422,7 @@
       </p:sp>
       <p:sp>
         <p:nvSpPr>
-          <p:cNvPr id="56" name="TextBox 55"/>
+          <p:cNvPr id="64" name="TextBox 63"/>
           <p:cNvSpPr txBox="1"/>
           <p:nvPr/>
         </p:nvSpPr>
@@ -10911,7 +11491,7 @@
       </p:sp>
       <p:sp>
         <p:nvSpPr>
-          <p:cNvPr id="57" name="Rectangle 56"/>
+          <p:cNvPr id="65" name="Rectangle 64"/>
           <p:cNvSpPr/>
           <p:nvPr/>
         </p:nvSpPr>
@@ -10942,7 +11522,7 @@
       </p:sp>
       <p:sp>
         <p:nvSpPr>
-          <p:cNvPr id="58" name="TextBox 57"/>
+          <p:cNvPr id="66" name="TextBox 65"/>
           <p:cNvSpPr txBox="1"/>
           <p:nvPr/>
         </p:nvSpPr>
@@ -10983,7 +11563,7 @@
       </p:sp>
       <p:sp>
         <p:nvSpPr>
-          <p:cNvPr id="59" name="TextBox 58"/>
+          <p:cNvPr id="67" name="TextBox 66"/>
           <p:cNvSpPr txBox="1"/>
           <p:nvPr/>
         </p:nvSpPr>
@@ -11052,7 +11632,7 @@
       </p:sp>
       <p:sp>
         <p:nvSpPr>
-          <p:cNvPr id="60" name="TextBox 59"/>
+          <p:cNvPr id="68" name="TextBox 67"/>
           <p:cNvSpPr txBox="1"/>
           <p:nvPr/>
         </p:nvSpPr>
@@ -11095,7 +11675,7 @@
       </p:sp>
       <p:sp>
         <p:nvSpPr>
-          <p:cNvPr id="61" name="TextBox 60"/>
+          <p:cNvPr id="69" name="TextBox 68"/>
           <p:cNvSpPr txBox="1"/>
           <p:nvPr/>
         </p:nvSpPr>
@@ -11164,7 +11744,7 @@
       </p:sp>
       <p:sp>
         <p:nvSpPr>
-          <p:cNvPr id="62" name="Rectangle 61"/>
+          <p:cNvPr id="70" name="Rectangle 69"/>
           <p:cNvSpPr/>
           <p:nvPr/>
         </p:nvSpPr>
@@ -11195,7 +11775,7 @@
       </p:sp>
       <p:sp>
         <p:nvSpPr>
-          <p:cNvPr id="63" name="TextBox 62"/>
+          <p:cNvPr id="71" name="TextBox 70"/>
           <p:cNvSpPr txBox="1"/>
           <p:nvPr/>
         </p:nvSpPr>
@@ -11236,7 +11816,7 @@
       </p:sp>
       <p:sp>
         <p:nvSpPr>
-          <p:cNvPr id="64" name="TextBox 63"/>
+          <p:cNvPr id="72" name="TextBox 71"/>
           <p:cNvSpPr txBox="1"/>
           <p:nvPr/>
         </p:nvSpPr>
@@ -11305,7 +11885,7 @@
       </p:sp>
       <p:sp>
         <p:nvSpPr>
-          <p:cNvPr id="65" name="TextBox 64"/>
+          <p:cNvPr id="73" name="TextBox 72"/>
           <p:cNvSpPr txBox="1"/>
           <p:nvPr/>
         </p:nvSpPr>
@@ -11348,7 +11928,7 @@
       </p:sp>
       <p:sp>
         <p:nvSpPr>
-          <p:cNvPr id="66" name="TextBox 65"/>
+          <p:cNvPr id="74" name="TextBox 73"/>
           <p:cNvSpPr txBox="1"/>
           <p:nvPr/>
         </p:nvSpPr>
@@ -11417,7 +11997,7 @@
       </p:sp>
       <p:sp>
         <p:nvSpPr>
-          <p:cNvPr id="67" name="Rectangle 66"/>
+          <p:cNvPr id="75" name="Rectangle 74"/>
           <p:cNvSpPr/>
           <p:nvPr/>
         </p:nvSpPr>
@@ -11448,7 +12028,7 @@
       </p:sp>
       <p:sp>
         <p:nvSpPr>
-          <p:cNvPr id="68" name="TextBox 67"/>
+          <p:cNvPr id="76" name="TextBox 75"/>
           <p:cNvSpPr txBox="1"/>
           <p:nvPr/>
         </p:nvSpPr>
@@ -11667,7 +12247,7 @@
       </p:sp>
       <p:sp>
         <p:nvSpPr>
-          <p:cNvPr id="69" name="Rectangle 68"/>
+          <p:cNvPr id="77" name="Rectangle 76"/>
           <p:cNvSpPr/>
           <p:nvPr/>
         </p:nvSpPr>
@@ -11702,7 +12282,7 @@
       </p:sp>
       <p:sp>
         <p:nvSpPr>
-          <p:cNvPr id="70" name="TextBox 69"/>
+          <p:cNvPr id="78" name="TextBox 77"/>
           <p:cNvSpPr txBox="1"/>
           <p:nvPr/>
         </p:nvSpPr>
@@ -11743,7 +12323,7 @@
       </p:sp>
       <p:cxnSp>
         <p:nvCxnSpPr>
-          <p:cNvPr id="71" name="Connector 70"/>
+          <p:cNvPr id="79" name="Connector 78"/>
           <p:cNvCxnSpPr/>
           <p:nvPr/>
         </p:nvCxnSpPr>
@@ -11767,7 +12347,7 @@
       </p:cxnSp>
       <p:sp>
         <p:nvSpPr>
-          <p:cNvPr id="72" name="Rectangle 71"/>
+          <p:cNvPr id="80" name="Rectangle 79"/>
           <p:cNvSpPr/>
           <p:nvPr/>
         </p:nvSpPr>
@@ -11802,7 +12382,7 @@
       </p:sp>
       <p:sp>
         <p:nvSpPr>
-          <p:cNvPr id="73" name="TextBox 72"/>
+          <p:cNvPr id="81" name="TextBox 80"/>
           <p:cNvSpPr txBox="1"/>
           <p:nvPr/>
         </p:nvSpPr>
@@ -11843,7 +12423,7 @@
       </p:sp>
       <p:cxnSp>
         <p:nvCxnSpPr>
-          <p:cNvPr id="74" name="Connector 73"/>
+          <p:cNvPr id="82" name="Connector 81"/>
           <p:cNvCxnSpPr/>
           <p:nvPr/>
         </p:nvCxnSpPr>
@@ -11867,7 +12447,7 @@
       </p:cxnSp>
       <p:sp>
         <p:nvSpPr>
-          <p:cNvPr id="75" name="Rectangle 74"/>
+          <p:cNvPr id="83" name="Rectangle 82"/>
           <p:cNvSpPr/>
           <p:nvPr/>
         </p:nvSpPr>
@@ -11902,7 +12482,7 @@
       </p:sp>
       <p:sp>
         <p:nvSpPr>
-          <p:cNvPr id="76" name="TextBox 75"/>
+          <p:cNvPr id="84" name="TextBox 83"/>
           <p:cNvSpPr txBox="1"/>
           <p:nvPr/>
         </p:nvSpPr>
@@ -11943,7 +12523,7 @@
       </p:sp>
       <p:cxnSp>
         <p:nvCxnSpPr>
-          <p:cNvPr id="77" name="Connector 76"/>
+          <p:cNvPr id="85" name="Connector 84"/>
           <p:cNvCxnSpPr/>
           <p:nvPr/>
         </p:nvCxnSpPr>
@@ -11967,7 +12547,7 @@
       </p:cxnSp>
       <p:sp>
         <p:nvSpPr>
-          <p:cNvPr id="78" name="Rectangle 77"/>
+          <p:cNvPr id="86" name="Rectangle 85"/>
           <p:cNvSpPr/>
           <p:nvPr/>
         </p:nvSpPr>
@@ -12002,7 +12582,7 @@
       </p:sp>
       <p:sp>
         <p:nvSpPr>
-          <p:cNvPr id="79" name="TextBox 78"/>
+          <p:cNvPr id="87" name="TextBox 86"/>
           <p:cNvSpPr txBox="1"/>
           <p:nvPr/>
         </p:nvSpPr>
@@ -12043,7 +12623,7 @@
       </p:sp>
       <p:cxnSp>
         <p:nvCxnSpPr>
-          <p:cNvPr id="80" name="Connector 79"/>
+          <p:cNvPr id="88" name="Connector 87"/>
           <p:cNvCxnSpPr/>
           <p:nvPr/>
         </p:nvCxnSpPr>
@@ -12067,7 +12647,7 @@
       </p:cxnSp>
       <p:sp>
         <p:nvSpPr>
-          <p:cNvPr id="81" name="Rectangle 80"/>
+          <p:cNvPr id="89" name="Rectangle 88"/>
           <p:cNvSpPr/>
           <p:nvPr/>
         </p:nvSpPr>
@@ -12102,7 +12682,7 @@
       </p:sp>
       <p:sp>
         <p:nvSpPr>
-          <p:cNvPr id="82" name="TextBox 81"/>
+          <p:cNvPr id="90" name="TextBox 89"/>
           <p:cNvSpPr txBox="1"/>
           <p:nvPr/>
         </p:nvSpPr>
@@ -12143,7 +12723,7 @@
       </p:sp>
       <p:cxnSp>
         <p:nvCxnSpPr>
-          <p:cNvPr id="83" name="Connector 82"/>
+          <p:cNvPr id="91" name="Connector 90"/>
           <p:cNvCxnSpPr/>
           <p:nvPr/>
         </p:nvCxnSpPr>
@@ -12167,7 +12747,7 @@
       </p:cxnSp>
       <p:sp>
         <p:nvSpPr>
-          <p:cNvPr id="84" name="Rectangle 83"/>
+          <p:cNvPr id="92" name="Rectangle 91"/>
           <p:cNvSpPr/>
           <p:nvPr/>
         </p:nvSpPr>
@@ -12202,7 +12782,7 @@
       </p:sp>
       <p:sp>
         <p:nvSpPr>
-          <p:cNvPr id="85" name="TextBox 84"/>
+          <p:cNvPr id="93" name="TextBox 92"/>
           <p:cNvSpPr txBox="1"/>
           <p:nvPr/>
         </p:nvSpPr>
@@ -12243,7 +12823,7 @@
       </p:sp>
       <p:sp>
         <p:nvSpPr>
-          <p:cNvPr id="86" name="TextBox 85"/>
+          <p:cNvPr id="94" name="TextBox 93"/>
           <p:cNvSpPr txBox="1"/>
           <p:nvPr/>
         </p:nvSpPr>
@@ -45183,7 +45763,7 @@
                 <a:ea typeface="微软雅黑"/>
                 <a:cs typeface="微软雅黑"/>
               </a:rPr>
-              <a:t>组、锚点</a:t>
+              <a:t>组、尾缀锚在发射点</a:t>
             </a:r>
             <a:r>
               <a:rPr sz="1000" b="0" lang="zh-CN" altLang="en-US">
@@ -45235,7 +45815,7 @@
                 <a:ea typeface="微软雅黑"/>
                 <a:cs typeface="微软雅黑"/>
               </a:rPr>
-              <a:t>组</a:t>
+              <a:t>组（共用一个源包）</a:t>
             </a:r>
           </a:p>
         </p:txBody>

--- a/协作/提示词/分享PPT交接_2026-10-29/第三版交付/烟花秀AI全流程_第三版.pptx
+++ b/协作/提示词/分享PPT交接_2026-10-29/第三版交付/烟花秀AI全流程_第三版.pptx
@@ -525,7 +525,7 @@
           <a:lstStyle/>
           <a:p>
             <a:r>
-              <a:t>第 1 页 · 封面（建议 25 秒）</a:t>
+              <a:t>第 1 页 · 封面（约 30 秒）</a:t>
             </a:r>
           </a:p>
           <a:p/>
@@ -601,7 +601,7 @@
           <a:lstStyle/>
           <a:p>
             <a:r>
-              <a:t>第 10 页 · 导入器（建议 40 秒）</a:t>
+              <a:t>第 10 页 · 导入器（约 40 秒）</a:t>
             </a:r>
           </a:p>
           <a:p/>
@@ -683,7 +683,7 @@
           <a:lstStyle/>
           <a:p>
             <a:r>
-              <a:t>第 11 页 · 编排：先从舞台推出规则（建议 50 秒）</a:t>
+              <a:t>第 11 页 · 编排：先从舞台推出规则（约 45 秒）</a:t>
             </a:r>
           </a:p>
           <a:p/>
@@ -765,7 +765,7 @@
           <a:lstStyle/>
           <a:p>
             <a:r>
-              <a:t>第 12 页 · 编排工作台（建议 30 秒）</a:t>
+              <a:t>第 12 页 · 编排工作台（约 30 秒）</a:t>
             </a:r>
           </a:p>
           <a:p/>
@@ -929,7 +929,7 @@
           <a:lstStyle/>
           <a:p>
             <a:r>
-              <a:t>第 14 页 · 成果一：资源（建议 40 秒）</a:t>
+              <a:t>第 14 页 · 成果一：资源（约 50 秒）</a:t>
             </a:r>
           </a:p>
           <a:p/>
@@ -1011,7 +1011,7 @@
           <a:lstStyle/>
           <a:p>
             <a:r>
-              <a:t>第 15 页 · 成果二：进引擎（建议 30 秒）</a:t>
+              <a:t>第 15 页 · 成果二：进引擎（约 35 秒）</a:t>
             </a:r>
           </a:p>
           <a:p/>
@@ -1093,7 +1093,7 @@
           <a:lstStyle/>
           <a:p>
             <a:r>
-              <a:t>第 16 页 · 成果三：排节目（建议 30 秒）</a:t>
+              <a:t>第 16 页 · 成果三：排节目（约 35 秒）</a:t>
             </a:r>
           </a:p>
           <a:p/>
@@ -1175,7 +1175,7 @@
           <a:lstStyle/>
           <a:p>
             <a:r>
-              <a:t>第 17 页 · 投入与角色（建议 35 秒）</a:t>
+              <a:t>第 17 页 · 投入与角色（约 30 秒）</a:t>
             </a:r>
           </a:p>
           <a:p/>
@@ -1257,7 +1257,7 @@
           <a:lstStyle/>
           <a:p>
             <a:r>
-              <a:t>第 18 页 · 尾缀：近段和远段（建议 45 秒）</a:t>
+              <a:t>第 18 页 · 尾缀：近段和远段（约 40 秒）</a:t>
             </a:r>
           </a:p>
           <a:p/>
@@ -1339,7 +1339,7 @@
           <a:lstStyle/>
           <a:p>
             <a:r>
-              <a:t>第 19 页 · 仙女棒：13 类火星合成一张（建议 50 秒）</a:t>
+              <a:t>第 19 页 · 仙女棒：13 类火星合成一张（约 50 秒）</a:t>
             </a:r>
           </a:p>
           <a:p/>
@@ -1421,7 +1421,7 @@
           <a:lstStyle/>
           <a:p>
             <a:r>
-              <a:t>第 2 页 · 今年的规模（建议 35 秒）</a:t>
+              <a:t>第 2 页 · 今年的规模（约 35 秒）</a:t>
             </a:r>
           </a:p>
           <a:p/>
@@ -1503,7 +1503,7 @@
           <a:lstStyle/>
           <a:p>
             <a:r>
-              <a:t>第 20 页 · 模糊与方头（建议 45 秒）</a:t>
+              <a:t>第 20 页 · 模糊与方头（约 50 秒）</a:t>
             </a:r>
           </a:p>
           <a:p/>
@@ -1585,7 +1585,7 @@
           <a:lstStyle/>
           <a:p>
             <a:r>
-              <a:t>第 21 页 · 黑点与 Ramp 末格（建议 40 秒）</a:t>
+              <a:t>第 21 页 · 黑点与 Ramp 末格（约 40 秒）</a:t>
             </a:r>
           </a:p>
           <a:p/>
@@ -1667,7 +1667,7 @@
           <a:lstStyle/>
           <a:p>
             <a:r>
-              <a:t>第 22 页 · 规则落到界面：宪章与令牌（建议 45 秒）</a:t>
+              <a:t>第 22 页 · 规则落到界面：宪章与令牌（约 35 秒）</a:t>
             </a:r>
           </a:p>
           <a:p/>
@@ -1749,7 +1749,7 @@
           <a:lstStyle/>
           <a:p>
             <a:r>
-              <a:t>第 23 页 · 心得：遇到批量需求，这样和 AI 一起做（建议 80 秒）</a:t>
+              <a:t>第 23 页 · 心得：遇到批量需求，这样和 AI 一起做（约 60 秒）</a:t>
             </a:r>
           </a:p>
           <a:p/>
@@ -1831,7 +1831,7 @@
           <a:lstStyle/>
           <a:p>
             <a:r>
-              <a:t>第 24 页 · 工具与致谢（建议 35 秒）</a:t>
+              <a:t>第 24 页 · 工具与致谢（约 40 秒）</a:t>
             </a:r>
           </a:p>
           <a:p/>
@@ -1913,7 +1913,7 @@
           <a:lstStyle/>
           <a:p>
             <a:r>
-              <a:t>第 3 页 · 问题一：出图（建议 60 秒）</a:t>
+              <a:t>第 3 页 · 问题一：出图（约 50 秒）</a:t>
             </a:r>
           </a:p>
           <a:p/>
@@ -1995,7 +1995,7 @@
           <a:lstStyle/>
           <a:p>
             <a:r>
-              <a:t>第 4 页 · 问题二：进引擎（建议 30 秒）</a:t>
+              <a:t>第 4 页 · 问题二：进引擎（约 30 秒）</a:t>
             </a:r>
           </a:p>
           <a:p/>
@@ -2077,7 +2077,7 @@
           <a:lstStyle/>
           <a:p>
             <a:r>
-              <a:t>第 5 页 · 问题三：排节目（建议 40 秒）</a:t>
+              <a:t>第 5 页 · 问题三：排节目（约 40 秒）</a:t>
             </a:r>
           </a:p>
           <a:p/>
@@ -2159,7 +2159,7 @@
           <a:lstStyle/>
           <a:p>
             <a:r>
-              <a:t>第 6 页 · 三个问题，三个工具（建议 40 秒）</a:t>
+              <a:t>第 6 页 · 三个问题，三个工具（约 40 秒）</a:t>
             </a:r>
           </a:p>
           <a:p/>
@@ -2235,7 +2235,7 @@
           <a:lstStyle/>
           <a:p>
             <a:r>
-              <a:t>第 7 页 · 烘焙器：为什么自己做（建议 60 秒）</a:t>
+              <a:t>第 7 页 · 烘焙器：为什么自己做（约 55 秒）</a:t>
             </a:r>
           </a:p>
           <a:p/>
@@ -2317,7 +2317,7 @@
           <a:lstStyle/>
           <a:p>
             <a:r>
-              <a:t>第 8 页 · 导出流程化之一：取景与裁剪（建议 60 秒）</a:t>
+              <a:t>第 8 页 · 导出流程化之一：取景与裁剪（约 50 秒）</a:t>
             </a:r>
           </a:p>
           <a:p/>
@@ -2399,7 +2399,7 @@
           <a:lstStyle/>
           <a:p>
             <a:r>
-              <a:t>第 9 页 · 导出流程化之二：打包与两平台（建议 55 秒）</a:t>
+              <a:t>第 9 页 · 导出流程化之二：打包与两平台（约 45 秒）</a:t>
             </a:r>
           </a:p>
           <a:p/>

--- a/协作/提示词/分享PPT交接_2026-10-29/第三版交付/烟花秀AI全流程_第三版.pptx
+++ b/协作/提示词/分享PPT交接_2026-10-29/第三版交付/烟花秀AI全流程_第三版.pptx
@@ -1175,13 +1175,13 @@
           <a:lstStyle/>
           <a:p>
             <a:r>
-              <a:t>第 17 页 · 投入与角色（约 30 秒）</a:t>
+              <a:t>第 17 页 · 投入与角色（约 25 秒）</a:t>
             </a:r>
           </a:p>
           <a:p/>
           <a:p>
             <a:r>
-              <a:t>这一个多月里，我一个人对接 AI，角色大致三类：定方向，包括需求、目标和编排设计；做判断，包括美术把关、UE 验收和规范取舍；还有维护规则和交接，让工作能一段段接续。这一版累计提交两千多次，其中三百多次是显卡后台自动回传；烘焙器迭代了近 200 个版本号。</a:t>
+              <a:t>这一个多月里，我一个人对接 AI，角色大致三类：定方向、做判断，还有维护规则和交接。下面是每天的提交量，这一版累计两千多次，其中三百多次是显卡后台自动回传；烘焙器迭代了近 200 个版本号。</a:t>
             </a:r>
           </a:p>
           <a:p/>
@@ -1427,13 +1427,13 @@
           <a:p/>
           <a:p>
             <a:r>
-              <a:t>先说规模。去年的烟花秀只有 3 种烟花，时长 70 秒左右。今年按资源表统计，开花花型有 26 种；升空尾缀按开花高度分了 6 档，还有一套窜天猴。节目时长约 220 秒，差不多是去年的 3 倍，而且 PC 和手游要各出一套。规模上来以后，原来的做法在出图、进引擎、排节目三个环节都跟不上，下面分别说。</a:t>
+              <a:t>先说规模。去年的烟花秀只有 3 种烟花。今年按资源表统计，开花花型有 26 种；升空尾缀按开花高度分了 6 档，还有一套窜天猴。节目约 220 秒，差不多是去年的 3 倍，而且 PC 和手游要各出一套。规模上来以后，原来的做法在出图、进引擎、排节目三个环节都跟不上，下面分别说。</a:t>
             </a:r>
           </a:p>
           <a:p/>
           <a:p>
             <a:r>
-              <a:t>依据：去年 3 种 = 口述（01:42）；去年约 70 秒 ◎（旧工程定序器范围 0–70.2 秒，本机确认即去年节目时长）；26 种 / 6 档 / 1 套 ✓（verify_A1_A2 §1）；219.5 秒 ✓（B11 修订 3）；219.5 ÷ 70.2 ≈ 3.1。用户说「几十种」，页面用核过的 26，不往大说。</a:t>
+              <a:t>依据：去年 3 种、时长约 3 倍 = 讲者口述（01:42；本机 T26 未能核实，旧定序器子序列播放范围 0–70.2 秒仅作参考）；26 种 / 6 档 / 1 套 ✓（verify_A1_A2 §1）；219.5 秒 ✓（B11 修订 3）；219.5 ÷ 70.2 ≈ 3.1。用户说「几十种」，页面用核过的 26，不往大说。</a:t>
             </a:r>
           </a:p>
         </p:txBody>
@@ -2235,13 +2235,13 @@
           <a:lstStyle/>
           <a:p>
             <a:r>
-              <a:t>第 7 页 · 烘焙器：为什么自己做（约 55 秒）</a:t>
+              <a:t>第 7 页 · 烘焙器：为什么自己做（约 45 秒）</a:t>
             </a:r>
           </a:p>
           <a:p/>
           <a:p>
             <a:r>
-              <a:t>出图这一环，我让 AI 做了烘焙器。之前那条 Blender 脚本的路能出图，但每改一轮都要等离线渲染，调参时看到的预览和最终输出也不完全一样。烟花在游戏里本质上是朝向镜头的面片，所以我换了思路：不追求完整的三维场景，按这次的舞台尺度、观看距离和 Cascade 规范，做一个面向游戏视角的 2D 烘焙器。它有三个特点：看得见，改参数当场能看，导出后还能在「引擎回放」里按导出的贴图和配置播放；出得快，确认后直接输出引擎要的格式；按项目定制，规格都围绕这次的需求来定。</a:t>
+              <a:t>出图这一环，我让 AI 做了烘焙器。前面说的脚本路线能出图，但慢，也看不见。烟花在游戏里本质上是朝向镜头的面片，所以我不追求完整的三维场景，而是按这次的舞台尺度、观看距离和 Cascade 规范，做一个面向游戏视角的 2D 烘焙器。它有三个特点：看得见，改参数当场能看，导出后还能在「引擎回放」里按导出的贴图播放；出得快，确认后直接输出引擎要的格式；按项目定制，规格都围绕这次的需求来定。</a:t>
             </a:r>
           </a:p>
           <a:p/>
@@ -2317,13 +2317,13 @@
           <a:lstStyle/>
           <a:p>
             <a:r>
-              <a:t>第 8 页 · 导出流程化之一：取景与裁剪（约 50 秒）</a:t>
+              <a:t>第 8 页 · 导出流程化之一：取景与裁剪（约 45 秒）</a:t>
             </a:r>
           </a:p>
           <a:p/>
           <a:p>
             <a:r>
-              <a:t>烘焙器里我花功夫最多的是导出规范，先说取景。烟花在面片里占得越小，分辨率就浪费得越多。固定框是默认；随开花放大，让刚开花的小花也有像素，但它以爆点为中心，扇形这种只往一侧长的花开满后反而更空；所以又加了锚在爆点，只朝有内容的方向放大。拿一个扇形测试，内容占面片的比例从两成左右提到四成左右。烘完再按每帧实际内容收紧；面片大小最多分 12 级，曲线点从近百个减到二十几个；帧数也按运动来分。这些以前要手工框、手工算，现在每次导出自动完成。</a:t>
+              <a:t>烘焙器里我花功夫最多的是导出规范，先说取景。烟花在面片里占得越小，分辨率浪费得越多。固定框是默认；随开花放大让刚开花的小花也有像素，但扇形这种只往一侧长的花，开满后反而更空，所以又加了锚在爆点，只朝有内容的方向放大，拿一个扇形测试，内容占比从两成左右提到四成左右。烘完再按每帧实际内容收紧，帧数也按运动来分。这些以前要手工框、手工算，现在每次导出自动完成。</a:t>
             </a:r>
           </a:p>
           <a:p/>
@@ -7116,7 +7116,7 @@
         <p:spPr>
           <a:xfrm>
             <a:off x="609600" y="1358900"/>
-            <a:ext cx="6400800" cy="3600450"/>
+            <a:ext cx="6400800" cy="4000500"/>
           </a:xfrm>
           <a:prstGeom prst="rect">
             <a:avLst/>
@@ -7131,7 +7131,7 @@
         </p:nvSpPr>
         <p:spPr>
           <a:xfrm>
-            <a:off x="609600" y="5035550"/>
+            <a:off x="609600" y="5435600"/>
             <a:ext cx="6400800" cy="508000"/>
           </a:xfrm>
           <a:prstGeom prst="rect">
@@ -7161,7 +7161,7 @@
                 <a:ea typeface="微软雅黑"/>
                 <a:cs typeface="微软雅黑"/>
               </a:rPr>
-              <a:t>导入器在特效工作台里，挨着原来的配表入口；烘焙器「资源交付」页导出后也能直接进导入清单</a:t>
+              <a:t>测试数据（Fixture）界面；导入器在特效工作台里，挨着原来的配表入口，</a:t>
             </a:r>
           </a:p>
           <a:p>
@@ -7181,7 +7181,7 @@
                 <a:ea typeface="微软雅黑"/>
                 <a:cs typeface="微软雅黑"/>
               </a:rPr>
-              <a:t>写进</a:t>
+              <a:t>烘焙器「资源交付」页导出后也能直接进导入清单；写进</a:t>
             </a:r>
             <a:r>
               <a:rPr sz="1100" b="0" lang="zh-CN" altLang="en-US">
@@ -10935,7 +10935,7 @@
                 <a:ea typeface="微软雅黑"/>
                 <a:cs typeface="微软雅黑"/>
               </a:rPr>
-              <a:t>与点距之比</a:t>
+              <a:t>开花高度</a:t>
             </a:r>
           </a:p>
         </p:txBody>
@@ -10978,7 +10978,7 @@
                 <a:ea typeface="微软雅黑"/>
                 <a:cs typeface="微软雅黑"/>
               </a:rPr>
-              <a:t>开花高度</a:t>
+              <a:t>升空尾缀</a:t>
             </a:r>
           </a:p>
         </p:txBody>
@@ -11162,7 +11162,33 @@
                 <a:ea typeface="微软雅黑"/>
                 <a:cs typeface="微软雅黑"/>
               </a:rPr>
-              <a:t>0.9</a:t>
+              <a:t>+150</a:t>
+            </a:r>
+            <a:r>
+              <a:rPr sz="1300" b="0" lang="zh-CN" altLang="en-US">
+                <a:solidFill>
+                  <a:srgbClr val="F5F5F5">
+                    <a:alpha val="70000"/>
+                  </a:srgbClr>
+                </a:solidFill>
+                <a:latin typeface="微软雅黑"/>
+                <a:ea typeface="微软雅黑"/>
+                <a:cs typeface="微软雅黑"/>
+              </a:rPr>
+              <a:t> </a:t>
+            </a:r>
+            <a:r>
+              <a:rPr sz="1300" b="0" lang="zh-CN" altLang="en-US">
+                <a:solidFill>
+                  <a:srgbClr val="F5F5F5">
+                    <a:alpha val="70000"/>
+                  </a:srgbClr>
+                </a:solidFill>
+                <a:latin typeface="Consolas"/>
+                <a:ea typeface="微软雅黑"/>
+                <a:cs typeface="微软雅黑"/>
+              </a:rPr>
+              <a:t>m</a:t>
             </a:r>
           </a:p>
         </p:txBody>
@@ -11205,33 +11231,7 @@
                 <a:ea typeface="微软雅黑"/>
                 <a:cs typeface="微软雅黑"/>
               </a:rPr>
-              <a:t>+150</a:t>
-            </a:r>
-            <a:r>
-              <a:rPr sz="1300" b="0" lang="zh-CN" altLang="en-US">
-                <a:solidFill>
-                  <a:srgbClr val="F5F5F5">
-                    <a:alpha val="70000"/>
-                  </a:srgbClr>
-                </a:solidFill>
-                <a:latin typeface="微软雅黑"/>
-                <a:ea typeface="微软雅黑"/>
-                <a:cs typeface="微软雅黑"/>
-              </a:rPr>
-              <a:t> </a:t>
-            </a:r>
-            <a:r>
-              <a:rPr sz="1300" b="0" lang="zh-CN" altLang="en-US">
-                <a:solidFill>
-                  <a:srgbClr val="F5F5F5">
-                    <a:alpha val="70000"/>
-                  </a:srgbClr>
-                </a:solidFill>
-                <a:latin typeface="Consolas"/>
-                <a:ea typeface="微软雅黑"/>
-                <a:cs typeface="微软雅黑"/>
-              </a:rPr>
-              <a:t>m</a:t>
+              <a:t>S</a:t>
             </a:r>
           </a:p>
         </p:txBody>
@@ -11415,7 +11415,33 @@
                 <a:ea typeface="微软雅黑"/>
                 <a:cs typeface="微软雅黑"/>
               </a:rPr>
-              <a:t>1.5</a:t>
+              <a:t>+210</a:t>
+            </a:r>
+            <a:r>
+              <a:rPr sz="1300" b="0" lang="zh-CN" altLang="en-US">
+                <a:solidFill>
+                  <a:srgbClr val="F5F5F5">
+                    <a:alpha val="70000"/>
+                  </a:srgbClr>
+                </a:solidFill>
+                <a:latin typeface="微软雅黑"/>
+                <a:ea typeface="微软雅黑"/>
+                <a:cs typeface="微软雅黑"/>
+              </a:rPr>
+              <a:t> </a:t>
+            </a:r>
+            <a:r>
+              <a:rPr sz="1300" b="0" lang="zh-CN" altLang="en-US">
+                <a:solidFill>
+                  <a:srgbClr val="F5F5F5">
+                    <a:alpha val="70000"/>
+                  </a:srgbClr>
+                </a:solidFill>
+                <a:latin typeface="Consolas"/>
+                <a:ea typeface="微软雅黑"/>
+                <a:cs typeface="微软雅黑"/>
+              </a:rPr>
+              <a:t>m</a:t>
             </a:r>
           </a:p>
         </p:txBody>
@@ -11458,33 +11484,7 @@
                 <a:ea typeface="微软雅黑"/>
                 <a:cs typeface="微软雅黑"/>
               </a:rPr>
-              <a:t>+210</a:t>
-            </a:r>
-            <a:r>
-              <a:rPr sz="1300" b="0" lang="zh-CN" altLang="en-US">
-                <a:solidFill>
-                  <a:srgbClr val="F5F5F5">
-                    <a:alpha val="70000"/>
-                  </a:srgbClr>
-                </a:solidFill>
-                <a:latin typeface="微软雅黑"/>
-                <a:ea typeface="微软雅黑"/>
-                <a:cs typeface="微软雅黑"/>
-              </a:rPr>
-              <a:t> </a:t>
-            </a:r>
-            <a:r>
-              <a:rPr sz="1300" b="0" lang="zh-CN" altLang="en-US">
-                <a:solidFill>
-                  <a:srgbClr val="F5F5F5">
-                    <a:alpha val="70000"/>
-                  </a:srgbClr>
-                </a:solidFill>
-                <a:latin typeface="Consolas"/>
-                <a:ea typeface="微软雅黑"/>
-                <a:cs typeface="微软雅黑"/>
-              </a:rPr>
-              <a:t>m</a:t>
+              <a:t>M</a:t>
             </a:r>
           </a:p>
         </p:txBody>
@@ -11668,7 +11668,33 @@
                 <a:ea typeface="微软雅黑"/>
                 <a:cs typeface="微软雅黑"/>
               </a:rPr>
-              <a:t>2.3</a:t>
+              <a:t>+330</a:t>
+            </a:r>
+            <a:r>
+              <a:rPr sz="1300" b="0" lang="zh-CN" altLang="en-US">
+                <a:solidFill>
+                  <a:srgbClr val="F5F5F5">
+                    <a:alpha val="70000"/>
+                  </a:srgbClr>
+                </a:solidFill>
+                <a:latin typeface="微软雅黑"/>
+                <a:ea typeface="微软雅黑"/>
+                <a:cs typeface="微软雅黑"/>
+              </a:rPr>
+              <a:t> </a:t>
+            </a:r>
+            <a:r>
+              <a:rPr sz="1300" b="0" lang="zh-CN" altLang="en-US">
+                <a:solidFill>
+                  <a:srgbClr val="F5F5F5">
+                    <a:alpha val="70000"/>
+                  </a:srgbClr>
+                </a:solidFill>
+                <a:latin typeface="Consolas"/>
+                <a:ea typeface="微软雅黑"/>
+                <a:cs typeface="微软雅黑"/>
+              </a:rPr>
+              <a:t>m</a:t>
             </a:r>
           </a:p>
         </p:txBody>
@@ -11711,33 +11737,7 @@
                 <a:ea typeface="微软雅黑"/>
                 <a:cs typeface="微软雅黑"/>
               </a:rPr>
-              <a:t>+330</a:t>
-            </a:r>
-            <a:r>
-              <a:rPr sz="1300" b="0" lang="zh-CN" altLang="en-US">
-                <a:solidFill>
-                  <a:srgbClr val="F5F5F5">
-                    <a:alpha val="70000"/>
-                  </a:srgbClr>
-                </a:solidFill>
-                <a:latin typeface="微软雅黑"/>
-                <a:ea typeface="微软雅黑"/>
-                <a:cs typeface="微软雅黑"/>
-              </a:rPr>
-              <a:t> </a:t>
-            </a:r>
-            <a:r>
-              <a:rPr sz="1300" b="0" lang="zh-CN" altLang="en-US">
-                <a:solidFill>
-                  <a:srgbClr val="F5F5F5">
-                    <a:alpha val="70000"/>
-                  </a:srgbClr>
-                </a:solidFill>
-                <a:latin typeface="Consolas"/>
-                <a:ea typeface="微软雅黑"/>
-                <a:cs typeface="微软雅黑"/>
-              </a:rPr>
-              <a:t>m</a:t>
+              <a:t>L</a:t>
             </a:r>
           </a:p>
         </p:txBody>
@@ -11921,7 +11921,33 @@
                 <a:ea typeface="微软雅黑"/>
                 <a:cs typeface="微软雅黑"/>
               </a:rPr>
-              <a:t>2.8</a:t>
+              <a:t>+400</a:t>
+            </a:r>
+            <a:r>
+              <a:rPr sz="1300" b="0" lang="zh-CN" altLang="en-US">
+                <a:solidFill>
+                  <a:srgbClr val="F5F5F5">
+                    <a:alpha val="70000"/>
+                  </a:srgbClr>
+                </a:solidFill>
+                <a:latin typeface="微软雅黑"/>
+                <a:ea typeface="微软雅黑"/>
+                <a:cs typeface="微软雅黑"/>
+              </a:rPr>
+              <a:t> </a:t>
+            </a:r>
+            <a:r>
+              <a:rPr sz="1300" b="0" lang="zh-CN" altLang="en-US">
+                <a:solidFill>
+                  <a:srgbClr val="F5F5F5">
+                    <a:alpha val="70000"/>
+                  </a:srgbClr>
+                </a:solidFill>
+                <a:latin typeface="Consolas"/>
+                <a:ea typeface="微软雅黑"/>
+                <a:cs typeface="微软雅黑"/>
+              </a:rPr>
+              <a:t>m</a:t>
             </a:r>
           </a:p>
         </p:txBody>
@@ -11964,33 +11990,7 @@
                 <a:ea typeface="微软雅黑"/>
                 <a:cs typeface="微软雅黑"/>
               </a:rPr>
-              <a:t>+400</a:t>
-            </a:r>
-            <a:r>
-              <a:rPr sz="1300" b="0" lang="zh-CN" altLang="en-US">
-                <a:solidFill>
-                  <a:srgbClr val="F5F5F5">
-                    <a:alpha val="70000"/>
-                  </a:srgbClr>
-                </a:solidFill>
-                <a:latin typeface="微软雅黑"/>
-                <a:ea typeface="微软雅黑"/>
-                <a:cs typeface="微软雅黑"/>
-              </a:rPr>
-              <a:t> </a:t>
-            </a:r>
-            <a:r>
-              <a:rPr sz="1300" b="0" lang="zh-CN" altLang="en-US">
-                <a:solidFill>
-                  <a:srgbClr val="F5F5F5">
-                    <a:alpha val="70000"/>
-                  </a:srgbClr>
-                </a:solidFill>
-                <a:latin typeface="Consolas"/>
-                <a:ea typeface="微软雅黑"/>
-                <a:cs typeface="微软雅黑"/>
-              </a:rPr>
-              <a:t>m</a:t>
+              <a:t>Hero</a:t>
             </a:r>
           </a:p>
         </p:txBody>
@@ -12064,8 +12064,15 @@
                 <a:ea typeface="微软雅黑"/>
                 <a:cs typeface="微软雅黑"/>
               </a:rPr>
-              <a:t>每档配同名升空尾缀（主角配</a:t>
-            </a:r>
+              <a:t>花径为构图目标；高度相对坝顶</a:t>
+            </a:r>
+          </a:p>
+          <a:p>
+            <a:pPr algn="l">
+              <a:lnSpc>
+                <a:spcPts val="1500"/>
+              </a:lnSpc>
+            </a:pPr>
             <a:r>
               <a:rPr sz="1000" b="0" lang="zh-CN" altLang="en-US">
                 <a:solidFill>
@@ -12073,11 +12080,11 @@
                     <a:alpha val="40000"/>
                   </a:srgbClr>
                 </a:solidFill>
-                <a:latin typeface="微软雅黑"/>
-                <a:ea typeface="微软雅黑"/>
-                <a:cs typeface="微软雅黑"/>
-              </a:rPr>
-              <a:t> </a:t>
+                <a:latin typeface="Consolas"/>
+                <a:ea typeface="微软雅黑"/>
+                <a:cs typeface="微软雅黑"/>
+              </a:rPr>
+              <a:t>主角只放</a:t>
             </a:r>
             <a:r>
               <a:rPr sz="1000" b="0" lang="zh-CN" altLang="en-US">
@@ -12086,19 +12093,12 @@
                     <a:alpha val="40000"/>
                   </a:srgbClr>
                 </a:solidFill>
-                <a:latin typeface="Consolas"/>
-                <a:ea typeface="微软雅黑"/>
-                <a:cs typeface="微软雅黑"/>
-              </a:rPr>
-              <a:t>Hero）；高度相对坝顶</a:t>
-            </a:r>
-          </a:p>
-          <a:p>
-            <a:pPr algn="l">
-              <a:lnSpc>
-                <a:spcPts val="1500"/>
-              </a:lnSpc>
-            </a:pPr>
+                <a:latin typeface="微软雅黑"/>
+                <a:ea typeface="微软雅黑"/>
+                <a:cs typeface="微软雅黑"/>
+              </a:rPr>
+              <a:t> </a:t>
+            </a:r>
             <a:r>
               <a:rPr sz="1000" b="0" lang="zh-CN" altLang="en-US">
                 <a:solidFill>
@@ -12110,7 +12110,7 @@
                 <a:ea typeface="微软雅黑"/>
                 <a:cs typeface="微软雅黑"/>
               </a:rPr>
-              <a:t>主角只放</a:t>
+              <a:t>P0</a:t>
             </a:r>
             <a:r>
               <a:rPr sz="1000" b="0" lang="zh-CN" altLang="en-US">
@@ -12136,7 +12136,7 @@
                 <a:ea typeface="微软雅黑"/>
                 <a:cs typeface="微软雅黑"/>
               </a:rPr>
-              <a:t>P0</a:t>
+              <a:t>/</a:t>
             </a:r>
             <a:r>
               <a:rPr sz="1000" b="0" lang="zh-CN" altLang="en-US">
@@ -12162,6 +12162,32 @@
                 <a:ea typeface="微软雅黑"/>
                 <a:cs typeface="微软雅黑"/>
               </a:rPr>
+              <a:t>P4</a:t>
+            </a:r>
+            <a:r>
+              <a:rPr sz="1000" b="0" lang="zh-CN" altLang="en-US">
+                <a:solidFill>
+                  <a:srgbClr val="F5F5F5">
+                    <a:alpha val="40000"/>
+                  </a:srgbClr>
+                </a:solidFill>
+                <a:latin typeface="微软雅黑"/>
+                <a:ea typeface="微软雅黑"/>
+                <a:cs typeface="微软雅黑"/>
+              </a:rPr>
+              <a:t> </a:t>
+            </a:r>
+            <a:r>
+              <a:rPr sz="1000" b="0" lang="zh-CN" altLang="en-US">
+                <a:solidFill>
+                  <a:srgbClr val="F5F5F5">
+                    <a:alpha val="40000"/>
+                  </a:srgbClr>
+                </a:solidFill>
+                <a:latin typeface="Consolas"/>
+                <a:ea typeface="微软雅黑"/>
+                <a:cs typeface="微软雅黑"/>
+              </a:rPr>
               <a:t>/</a:t>
             </a:r>
             <a:r>
@@ -12188,59 +12214,7 @@
                 <a:ea typeface="微软雅黑"/>
                 <a:cs typeface="微软雅黑"/>
               </a:rPr>
-              <a:t>P4</a:t>
-            </a:r>
-            <a:r>
-              <a:rPr sz="1000" b="0" lang="zh-CN" altLang="en-US">
-                <a:solidFill>
-                  <a:srgbClr val="F5F5F5">
-                    <a:alpha val="40000"/>
-                  </a:srgbClr>
-                </a:solidFill>
-                <a:latin typeface="微软雅黑"/>
-                <a:ea typeface="微软雅黑"/>
-                <a:cs typeface="微软雅黑"/>
-              </a:rPr>
-              <a:t> </a:t>
-            </a:r>
-            <a:r>
-              <a:rPr sz="1000" b="0" lang="zh-CN" altLang="en-US">
-                <a:solidFill>
-                  <a:srgbClr val="F5F5F5">
-                    <a:alpha val="40000"/>
-                  </a:srgbClr>
-                </a:solidFill>
-                <a:latin typeface="Consolas"/>
-                <a:ea typeface="微软雅黑"/>
-                <a:cs typeface="微软雅黑"/>
-              </a:rPr>
-              <a:t>/</a:t>
-            </a:r>
-            <a:r>
-              <a:rPr sz="1000" b="0" lang="zh-CN" altLang="en-US">
-                <a:solidFill>
-                  <a:srgbClr val="F5F5F5">
-                    <a:alpha val="40000"/>
-                  </a:srgbClr>
-                </a:solidFill>
-                <a:latin typeface="微软雅黑"/>
-                <a:ea typeface="微软雅黑"/>
-                <a:cs typeface="微软雅黑"/>
-              </a:rPr>
-              <a:t> </a:t>
-            </a:r>
-            <a:r>
-              <a:rPr sz="1000" b="0" lang="zh-CN" altLang="en-US">
-                <a:solidFill>
-                  <a:srgbClr val="F5F5F5">
-                    <a:alpha val="40000"/>
-                  </a:srgbClr>
-                </a:solidFill>
-                <a:latin typeface="Consolas"/>
-                <a:ea typeface="微软雅黑"/>
-                <a:cs typeface="微软雅黑"/>
-              </a:rPr>
-              <a:t>P8，不与同档相邻</a:t>
+              <a:t>P8</a:t>
             </a:r>
           </a:p>
         </p:txBody>
@@ -12260,14 +12234,12 @@
             <a:avLst/>
           </a:prstGeom>
           <a:solidFill>
-            <a:srgbClr val="0FF796">
-              <a:alpha val="8000"/>
-            </a:srgbClr>
+            <a:srgbClr val="161616"/>
           </a:solidFill>
           <a:ln w="6350">
             <a:solidFill>
-              <a:srgbClr val="0FF796">
-                <a:alpha val="35000"/>
+              <a:srgbClr val="F5F5F5">
+                <a:alpha val="8000"/>
               </a:srgbClr>
             </a:solidFill>
           </a:ln>
@@ -12337,8 +12309,8 @@
           </a:prstGeom>
           <a:ln w="12700">
             <a:solidFill>
-              <a:srgbClr val="0FF796">
-                <a:alpha val="70000"/>
+              <a:srgbClr val="F5F5F5">
+                <a:alpha val="45000"/>
               </a:srgbClr>
             </a:solidFill>
             <a:tailEnd type="triangle" w="med" len="med"/>
@@ -12360,14 +12332,12 @@
             <a:avLst/>
           </a:prstGeom>
           <a:solidFill>
-            <a:srgbClr val="0FF796">
-              <a:alpha val="8000"/>
-            </a:srgbClr>
+            <a:srgbClr val="161616"/>
           </a:solidFill>
           <a:ln w="6350">
             <a:solidFill>
-              <a:srgbClr val="0FF796">
-                <a:alpha val="35000"/>
+              <a:srgbClr val="F5F5F5">
+                <a:alpha val="8000"/>
               </a:srgbClr>
             </a:solidFill>
           </a:ln>
@@ -12437,8 +12407,8 @@
           </a:prstGeom>
           <a:ln w="12700">
             <a:solidFill>
-              <a:srgbClr val="0FF796">
-                <a:alpha val="70000"/>
+              <a:srgbClr val="F5F5F5">
+                <a:alpha val="45000"/>
               </a:srgbClr>
             </a:solidFill>
             <a:tailEnd type="triangle" w="med" len="med"/>
@@ -12460,14 +12430,12 @@
             <a:avLst/>
           </a:prstGeom>
           <a:solidFill>
-            <a:srgbClr val="0FF796">
-              <a:alpha val="8000"/>
-            </a:srgbClr>
+            <a:srgbClr val="161616"/>
           </a:solidFill>
           <a:ln w="6350">
             <a:solidFill>
-              <a:srgbClr val="0FF796">
-                <a:alpha val="35000"/>
+              <a:srgbClr val="F5F5F5">
+                <a:alpha val="8000"/>
               </a:srgbClr>
             </a:solidFill>
           </a:ln>
@@ -12537,8 +12505,8 @@
           </a:prstGeom>
           <a:ln w="12700">
             <a:solidFill>
-              <a:srgbClr val="0FF796">
-                <a:alpha val="70000"/>
+              <a:srgbClr val="F5F5F5">
+                <a:alpha val="45000"/>
               </a:srgbClr>
             </a:solidFill>
             <a:tailEnd type="triangle" w="med" len="med"/>
@@ -12560,14 +12528,12 @@
             <a:avLst/>
           </a:prstGeom>
           <a:solidFill>
-            <a:srgbClr val="0FF796">
-              <a:alpha val="8000"/>
-            </a:srgbClr>
+            <a:srgbClr val="161616"/>
           </a:solidFill>
           <a:ln w="6350">
             <a:solidFill>
-              <a:srgbClr val="0FF796">
-                <a:alpha val="35000"/>
+              <a:srgbClr val="F5F5F5">
+                <a:alpha val="8000"/>
               </a:srgbClr>
             </a:solidFill>
           </a:ln>
@@ -12637,8 +12603,8 @@
           </a:prstGeom>
           <a:ln w="12700">
             <a:solidFill>
-              <a:srgbClr val="0FF796">
-                <a:alpha val="70000"/>
+              <a:srgbClr val="F5F5F5">
+                <a:alpha val="45000"/>
               </a:srgbClr>
             </a:solidFill>
             <a:tailEnd type="triangle" w="med" len="med"/>
@@ -12660,14 +12626,12 @@
             <a:avLst/>
           </a:prstGeom>
           <a:solidFill>
-            <a:srgbClr val="0FF796">
-              <a:alpha val="16000"/>
-            </a:srgbClr>
+            <a:srgbClr val="161616"/>
           </a:solidFill>
-          <a:ln w="6350">
+          <a:ln w="12700">
             <a:solidFill>
               <a:srgbClr val="0FF796">
-                <a:alpha val="35000"/>
+                <a:alpha val="80000"/>
               </a:srgbClr>
             </a:solidFill>
           </a:ln>
@@ -12737,8 +12701,8 @@
           </a:prstGeom>
           <a:ln w="12700">
             <a:solidFill>
-              <a:srgbClr val="0FF796">
-                <a:alpha val="70000"/>
+              <a:srgbClr val="F5F5F5">
+                <a:alpha val="45000"/>
               </a:srgbClr>
             </a:solidFill>
             <a:tailEnd type="triangle" w="med" len="med"/>
@@ -12760,14 +12724,12 @@
             <a:avLst/>
           </a:prstGeom>
           <a:solidFill>
-            <a:srgbClr val="0FF796">
-              <a:alpha val="8000"/>
-            </a:srgbClr>
+            <a:srgbClr val="161616"/>
           </a:solidFill>
           <a:ln w="6350">
             <a:solidFill>
-              <a:srgbClr val="0FF796">
-                <a:alpha val="35000"/>
+              <a:srgbClr val="F5F5F5">
+                <a:alpha val="8000"/>
               </a:srgbClr>
             </a:solidFill>
           </a:ln>
@@ -13230,7 +13192,7 @@
         <p:spPr>
           <a:xfrm>
             <a:off x="609600" y="1358900"/>
-            <a:ext cx="10972800" cy="2794000"/>
+            <a:ext cx="10972800" cy="2514600"/>
           </a:xfrm>
           <a:prstGeom prst="rect">
             <a:avLst/>
@@ -13245,7 +13207,7 @@
         </p:nvSpPr>
         <p:spPr>
           <a:xfrm>
-            <a:off x="609600" y="4203700"/>
+            <a:off x="609600" y="3924300"/>
             <a:ext cx="10972800" cy="190500"/>
           </a:xfrm>
           <a:prstGeom prst="rect">
@@ -13327,7 +13289,7 @@
                 <a:ea typeface="微软雅黑"/>
                 <a:cs typeface="微软雅黑"/>
               </a:rPr>
-              <a:t>烟花编排工作台</a:t>
+              <a:t>烟花编排工作台：段落、音乐波形、各点位轨道在同一条时间轴上</a:t>
             </a:r>
           </a:p>
         </p:txBody>
@@ -13340,8 +13302,8 @@
         </p:nvSpPr>
         <p:spPr>
           <a:xfrm>
-            <a:off x="609600" y="4470400"/>
-            <a:ext cx="6400800" cy="1600200"/>
+            <a:off x="609600" y="4318000"/>
+            <a:ext cx="6400800" cy="1752600"/>
           </a:xfrm>
           <a:prstGeom prst="rect">
             <a:avLst/>
@@ -13373,8 +13335,8 @@
         </p:nvSpPr>
         <p:spPr>
           <a:xfrm>
-            <a:off x="609600" y="4470400"/>
-            <a:ext cx="38100" cy="1600200"/>
+            <a:off x="609600" y="4318000"/>
+            <a:ext cx="38100" cy="1752600"/>
           </a:xfrm>
           <a:prstGeom prst="rect">
             <a:avLst/>
@@ -13402,7 +13364,7 @@
         </p:nvSpPr>
         <p:spPr>
           <a:xfrm>
-            <a:off x="863600" y="4610100"/>
+            <a:off x="863600" y="4470400"/>
             <a:ext cx="3810000" cy="228600"/>
           </a:xfrm>
           <a:prstGeom prst="rect">
@@ -13443,7 +13405,7 @@
         </p:nvSpPr>
         <p:spPr>
           <a:xfrm>
-            <a:off x="863600" y="4889500"/>
+            <a:off x="863600" y="4749800"/>
             <a:ext cx="5842000" cy="317500"/>
           </a:xfrm>
           <a:prstGeom prst="rect">
@@ -13484,7 +13446,7 @@
         </p:nvSpPr>
         <p:spPr>
           <a:xfrm>
-            <a:off x="863600" y="5245100"/>
+            <a:off x="863600" y="5118100"/>
             <a:ext cx="5842000" cy="635000"/>
           </a:xfrm>
           <a:prstGeom prst="rect">
@@ -13527,8 +13489,8 @@
         </p:nvSpPr>
         <p:spPr>
           <a:xfrm>
-            <a:off x="7315200" y="4470400"/>
-            <a:ext cx="4267200" cy="1600200"/>
+            <a:off x="7315200" y="4318000"/>
+            <a:ext cx="4267200" cy="1752600"/>
           </a:xfrm>
           <a:prstGeom prst="rect">
             <a:avLst/>
@@ -13560,7 +13522,7 @@
         </p:nvSpPr>
         <p:spPr>
           <a:xfrm>
-            <a:off x="7569200" y="4610100"/>
+            <a:off x="7569200" y="4470400"/>
             <a:ext cx="3810000" cy="228600"/>
           </a:xfrm>
           <a:prstGeom prst="rect">
@@ -13601,7 +13563,7 @@
         </p:nvSpPr>
         <p:spPr>
           <a:xfrm>
-            <a:off x="7569200" y="4889500"/>
+            <a:off x="7569200" y="4749800"/>
             <a:ext cx="3810000" cy="317500"/>
           </a:xfrm>
           <a:prstGeom prst="rect">
@@ -13642,7 +13604,7 @@
         </p:nvSpPr>
         <p:spPr>
           <a:xfrm>
-            <a:off x="7569200" y="5245100"/>
+            <a:off x="7569200" y="5118100"/>
             <a:ext cx="3810000" cy="762000"/>
           </a:xfrm>
           <a:prstGeom prst="rect">
@@ -16104,8 +16066,8 @@
         </p:nvSpPr>
         <p:spPr>
           <a:xfrm>
-            <a:off x="889000" y="2717800"/>
-            <a:ext cx="2667000" cy="635000"/>
+            <a:off x="889000" y="2692400"/>
+            <a:ext cx="2667000" cy="698500"/>
           </a:xfrm>
           <a:prstGeom prst="rect">
             <a:avLst/>
@@ -16120,11 +16082,11 @@
           <a:p>
             <a:pPr algn="l">
               <a:lnSpc>
-                <a:spcPts val="1937"/>
-              </a:lnSpc>
-            </a:pPr>
-            <a:r>
-              <a:rPr sz="1250" b="0" lang="zh-CN" altLang="en-US">
+                <a:spcPts val="1705"/>
+              </a:lnSpc>
+            </a:pPr>
+            <a:r>
+              <a:rPr sz="1100" b="0" lang="zh-CN" altLang="en-US">
                 <a:solidFill>
                   <a:srgbClr val="F5F5F5">
                     <a:alpha val="70000"/>
@@ -16137,20 +16099,20 @@
               <a:t>按尺寸共</a:t>
             </a:r>
             <a:r>
-              <a:rPr sz="1250" b="0" lang="zh-CN" altLang="en-US">
-                <a:solidFill>
-                  <a:srgbClr val="F5F5F5">
-                    <a:alpha val="70000"/>
-                  </a:srgbClr>
-                </a:solidFill>
-                <a:latin typeface="微软雅黑"/>
-                <a:ea typeface="微软雅黑"/>
-                <a:cs typeface="微软雅黑"/>
-              </a:rPr>
-              <a:t> </a:t>
-            </a:r>
-            <a:r>
-              <a:rPr sz="1250" b="0" lang="zh-CN" altLang="en-US">
+              <a:rPr sz="1100" b="0" lang="zh-CN" altLang="en-US">
+                <a:solidFill>
+                  <a:srgbClr val="F5F5F5">
+                    <a:alpha val="70000"/>
+                  </a:srgbClr>
+                </a:solidFill>
+                <a:latin typeface="微软雅黑"/>
+                <a:ea typeface="微软雅黑"/>
+                <a:cs typeface="微软雅黑"/>
+              </a:rPr>
+              <a:t> </a:t>
+            </a:r>
+            <a:r>
+              <a:rPr sz="1100" b="0" lang="zh-CN" altLang="en-US">
                 <a:solidFill>
                   <a:srgbClr val="F5F5F5">
                     <a:alpha val="70000"/>
@@ -16163,20 +16125,20 @@
               <a:t>30</a:t>
             </a:r>
             <a:r>
-              <a:rPr sz="1250" b="0" lang="zh-CN" altLang="en-US">
-                <a:solidFill>
-                  <a:srgbClr val="F5F5F5">
-                    <a:alpha val="70000"/>
-                  </a:srgbClr>
-                </a:solidFill>
-                <a:latin typeface="微软雅黑"/>
-                <a:ea typeface="微软雅黑"/>
-                <a:cs typeface="微软雅黑"/>
-              </a:rPr>
-              <a:t> </a:t>
-            </a:r>
-            <a:r>
-              <a:rPr sz="1250" b="0" lang="zh-CN" altLang="en-US">
+              <a:rPr sz="1100" b="0" lang="zh-CN" altLang="en-US">
+                <a:solidFill>
+                  <a:srgbClr val="F5F5F5">
+                    <a:alpha val="70000"/>
+                  </a:srgbClr>
+                </a:solidFill>
+                <a:latin typeface="微软雅黑"/>
+                <a:ea typeface="微软雅黑"/>
+                <a:cs typeface="微软雅黑"/>
+              </a:rPr>
+              <a:t> </a:t>
+            </a:r>
+            <a:r>
+              <a:rPr sz="1100" b="0" lang="zh-CN" altLang="en-US">
                 <a:solidFill>
                   <a:srgbClr val="F5F5F5">
                     <a:alpha val="70000"/>
@@ -16192,11 +16154,11 @@
           <a:p>
             <a:pPr algn="l">
               <a:lnSpc>
-                <a:spcPts val="1937"/>
-              </a:lnSpc>
-            </a:pPr>
-            <a:r>
-              <a:rPr sz="1250" b="0" lang="zh-CN" altLang="en-US">
+                <a:spcPts val="1705"/>
+              </a:lnSpc>
+            </a:pPr>
+            <a:r>
+              <a:rPr sz="1100" b="0" lang="zh-CN" altLang="en-US">
                 <a:solidFill>
                   <a:srgbClr val="F5F5F5">
                     <a:alpha val="70000"/>
@@ -16209,20 +16171,20 @@
               <a:t>小号</a:t>
             </a:r>
             <a:r>
-              <a:rPr sz="1250" b="0" lang="zh-CN" altLang="en-US">
-                <a:solidFill>
-                  <a:srgbClr val="F5F5F5">
-                    <a:alpha val="70000"/>
-                  </a:srgbClr>
-                </a:solidFill>
-                <a:latin typeface="微软雅黑"/>
-                <a:ea typeface="微软雅黑"/>
-                <a:cs typeface="微软雅黑"/>
-              </a:rPr>
-              <a:t> </a:t>
-            </a:r>
-            <a:r>
-              <a:rPr sz="1250" b="0" lang="zh-CN" altLang="en-US">
+              <a:rPr sz="1100" b="0" lang="zh-CN" altLang="en-US">
+                <a:solidFill>
+                  <a:srgbClr val="F5F5F5">
+                    <a:alpha val="70000"/>
+                  </a:srgbClr>
+                </a:solidFill>
+                <a:latin typeface="微软雅黑"/>
+                <a:ea typeface="微软雅黑"/>
+                <a:cs typeface="微软雅黑"/>
+              </a:rPr>
+              <a:t> </a:t>
+            </a:r>
+            <a:r>
+              <a:rPr sz="1100" b="0" lang="zh-CN" altLang="en-US">
                 <a:solidFill>
                   <a:srgbClr val="F5F5F5">
                     <a:alpha val="70000"/>
@@ -16235,20 +16197,20 @@
               <a:t>6</a:t>
             </a:r>
             <a:r>
-              <a:rPr sz="1250" b="0" lang="zh-CN" altLang="en-US">
-                <a:solidFill>
-                  <a:srgbClr val="F5F5F5">
-                    <a:alpha val="70000"/>
-                  </a:srgbClr>
-                </a:solidFill>
-                <a:latin typeface="微软雅黑"/>
-                <a:ea typeface="微软雅黑"/>
-                <a:cs typeface="微软雅黑"/>
-              </a:rPr>
-              <a:t> </a:t>
-            </a:r>
-            <a:r>
-              <a:rPr sz="1250" b="0" lang="zh-CN" altLang="en-US">
+              <a:rPr sz="1100" b="0" lang="zh-CN" altLang="en-US">
+                <a:solidFill>
+                  <a:srgbClr val="F5F5F5">
+                    <a:alpha val="70000"/>
+                  </a:srgbClr>
+                </a:solidFill>
+                <a:latin typeface="微软雅黑"/>
+                <a:ea typeface="微软雅黑"/>
+                <a:cs typeface="微软雅黑"/>
+              </a:rPr>
+              <a:t> </a:t>
+            </a:r>
+            <a:r>
+              <a:rPr sz="1100" b="0" lang="zh-CN" altLang="en-US">
                 <a:solidFill>
                   <a:srgbClr val="F5F5F5">
                     <a:alpha val="70000"/>
@@ -16261,20 +16223,20 @@
               <a:t>·</a:t>
             </a:r>
             <a:r>
-              <a:rPr sz="1250" b="0" lang="zh-CN" altLang="en-US">
-                <a:solidFill>
-                  <a:srgbClr val="F5F5F5">
-                    <a:alpha val="70000"/>
-                  </a:srgbClr>
-                </a:solidFill>
-                <a:latin typeface="微软雅黑"/>
-                <a:ea typeface="微软雅黑"/>
-                <a:cs typeface="微软雅黑"/>
-              </a:rPr>
-              <a:t> </a:t>
-            </a:r>
-            <a:r>
-              <a:rPr sz="1250" b="0" lang="zh-CN" altLang="en-US">
+              <a:rPr sz="1100" b="0" lang="zh-CN" altLang="en-US">
+                <a:solidFill>
+                  <a:srgbClr val="F5F5F5">
+                    <a:alpha val="70000"/>
+                  </a:srgbClr>
+                </a:solidFill>
+                <a:latin typeface="微软雅黑"/>
+                <a:ea typeface="微软雅黑"/>
+                <a:cs typeface="微软雅黑"/>
+              </a:rPr>
+              <a:t> </a:t>
+            </a:r>
+            <a:r>
+              <a:rPr sz="1100" b="0" lang="zh-CN" altLang="en-US">
                 <a:solidFill>
                   <a:srgbClr val="F5F5F5">
                     <a:alpha val="70000"/>
@@ -16287,46 +16249,46 @@
               <a:t>小型</a:t>
             </a:r>
             <a:r>
-              <a:rPr sz="1250" b="0" lang="zh-CN" altLang="en-US">
-                <a:solidFill>
-                  <a:srgbClr val="F5F5F5">
-                    <a:alpha val="70000"/>
-                  </a:srgbClr>
-                </a:solidFill>
-                <a:latin typeface="微软雅黑"/>
-                <a:ea typeface="微软雅黑"/>
-                <a:cs typeface="微软雅黑"/>
-              </a:rPr>
-              <a:t> </a:t>
-            </a:r>
-            <a:r>
-              <a:rPr sz="1250" b="0" lang="zh-CN" altLang="en-US">
-                <a:solidFill>
-                  <a:srgbClr val="F5F5F5">
-                    <a:alpha val="70000"/>
-                  </a:srgbClr>
-                </a:solidFill>
-                <a:latin typeface="Consolas"/>
-                <a:ea typeface="微软雅黑"/>
-                <a:cs typeface="微软雅黑"/>
-              </a:rPr>
-              <a:t>13</a:t>
-            </a:r>
-            <a:r>
-              <a:rPr sz="1250" b="0" lang="zh-CN" altLang="en-US">
-                <a:solidFill>
-                  <a:srgbClr val="F5F5F5">
-                    <a:alpha val="70000"/>
-                  </a:srgbClr>
-                </a:solidFill>
-                <a:latin typeface="微软雅黑"/>
-                <a:ea typeface="微软雅黑"/>
-                <a:cs typeface="微软雅黑"/>
-              </a:rPr>
-              <a:t> </a:t>
-            </a:r>
-            <a:r>
-              <a:rPr sz="1250" b="0" lang="zh-CN" altLang="en-US">
+              <a:rPr sz="1100" b="0" lang="zh-CN" altLang="en-US">
+                <a:solidFill>
+                  <a:srgbClr val="F5F5F5">
+                    <a:alpha val="70000"/>
+                  </a:srgbClr>
+                </a:solidFill>
+                <a:latin typeface="微软雅黑"/>
+                <a:ea typeface="微软雅黑"/>
+                <a:cs typeface="微软雅黑"/>
+              </a:rPr>
+              <a:t> </a:t>
+            </a:r>
+            <a:r>
+              <a:rPr sz="1100" b="0" lang="zh-CN" altLang="en-US">
+                <a:solidFill>
+                  <a:srgbClr val="F5F5F5">
+                    <a:alpha val="70000"/>
+                  </a:srgbClr>
+                </a:solidFill>
+                <a:latin typeface="Consolas"/>
+                <a:ea typeface="微软雅黑"/>
+                <a:cs typeface="微软雅黑"/>
+              </a:rPr>
+              <a:t>10</a:t>
+            </a:r>
+            <a:r>
+              <a:rPr sz="1100" b="0" lang="zh-CN" altLang="en-US">
+                <a:solidFill>
+                  <a:srgbClr val="F5F5F5">
+                    <a:alpha val="70000"/>
+                  </a:srgbClr>
+                </a:solidFill>
+                <a:latin typeface="微软雅黑"/>
+                <a:ea typeface="微软雅黑"/>
+                <a:cs typeface="微软雅黑"/>
+              </a:rPr>
+              <a:t> </a:t>
+            </a:r>
+            <a:r>
+              <a:rPr sz="1100" b="0" lang="zh-CN" altLang="en-US">
                 <a:solidFill>
                   <a:srgbClr val="F5F5F5">
                     <a:alpha val="70000"/>
@@ -16339,20 +16301,20 @@
               <a:t>·</a:t>
             </a:r>
             <a:r>
-              <a:rPr sz="1250" b="0" lang="zh-CN" altLang="en-US">
-                <a:solidFill>
-                  <a:srgbClr val="F5F5F5">
-                    <a:alpha val="70000"/>
-                  </a:srgbClr>
-                </a:solidFill>
-                <a:latin typeface="微软雅黑"/>
-                <a:ea typeface="微软雅黑"/>
-                <a:cs typeface="微软雅黑"/>
-              </a:rPr>
-              <a:t> </a:t>
-            </a:r>
-            <a:r>
-              <a:rPr sz="1250" b="0" lang="zh-CN" altLang="en-US">
+              <a:rPr sz="1100" b="0" lang="zh-CN" altLang="en-US">
+                <a:solidFill>
+                  <a:srgbClr val="F5F5F5">
+                    <a:alpha val="70000"/>
+                  </a:srgbClr>
+                </a:solidFill>
+                <a:latin typeface="微软雅黑"/>
+                <a:ea typeface="微软雅黑"/>
+                <a:cs typeface="微软雅黑"/>
+              </a:rPr>
+              <a:t> </a:t>
+            </a:r>
+            <a:r>
+              <a:rPr sz="1100" b="0" lang="zh-CN" altLang="en-US">
                 <a:solidFill>
                   <a:srgbClr val="F5F5F5">
                     <a:alpha val="70000"/>
@@ -16365,20 +16327,20 @@
               <a:t>中型</a:t>
             </a:r>
             <a:r>
-              <a:rPr sz="1250" b="0" lang="zh-CN" altLang="en-US">
-                <a:solidFill>
-                  <a:srgbClr val="F5F5F5">
-                    <a:alpha val="70000"/>
-                  </a:srgbClr>
-                </a:solidFill>
-                <a:latin typeface="微软雅黑"/>
-                <a:ea typeface="微软雅黑"/>
-                <a:cs typeface="微软雅黑"/>
-              </a:rPr>
-              <a:t> </a:t>
-            </a:r>
-            <a:r>
-              <a:rPr sz="1250" b="0" lang="zh-CN" altLang="en-US">
+              <a:rPr sz="1100" b="0" lang="zh-CN" altLang="en-US">
+                <a:solidFill>
+                  <a:srgbClr val="F5F5F5">
+                    <a:alpha val="70000"/>
+                  </a:srgbClr>
+                </a:solidFill>
+                <a:latin typeface="微软雅黑"/>
+                <a:ea typeface="微软雅黑"/>
+                <a:cs typeface="微软雅黑"/>
+              </a:rPr>
+              <a:t> </a:t>
+            </a:r>
+            <a:r>
+              <a:rPr sz="1100" b="0" lang="zh-CN" altLang="en-US">
                 <a:solidFill>
                   <a:srgbClr val="F5F5F5">
                     <a:alpha val="70000"/>
@@ -16391,20 +16353,20 @@
               <a:t>7</a:t>
             </a:r>
             <a:r>
-              <a:rPr sz="1250" b="0" lang="zh-CN" altLang="en-US">
-                <a:solidFill>
-                  <a:srgbClr val="F5F5F5">
-                    <a:alpha val="70000"/>
-                  </a:srgbClr>
-                </a:solidFill>
-                <a:latin typeface="微软雅黑"/>
-                <a:ea typeface="微软雅黑"/>
-                <a:cs typeface="微软雅黑"/>
-              </a:rPr>
-              <a:t> </a:t>
-            </a:r>
-            <a:r>
-              <a:rPr sz="1250" b="0" lang="zh-CN" altLang="en-US">
+              <a:rPr sz="1100" b="0" lang="zh-CN" altLang="en-US">
+                <a:solidFill>
+                  <a:srgbClr val="F5F5F5">
+                    <a:alpha val="70000"/>
+                  </a:srgbClr>
+                </a:solidFill>
+                <a:latin typeface="微软雅黑"/>
+                <a:ea typeface="微软雅黑"/>
+                <a:cs typeface="微软雅黑"/>
+              </a:rPr>
+              <a:t> </a:t>
+            </a:r>
+            <a:r>
+              <a:rPr sz="1100" b="0" lang="zh-CN" altLang="en-US">
                 <a:solidFill>
                   <a:srgbClr val="F5F5F5">
                     <a:alpha val="70000"/>
@@ -16417,20 +16379,20 @@
               <a:t>·</a:t>
             </a:r>
             <a:r>
-              <a:rPr sz="1250" b="0" lang="zh-CN" altLang="en-US">
-                <a:solidFill>
-                  <a:srgbClr val="F5F5F5">
-                    <a:alpha val="70000"/>
-                  </a:srgbClr>
-                </a:solidFill>
-                <a:latin typeface="微软雅黑"/>
-                <a:ea typeface="微软雅黑"/>
-                <a:cs typeface="微软雅黑"/>
-              </a:rPr>
-              <a:t> </a:t>
-            </a:r>
-            <a:r>
-              <a:rPr sz="1250" b="0" lang="zh-CN" altLang="en-US">
+              <a:rPr sz="1100" b="0" lang="zh-CN" altLang="en-US">
+                <a:solidFill>
+                  <a:srgbClr val="F5F5F5">
+                    <a:alpha val="70000"/>
+                  </a:srgbClr>
+                </a:solidFill>
+                <a:latin typeface="微软雅黑"/>
+                <a:ea typeface="微软雅黑"/>
+                <a:cs typeface="微软雅黑"/>
+              </a:rPr>
+              <a:t> </a:t>
+            </a:r>
+            <a:r>
+              <a:rPr sz="1100" b="0" lang="zh-CN" altLang="en-US">
                 <a:solidFill>
                   <a:srgbClr val="F5F5F5">
                     <a:alpha val="70000"/>
@@ -16443,20 +16405,20 @@
               <a:t>大型</a:t>
             </a:r>
             <a:r>
-              <a:rPr sz="1250" b="0" lang="zh-CN" altLang="en-US">
-                <a:solidFill>
-                  <a:srgbClr val="F5F5F5">
-                    <a:alpha val="70000"/>
-                  </a:srgbClr>
-                </a:solidFill>
-                <a:latin typeface="微软雅黑"/>
-                <a:ea typeface="微软雅黑"/>
-                <a:cs typeface="微软雅黑"/>
-              </a:rPr>
-              <a:t> </a:t>
-            </a:r>
-            <a:r>
-              <a:rPr sz="1250" b="0" lang="zh-CN" altLang="en-US">
+              <a:rPr sz="1100" b="0" lang="zh-CN" altLang="en-US">
+                <a:solidFill>
+                  <a:srgbClr val="F5F5F5">
+                    <a:alpha val="70000"/>
+                  </a:srgbClr>
+                </a:solidFill>
+                <a:latin typeface="微软雅黑"/>
+                <a:ea typeface="微软雅黑"/>
+                <a:cs typeface="微软雅黑"/>
+              </a:rPr>
+              <a:t> </a:t>
+            </a:r>
+            <a:r>
+              <a:rPr sz="1100" b="0" lang="zh-CN" altLang="en-US">
                 <a:solidFill>
                   <a:srgbClr val="F5F5F5">
                     <a:alpha val="70000"/>
@@ -16467,6 +16429,130 @@
                 <a:cs typeface="微软雅黑"/>
               </a:rPr>
               <a:t>7</a:t>
+            </a:r>
+          </a:p>
+          <a:p>
+            <a:pPr algn="l">
+              <a:lnSpc>
+                <a:spcPts val="1705"/>
+              </a:lnSpc>
+            </a:pPr>
+            <a:r>
+              <a:rPr sz="1100" b="0" lang="zh-CN" altLang="en-US">
+                <a:solidFill>
+                  <a:srgbClr val="F5F5F5">
+                    <a:alpha val="70000"/>
+                  </a:srgbClr>
+                </a:solidFill>
+                <a:latin typeface="Consolas"/>
+                <a:ea typeface="微软雅黑"/>
+                <a:cs typeface="微软雅黑"/>
+              </a:rPr>
+              <a:t>（金锦冠</a:t>
+            </a:r>
+            <a:r>
+              <a:rPr sz="1100" b="0" lang="zh-CN" altLang="en-US">
+                <a:solidFill>
+                  <a:srgbClr val="F5F5F5">
+                    <a:alpha val="70000"/>
+                  </a:srgbClr>
+                </a:solidFill>
+                <a:latin typeface="微软雅黑"/>
+                <a:ea typeface="微软雅黑"/>
+                <a:cs typeface="微软雅黑"/>
+              </a:rPr>
+              <a:t> </a:t>
+            </a:r>
+            <a:r>
+              <a:rPr sz="1100" b="0" lang="zh-CN" altLang="en-US">
+                <a:solidFill>
+                  <a:srgbClr val="F5F5F5">
+                    <a:alpha val="70000"/>
+                  </a:srgbClr>
+                </a:solidFill>
+                <a:latin typeface="Consolas"/>
+                <a:ea typeface="微软雅黑"/>
+                <a:cs typeface="微软雅黑"/>
+              </a:rPr>
+              <a:t>4</a:t>
+            </a:r>
+            <a:r>
+              <a:rPr sz="1100" b="0" lang="zh-CN" altLang="en-US">
+                <a:solidFill>
+                  <a:srgbClr val="F5F5F5">
+                    <a:alpha val="70000"/>
+                  </a:srgbClr>
+                </a:solidFill>
+                <a:latin typeface="微软雅黑"/>
+                <a:ea typeface="微软雅黑"/>
+                <a:cs typeface="微软雅黑"/>
+              </a:rPr>
+              <a:t> </a:t>
+            </a:r>
+            <a:r>
+              <a:rPr sz="1100" b="0" lang="zh-CN" altLang="en-US">
+                <a:solidFill>
+                  <a:srgbClr val="F5F5F5">
+                    <a:alpha val="70000"/>
+                  </a:srgbClr>
+                </a:solidFill>
+                <a:latin typeface="Consolas"/>
+                <a:ea typeface="微软雅黑"/>
+                <a:cs typeface="微软雅黑"/>
+              </a:rPr>
+              <a:t>段算</a:t>
+            </a:r>
+            <a:r>
+              <a:rPr sz="1100" b="0" lang="zh-CN" altLang="en-US">
+                <a:solidFill>
+                  <a:srgbClr val="F5F5F5">
+                    <a:alpha val="70000"/>
+                  </a:srgbClr>
+                </a:solidFill>
+                <a:latin typeface="微软雅黑"/>
+                <a:ea typeface="微软雅黑"/>
+                <a:cs typeface="微软雅黑"/>
+              </a:rPr>
+              <a:t> </a:t>
+            </a:r>
+            <a:r>
+              <a:rPr sz="1100" b="0" lang="zh-CN" altLang="en-US">
+                <a:solidFill>
+                  <a:srgbClr val="F5F5F5">
+                    <a:alpha val="70000"/>
+                  </a:srgbClr>
+                </a:solidFill>
+                <a:latin typeface="Consolas"/>
+                <a:ea typeface="微软雅黑"/>
+                <a:cs typeface="微软雅黑"/>
+              </a:rPr>
+              <a:t>1</a:t>
+            </a:r>
+            <a:r>
+              <a:rPr sz="1100" b="0" lang="zh-CN" altLang="en-US">
+                <a:solidFill>
+                  <a:srgbClr val="F5F5F5">
+                    <a:alpha val="70000"/>
+                  </a:srgbClr>
+                </a:solidFill>
+                <a:latin typeface="微软雅黑"/>
+                <a:ea typeface="微软雅黑"/>
+                <a:cs typeface="微软雅黑"/>
+              </a:rPr>
+              <a:t> </a:t>
+            </a:r>
+            <a:r>
+              <a:rPr sz="1100" b="0" lang="zh-CN" altLang="en-US">
+                <a:solidFill>
+                  <a:srgbClr val="F5F5F5">
+                    <a:alpha val="70000"/>
+                  </a:srgbClr>
+                </a:solidFill>
+                <a:latin typeface="Consolas"/>
+                <a:ea typeface="微软雅黑"/>
+                <a:cs typeface="微软雅黑"/>
+              </a:rPr>
+              <a:t>个）</a:t>
             </a:r>
           </a:p>
         </p:txBody>
@@ -16840,7 +16926,85 @@
                 <a:ea typeface="微软雅黑"/>
                 <a:cs typeface="微软雅黑"/>
               </a:rPr>
-              <a:t>扇面（UE）</a:t>
+              <a:t>整场扇面</a:t>
+            </a:r>
+            <a:r>
+              <a:rPr sz="1100" b="0" lang="zh-CN" altLang="en-US">
+                <a:solidFill>
+                  <a:srgbClr val="F5F5F5">
+                    <a:alpha val="70000"/>
+                  </a:srgbClr>
+                </a:solidFill>
+                <a:latin typeface="微软雅黑"/>
+                <a:ea typeface="微软雅黑"/>
+                <a:cs typeface="微软雅黑"/>
+              </a:rPr>
+              <a:t> </a:t>
+            </a:r>
+            <a:r>
+              <a:rPr sz="1100" b="0" lang="zh-CN" altLang="en-US">
+                <a:solidFill>
+                  <a:srgbClr val="F5F5F5">
+                    <a:alpha val="70000"/>
+                  </a:srgbClr>
+                </a:solidFill>
+                <a:latin typeface="Consolas"/>
+                <a:ea typeface="微软雅黑"/>
+                <a:cs typeface="微软雅黑"/>
+              </a:rPr>
+              <a:t>·</a:t>
+            </a:r>
+            <a:r>
+              <a:rPr sz="1100" b="0" lang="zh-CN" altLang="en-US">
+                <a:solidFill>
+                  <a:srgbClr val="F5F5F5">
+                    <a:alpha val="70000"/>
+                  </a:srgbClr>
+                </a:solidFill>
+                <a:latin typeface="微软雅黑"/>
+                <a:ea typeface="微软雅黑"/>
+                <a:cs typeface="微软雅黑"/>
+              </a:rPr>
+              <a:t> </a:t>
+            </a:r>
+            <a:r>
+              <a:rPr sz="1100" b="0" lang="zh-CN" altLang="en-US">
+                <a:solidFill>
+                  <a:srgbClr val="F5F5F5">
+                    <a:alpha val="70000"/>
+                  </a:srgbClr>
+                </a:solidFill>
+                <a:latin typeface="Consolas"/>
+                <a:ea typeface="微软雅黑"/>
+                <a:cs typeface="微软雅黑"/>
+              </a:rPr>
+              <a:t>UE</a:t>
+            </a:r>
+            <a:r>
+              <a:rPr sz="1100" b="0" lang="zh-CN" altLang="en-US">
+                <a:solidFill>
+                  <a:srgbClr val="F5F5F5">
+                    <a:alpha val="70000"/>
+                  </a:srgbClr>
+                </a:solidFill>
+                <a:latin typeface="微软雅黑"/>
+                <a:ea typeface="微软雅黑"/>
+                <a:cs typeface="微软雅黑"/>
+              </a:rPr>
+              <a:t> </a:t>
+            </a:r>
+            <a:r>
+              <a:rPr sz="1100" b="0" lang="zh-CN" altLang="en-US">
+                <a:solidFill>
+                  <a:srgbClr val="F5F5F5">
+                    <a:alpha val="70000"/>
+                  </a:srgbClr>
+                </a:solidFill>
+                <a:latin typeface="Consolas"/>
+                <a:ea typeface="微软雅黑"/>
+                <a:cs typeface="微软雅黑"/>
+              </a:rPr>
+              <a:t>实机</a:t>
             </a:r>
           </a:p>
         </p:txBody>
@@ -16907,7 +17071,85 @@
                 <a:ea typeface="微软雅黑"/>
                 <a:cs typeface="微软雅黑"/>
               </a:rPr>
-              <a:t>彩色组合（UE）</a:t>
+              <a:t>彩色组合</a:t>
+            </a:r>
+            <a:r>
+              <a:rPr sz="1100" b="0" lang="zh-CN" altLang="en-US">
+                <a:solidFill>
+                  <a:srgbClr val="F5F5F5">
+                    <a:alpha val="70000"/>
+                  </a:srgbClr>
+                </a:solidFill>
+                <a:latin typeface="微软雅黑"/>
+                <a:ea typeface="微软雅黑"/>
+                <a:cs typeface="微软雅黑"/>
+              </a:rPr>
+              <a:t> </a:t>
+            </a:r>
+            <a:r>
+              <a:rPr sz="1100" b="0" lang="zh-CN" altLang="en-US">
+                <a:solidFill>
+                  <a:srgbClr val="F5F5F5">
+                    <a:alpha val="70000"/>
+                  </a:srgbClr>
+                </a:solidFill>
+                <a:latin typeface="Consolas"/>
+                <a:ea typeface="微软雅黑"/>
+                <a:cs typeface="微软雅黑"/>
+              </a:rPr>
+              <a:t>·</a:t>
+            </a:r>
+            <a:r>
+              <a:rPr sz="1100" b="0" lang="zh-CN" altLang="en-US">
+                <a:solidFill>
+                  <a:srgbClr val="F5F5F5">
+                    <a:alpha val="70000"/>
+                  </a:srgbClr>
+                </a:solidFill>
+                <a:latin typeface="微软雅黑"/>
+                <a:ea typeface="微软雅黑"/>
+                <a:cs typeface="微软雅黑"/>
+              </a:rPr>
+              <a:t> </a:t>
+            </a:r>
+            <a:r>
+              <a:rPr sz="1100" b="0" lang="zh-CN" altLang="en-US">
+                <a:solidFill>
+                  <a:srgbClr val="F5F5F5">
+                    <a:alpha val="70000"/>
+                  </a:srgbClr>
+                </a:solidFill>
+                <a:latin typeface="Consolas"/>
+                <a:ea typeface="微软雅黑"/>
+                <a:cs typeface="微软雅黑"/>
+              </a:rPr>
+              <a:t>UE</a:t>
+            </a:r>
+            <a:r>
+              <a:rPr sz="1100" b="0" lang="zh-CN" altLang="en-US">
+                <a:solidFill>
+                  <a:srgbClr val="F5F5F5">
+                    <a:alpha val="70000"/>
+                  </a:srgbClr>
+                </a:solidFill>
+                <a:latin typeface="微软雅黑"/>
+                <a:ea typeface="微软雅黑"/>
+                <a:cs typeface="微软雅黑"/>
+              </a:rPr>
+              <a:t> </a:t>
+            </a:r>
+            <a:r>
+              <a:rPr sz="1100" b="0" lang="zh-CN" altLang="en-US">
+                <a:solidFill>
+                  <a:srgbClr val="F5F5F5">
+                    <a:alpha val="70000"/>
+                  </a:srgbClr>
+                </a:solidFill>
+                <a:latin typeface="Consolas"/>
+                <a:ea typeface="微软雅黑"/>
+                <a:cs typeface="微软雅黑"/>
+              </a:rPr>
+              <a:t>实机</a:t>
             </a:r>
           </a:p>
         </p:txBody>
@@ -16976,6 +17218,58 @@
               </a:rPr>
               <a:t>金芒爆裂菊</a:t>
             </a:r>
+            <a:r>
+              <a:rPr sz="1100" b="0" lang="zh-CN" altLang="en-US">
+                <a:solidFill>
+                  <a:srgbClr val="F5F5F5">
+                    <a:alpha val="70000"/>
+                  </a:srgbClr>
+                </a:solidFill>
+                <a:latin typeface="微软雅黑"/>
+                <a:ea typeface="微软雅黑"/>
+                <a:cs typeface="微软雅黑"/>
+              </a:rPr>
+              <a:t> </a:t>
+            </a:r>
+            <a:r>
+              <a:rPr sz="1100" b="0" lang="zh-CN" altLang="en-US">
+                <a:solidFill>
+                  <a:srgbClr val="F5F5F5">
+                    <a:alpha val="70000"/>
+                  </a:srgbClr>
+                </a:solidFill>
+                <a:latin typeface="Consolas"/>
+                <a:ea typeface="微软雅黑"/>
+                <a:cs typeface="微软雅黑"/>
+              </a:rPr>
+              <a:t>·</a:t>
+            </a:r>
+            <a:r>
+              <a:rPr sz="1100" b="0" lang="zh-CN" altLang="en-US">
+                <a:solidFill>
+                  <a:srgbClr val="F5F5F5">
+                    <a:alpha val="70000"/>
+                  </a:srgbClr>
+                </a:solidFill>
+                <a:latin typeface="微软雅黑"/>
+                <a:ea typeface="微软雅黑"/>
+                <a:cs typeface="微软雅黑"/>
+              </a:rPr>
+              <a:t> </a:t>
+            </a:r>
+            <a:r>
+              <a:rPr sz="1100" b="0" lang="zh-CN" altLang="en-US">
+                <a:solidFill>
+                  <a:srgbClr val="F5F5F5">
+                    <a:alpha val="70000"/>
+                  </a:srgbClr>
+                </a:solidFill>
+                <a:latin typeface="Consolas"/>
+                <a:ea typeface="微软雅黑"/>
+                <a:cs typeface="微软雅黑"/>
+              </a:rPr>
+              <a:t>引擎回放</a:t>
+            </a:r>
           </a:p>
         </p:txBody>
       </p:sp>
@@ -17043,147 +17337,47 @@
               </a:rPr>
               <a:t>小青柠</a:t>
             </a:r>
-          </a:p>
-        </p:txBody>
-      </p:sp>
-      <p:sp>
-        <p:nvSpPr>
-          <p:cNvPr id="22" name="Rectangle 21"/>
-          <p:cNvSpPr/>
-          <p:nvPr/>
-        </p:nvSpPr>
-        <p:spPr>
-          <a:xfrm>
-            <a:off x="9999980" y="2806700"/>
-            <a:ext cx="1506220" cy="254000"/>
-          </a:xfrm>
-          <a:prstGeom prst="rect">
-            <a:avLst/>
-          </a:prstGeom>
-          <a:solidFill>
-            <a:srgbClr val="0A0A0A">
-              <a:alpha val="72000"/>
-            </a:srgbClr>
-          </a:solidFill>
-          <a:ln>
-            <a:noFill/>
-          </a:ln>
-        </p:spPr>
-        <p:txBody>
-          <a:bodyPr rtlCol="0" anchor="ctr"/>
-          <a:lstStyle/>
-          <a:p>
-            <a:pPr algn="ctr"/>
-          </a:p>
-        </p:txBody>
-      </p:sp>
-      <p:sp>
-        <p:nvSpPr>
-          <p:cNvPr id="23" name="source_tag"/>
-          <p:cNvSpPr txBox="1"/>
-          <p:nvPr/>
-        </p:nvSpPr>
-        <p:spPr>
-          <a:xfrm>
-            <a:off x="9999980" y="2806700"/>
-            <a:ext cx="1506220" cy="254000"/>
-          </a:xfrm>
-          <a:prstGeom prst="rect">
-            <a:avLst/>
-          </a:prstGeom>
-          <a:noFill/>
-        </p:spPr>
-        <p:txBody>
-          <a:bodyPr wrap="square" lIns="0" rIns="0" tIns="0" bIns="0" anchor="ctr">
-            <a:noAutofit/>
-          </a:bodyPr>
-          <a:lstStyle/>
-          <a:p>
-            <a:pPr algn="ctr">
-              <a:lnSpc>
-                <a:spcPts val="1439"/>
-              </a:lnSpc>
-            </a:pPr>
-            <a:r>
-              <a:rPr sz="1200" b="0" lang="zh-CN" altLang="en-US">
-                <a:solidFill>
-                  <a:srgbClr val="F5F5F5">
-                    <a:alpha val="70000"/>
-                  </a:srgbClr>
-                </a:solidFill>
-                <a:latin typeface="Consolas"/>
-                <a:ea typeface="微软雅黑"/>
-                <a:cs typeface="微软雅黑"/>
-              </a:rPr>
-              <a:t>UE</a:t>
-            </a:r>
-            <a:r>
-              <a:rPr sz="1200" b="0" lang="zh-CN" altLang="en-US">
-                <a:solidFill>
-                  <a:srgbClr val="F5F5F5">
-                    <a:alpha val="70000"/>
-                  </a:srgbClr>
-                </a:solidFill>
-                <a:latin typeface="微软雅黑"/>
-                <a:ea typeface="微软雅黑"/>
-                <a:cs typeface="微软雅黑"/>
-              </a:rPr>
-              <a:t> </a:t>
-            </a:r>
-            <a:r>
-              <a:rPr sz="1200" b="0" lang="zh-CN" altLang="en-US">
-                <a:solidFill>
-                  <a:srgbClr val="F5F5F5">
-                    <a:alpha val="70000"/>
-                  </a:srgbClr>
-                </a:solidFill>
-                <a:latin typeface="Consolas"/>
-                <a:ea typeface="微软雅黑"/>
-                <a:cs typeface="微软雅黑"/>
-              </a:rPr>
-              <a:t>实机</a:t>
-            </a:r>
-            <a:r>
-              <a:rPr sz="1200" b="0" lang="zh-CN" altLang="en-US">
-                <a:solidFill>
-                  <a:srgbClr val="F5F5F5">
-                    <a:alpha val="70000"/>
-                  </a:srgbClr>
-                </a:solidFill>
-                <a:latin typeface="微软雅黑"/>
-                <a:ea typeface="微软雅黑"/>
-                <a:cs typeface="微软雅黑"/>
-              </a:rPr>
-              <a:t> </a:t>
-            </a:r>
-            <a:r>
-              <a:rPr sz="1200" b="0" lang="zh-CN" altLang="en-US">
-                <a:solidFill>
-                  <a:srgbClr val="F5F5F5">
-                    <a:alpha val="70000"/>
-                  </a:srgbClr>
-                </a:solidFill>
-                <a:latin typeface="Consolas"/>
-                <a:ea typeface="微软雅黑"/>
-                <a:cs typeface="微软雅黑"/>
-              </a:rPr>
-              <a:t>/</a:t>
-            </a:r>
-            <a:r>
-              <a:rPr sz="1200" b="0" lang="zh-CN" altLang="en-US">
-                <a:solidFill>
-                  <a:srgbClr val="F5F5F5">
-                    <a:alpha val="70000"/>
-                  </a:srgbClr>
-                </a:solidFill>
-                <a:latin typeface="微软雅黑"/>
-                <a:ea typeface="微软雅黑"/>
-                <a:cs typeface="微软雅黑"/>
-              </a:rPr>
-              <a:t> </a:t>
-            </a:r>
-            <a:r>
-              <a:rPr sz="1200" b="0" lang="zh-CN" altLang="en-US">
+            <a:r>
+              <a:rPr sz="1100" b="0" lang="zh-CN" altLang="en-US">
+                <a:solidFill>
+                  <a:srgbClr val="F5F5F5">
+                    <a:alpha val="70000"/>
+                  </a:srgbClr>
+                </a:solidFill>
+                <a:latin typeface="微软雅黑"/>
+                <a:ea typeface="微软雅黑"/>
+                <a:cs typeface="微软雅黑"/>
+              </a:rPr>
+              <a:t> </a:t>
+            </a:r>
+            <a:r>
+              <a:rPr sz="1100" b="0" lang="zh-CN" altLang="en-US">
+                <a:solidFill>
+                  <a:srgbClr val="F5F5F5">
+                    <a:alpha val="70000"/>
+                  </a:srgbClr>
+                </a:solidFill>
+                <a:latin typeface="Consolas"/>
+                <a:ea typeface="微软雅黑"/>
+                <a:cs typeface="微软雅黑"/>
+              </a:rPr>
+              <a:t>·</a:t>
+            </a:r>
+            <a:r>
+              <a:rPr sz="1100" b="0" lang="zh-CN" altLang="en-US">
+                <a:solidFill>
+                  <a:srgbClr val="F5F5F5">
+                    <a:alpha val="70000"/>
+                  </a:srgbClr>
+                </a:solidFill>
+                <a:latin typeface="微软雅黑"/>
+                <a:ea typeface="微软雅黑"/>
+                <a:cs typeface="微软雅黑"/>
+              </a:rPr>
+              <a:t> </a:t>
+            </a:r>
+            <a:r>
+              <a:rPr sz="1100" b="0" lang="zh-CN" altLang="en-US">
                 <a:solidFill>
                   <a:srgbClr val="F5F5F5">
                     <a:alpha val="70000"/>
@@ -17200,7 +17394,7 @@
       </p:sp>
       <p:sp>
         <p:nvSpPr>
-          <p:cNvPr id="24" name="TextBox 23"/>
+          <p:cNvPr id="22" name="TextBox 21"/>
           <p:cNvSpPr txBox="1"/>
           <p:nvPr/>
         </p:nvSpPr>
@@ -17243,7 +17437,7 @@
       </p:sp>
       <p:sp>
         <p:nvSpPr>
-          <p:cNvPr id="25" name="TextBox 24"/>
+          <p:cNvPr id="23" name="TextBox 22"/>
           <p:cNvSpPr txBox="1"/>
           <p:nvPr/>
         </p:nvSpPr>
@@ -17286,7 +17480,7 @@
       </p:sp>
       <p:sp>
         <p:nvSpPr>
-          <p:cNvPr id="26" name="TextBox 25"/>
+          <p:cNvPr id="24" name="TextBox 23"/>
           <p:cNvSpPr txBox="1"/>
           <p:nvPr/>
         </p:nvSpPr>
@@ -17329,7 +17523,7 @@
       </p:sp>
       <p:sp>
         <p:nvSpPr>
-          <p:cNvPr id="27" name="Rectangle 26"/>
+          <p:cNvPr id="25" name="Rectangle 24"/>
           <p:cNvSpPr/>
           <p:nvPr/>
         </p:nvSpPr>
@@ -17360,7 +17554,7 @@
       </p:sp>
       <p:sp>
         <p:nvSpPr>
-          <p:cNvPr id="28" name="TextBox 27"/>
+          <p:cNvPr id="26" name="TextBox 25"/>
           <p:cNvSpPr txBox="1"/>
           <p:nvPr/>
         </p:nvSpPr>
@@ -17401,7 +17595,7 @@
       </p:sp>
       <p:sp>
         <p:nvSpPr>
-          <p:cNvPr id="29" name="TextBox 28"/>
+          <p:cNvPr id="27" name="TextBox 26"/>
           <p:cNvSpPr txBox="1"/>
           <p:nvPr/>
         </p:nvSpPr>
@@ -17470,7 +17664,7 @@
       </p:sp>
       <p:sp>
         <p:nvSpPr>
-          <p:cNvPr id="30" name="TextBox 29"/>
+          <p:cNvPr id="28" name="TextBox 27"/>
           <p:cNvSpPr txBox="1"/>
           <p:nvPr/>
         </p:nvSpPr>
@@ -17539,7 +17733,7 @@
       </p:sp>
       <p:sp>
         <p:nvSpPr>
-          <p:cNvPr id="31" name="Rectangle 30"/>
+          <p:cNvPr id="29" name="Rectangle 28"/>
           <p:cNvSpPr/>
           <p:nvPr/>
         </p:nvSpPr>
@@ -17570,7 +17764,7 @@
       </p:sp>
       <p:sp>
         <p:nvSpPr>
-          <p:cNvPr id="32" name="TextBox 31"/>
+          <p:cNvPr id="30" name="TextBox 29"/>
           <p:cNvSpPr txBox="1"/>
           <p:nvPr/>
         </p:nvSpPr>
@@ -17611,7 +17805,7 @@
       </p:sp>
       <p:sp>
         <p:nvSpPr>
-          <p:cNvPr id="33" name="TextBox 32"/>
+          <p:cNvPr id="31" name="TextBox 30"/>
           <p:cNvSpPr txBox="1"/>
           <p:nvPr/>
         </p:nvSpPr>
@@ -17680,7 +17874,7 @@
       </p:sp>
       <p:sp>
         <p:nvSpPr>
-          <p:cNvPr id="34" name="TextBox 33"/>
+          <p:cNvPr id="32" name="TextBox 31"/>
           <p:cNvSpPr txBox="1"/>
           <p:nvPr/>
         </p:nvSpPr>
@@ -17749,7 +17943,7 @@
       </p:sp>
       <p:sp>
         <p:nvSpPr>
-          <p:cNvPr id="35" name="Rectangle 34"/>
+          <p:cNvPr id="33" name="Rectangle 32"/>
           <p:cNvSpPr/>
           <p:nvPr/>
         </p:nvSpPr>
@@ -17780,7 +17974,7 @@
       </p:sp>
       <p:sp>
         <p:nvSpPr>
-          <p:cNvPr id="36" name="TextBox 35"/>
+          <p:cNvPr id="34" name="TextBox 33"/>
           <p:cNvSpPr txBox="1"/>
           <p:nvPr/>
         </p:nvSpPr>
@@ -17821,7 +18015,7 @@
       </p:sp>
       <p:sp>
         <p:nvSpPr>
-          <p:cNvPr id="37" name="TextBox 36"/>
+          <p:cNvPr id="35" name="TextBox 34"/>
           <p:cNvSpPr txBox="1"/>
           <p:nvPr/>
         </p:nvSpPr>
@@ -17890,7 +18084,7 @@
       </p:sp>
       <p:sp>
         <p:nvSpPr>
-          <p:cNvPr id="38" name="TextBox 37"/>
+          <p:cNvPr id="36" name="TextBox 35"/>
           <p:cNvSpPr txBox="1"/>
           <p:nvPr/>
         </p:nvSpPr>
@@ -17959,7 +18153,7 @@
       </p:sp>
       <p:sp>
         <p:nvSpPr>
-          <p:cNvPr id="39" name="Rectangle 38"/>
+          <p:cNvPr id="37" name="Rectangle 36"/>
           <p:cNvSpPr/>
           <p:nvPr/>
         </p:nvSpPr>
@@ -17990,7 +18184,7 @@
       </p:sp>
       <p:sp>
         <p:nvSpPr>
-          <p:cNvPr id="40" name="TextBox 39"/>
+          <p:cNvPr id="38" name="TextBox 37"/>
           <p:cNvSpPr txBox="1"/>
           <p:nvPr/>
         </p:nvSpPr>
@@ -18031,7 +18225,7 @@
       </p:sp>
       <p:sp>
         <p:nvSpPr>
-          <p:cNvPr id="41" name="TextBox 40"/>
+          <p:cNvPr id="39" name="TextBox 38"/>
           <p:cNvSpPr txBox="1"/>
           <p:nvPr/>
         </p:nvSpPr>
@@ -18178,7 +18372,7 @@
       </p:sp>
       <p:sp>
         <p:nvSpPr>
-          <p:cNvPr id="42" name="TextBox 41"/>
+          <p:cNvPr id="40" name="TextBox 39"/>
           <p:cNvSpPr txBox="1"/>
           <p:nvPr/>
         </p:nvSpPr>
@@ -18221,7 +18415,7 @@
       </p:sp>
       <p:sp>
         <p:nvSpPr>
-          <p:cNvPr id="43" name="Rectangle 42"/>
+          <p:cNvPr id="41" name="Rectangle 40"/>
           <p:cNvSpPr/>
           <p:nvPr/>
         </p:nvSpPr>
@@ -18252,7 +18446,7 @@
       </p:sp>
       <p:sp>
         <p:nvSpPr>
-          <p:cNvPr id="44" name="TextBox 43"/>
+          <p:cNvPr id="42" name="TextBox 41"/>
           <p:cNvSpPr txBox="1"/>
           <p:nvPr/>
         </p:nvSpPr>
@@ -18293,7 +18487,7 @@
       </p:sp>
       <p:sp>
         <p:nvSpPr>
-          <p:cNvPr id="45" name="TextBox 44"/>
+          <p:cNvPr id="43" name="TextBox 42"/>
           <p:cNvSpPr txBox="1"/>
           <p:nvPr/>
         </p:nvSpPr>
@@ -18362,7 +18556,7 @@
       </p:sp>
       <p:sp>
         <p:nvSpPr>
-          <p:cNvPr id="46" name="TextBox 45"/>
+          <p:cNvPr id="44" name="TextBox 43"/>
           <p:cNvSpPr txBox="1"/>
           <p:nvPr/>
         </p:nvSpPr>
@@ -18431,7 +18625,7 @@
       </p:sp>
       <p:sp>
         <p:nvSpPr>
-          <p:cNvPr id="47" name="Rectangle 46"/>
+          <p:cNvPr id="45" name="Rectangle 44"/>
           <p:cNvSpPr/>
           <p:nvPr/>
         </p:nvSpPr>
@@ -18462,7 +18656,7 @@
       </p:sp>
       <p:sp>
         <p:nvSpPr>
-          <p:cNvPr id="48" name="TextBox 47"/>
+          <p:cNvPr id="46" name="TextBox 45"/>
           <p:cNvSpPr txBox="1"/>
           <p:nvPr/>
         </p:nvSpPr>
@@ -18503,7 +18697,7 @@
       </p:sp>
       <p:sp>
         <p:nvSpPr>
-          <p:cNvPr id="49" name="TextBox 48"/>
+          <p:cNvPr id="47" name="TextBox 46"/>
           <p:cNvSpPr txBox="1"/>
           <p:nvPr/>
         </p:nvSpPr>
@@ -18572,7 +18766,7 @@
       </p:sp>
       <p:sp>
         <p:nvSpPr>
-          <p:cNvPr id="50" name="TextBox 49"/>
+          <p:cNvPr id="48" name="TextBox 47"/>
           <p:cNvSpPr txBox="1"/>
           <p:nvPr/>
         </p:nvSpPr>
@@ -18641,7 +18835,7 @@
       </p:sp>
       <p:sp>
         <p:nvSpPr>
-          <p:cNvPr id="51" name="Rectangle 50"/>
+          <p:cNvPr id="49" name="Rectangle 48"/>
           <p:cNvSpPr/>
           <p:nvPr/>
         </p:nvSpPr>
@@ -18672,7 +18866,7 @@
       </p:sp>
       <p:sp>
         <p:nvSpPr>
-          <p:cNvPr id="52" name="TextBox 51"/>
+          <p:cNvPr id="50" name="TextBox 49"/>
           <p:cNvSpPr txBox="1"/>
           <p:nvPr/>
         </p:nvSpPr>
@@ -18713,7 +18907,7 @@
       </p:sp>
       <p:sp>
         <p:nvSpPr>
-          <p:cNvPr id="53" name="TextBox 52"/>
+          <p:cNvPr id="51" name="TextBox 50"/>
           <p:cNvSpPr txBox="1"/>
           <p:nvPr/>
         </p:nvSpPr>
@@ -18782,7 +18976,7 @@
       </p:sp>
       <p:sp>
         <p:nvSpPr>
-          <p:cNvPr id="54" name="TextBox 53"/>
+          <p:cNvPr id="52" name="TextBox 51"/>
           <p:cNvSpPr txBox="1"/>
           <p:nvPr/>
         </p:nvSpPr>
@@ -18851,7 +19045,7 @@
       </p:sp>
       <p:sp>
         <p:nvSpPr>
-          <p:cNvPr id="55" name="Rectangle 54"/>
+          <p:cNvPr id="53" name="Rectangle 52"/>
           <p:cNvSpPr/>
           <p:nvPr/>
         </p:nvSpPr>
@@ -18882,7 +19076,7 @@
       </p:sp>
       <p:sp>
         <p:nvSpPr>
-          <p:cNvPr id="56" name="TextBox 55"/>
+          <p:cNvPr id="54" name="TextBox 53"/>
           <p:cNvSpPr txBox="1"/>
           <p:nvPr/>
         </p:nvSpPr>
@@ -18923,7 +19117,7 @@
       </p:sp>
       <p:sp>
         <p:nvSpPr>
-          <p:cNvPr id="57" name="TextBox 56"/>
+          <p:cNvPr id="55" name="TextBox 54"/>
           <p:cNvSpPr txBox="1"/>
           <p:nvPr/>
         </p:nvSpPr>
@@ -18992,7 +19186,7 @@
       </p:sp>
       <p:sp>
         <p:nvSpPr>
-          <p:cNvPr id="58" name="TextBox 57"/>
+          <p:cNvPr id="56" name="TextBox 55"/>
           <p:cNvSpPr txBox="1"/>
           <p:nvPr/>
         </p:nvSpPr>
@@ -19061,7 +19255,7 @@
       </p:sp>
       <p:sp>
         <p:nvSpPr>
-          <p:cNvPr id="59" name="Rectangle 58"/>
+          <p:cNvPr id="57" name="Rectangle 56"/>
           <p:cNvSpPr/>
           <p:nvPr/>
         </p:nvSpPr>
@@ -19092,7 +19286,7 @@
       </p:sp>
       <p:sp>
         <p:nvSpPr>
-          <p:cNvPr id="60" name="TextBox 59"/>
+          <p:cNvPr id="58" name="TextBox 57"/>
           <p:cNvSpPr txBox="1"/>
           <p:nvPr/>
         </p:nvSpPr>
@@ -19716,16 +19910,40 @@
           </a:p>
         </p:txBody>
       </p:sp>
-      <p:sp>
-        <p:nvSpPr>
-          <p:cNvPr id="6" name="TextBox 5"/>
+      <p:pic>
+        <p:nvPicPr>
+          <p:cNvPr id="6" name="Picture 5" descr="p14_ue_b.jpg"/>
+          <p:cNvPicPr>
+            <a:picLocks noChangeAspect="1"/>
+          </p:cNvPicPr>
+          <p:nvPr/>
+        </p:nvPicPr>
+        <p:blipFill>
+          <a:blip r:embed="rId2"/>
+          <a:stretch>
+            <a:fillRect/>
+          </a:stretch>
+        </p:blipFill>
+        <p:spPr>
+          <a:xfrm>
+            <a:off x="609600" y="1358900"/>
+            <a:ext cx="6400800" cy="3594100"/>
+          </a:xfrm>
+          <a:prstGeom prst="rect">
+            <a:avLst/>
+          </a:prstGeom>
+        </p:spPr>
+      </p:pic>
+      <p:sp>
+        <p:nvSpPr>
+          <p:cNvPr id="7" name="TextBox 6"/>
           <p:cNvSpPr txBox="1"/>
           <p:nvPr/>
         </p:nvSpPr>
         <p:spPr>
           <a:xfrm>
-            <a:off x="609600" y="1358900"/>
-            <a:ext cx="6400800" cy="228600"/>
+            <a:off x="609600" y="5016500"/>
+            <a:ext cx="6400800" cy="190500"/>
           </a:xfrm>
           <a:prstGeom prst="rect">
             <a:avLst/>
@@ -19740,35 +19958,93 @@
           <a:p>
             <a:pPr algn="l">
               <a:lnSpc>
-                <a:spcPts val="1560"/>
-              </a:lnSpc>
-            </a:pPr>
-            <a:r>
-              <a:rPr sz="1200" b="1" lang="zh-CN" altLang="en-US" spc="100">
-                <a:solidFill>
-                  <a:srgbClr val="0FF796"/>
-                </a:solidFill>
-                <a:latin typeface="Consolas"/>
-                <a:ea typeface="微软雅黑"/>
-                <a:cs typeface="微软雅黑"/>
-              </a:rPr>
-              <a:t>10-18</a:t>
-            </a:r>
-            <a:r>
-              <a:rPr sz="1200" b="1" lang="zh-CN" altLang="en-US" spc="100">
-                <a:solidFill>
-                  <a:srgbClr val="0FF796"/>
-                </a:solidFill>
-                <a:latin typeface="微软雅黑"/>
-                <a:ea typeface="微软雅黑"/>
-                <a:cs typeface="微软雅黑"/>
-              </a:rPr>
-              <a:t> </a:t>
-            </a:r>
-            <a:r>
-              <a:rPr sz="1200" b="1" lang="zh-CN" altLang="en-US" spc="100">
-                <a:solidFill>
-                  <a:srgbClr val="0FF796"/>
+                <a:spcPts val="1200"/>
+              </a:lnSpc>
+            </a:pPr>
+            <a:r>
+              <a:rPr sz="1000" b="0" lang="zh-CN" altLang="en-US">
+                <a:solidFill>
+                  <a:srgbClr val="F5F5F5">
+                    <a:alpha val="55000"/>
+                  </a:srgbClr>
+                </a:solidFill>
+                <a:latin typeface="Consolas"/>
+                <a:ea typeface="微软雅黑"/>
+                <a:cs typeface="微软雅黑"/>
+              </a:rPr>
+              <a:t>UE</a:t>
+            </a:r>
+            <a:r>
+              <a:rPr sz="1000" b="0" lang="zh-CN" altLang="en-US">
+                <a:solidFill>
+                  <a:srgbClr val="F5F5F5">
+                    <a:alpha val="55000"/>
+                  </a:srgbClr>
+                </a:solidFill>
+                <a:latin typeface="微软雅黑"/>
+                <a:ea typeface="微软雅黑"/>
+                <a:cs typeface="微软雅黑"/>
+              </a:rPr>
+              <a:t> </a:t>
+            </a:r>
+            <a:r>
+              <a:rPr sz="1000" b="0" lang="zh-CN" altLang="en-US">
+                <a:solidFill>
+                  <a:srgbClr val="F5F5F5">
+                    <a:alpha val="55000"/>
+                  </a:srgbClr>
+                </a:solidFill>
+                <a:latin typeface="Consolas"/>
+                <a:ea typeface="微软雅黑"/>
+                <a:cs typeface="微软雅黑"/>
+              </a:rPr>
+              <a:t>4.24</a:t>
+            </a:r>
+            <a:r>
+              <a:rPr sz="1000" b="0" lang="zh-CN" altLang="en-US">
+                <a:solidFill>
+                  <a:srgbClr val="F5F5F5">
+                    <a:alpha val="55000"/>
+                  </a:srgbClr>
+                </a:solidFill>
+                <a:latin typeface="微软雅黑"/>
+                <a:ea typeface="微软雅黑"/>
+                <a:cs typeface="微软雅黑"/>
+              </a:rPr>
+              <a:t> </a:t>
+            </a:r>
+            <a:r>
+              <a:rPr sz="1000" b="0" lang="zh-CN" altLang="en-US">
+                <a:solidFill>
+                  <a:srgbClr val="F5F5F5">
+                    <a:alpha val="55000"/>
+                  </a:srgbClr>
+                </a:solidFill>
+                <a:latin typeface="Consolas"/>
+                <a:ea typeface="微软雅黑"/>
+                <a:cs typeface="微软雅黑"/>
+              </a:rPr>
+              <a:t>实播</a:t>
+            </a:r>
+            <a:r>
+              <a:rPr sz="1000" b="0" lang="zh-CN" altLang="en-US">
+                <a:solidFill>
+                  <a:srgbClr val="F5F5F5">
+                    <a:alpha val="55000"/>
+                  </a:srgbClr>
+                </a:solidFill>
+                <a:latin typeface="微软雅黑"/>
+                <a:ea typeface="微软雅黑"/>
+                <a:cs typeface="微软雅黑"/>
+              </a:rPr>
+              <a:t> </a:t>
+            </a:r>
+            <a:r>
+              <a:rPr sz="1000" b="0" lang="zh-CN" altLang="en-US">
+                <a:solidFill>
+                  <a:srgbClr val="F5F5F5">
+                    <a:alpha val="55000"/>
+                  </a:srgbClr>
                 </a:solidFill>
                 <a:latin typeface="Consolas"/>
                 <a:ea typeface="微软雅黑"/>
@@ -19777,40 +20053,70 @@
               <a:t>·</a:t>
             </a:r>
             <a:r>
-              <a:rPr sz="1200" b="1" lang="zh-CN" altLang="en-US" spc="100">
-                <a:solidFill>
-                  <a:srgbClr val="0FF796"/>
-                </a:solidFill>
-                <a:latin typeface="微软雅黑"/>
-                <a:ea typeface="微软雅黑"/>
-                <a:cs typeface="微软雅黑"/>
-              </a:rPr>
-              <a:t> </a:t>
-            </a:r>
-            <a:r>
-              <a:rPr sz="1200" b="1" lang="zh-CN" altLang="en-US" spc="100">
-                <a:solidFill>
-                  <a:srgbClr val="0FF796"/>
-                </a:solidFill>
-                <a:latin typeface="Consolas"/>
-                <a:ea typeface="微软雅黑"/>
-                <a:cs typeface="微软雅黑"/>
-              </a:rPr>
-              <a:t>和性能组定下贴图规范后</a:t>
-            </a:r>
-          </a:p>
-        </p:txBody>
-      </p:sp>
-      <p:sp>
-        <p:nvSpPr>
-          <p:cNvPr id="7" name="TextBox 6"/>
+              <a:rPr sz="1000" b="0" lang="zh-CN" altLang="en-US">
+                <a:solidFill>
+                  <a:srgbClr val="F5F5F5">
+                    <a:alpha val="55000"/>
+                  </a:srgbClr>
+                </a:solidFill>
+                <a:latin typeface="微软雅黑"/>
+                <a:ea typeface="微软雅黑"/>
+                <a:cs typeface="微软雅黑"/>
+              </a:rPr>
+              <a:t> </a:t>
+            </a:r>
+            <a:r>
+              <a:rPr sz="1000" b="0" lang="zh-CN" altLang="en-US">
+                <a:solidFill>
+                  <a:srgbClr val="F5F5F5">
+                    <a:alpha val="55000"/>
+                  </a:srgbClr>
+                </a:solidFill>
+                <a:latin typeface="Consolas"/>
+                <a:ea typeface="微软雅黑"/>
+                <a:cs typeface="微软雅黑"/>
+              </a:rPr>
+              <a:t>10-16</a:t>
+            </a:r>
+            <a:r>
+              <a:rPr sz="1000" b="0" lang="zh-CN" altLang="en-US">
+                <a:solidFill>
+                  <a:srgbClr val="F5F5F5">
+                    <a:alpha val="55000"/>
+                  </a:srgbClr>
+                </a:solidFill>
+                <a:latin typeface="微软雅黑"/>
+                <a:ea typeface="微软雅黑"/>
+                <a:cs typeface="微软雅黑"/>
+              </a:rPr>
+              <a:t> </a:t>
+            </a:r>
+            <a:r>
+              <a:rPr sz="1000" b="0" lang="zh-CN" altLang="en-US">
+                <a:solidFill>
+                  <a:srgbClr val="F5F5F5">
+                    <a:alpha val="55000"/>
+                  </a:srgbClr>
+                </a:solidFill>
+                <a:latin typeface="Consolas"/>
+                <a:ea typeface="微软雅黑"/>
+                <a:cs typeface="微软雅黑"/>
+              </a:rPr>
+              <a:t>修正后的金垂柳</a:t>
+            </a:r>
+          </a:p>
+        </p:txBody>
+      </p:sp>
+      <p:sp>
+        <p:nvSpPr>
+          <p:cNvPr id="8" name="TextBox 7"/>
           <p:cNvSpPr txBox="1"/>
           <p:nvPr/>
         </p:nvSpPr>
         <p:spPr>
           <a:xfrm>
-            <a:off x="609600" y="1663700"/>
-            <a:ext cx="6350000" cy="1079500"/>
+            <a:off x="609600" y="5372100"/>
+            <a:ext cx="6400800" cy="635000"/>
           </a:xfrm>
           <a:prstGeom prst="rect">
             <a:avLst/>
@@ -19825,11 +20131,11 @@
           <a:p>
             <a:pPr algn="l">
               <a:lnSpc>
-                <a:spcPts val="7500"/>
-              </a:lnSpc>
-            </a:pPr>
-            <a:r>
-              <a:rPr sz="7500" b="1" lang="zh-CN" altLang="en-US">
+                <a:spcPts val="1950"/>
+              </a:lnSpc>
+            </a:pPr>
+            <a:r>
+              <a:rPr sz="1300" b="0" lang="zh-CN" altLang="en-US">
                 <a:solidFill>
                   <a:srgbClr val="0FF796"/>
                 </a:solidFill>
@@ -19837,10 +20143,17 @@
                 <a:ea typeface="微软雅黑"/>
                 <a:cs typeface="微软雅黑"/>
               </a:rPr>
-              <a:t>149</a:t>
-            </a:r>
-            <a:r>
-              <a:rPr sz="4800" b="1" lang="zh-CN" altLang="en-US">
+              <a:t>之后这些都写进了导入器，</a:t>
+            </a:r>
+          </a:p>
+          <a:p>
+            <a:pPr algn="l">
+              <a:lnSpc>
+                <a:spcPts val="1950"/>
+              </a:lnSpc>
+            </a:pPr>
+            <a:r>
+              <a:rPr sz="1300" b="0" lang="zh-CN" altLang="en-US">
                 <a:solidFill>
                   <a:srgbClr val="0FF796"/>
                 </a:solidFill>
@@ -19848,21 +20161,21 @@
                 <a:ea typeface="微软雅黑"/>
                 <a:cs typeface="微软雅黑"/>
               </a:rPr>
-              <a:t>/149</a:t>
-            </a:r>
-          </a:p>
-        </p:txBody>
-      </p:sp>
-      <p:sp>
-        <p:nvSpPr>
-          <p:cNvPr id="8" name="TextBox 7"/>
+              <a:t>新资源导入时自动按规范设置</a:t>
+            </a:r>
+          </a:p>
+        </p:txBody>
+      </p:sp>
+      <p:sp>
+        <p:nvSpPr>
+          <p:cNvPr id="9" name="TextBox 8"/>
           <p:cNvSpPr txBox="1"/>
           <p:nvPr/>
         </p:nvSpPr>
         <p:spPr>
           <a:xfrm>
-            <a:off x="609600" y="2768600"/>
-            <a:ext cx="6350000" cy="317500"/>
+            <a:off x="7315200" y="1358900"/>
+            <a:ext cx="4267200" cy="228600"/>
           </a:xfrm>
           <a:prstGeom prst="rect">
             <a:avLst/>
@@ -19877,33 +20190,77 @@
           <a:p>
             <a:pPr algn="l">
               <a:lnSpc>
-                <a:spcPts val="2080"/>
-              </a:lnSpc>
-            </a:pPr>
-            <a:r>
-              <a:rPr sz="1600" b="1" lang="zh-CN" altLang="en-US">
-                <a:solidFill>
-                  <a:srgbClr val="F5F5F5"/>
-                </a:solidFill>
-                <a:latin typeface="Consolas"/>
-                <a:ea typeface="微软雅黑"/>
-                <a:cs typeface="微软雅黑"/>
-              </a:rPr>
-              <a:t>张贴图整批重设，读回全部一致</a:t>
-            </a:r>
-          </a:p>
-        </p:txBody>
-      </p:sp>
-      <p:sp>
-        <p:nvSpPr>
-          <p:cNvPr id="9" name="TextBox 8"/>
+                <a:spcPts val="1560"/>
+              </a:lnSpc>
+            </a:pPr>
+            <a:r>
+              <a:rPr sz="1200" b="1" lang="zh-CN" altLang="en-US" spc="100">
+                <a:solidFill>
+                  <a:srgbClr val="0FF796"/>
+                </a:solidFill>
+                <a:latin typeface="Consolas"/>
+                <a:ea typeface="微软雅黑"/>
+                <a:cs typeface="微软雅黑"/>
+              </a:rPr>
+              <a:t>10-18</a:t>
+            </a:r>
+            <a:r>
+              <a:rPr sz="1200" b="1" lang="zh-CN" altLang="en-US" spc="100">
+                <a:solidFill>
+                  <a:srgbClr val="0FF796"/>
+                </a:solidFill>
+                <a:latin typeface="微软雅黑"/>
+                <a:ea typeface="微软雅黑"/>
+                <a:cs typeface="微软雅黑"/>
+              </a:rPr>
+              <a:t> </a:t>
+            </a:r>
+            <a:r>
+              <a:rPr sz="1200" b="1" lang="zh-CN" altLang="en-US" spc="100">
+                <a:solidFill>
+                  <a:srgbClr val="0FF796"/>
+                </a:solidFill>
+                <a:latin typeface="Consolas"/>
+                <a:ea typeface="微软雅黑"/>
+                <a:cs typeface="微软雅黑"/>
+              </a:rPr>
+              <a:t>·</a:t>
+            </a:r>
+            <a:r>
+              <a:rPr sz="1200" b="1" lang="zh-CN" altLang="en-US" spc="100">
+                <a:solidFill>
+                  <a:srgbClr val="0FF796"/>
+                </a:solidFill>
+                <a:latin typeface="微软雅黑"/>
+                <a:ea typeface="微软雅黑"/>
+                <a:cs typeface="微软雅黑"/>
+              </a:rPr>
+              <a:t> </a:t>
+            </a:r>
+            <a:r>
+              <a:rPr sz="1200" b="1" lang="zh-CN" altLang="en-US" spc="100">
+                <a:solidFill>
+                  <a:srgbClr val="0FF796"/>
+                </a:solidFill>
+                <a:latin typeface="Consolas"/>
+                <a:ea typeface="微软雅黑"/>
+                <a:cs typeface="微软雅黑"/>
+              </a:rPr>
+              <a:t>和性能组定下贴图规范后</a:t>
+            </a:r>
+          </a:p>
+        </p:txBody>
+      </p:sp>
+      <p:sp>
+        <p:nvSpPr>
+          <p:cNvPr id="10" name="TextBox 9"/>
           <p:cNvSpPr txBox="1"/>
           <p:nvPr/>
         </p:nvSpPr>
         <p:spPr>
           <a:xfrm>
-            <a:off x="609600" y="3111500"/>
-            <a:ext cx="6350000" cy="317500"/>
+            <a:off x="7315200" y="1663700"/>
+            <a:ext cx="4267200" cy="889000"/>
           </a:xfrm>
           <a:prstGeom prst="rect">
             <a:avLst/>
@@ -19918,35 +20275,107 @@
           <a:p>
             <a:pPr algn="l">
               <a:lnSpc>
-                <a:spcPts val="1950"/>
-              </a:lnSpc>
-            </a:pPr>
-            <a:r>
-              <a:rPr sz="1300" b="0" lang="zh-CN" altLang="en-US">
-                <a:solidFill>
-                  <a:srgbClr val="F5F5F5">
-                    <a:alpha val="70000"/>
-                  </a:srgbClr>
-                </a:solidFill>
-                <a:latin typeface="Consolas"/>
-                <a:ea typeface="微软雅黑"/>
-                <a:cs typeface="微软雅黑"/>
-              </a:rPr>
-              <a:t>别的项目也在用的共享贴图单独列出核对，不跟着改</a:t>
-            </a:r>
-          </a:p>
-        </p:txBody>
-      </p:sp>
-      <p:sp>
-        <p:nvSpPr>
-          <p:cNvPr id="10" name="Rectangle 9"/>
+                <a:spcPts val="6000"/>
+              </a:lnSpc>
+            </a:pPr>
+            <a:r>
+              <a:rPr sz="6000" b="1" lang="zh-CN" altLang="en-US">
+                <a:solidFill>
+                  <a:srgbClr val="0FF796"/>
+                </a:solidFill>
+                <a:latin typeface="Consolas"/>
+                <a:ea typeface="微软雅黑"/>
+                <a:cs typeface="微软雅黑"/>
+              </a:rPr>
+              <a:t>149</a:t>
+            </a:r>
+            <a:r>
+              <a:rPr sz="3800" b="1" lang="zh-CN" altLang="en-US">
+                <a:solidFill>
+                  <a:srgbClr val="0FF796"/>
+                </a:solidFill>
+                <a:latin typeface="Consolas"/>
+                <a:ea typeface="微软雅黑"/>
+                <a:cs typeface="微软雅黑"/>
+              </a:rPr>
+              <a:t>/149</a:t>
+            </a:r>
+          </a:p>
+        </p:txBody>
+      </p:sp>
+      <p:sp>
+        <p:nvSpPr>
+          <p:cNvPr id="11" name="TextBox 10"/>
+          <p:cNvSpPr txBox="1"/>
+          <p:nvPr/>
+        </p:nvSpPr>
+        <p:spPr>
+          <a:xfrm>
+            <a:off x="7315200" y="2540000"/>
+            <a:ext cx="4267200" cy="571500"/>
+          </a:xfrm>
+          <a:prstGeom prst="rect">
+            <a:avLst/>
+          </a:prstGeom>
+          <a:noFill/>
+        </p:spPr>
+        <p:txBody>
+          <a:bodyPr wrap="square" lIns="0" rIns="0" tIns="0" bIns="0" anchor="t">
+            <a:noAutofit/>
+          </a:bodyPr>
+          <a:lstStyle/>
+          <a:p>
+            <a:pPr algn="l">
+              <a:lnSpc>
+                <a:spcPts val="2000"/>
+              </a:lnSpc>
+            </a:pPr>
+            <a:r>
+              <a:rPr sz="1250" b="0" lang="zh-CN" altLang="en-US">
+                <a:solidFill>
+                  <a:srgbClr val="F5F5F5">
+                    <a:alpha val="70000"/>
+                  </a:srgbClr>
+                </a:solidFill>
+                <a:latin typeface="Consolas"/>
+                <a:ea typeface="微软雅黑"/>
+                <a:cs typeface="微软雅黑"/>
+              </a:rPr>
+              <a:t>张贴图整批重设，读回全部一致；</a:t>
+            </a:r>
+          </a:p>
+          <a:p>
+            <a:pPr algn="l">
+              <a:lnSpc>
+                <a:spcPts val="2000"/>
+              </a:lnSpc>
+            </a:pPr>
+            <a:r>
+              <a:rPr sz="1250" b="0" lang="zh-CN" altLang="en-US">
+                <a:solidFill>
+                  <a:srgbClr val="F5F5F5">
+                    <a:alpha val="70000"/>
+                  </a:srgbClr>
+                </a:solidFill>
+                <a:latin typeface="Consolas"/>
+                <a:ea typeface="微软雅黑"/>
+                <a:cs typeface="微软雅黑"/>
+              </a:rPr>
+              <a:t>共享贴图单独列出核对，不跟着改</a:t>
+            </a:r>
+          </a:p>
+        </p:txBody>
+      </p:sp>
+      <p:sp>
+        <p:nvSpPr>
+          <p:cNvPr id="12" name="Rectangle 11"/>
           <p:cNvSpPr/>
           <p:nvPr/>
         </p:nvSpPr>
         <p:spPr>
           <a:xfrm>
-            <a:off x="609600" y="3632200"/>
-            <a:ext cx="6400800" cy="6350"/>
+            <a:off x="7315200" y="3276600"/>
+            <a:ext cx="4267200" cy="6350"/>
           </a:xfrm>
           <a:prstGeom prst="rect">
             <a:avLst/>
@@ -19970,14 +20399,14 @@
       </p:sp>
       <p:sp>
         <p:nvSpPr>
-          <p:cNvPr id="11" name="TextBox 10"/>
+          <p:cNvPr id="13" name="TextBox 12"/>
           <p:cNvSpPr txBox="1"/>
           <p:nvPr/>
         </p:nvSpPr>
         <p:spPr>
           <a:xfrm>
-            <a:off x="609600" y="3810000"/>
-            <a:ext cx="6400800" cy="228600"/>
+            <a:off x="7315200" y="3454400"/>
+            <a:ext cx="4267200" cy="228600"/>
           </a:xfrm>
           <a:prstGeom prst="rect">
             <a:avLst/>
@@ -20055,14 +20484,14 @@
       </p:sp>
       <p:sp>
         <p:nvSpPr>
-          <p:cNvPr id="12" name="TextBox 11"/>
+          <p:cNvPr id="14" name="TextBox 13"/>
           <p:cNvSpPr txBox="1"/>
           <p:nvPr/>
         </p:nvSpPr>
         <p:spPr>
           <a:xfrm>
-            <a:off x="609600" y="4114800"/>
-            <a:ext cx="6350000" cy="571500"/>
+            <a:off x="7315200" y="3759200"/>
+            <a:ext cx="4267200" cy="571500"/>
           </a:xfrm>
           <a:prstGeom prst="rect">
             <a:avLst/>
@@ -20118,14 +20547,14 @@
       </p:sp>
       <p:sp>
         <p:nvSpPr>
-          <p:cNvPr id="13" name="TextBox 12"/>
+          <p:cNvPr id="15" name="TextBox 14"/>
           <p:cNvSpPr txBox="1"/>
           <p:nvPr/>
         </p:nvSpPr>
         <p:spPr>
           <a:xfrm>
-            <a:off x="609600" y="4699000"/>
-            <a:ext cx="6350000" cy="571500"/>
+            <a:off x="7315200" y="4343400"/>
+            <a:ext cx="4267200" cy="762000"/>
           </a:xfrm>
           <a:prstGeom prst="rect">
             <a:avLst/>
@@ -20140,11 +20569,11 @@
           <a:p>
             <a:pPr algn="l">
               <a:lnSpc>
-                <a:spcPts val="2080"/>
-              </a:lnSpc>
-            </a:pPr>
-            <a:r>
-              <a:rPr sz="1300" b="0" lang="zh-CN" altLang="en-US">
+                <a:spcPts val="2000"/>
+              </a:lnSpc>
+            </a:pPr>
+            <a:r>
+              <a:rPr sz="1250" b="0" lang="zh-CN" altLang="en-US">
                 <a:solidFill>
                   <a:srgbClr val="F5F5F5">
                     <a:alpha val="70000"/>
@@ -20157,20 +20586,20 @@
               <a:t>48</a:t>
             </a:r>
             <a:r>
-              <a:rPr sz="1300" b="0" lang="zh-CN" altLang="en-US">
-                <a:solidFill>
-                  <a:srgbClr val="F5F5F5">
-                    <a:alpha val="70000"/>
-                  </a:srgbClr>
-                </a:solidFill>
-                <a:latin typeface="微软雅黑"/>
-                <a:ea typeface="微软雅黑"/>
-                <a:cs typeface="微软雅黑"/>
-              </a:rPr>
-              <a:t> </a:t>
-            </a:r>
-            <a:r>
-              <a:rPr sz="1300" b="0" lang="zh-CN" altLang="en-US">
+              <a:rPr sz="1250" b="0" lang="zh-CN" altLang="en-US">
+                <a:solidFill>
+                  <a:srgbClr val="F5F5F5">
+                    <a:alpha val="70000"/>
+                  </a:srgbClr>
+                </a:solidFill>
+                <a:latin typeface="微软雅黑"/>
+                <a:ea typeface="微软雅黑"/>
+                <a:cs typeface="微软雅黑"/>
+              </a:rPr>
+              <a:t> </a:t>
+            </a:r>
+            <a:r>
+              <a:rPr sz="1250" b="0" lang="zh-CN" altLang="en-US">
                 <a:solidFill>
                   <a:srgbClr val="F5F5F5">
                     <a:alpha val="70000"/>
@@ -20183,40 +20612,60 @@
               <a:t>个粒子系统、67</a:t>
             </a:r>
             <a:r>
-              <a:rPr sz="1300" b="0" lang="zh-CN" altLang="en-US">
-                <a:solidFill>
-                  <a:srgbClr val="F5F5F5">
-                    <a:alpha val="70000"/>
-                  </a:srgbClr>
-                </a:solidFill>
-                <a:latin typeface="微软雅黑"/>
-                <a:ea typeface="微软雅黑"/>
-                <a:cs typeface="微软雅黑"/>
-              </a:rPr>
-              <a:t> </a:t>
-            </a:r>
-            <a:r>
-              <a:rPr sz="1300" b="0" lang="zh-CN" altLang="en-US">
-                <a:solidFill>
-                  <a:srgbClr val="F5F5F5">
-                    <a:alpha val="70000"/>
-                  </a:srgbClr>
-                </a:solidFill>
-                <a:latin typeface="Consolas"/>
-                <a:ea typeface="微软雅黑"/>
-                <a:cs typeface="微软雅黑"/>
-              </a:rPr>
-              <a:t>个材质实例，统一几项发射器与材质设置，</a:t>
+              <a:rPr sz="1250" b="0" lang="zh-CN" altLang="en-US">
+                <a:solidFill>
+                  <a:srgbClr val="F5F5F5">
+                    <a:alpha val="70000"/>
+                  </a:srgbClr>
+                </a:solidFill>
+                <a:latin typeface="微软雅黑"/>
+                <a:ea typeface="微软雅黑"/>
+                <a:cs typeface="微软雅黑"/>
+              </a:rPr>
+              <a:t> </a:t>
+            </a:r>
+            <a:r>
+              <a:rPr sz="1250" b="0" lang="zh-CN" altLang="en-US">
+                <a:solidFill>
+                  <a:srgbClr val="F5F5F5">
+                    <a:alpha val="70000"/>
+                  </a:srgbClr>
+                </a:solidFill>
+                <a:latin typeface="Consolas"/>
+                <a:ea typeface="微软雅黑"/>
+                <a:cs typeface="微软雅黑"/>
+              </a:rPr>
+              <a:t>个材质实例，</a:t>
             </a:r>
           </a:p>
           <a:p>
             <a:pPr algn="l">
               <a:lnSpc>
-                <a:spcPts val="2080"/>
-              </a:lnSpc>
-            </a:pPr>
-            <a:r>
-              <a:rPr sz="1300" b="0" lang="zh-CN" altLang="en-US">
+                <a:spcPts val="2000"/>
+              </a:lnSpc>
+            </a:pPr>
+            <a:r>
+              <a:rPr sz="1250" b="0" lang="zh-CN" altLang="en-US">
+                <a:solidFill>
+                  <a:srgbClr val="F5F5F5">
+                    <a:alpha val="70000"/>
+                  </a:srgbClr>
+                </a:solidFill>
+                <a:latin typeface="Consolas"/>
+                <a:ea typeface="微软雅黑"/>
+                <a:cs typeface="微软雅黑"/>
+              </a:rPr>
+              <a:t>统一几项发射器与材质设置，</a:t>
+            </a:r>
+          </a:p>
+          <a:p>
+            <a:pPr algn="l">
+              <a:lnSpc>
+                <a:spcPts val="2000"/>
+              </a:lnSpc>
+            </a:pPr>
+            <a:r>
+              <a:rPr sz="1250" b="0" lang="zh-CN" altLang="en-US">
                 <a:solidFill>
                   <a:srgbClr val="F5F5F5">
                     <a:alpha val="70000"/>
@@ -20227,338 +20676,6 @@
                 <a:cs typeface="微软雅黑"/>
               </a:rPr>
               <a:t>读回无错误</a:t>
-            </a:r>
-          </a:p>
-        </p:txBody>
-      </p:sp>
-      <p:pic>
-        <p:nvPicPr>
-          <p:cNvPr id="14" name="Picture 13" descr="p14_ue_a.jpg"/>
-          <p:cNvPicPr>
-            <a:picLocks noChangeAspect="1"/>
-          </p:cNvPicPr>
-          <p:nvPr/>
-        </p:nvPicPr>
-        <p:blipFill>
-          <a:blip r:embed="rId2"/>
-          <a:stretch>
-            <a:fillRect/>
-          </a:stretch>
-        </p:blipFill>
-        <p:spPr>
-          <a:xfrm>
-            <a:off x="7315200" y="1358900"/>
-            <a:ext cx="4267200" cy="1905000"/>
-          </a:xfrm>
-          <a:prstGeom prst="rect">
-            <a:avLst/>
-          </a:prstGeom>
-        </p:spPr>
-      </p:pic>
-      <p:pic>
-        <p:nvPicPr>
-          <p:cNvPr id="15" name="Picture 14" descr="p14_ue_b.jpg"/>
-          <p:cNvPicPr>
-            <a:picLocks noChangeAspect="1"/>
-          </p:cNvPicPr>
-          <p:nvPr/>
-        </p:nvPicPr>
-        <p:blipFill>
-          <a:blip r:embed="rId3"/>
-          <a:stretch>
-            <a:fillRect/>
-          </a:stretch>
-        </p:blipFill>
-        <p:spPr>
-          <a:xfrm>
-            <a:off x="7315200" y="3340100"/>
-            <a:ext cx="4267200" cy="1905000"/>
-          </a:xfrm>
-          <a:prstGeom prst="rect">
-            <a:avLst/>
-          </a:prstGeom>
-        </p:spPr>
-      </p:pic>
-      <p:sp>
-        <p:nvSpPr>
-          <p:cNvPr id="16" name="TextBox 15"/>
-          <p:cNvSpPr txBox="1"/>
-          <p:nvPr/>
-        </p:nvSpPr>
-        <p:spPr>
-          <a:xfrm>
-            <a:off x="7315200" y="5308600"/>
-            <a:ext cx="4267200" cy="190500"/>
-          </a:xfrm>
-          <a:prstGeom prst="rect">
-            <a:avLst/>
-          </a:prstGeom>
-          <a:noFill/>
-        </p:spPr>
-        <p:txBody>
-          <a:bodyPr wrap="square" lIns="0" rIns="0" tIns="0" bIns="0" anchor="t">
-            <a:noAutofit/>
-          </a:bodyPr>
-          <a:lstStyle/>
-          <a:p>
-            <a:pPr algn="l">
-              <a:lnSpc>
-                <a:spcPts val="1200"/>
-              </a:lnSpc>
-            </a:pPr>
-            <a:r>
-              <a:rPr sz="1000" b="0" lang="zh-CN" altLang="en-US">
-                <a:solidFill>
-                  <a:srgbClr val="F5F5F5">
-                    <a:alpha val="55000"/>
-                  </a:srgbClr>
-                </a:solidFill>
-                <a:latin typeface="Consolas"/>
-                <a:ea typeface="微软雅黑"/>
-                <a:cs typeface="微软雅黑"/>
-              </a:rPr>
-              <a:t>UE</a:t>
-            </a:r>
-            <a:r>
-              <a:rPr sz="1000" b="0" lang="zh-CN" altLang="en-US">
-                <a:solidFill>
-                  <a:srgbClr val="F5F5F5">
-                    <a:alpha val="55000"/>
-                  </a:srgbClr>
-                </a:solidFill>
-                <a:latin typeface="微软雅黑"/>
-                <a:ea typeface="微软雅黑"/>
-                <a:cs typeface="微软雅黑"/>
-              </a:rPr>
-              <a:t> </a:t>
-            </a:r>
-            <a:r>
-              <a:rPr sz="1000" b="0" lang="zh-CN" altLang="en-US">
-                <a:solidFill>
-                  <a:srgbClr val="F5F5F5">
-                    <a:alpha val="55000"/>
-                  </a:srgbClr>
-                </a:solidFill>
-                <a:latin typeface="Consolas"/>
-                <a:ea typeface="微软雅黑"/>
-                <a:cs typeface="微软雅黑"/>
-              </a:rPr>
-              <a:t>4.24</a:t>
-            </a:r>
-            <a:r>
-              <a:rPr sz="1000" b="0" lang="zh-CN" altLang="en-US">
-                <a:solidFill>
-                  <a:srgbClr val="F5F5F5">
-                    <a:alpha val="55000"/>
-                  </a:srgbClr>
-                </a:solidFill>
-                <a:latin typeface="微软雅黑"/>
-                <a:ea typeface="微软雅黑"/>
-                <a:cs typeface="微软雅黑"/>
-              </a:rPr>
-              <a:t> </a:t>
-            </a:r>
-            <a:r>
-              <a:rPr sz="1000" b="0" lang="zh-CN" altLang="en-US">
-                <a:solidFill>
-                  <a:srgbClr val="F5F5F5">
-                    <a:alpha val="55000"/>
-                  </a:srgbClr>
-                </a:solidFill>
-                <a:latin typeface="Consolas"/>
-                <a:ea typeface="微软雅黑"/>
-                <a:cs typeface="微软雅黑"/>
-              </a:rPr>
-              <a:t>实播</a:t>
-            </a:r>
-            <a:r>
-              <a:rPr sz="1000" b="0" lang="zh-CN" altLang="en-US">
-                <a:solidFill>
-                  <a:srgbClr val="F5F5F5">
-                    <a:alpha val="55000"/>
-                  </a:srgbClr>
-                </a:solidFill>
-                <a:latin typeface="微软雅黑"/>
-                <a:ea typeface="微软雅黑"/>
-                <a:cs typeface="微软雅黑"/>
-              </a:rPr>
-              <a:t> </a:t>
-            </a:r>
-            <a:r>
-              <a:rPr sz="1000" b="0" lang="zh-CN" altLang="en-US">
-                <a:solidFill>
-                  <a:srgbClr val="F5F5F5">
-                    <a:alpha val="55000"/>
-                  </a:srgbClr>
-                </a:solidFill>
-                <a:latin typeface="Consolas"/>
-                <a:ea typeface="微软雅黑"/>
-                <a:cs typeface="微软雅黑"/>
-              </a:rPr>
-              <a:t>·</a:t>
-            </a:r>
-            <a:r>
-              <a:rPr sz="1000" b="0" lang="zh-CN" altLang="en-US">
-                <a:solidFill>
-                  <a:srgbClr val="F5F5F5">
-                    <a:alpha val="55000"/>
-                  </a:srgbClr>
-                </a:solidFill>
-                <a:latin typeface="微软雅黑"/>
-                <a:ea typeface="微软雅黑"/>
-                <a:cs typeface="微软雅黑"/>
-              </a:rPr>
-              <a:t> </a:t>
-            </a:r>
-            <a:r>
-              <a:rPr sz="1000" b="0" lang="zh-CN" altLang="en-US">
-                <a:solidFill>
-                  <a:srgbClr val="F5F5F5">
-                    <a:alpha val="55000"/>
-                  </a:srgbClr>
-                </a:solidFill>
-                <a:latin typeface="Consolas"/>
-                <a:ea typeface="微软雅黑"/>
-                <a:cs typeface="微软雅黑"/>
-              </a:rPr>
-              <a:t>10-16</a:t>
-            </a:r>
-            <a:r>
-              <a:rPr sz="1000" b="0" lang="zh-CN" altLang="en-US">
-                <a:solidFill>
-                  <a:srgbClr val="F5F5F5">
-                    <a:alpha val="55000"/>
-                  </a:srgbClr>
-                </a:solidFill>
-                <a:latin typeface="微软雅黑"/>
-                <a:ea typeface="微软雅黑"/>
-                <a:cs typeface="微软雅黑"/>
-              </a:rPr>
-              <a:t> </a:t>
-            </a:r>
-            <a:r>
-              <a:rPr sz="1000" b="0" lang="zh-CN" altLang="en-US">
-                <a:solidFill>
-                  <a:srgbClr val="F5F5F5">
-                    <a:alpha val="55000"/>
-                  </a:srgbClr>
-                </a:solidFill>
-                <a:latin typeface="Consolas"/>
-                <a:ea typeface="微软雅黑"/>
-                <a:cs typeface="微软雅黑"/>
-              </a:rPr>
-              <a:t>修正后</a:t>
-            </a:r>
-            <a:r>
-              <a:rPr sz="1000" b="0" lang="zh-CN" altLang="en-US">
-                <a:solidFill>
-                  <a:srgbClr val="F5F5F5">
-                    <a:alpha val="55000"/>
-                  </a:srgbClr>
-                </a:solidFill>
-                <a:latin typeface="微软雅黑"/>
-                <a:ea typeface="微软雅黑"/>
-                <a:cs typeface="微软雅黑"/>
-              </a:rPr>
-              <a:t> </a:t>
-            </a:r>
-            <a:r>
-              <a:rPr sz="1000" b="0" lang="zh-CN" altLang="en-US">
-                <a:solidFill>
-                  <a:srgbClr val="F5F5F5">
-                    <a:alpha val="55000"/>
-                  </a:srgbClr>
-                </a:solidFill>
-                <a:latin typeface="Consolas"/>
-                <a:ea typeface="微软雅黑"/>
-                <a:cs typeface="微软雅黑"/>
-              </a:rPr>
-              <a:t>·</a:t>
-            </a:r>
-            <a:r>
-              <a:rPr sz="1000" b="0" lang="zh-CN" altLang="en-US">
-                <a:solidFill>
-                  <a:srgbClr val="F5F5F5">
-                    <a:alpha val="55000"/>
-                  </a:srgbClr>
-                </a:solidFill>
-                <a:latin typeface="微软雅黑"/>
-                <a:ea typeface="微软雅黑"/>
-                <a:cs typeface="微软雅黑"/>
-              </a:rPr>
-              <a:t> </a:t>
-            </a:r>
-            <a:r>
-              <a:rPr sz="1000" b="0" lang="zh-CN" altLang="en-US">
-                <a:solidFill>
-                  <a:srgbClr val="F5F5F5">
-                    <a:alpha val="55000"/>
-                  </a:srgbClr>
-                </a:solidFill>
-                <a:latin typeface="Consolas"/>
-                <a:ea typeface="微软雅黑"/>
-                <a:cs typeface="微软雅黑"/>
-              </a:rPr>
-              <a:t>爆裂星、金垂柳</a:t>
-            </a:r>
-          </a:p>
-        </p:txBody>
-      </p:sp>
-      <p:sp>
-        <p:nvSpPr>
-          <p:cNvPr id="17" name="TextBox 16"/>
-          <p:cNvSpPr txBox="1"/>
-          <p:nvPr/>
-        </p:nvSpPr>
-        <p:spPr>
-          <a:xfrm>
-            <a:off x="7315200" y="5588000"/>
-            <a:ext cx="4267200" cy="508000"/>
-          </a:xfrm>
-          <a:prstGeom prst="rect">
-            <a:avLst/>
-          </a:prstGeom>
-          <a:noFill/>
-        </p:spPr>
-        <p:txBody>
-          <a:bodyPr wrap="square" lIns="0" rIns="0" tIns="0" bIns="0" anchor="t">
-            <a:noAutofit/>
-          </a:bodyPr>
-          <a:lstStyle/>
-          <a:p>
-            <a:pPr algn="l">
-              <a:lnSpc>
-                <a:spcPts val="1875"/>
-              </a:lnSpc>
-            </a:pPr>
-            <a:r>
-              <a:rPr sz="1250" b="0" lang="zh-CN" altLang="en-US">
-                <a:solidFill>
-                  <a:srgbClr val="0FF796"/>
-                </a:solidFill>
-                <a:latin typeface="Consolas"/>
-                <a:ea typeface="微软雅黑"/>
-                <a:cs typeface="微软雅黑"/>
-              </a:rPr>
-              <a:t>之后这些都写进了导入器，</a:t>
-            </a:r>
-          </a:p>
-          <a:p>
-            <a:pPr algn="l">
-              <a:lnSpc>
-                <a:spcPts val="1875"/>
-              </a:lnSpc>
-            </a:pPr>
-            <a:r>
-              <a:rPr sz="1250" b="0" lang="zh-CN" altLang="en-US">
-                <a:solidFill>
-                  <a:srgbClr val="0FF796"/>
-                </a:solidFill>
-                <a:latin typeface="Consolas"/>
-                <a:ea typeface="微软雅黑"/>
-                <a:cs typeface="微软雅黑"/>
-              </a:rPr>
-              <a:t>新资源导入时自动按规范设置</a:t>
             </a:r>
           </a:p>
         </p:txBody>
@@ -22694,7 +22811,7 @@
         <p:spPr>
           <a:xfrm>
             <a:off x="609600" y="1358900"/>
-            <a:ext cx="3454400" cy="3302000"/>
+            <a:ext cx="3454400" cy="1587500"/>
           </a:xfrm>
           <a:prstGeom prst="rect">
             <a:avLst/>
@@ -22720,179 +22837,14 @@
       </p:sp>
       <p:sp>
         <p:nvSpPr>
-          <p:cNvPr id="7" name="TextBox 6"/>
-          <p:cNvSpPr txBox="1"/>
-          <p:nvPr/>
-        </p:nvSpPr>
-        <p:spPr>
-          <a:xfrm>
-            <a:off x="889000" y="1587500"/>
-            <a:ext cx="1270000" cy="508000"/>
-          </a:xfrm>
-          <a:prstGeom prst="rect">
-            <a:avLst/>
-          </a:prstGeom>
-          <a:noFill/>
-        </p:spPr>
-        <p:txBody>
-          <a:bodyPr wrap="square" lIns="0" rIns="0" tIns="0" bIns="0" anchor="t">
-            <a:noAutofit/>
-          </a:bodyPr>
-          <a:lstStyle/>
-          <a:p>
-            <a:pPr algn="l">
-              <a:lnSpc>
-                <a:spcPts val="3200"/>
-              </a:lnSpc>
-            </a:pPr>
-            <a:r>
-              <a:rPr sz="3200" b="1" lang="zh-CN" altLang="en-US">
-                <a:solidFill>
-                  <a:srgbClr val="0FF796"/>
-                </a:solidFill>
-                <a:latin typeface="Consolas"/>
-                <a:ea typeface="微软雅黑"/>
-                <a:cs typeface="微软雅黑"/>
-              </a:rPr>
-              <a:t>01</a:t>
-            </a:r>
-          </a:p>
-        </p:txBody>
-      </p:sp>
-      <p:sp>
-        <p:nvSpPr>
-          <p:cNvPr id="8" name="TextBox 7"/>
-          <p:cNvSpPr txBox="1"/>
-          <p:nvPr/>
-        </p:nvSpPr>
-        <p:spPr>
-          <a:xfrm>
-            <a:off x="889000" y="2260600"/>
-            <a:ext cx="2921000" cy="355600"/>
-          </a:xfrm>
-          <a:prstGeom prst="rect">
-            <a:avLst/>
-          </a:prstGeom>
-          <a:noFill/>
-        </p:spPr>
-        <p:txBody>
-          <a:bodyPr wrap="square" lIns="0" rIns="0" tIns="0" bIns="0" anchor="t">
-            <a:noAutofit/>
-          </a:bodyPr>
-          <a:lstStyle/>
-          <a:p>
-            <a:pPr algn="l">
-              <a:lnSpc>
-                <a:spcPts val="2600"/>
-              </a:lnSpc>
-            </a:pPr>
-            <a:r>
-              <a:rPr sz="2000" b="1" lang="zh-CN" altLang="en-US">
-                <a:solidFill>
-                  <a:srgbClr val="F5F5F5"/>
-                </a:solidFill>
-                <a:latin typeface="Consolas"/>
-                <a:ea typeface="微软雅黑"/>
-                <a:cs typeface="微软雅黑"/>
-              </a:rPr>
-              <a:t>定方向</a:t>
-            </a:r>
-          </a:p>
-        </p:txBody>
-      </p:sp>
-      <p:sp>
-        <p:nvSpPr>
-          <p:cNvPr id="9" name="TextBox 8"/>
-          <p:cNvSpPr txBox="1"/>
-          <p:nvPr/>
-        </p:nvSpPr>
-        <p:spPr>
-          <a:xfrm>
-            <a:off x="889000" y="2794000"/>
-            <a:ext cx="2921000" cy="1397000"/>
-          </a:xfrm>
-          <a:prstGeom prst="rect">
-            <a:avLst/>
-          </a:prstGeom>
-          <a:noFill/>
-        </p:spPr>
-        <p:txBody>
-          <a:bodyPr wrap="square" lIns="0" rIns="0" tIns="0" bIns="0" anchor="t">
-            <a:noAutofit/>
-          </a:bodyPr>
-          <a:lstStyle/>
-          <a:p>
-            <a:pPr algn="l">
-              <a:lnSpc>
-                <a:spcPts val="2625"/>
-              </a:lnSpc>
-            </a:pPr>
-            <a:r>
-              <a:rPr sz="1500" b="0" lang="zh-CN" altLang="en-US">
-                <a:solidFill>
-                  <a:srgbClr val="F5F5F5">
-                    <a:alpha val="70000"/>
-                  </a:srgbClr>
-                </a:solidFill>
-                <a:latin typeface="Consolas"/>
-                <a:ea typeface="微软雅黑"/>
-                <a:cs typeface="微软雅黑"/>
-              </a:rPr>
-              <a:t>需求、目标与限制</a:t>
-            </a:r>
-          </a:p>
-          <a:p>
-            <a:pPr algn="l">
-              <a:lnSpc>
-                <a:spcPts val="2625"/>
-              </a:lnSpc>
-            </a:pPr>
-            <a:r>
-              <a:rPr sz="1500" b="0" lang="zh-CN" altLang="en-US">
-                <a:solidFill>
-                  <a:srgbClr val="F5F5F5">
-                    <a:alpha val="70000"/>
-                  </a:srgbClr>
-                </a:solidFill>
-                <a:latin typeface="Consolas"/>
-                <a:ea typeface="微软雅黑"/>
-                <a:cs typeface="微软雅黑"/>
-              </a:rPr>
-              <a:t>舞台与编排设计</a:t>
-            </a:r>
-          </a:p>
-          <a:p>
-            <a:pPr algn="l">
-              <a:lnSpc>
-                <a:spcPts val="2625"/>
-              </a:lnSpc>
-            </a:pPr>
-            <a:r>
-              <a:rPr sz="1500" b="0" lang="zh-CN" altLang="en-US">
-                <a:solidFill>
-                  <a:srgbClr val="F5F5F5">
-                    <a:alpha val="70000"/>
-                  </a:srgbClr>
-                </a:solidFill>
-                <a:latin typeface="Consolas"/>
-                <a:ea typeface="微软雅黑"/>
-                <a:cs typeface="微软雅黑"/>
-              </a:rPr>
-              <a:t>审美方向</a:t>
-            </a:r>
-          </a:p>
-        </p:txBody>
-      </p:sp>
-      <p:sp>
-        <p:nvSpPr>
-          <p:cNvPr id="10" name="Rectangle 9"/>
+          <p:cNvPr id="7" name="Rectangle 6"/>
           <p:cNvSpPr/>
           <p:nvPr/>
         </p:nvSpPr>
         <p:spPr>
           <a:xfrm>
-            <a:off x="889000" y="4318000"/>
-            <a:ext cx="342900" cy="38100"/>
+            <a:off x="609600" y="1358900"/>
+            <a:ext cx="38100" cy="1587500"/>
           </a:xfrm>
           <a:prstGeom prst="rect">
             <a:avLst/>
@@ -22914,6 +22866,131 @@
       </p:sp>
       <p:sp>
         <p:nvSpPr>
+          <p:cNvPr id="8" name="TextBox 7"/>
+          <p:cNvSpPr txBox="1"/>
+          <p:nvPr/>
+        </p:nvSpPr>
+        <p:spPr>
+          <a:xfrm>
+            <a:off x="863600" y="1511300"/>
+            <a:ext cx="762000" cy="381000"/>
+          </a:xfrm>
+          <a:prstGeom prst="rect">
+            <a:avLst/>
+          </a:prstGeom>
+          <a:noFill/>
+        </p:spPr>
+        <p:txBody>
+          <a:bodyPr wrap="square" lIns="0" rIns="0" tIns="0" bIns="0" anchor="t">
+            <a:noAutofit/>
+          </a:bodyPr>
+          <a:lstStyle/>
+          <a:p>
+            <a:pPr algn="l">
+              <a:lnSpc>
+                <a:spcPts val="2420"/>
+              </a:lnSpc>
+            </a:pPr>
+            <a:r>
+              <a:rPr sz="2200" b="1" lang="zh-CN" altLang="en-US">
+                <a:solidFill>
+                  <a:srgbClr val="0FF796"/>
+                </a:solidFill>
+                <a:latin typeface="Consolas"/>
+                <a:ea typeface="微软雅黑"/>
+                <a:cs typeface="微软雅黑"/>
+              </a:rPr>
+              <a:t>01</a:t>
+            </a:r>
+          </a:p>
+        </p:txBody>
+      </p:sp>
+      <p:sp>
+        <p:nvSpPr>
+          <p:cNvPr id="9" name="TextBox 8"/>
+          <p:cNvSpPr txBox="1"/>
+          <p:nvPr/>
+        </p:nvSpPr>
+        <p:spPr>
+          <a:xfrm>
+            <a:off x="863600" y="1943100"/>
+            <a:ext cx="2984500" cy="317500"/>
+          </a:xfrm>
+          <a:prstGeom prst="rect">
+            <a:avLst/>
+          </a:prstGeom>
+          <a:noFill/>
+        </p:spPr>
+        <p:txBody>
+          <a:bodyPr wrap="square" lIns="0" rIns="0" tIns="0" bIns="0" anchor="t">
+            <a:noAutofit/>
+          </a:bodyPr>
+          <a:lstStyle/>
+          <a:p>
+            <a:pPr algn="l">
+              <a:lnSpc>
+                <a:spcPts val="2210"/>
+              </a:lnSpc>
+            </a:pPr>
+            <a:r>
+              <a:rPr sz="1700" b="1" lang="zh-CN" altLang="en-US">
+                <a:solidFill>
+                  <a:srgbClr val="F5F5F5"/>
+                </a:solidFill>
+                <a:latin typeface="Consolas"/>
+                <a:ea typeface="微软雅黑"/>
+                <a:cs typeface="微软雅黑"/>
+              </a:rPr>
+              <a:t>定方向</a:t>
+            </a:r>
+          </a:p>
+        </p:txBody>
+      </p:sp>
+      <p:sp>
+        <p:nvSpPr>
+          <p:cNvPr id="10" name="TextBox 9"/>
+          <p:cNvSpPr txBox="1"/>
+          <p:nvPr/>
+        </p:nvSpPr>
+        <p:spPr>
+          <a:xfrm>
+            <a:off x="863600" y="2324100"/>
+            <a:ext cx="2984500" cy="508000"/>
+          </a:xfrm>
+          <a:prstGeom prst="rect">
+            <a:avLst/>
+          </a:prstGeom>
+          <a:noFill/>
+        </p:spPr>
+        <p:txBody>
+          <a:bodyPr wrap="square" lIns="0" rIns="0" tIns="0" bIns="0" anchor="t">
+            <a:noAutofit/>
+          </a:bodyPr>
+          <a:lstStyle/>
+          <a:p>
+            <a:pPr algn="l">
+              <a:lnSpc>
+                <a:spcPts val="1875"/>
+              </a:lnSpc>
+            </a:pPr>
+            <a:r>
+              <a:rPr sz="1250" b="0" lang="zh-CN" altLang="en-US">
+                <a:solidFill>
+                  <a:srgbClr val="F5F5F5">
+                    <a:alpha val="70000"/>
+                  </a:srgbClr>
+                </a:solidFill>
+                <a:latin typeface="Consolas"/>
+                <a:ea typeface="微软雅黑"/>
+                <a:cs typeface="微软雅黑"/>
+              </a:rPr>
+              <a:t>需求、目标与限制；舞台与编排设计</a:t>
+            </a:r>
+          </a:p>
+        </p:txBody>
+      </p:sp>
+      <p:sp>
+        <p:nvSpPr>
           <p:cNvPr id="11" name="Rectangle 10"/>
           <p:cNvSpPr/>
           <p:nvPr/>
@@ -22921,7 +22998,7 @@
         <p:spPr>
           <a:xfrm>
             <a:off x="4368800" y="1358900"/>
-            <a:ext cx="3454400" cy="3302000"/>
+            <a:ext cx="3454400" cy="1587500"/>
           </a:xfrm>
           <a:prstGeom prst="rect">
             <a:avLst/>
@@ -22953,8 +23030,8 @@
         </p:nvSpPr>
         <p:spPr>
           <a:xfrm>
-            <a:off x="4648200" y="1587500"/>
-            <a:ext cx="1270000" cy="508000"/>
+            <a:off x="4622800" y="1511300"/>
+            <a:ext cx="762000" cy="381000"/>
           </a:xfrm>
           <a:prstGeom prst="rect">
             <a:avLst/>
@@ -22969,11 +23046,11 @@
           <a:p>
             <a:pPr algn="l">
               <a:lnSpc>
-                <a:spcPts val="3200"/>
-              </a:lnSpc>
-            </a:pPr>
-            <a:r>
-              <a:rPr sz="3200" b="1" lang="zh-CN" altLang="en-US">
+                <a:spcPts val="2420"/>
+              </a:lnSpc>
+            </a:pPr>
+            <a:r>
+              <a:rPr sz="2200" b="1" lang="zh-CN" altLang="en-US">
                 <a:solidFill>
                   <a:srgbClr val="0FF796"/>
                 </a:solidFill>
@@ -22994,8 +23071,8 @@
         </p:nvSpPr>
         <p:spPr>
           <a:xfrm>
-            <a:off x="4648200" y="2260600"/>
-            <a:ext cx="2921000" cy="355600"/>
+            <a:off x="4622800" y="1943100"/>
+            <a:ext cx="2984500" cy="317500"/>
           </a:xfrm>
           <a:prstGeom prst="rect">
             <a:avLst/>
@@ -23010,11 +23087,11 @@
           <a:p>
             <a:pPr algn="l">
               <a:lnSpc>
-                <a:spcPts val="2600"/>
-              </a:lnSpc>
-            </a:pPr>
-            <a:r>
-              <a:rPr sz="2000" b="1" lang="zh-CN" altLang="en-US">
+                <a:spcPts val="2210"/>
+              </a:lnSpc>
+            </a:pPr>
+            <a:r>
+              <a:rPr sz="1700" b="1" lang="zh-CN" altLang="en-US">
                 <a:solidFill>
                   <a:srgbClr val="F5F5F5"/>
                 </a:solidFill>
@@ -23035,8 +23112,8 @@
         </p:nvSpPr>
         <p:spPr>
           <a:xfrm>
-            <a:off x="4648200" y="2794000"/>
-            <a:ext cx="2921000" cy="1397000"/>
+            <a:off x="4622800" y="2324100"/>
+            <a:ext cx="2984500" cy="508000"/>
           </a:xfrm>
           <a:prstGeom prst="rect">
             <a:avLst/>
@@ -23051,87 +23128,47 @@
           <a:p>
             <a:pPr algn="l">
               <a:lnSpc>
-                <a:spcPts val="2625"/>
-              </a:lnSpc>
-            </a:pPr>
-            <a:r>
-              <a:rPr sz="1500" b="0" lang="zh-CN" altLang="en-US">
-                <a:solidFill>
-                  <a:srgbClr val="F5F5F5">
-                    <a:alpha val="70000"/>
-                  </a:srgbClr>
-                </a:solidFill>
-                <a:latin typeface="Consolas"/>
-                <a:ea typeface="微软雅黑"/>
-                <a:cs typeface="微软雅黑"/>
-              </a:rPr>
-              <a:t>美术把关</a:t>
-            </a:r>
-          </a:p>
-          <a:p>
-            <a:pPr algn="l">
-              <a:lnSpc>
-                <a:spcPts val="2625"/>
-              </a:lnSpc>
-            </a:pPr>
-            <a:r>
-              <a:rPr sz="1500" b="0" lang="zh-CN" altLang="en-US">
-                <a:solidFill>
-                  <a:srgbClr val="F5F5F5">
-                    <a:alpha val="70000"/>
-                  </a:srgbClr>
-                </a:solidFill>
-                <a:latin typeface="Consolas"/>
-                <a:ea typeface="微软雅黑"/>
-                <a:cs typeface="微软雅黑"/>
-              </a:rPr>
-              <a:t>UE</a:t>
-            </a:r>
-            <a:r>
-              <a:rPr sz="1500" b="0" lang="zh-CN" altLang="en-US">
-                <a:solidFill>
-                  <a:srgbClr val="F5F5F5">
-                    <a:alpha val="70000"/>
-                  </a:srgbClr>
-                </a:solidFill>
-                <a:latin typeface="微软雅黑"/>
-                <a:ea typeface="微软雅黑"/>
-                <a:cs typeface="微软雅黑"/>
-              </a:rPr>
-              <a:t> </a:t>
-            </a:r>
-            <a:r>
-              <a:rPr sz="1500" b="0" lang="zh-CN" altLang="en-US">
-                <a:solidFill>
-                  <a:srgbClr val="F5F5F5">
-                    <a:alpha val="70000"/>
-                  </a:srgbClr>
-                </a:solidFill>
-                <a:latin typeface="Consolas"/>
-                <a:ea typeface="微软雅黑"/>
-                <a:cs typeface="微软雅黑"/>
-              </a:rPr>
-              <a:t>里验收</a:t>
-            </a:r>
-          </a:p>
-          <a:p>
-            <a:pPr algn="l">
-              <a:lnSpc>
-                <a:spcPts val="2625"/>
-              </a:lnSpc>
-            </a:pPr>
-            <a:r>
-              <a:rPr sz="1500" b="0" lang="zh-CN" altLang="en-US">
-                <a:solidFill>
-                  <a:srgbClr val="F5F5F5">
-                    <a:alpha val="70000"/>
-                  </a:srgbClr>
-                </a:solidFill>
-                <a:latin typeface="Consolas"/>
-                <a:ea typeface="微软雅黑"/>
-                <a:cs typeface="微软雅黑"/>
-              </a:rPr>
-              <a:t>规范取舍</a:t>
+                <a:spcPts val="1875"/>
+              </a:lnSpc>
+            </a:pPr>
+            <a:r>
+              <a:rPr sz="1250" b="0" lang="zh-CN" altLang="en-US">
+                <a:solidFill>
+                  <a:srgbClr val="F5F5F5">
+                    <a:alpha val="70000"/>
+                  </a:srgbClr>
+                </a:solidFill>
+                <a:latin typeface="Consolas"/>
+                <a:ea typeface="微软雅黑"/>
+                <a:cs typeface="微软雅黑"/>
+              </a:rPr>
+              <a:t>美术把关、UE</a:t>
+            </a:r>
+            <a:r>
+              <a:rPr sz="1250" b="0" lang="zh-CN" altLang="en-US">
+                <a:solidFill>
+                  <a:srgbClr val="F5F5F5">
+                    <a:alpha val="70000"/>
+                  </a:srgbClr>
+                </a:solidFill>
+                <a:latin typeface="微软雅黑"/>
+                <a:ea typeface="微软雅黑"/>
+                <a:cs typeface="微软雅黑"/>
+              </a:rPr>
+              <a:t> </a:t>
+            </a:r>
+            <a:r>
+              <a:rPr sz="1250" b="0" lang="zh-CN" altLang="en-US">
+                <a:solidFill>
+                  <a:srgbClr val="F5F5F5">
+                    <a:alpha val="70000"/>
+                  </a:srgbClr>
+                </a:solidFill>
+                <a:latin typeface="Consolas"/>
+                <a:ea typeface="微软雅黑"/>
+                <a:cs typeface="微软雅黑"/>
+              </a:rPr>
+              <a:t>里验收、规范取舍</a:t>
             </a:r>
           </a:p>
         </p:txBody>
@@ -23144,37 +23181,8 @@
         </p:nvSpPr>
         <p:spPr>
           <a:xfrm>
-            <a:off x="4648200" y="4318000"/>
-            <a:ext cx="342900" cy="38100"/>
-          </a:xfrm>
-          <a:prstGeom prst="rect">
-            <a:avLst/>
-          </a:prstGeom>
-          <a:solidFill>
-            <a:srgbClr val="0FF796"/>
-          </a:solidFill>
-          <a:ln>
-            <a:noFill/>
-          </a:ln>
-        </p:spPr>
-        <p:txBody>
-          <a:bodyPr rtlCol="0" anchor="ctr"/>
-          <a:lstStyle/>
-          <a:p>
-            <a:pPr algn="ctr"/>
-          </a:p>
-        </p:txBody>
-      </p:sp>
-      <p:sp>
-        <p:nvSpPr>
-          <p:cNvPr id="16" name="Rectangle 15"/>
-          <p:cNvSpPr/>
-          <p:nvPr/>
-        </p:nvSpPr>
-        <p:spPr>
-          <a:xfrm>
             <a:off x="8128000" y="1358900"/>
-            <a:ext cx="3454400" cy="3302000"/>
+            <a:ext cx="3454400" cy="1587500"/>
           </a:xfrm>
           <a:prstGeom prst="rect">
             <a:avLst/>
@@ -23200,14 +23208,14 @@
       </p:sp>
       <p:sp>
         <p:nvSpPr>
-          <p:cNvPr id="17" name="TextBox 16"/>
+          <p:cNvPr id="16" name="TextBox 15"/>
           <p:cNvSpPr txBox="1"/>
           <p:nvPr/>
         </p:nvSpPr>
         <p:spPr>
           <a:xfrm>
-            <a:off x="8407400" y="1587500"/>
-            <a:ext cx="1270000" cy="508000"/>
+            <a:off x="8382000" y="1511300"/>
+            <a:ext cx="762000" cy="381000"/>
           </a:xfrm>
           <a:prstGeom prst="rect">
             <a:avLst/>
@@ -23222,11 +23230,11 @@
           <a:p>
             <a:pPr algn="l">
               <a:lnSpc>
-                <a:spcPts val="3200"/>
-              </a:lnSpc>
-            </a:pPr>
-            <a:r>
-              <a:rPr sz="3200" b="1" lang="zh-CN" altLang="en-US">
+                <a:spcPts val="2420"/>
+              </a:lnSpc>
+            </a:pPr>
+            <a:r>
+              <a:rPr sz="2200" b="1" lang="zh-CN" altLang="en-US">
                 <a:solidFill>
                   <a:srgbClr val="0FF796"/>
                 </a:solidFill>
@@ -23241,14 +23249,14 @@
       </p:sp>
       <p:sp>
         <p:nvSpPr>
-          <p:cNvPr id="18" name="TextBox 17"/>
+          <p:cNvPr id="17" name="TextBox 16"/>
           <p:cNvSpPr txBox="1"/>
           <p:nvPr/>
         </p:nvSpPr>
         <p:spPr>
           <a:xfrm>
-            <a:off x="8407400" y="2260600"/>
-            <a:ext cx="2921000" cy="355600"/>
+            <a:off x="8382000" y="1943100"/>
+            <a:ext cx="2984500" cy="317500"/>
           </a:xfrm>
           <a:prstGeom prst="rect">
             <a:avLst/>
@@ -23263,11 +23271,11 @@
           <a:p>
             <a:pPr algn="l">
               <a:lnSpc>
-                <a:spcPts val="2600"/>
-              </a:lnSpc>
-            </a:pPr>
-            <a:r>
-              <a:rPr sz="2000" b="1" lang="zh-CN" altLang="en-US">
+                <a:spcPts val="2210"/>
+              </a:lnSpc>
+            </a:pPr>
+            <a:r>
+              <a:rPr sz="1700" b="1" lang="zh-CN" altLang="en-US">
                 <a:solidFill>
                   <a:srgbClr val="F5F5F5"/>
                 </a:solidFill>
@@ -23282,14 +23290,14 @@
       </p:sp>
       <p:sp>
         <p:nvSpPr>
-          <p:cNvPr id="19" name="TextBox 18"/>
+          <p:cNvPr id="18" name="TextBox 17"/>
           <p:cNvSpPr txBox="1"/>
           <p:nvPr/>
         </p:nvSpPr>
         <p:spPr>
           <a:xfrm>
-            <a:off x="8407400" y="2794000"/>
-            <a:ext cx="2921000" cy="1397000"/>
+            <a:off x="8382000" y="2324100"/>
+            <a:ext cx="2984500" cy="508000"/>
           </a:xfrm>
           <a:prstGeom prst="rect">
             <a:avLst/>
@@ -23304,91 +23312,262 @@
           <a:p>
             <a:pPr algn="l">
               <a:lnSpc>
-                <a:spcPts val="2625"/>
-              </a:lnSpc>
-            </a:pPr>
-            <a:r>
-              <a:rPr sz="1500" b="0" lang="zh-CN" altLang="en-US">
-                <a:solidFill>
-                  <a:srgbClr val="F5F5F5">
-                    <a:alpha val="70000"/>
-                  </a:srgbClr>
-                </a:solidFill>
-                <a:latin typeface="Consolas"/>
-                <a:ea typeface="微软雅黑"/>
-                <a:cs typeface="微软雅黑"/>
-              </a:rPr>
-              <a:t>把要求写成规则</a:t>
-            </a:r>
-          </a:p>
+                <a:spcPts val="1875"/>
+              </a:lnSpc>
+            </a:pPr>
+            <a:r>
+              <a:rPr sz="1250" b="0" lang="zh-CN" altLang="en-US">
+                <a:solidFill>
+                  <a:srgbClr val="F5F5F5">
+                    <a:alpha val="70000"/>
+                  </a:srgbClr>
+                </a:solidFill>
+                <a:latin typeface="Consolas"/>
+                <a:ea typeface="微软雅黑"/>
+                <a:cs typeface="微软雅黑"/>
+              </a:rPr>
+              <a:t>把要求写成规则，每段工作留交接</a:t>
+            </a:r>
+          </a:p>
+        </p:txBody>
+      </p:sp>
+      <p:sp>
+        <p:nvSpPr>
+          <p:cNvPr id="19" name="TextBox 18"/>
+          <p:cNvSpPr txBox="1"/>
+          <p:nvPr/>
+        </p:nvSpPr>
+        <p:spPr>
+          <a:xfrm>
+            <a:off x="609600" y="3238500"/>
+            <a:ext cx="6985000" cy="254000"/>
+          </a:xfrm>
+          <a:prstGeom prst="rect">
+            <a:avLst/>
+          </a:prstGeom>
+          <a:noFill/>
+        </p:spPr>
+        <p:txBody>
+          <a:bodyPr wrap="square" lIns="0" rIns="0" tIns="0" bIns="0" anchor="t">
+            <a:noAutofit/>
+          </a:bodyPr>
+          <a:lstStyle/>
           <a:p>
             <a:pPr algn="l">
               <a:lnSpc>
-                <a:spcPts val="2625"/>
-              </a:lnSpc>
-            </a:pPr>
-            <a:r>
-              <a:rPr sz="1500" b="0" lang="zh-CN" altLang="en-US">
-                <a:solidFill>
-                  <a:srgbClr val="F5F5F5">
-                    <a:alpha val="70000"/>
-                  </a:srgbClr>
-                </a:solidFill>
-                <a:latin typeface="Consolas"/>
-                <a:ea typeface="微软雅黑"/>
-                <a:cs typeface="微软雅黑"/>
-              </a:rPr>
-              <a:t>每段工作留交接</a:t>
-            </a:r>
-          </a:p>
-          <a:p>
-            <a:pPr algn="l">
-              <a:lnSpc>
-                <a:spcPts val="2625"/>
-              </a:lnSpc>
-            </a:pPr>
-            <a:r>
-              <a:rPr sz="1500" b="0" lang="zh-CN" altLang="en-US">
-                <a:solidFill>
-                  <a:srgbClr val="F5F5F5">
-                    <a:alpha val="70000"/>
-                  </a:srgbClr>
-                </a:solidFill>
-                <a:latin typeface="Consolas"/>
-                <a:ea typeface="微软雅黑"/>
-                <a:cs typeface="微软雅黑"/>
-              </a:rPr>
-              <a:t>让工作能一段段接续</a:t>
-            </a:r>
-          </a:p>
-        </p:txBody>
-      </p:sp>
-      <p:sp>
-        <p:nvSpPr>
-          <p:cNvPr id="20" name="Rectangle 19"/>
-          <p:cNvSpPr/>
-          <p:nvPr/>
-        </p:nvSpPr>
-        <p:spPr>
-          <a:xfrm>
-            <a:off x="8407400" y="4318000"/>
-            <a:ext cx="342900" cy="38100"/>
-          </a:xfrm>
-          <a:prstGeom prst="rect">
-            <a:avLst/>
-          </a:prstGeom>
-          <a:solidFill>
-            <a:srgbClr val="0FF796"/>
-          </a:solidFill>
-          <a:ln>
-            <a:noFill/>
-          </a:ln>
-        </p:spPr>
-        <p:txBody>
-          <a:bodyPr rtlCol="0" anchor="ctr"/>
-          <a:lstStyle/>
-          <a:p>
-            <a:pPr algn="ctr"/>
+                <a:spcPts val="1690"/>
+              </a:lnSpc>
+            </a:pPr>
+            <a:r>
+              <a:rPr sz="1300" b="1" lang="zh-CN" altLang="en-US">
+                <a:solidFill>
+                  <a:srgbClr val="F5F5F5"/>
+                </a:solidFill>
+                <a:latin typeface="Consolas"/>
+                <a:ea typeface="微软雅黑"/>
+                <a:cs typeface="微软雅黑"/>
+              </a:rPr>
+              <a:t>一个多月里每天的项目提交量</a:t>
+            </a:r>
+          </a:p>
+        </p:txBody>
+      </p:sp>
+      <p:sp>
+        <p:nvSpPr>
+          <p:cNvPr id="20" name="TextBox 19"/>
+          <p:cNvSpPr txBox="1"/>
+          <p:nvPr/>
+        </p:nvSpPr>
+        <p:spPr>
+          <a:xfrm>
+            <a:off x="7594600" y="3238500"/>
+            <a:ext cx="3987800" cy="254000"/>
+          </a:xfrm>
+          <a:prstGeom prst="rect">
+            <a:avLst/>
+          </a:prstGeom>
+          <a:noFill/>
+        </p:spPr>
+        <p:txBody>
+          <a:bodyPr wrap="square" lIns="0" rIns="0" tIns="0" bIns="0" anchor="t">
+            <a:noAutofit/>
+          </a:bodyPr>
+          <a:lstStyle/>
+          <a:p>
+            <a:pPr algn="r">
+              <a:lnSpc>
+                <a:spcPts val="1690"/>
+              </a:lnSpc>
+            </a:pPr>
+            <a:r>
+              <a:rPr sz="1300" b="0" lang="zh-CN" altLang="en-US">
+                <a:solidFill>
+                  <a:srgbClr val="F5F5F5">
+                    <a:alpha val="70000"/>
+                  </a:srgbClr>
+                </a:solidFill>
+                <a:latin typeface="Consolas"/>
+                <a:ea typeface="微软雅黑"/>
+                <a:cs typeface="微软雅黑"/>
+              </a:rPr>
+              <a:t>约</a:t>
+            </a:r>
+            <a:r>
+              <a:rPr sz="1300" b="0" lang="zh-CN" altLang="en-US">
+                <a:solidFill>
+                  <a:srgbClr val="F5F5F5">
+                    <a:alpha val="70000"/>
+                  </a:srgbClr>
+                </a:solidFill>
+                <a:latin typeface="微软雅黑"/>
+                <a:ea typeface="微软雅黑"/>
+                <a:cs typeface="微软雅黑"/>
+              </a:rPr>
+              <a:t> </a:t>
+            </a:r>
+            <a:r>
+              <a:rPr sz="1300" b="0" lang="zh-CN" altLang="en-US">
+                <a:solidFill>
+                  <a:srgbClr val="F5F5F5">
+                    <a:alpha val="70000"/>
+                  </a:srgbClr>
+                </a:solidFill>
+                <a:latin typeface="Consolas"/>
+                <a:ea typeface="微软雅黑"/>
+                <a:cs typeface="微软雅黑"/>
+              </a:rPr>
+              <a:t>2200</a:t>
+            </a:r>
+            <a:r>
+              <a:rPr sz="1300" b="0" lang="zh-CN" altLang="en-US">
+                <a:solidFill>
+                  <a:srgbClr val="F5F5F5">
+                    <a:alpha val="70000"/>
+                  </a:srgbClr>
+                </a:solidFill>
+                <a:latin typeface="微软雅黑"/>
+                <a:ea typeface="微软雅黑"/>
+                <a:cs typeface="微软雅黑"/>
+              </a:rPr>
+              <a:t> </a:t>
+            </a:r>
+            <a:r>
+              <a:rPr sz="1300" b="0" lang="zh-CN" altLang="en-US">
+                <a:solidFill>
+                  <a:srgbClr val="F5F5F5">
+                    <a:alpha val="70000"/>
+                  </a:srgbClr>
+                </a:solidFill>
+                <a:latin typeface="Consolas"/>
+                <a:ea typeface="微软雅黑"/>
+                <a:cs typeface="微软雅黑"/>
+              </a:rPr>
+              <a:t>次提交</a:t>
+            </a:r>
+            <a:r>
+              <a:rPr sz="1300" b="0" lang="zh-CN" altLang="en-US">
+                <a:solidFill>
+                  <a:srgbClr val="F5F5F5">
+                    <a:alpha val="70000"/>
+                  </a:srgbClr>
+                </a:solidFill>
+                <a:latin typeface="微软雅黑"/>
+                <a:ea typeface="微软雅黑"/>
+                <a:cs typeface="微软雅黑"/>
+              </a:rPr>
+              <a:t> </a:t>
+            </a:r>
+            <a:r>
+              <a:rPr sz="1300" b="0" lang="zh-CN" altLang="en-US">
+                <a:solidFill>
+                  <a:srgbClr val="F5F5F5">
+                    <a:alpha val="70000"/>
+                  </a:srgbClr>
+                </a:solidFill>
+                <a:latin typeface="Consolas"/>
+                <a:ea typeface="微软雅黑"/>
+                <a:cs typeface="微软雅黑"/>
+              </a:rPr>
+              <a:t>·</a:t>
+            </a:r>
+            <a:r>
+              <a:rPr sz="1300" b="0" lang="zh-CN" altLang="en-US">
+                <a:solidFill>
+                  <a:srgbClr val="F5F5F5">
+                    <a:alpha val="70000"/>
+                  </a:srgbClr>
+                </a:solidFill>
+                <a:latin typeface="微软雅黑"/>
+                <a:ea typeface="微软雅黑"/>
+                <a:cs typeface="微软雅黑"/>
+              </a:rPr>
+              <a:t> </a:t>
+            </a:r>
+            <a:r>
+              <a:rPr sz="1300" b="0" lang="zh-CN" altLang="en-US">
+                <a:solidFill>
+                  <a:srgbClr val="F5F5F5">
+                    <a:alpha val="70000"/>
+                  </a:srgbClr>
+                </a:solidFill>
+                <a:latin typeface="Consolas"/>
+                <a:ea typeface="微软雅黑"/>
+                <a:cs typeface="微软雅黑"/>
+              </a:rPr>
+              <a:t>烘焙器近</a:t>
+            </a:r>
+            <a:r>
+              <a:rPr sz="1300" b="0" lang="zh-CN" altLang="en-US">
+                <a:solidFill>
+                  <a:srgbClr val="F5F5F5">
+                    <a:alpha val="70000"/>
+                  </a:srgbClr>
+                </a:solidFill>
+                <a:latin typeface="微软雅黑"/>
+                <a:ea typeface="微软雅黑"/>
+                <a:cs typeface="微软雅黑"/>
+              </a:rPr>
+              <a:t> </a:t>
+            </a:r>
+            <a:r>
+              <a:rPr sz="1300" b="0" lang="zh-CN" altLang="en-US">
+                <a:solidFill>
+                  <a:srgbClr val="F5F5F5">
+                    <a:alpha val="70000"/>
+                  </a:srgbClr>
+                </a:solidFill>
+                <a:latin typeface="Consolas"/>
+                <a:ea typeface="微软雅黑"/>
+                <a:cs typeface="微软雅黑"/>
+              </a:rPr>
+              <a:t>200</a:t>
+            </a:r>
+            <a:r>
+              <a:rPr sz="1300" b="0" lang="zh-CN" altLang="en-US">
+                <a:solidFill>
+                  <a:srgbClr val="F5F5F5">
+                    <a:alpha val="70000"/>
+                  </a:srgbClr>
+                </a:solidFill>
+                <a:latin typeface="微软雅黑"/>
+                <a:ea typeface="微软雅黑"/>
+                <a:cs typeface="微软雅黑"/>
+              </a:rPr>
+              <a:t> </a:t>
+            </a:r>
+            <a:r>
+              <a:rPr sz="1300" b="0" lang="zh-CN" altLang="en-US">
+                <a:solidFill>
+                  <a:srgbClr val="F5F5F5">
+                    <a:alpha val="70000"/>
+                  </a:srgbClr>
+                </a:solidFill>
+                <a:latin typeface="Consolas"/>
+                <a:ea typeface="微软雅黑"/>
+                <a:cs typeface="微软雅黑"/>
+              </a:rPr>
+              <a:t>个版本号</a:t>
+            </a:r>
           </a:p>
         </p:txBody>
       </p:sp>
@@ -23400,7 +23579,7 @@
         </p:nvSpPr>
         <p:spPr>
           <a:xfrm>
-            <a:off x="609600" y="5016500"/>
+            <a:off x="609600" y="5715000"/>
             <a:ext cx="10972800" cy="6350"/>
           </a:xfrm>
           <a:prstGeom prst="rect">
@@ -23408,7 +23587,7 @@
           </a:prstGeom>
           <a:solidFill>
             <a:srgbClr val="F5F5F5">
-              <a:alpha val="12000"/>
+              <a:alpha val="15000"/>
             </a:srgbClr>
           </a:solidFill>
           <a:ln>
@@ -23425,14 +23604,1006 @@
       </p:sp>
       <p:sp>
         <p:nvSpPr>
-          <p:cNvPr id="22" name="TextBox 21"/>
+          <p:cNvPr id="22" name="Rectangle 21"/>
+          <p:cNvSpPr/>
+          <p:nvPr/>
+        </p:nvSpPr>
+        <p:spPr>
+          <a:xfrm>
+            <a:off x="682752" y="5604933"/>
+            <a:ext cx="186205" cy="110067"/>
+          </a:xfrm>
+          <a:prstGeom prst="rect">
+            <a:avLst/>
+          </a:prstGeom>
+          <a:solidFill>
+            <a:srgbClr val="F5F5F5">
+              <a:alpha val="30000"/>
+            </a:srgbClr>
+          </a:solidFill>
+          <a:ln>
+            <a:noFill/>
+          </a:ln>
+        </p:spPr>
+        <p:txBody>
+          <a:bodyPr rtlCol="0" anchor="ctr"/>
+          <a:lstStyle/>
+          <a:p>
+            <a:pPr algn="ctr"/>
+          </a:p>
+        </p:txBody>
+      </p:sp>
+      <p:sp>
+        <p:nvSpPr>
+          <p:cNvPr id="23" name="Rectangle 22"/>
+          <p:cNvSpPr/>
+          <p:nvPr/>
+        </p:nvSpPr>
+        <p:spPr>
+          <a:xfrm>
+            <a:off x="1015261" y="5494867"/>
+            <a:ext cx="186205" cy="220133"/>
+          </a:xfrm>
+          <a:prstGeom prst="rect">
+            <a:avLst/>
+          </a:prstGeom>
+          <a:solidFill>
+            <a:srgbClr val="F5F5F5">
+              <a:alpha val="30000"/>
+            </a:srgbClr>
+          </a:solidFill>
+          <a:ln>
+            <a:noFill/>
+          </a:ln>
+        </p:spPr>
+        <p:txBody>
+          <a:bodyPr rtlCol="0" anchor="ctr"/>
+          <a:lstStyle/>
+          <a:p>
+            <a:pPr algn="ctr"/>
+          </a:p>
+        </p:txBody>
+      </p:sp>
+      <p:sp>
+        <p:nvSpPr>
+          <p:cNvPr id="24" name="Rectangle 23"/>
+          <p:cNvSpPr/>
+          <p:nvPr/>
+        </p:nvSpPr>
+        <p:spPr>
+          <a:xfrm>
+            <a:off x="1347770" y="5469467"/>
+            <a:ext cx="186205" cy="245533"/>
+          </a:xfrm>
+          <a:prstGeom prst="rect">
+            <a:avLst/>
+          </a:prstGeom>
+          <a:solidFill>
+            <a:srgbClr val="F5F5F5">
+              <a:alpha val="30000"/>
+            </a:srgbClr>
+          </a:solidFill>
+          <a:ln>
+            <a:noFill/>
+          </a:ln>
+        </p:spPr>
+        <p:txBody>
+          <a:bodyPr rtlCol="0" anchor="ctr"/>
+          <a:lstStyle/>
+          <a:p>
+            <a:pPr algn="ctr"/>
+          </a:p>
+        </p:txBody>
+      </p:sp>
+      <p:sp>
+        <p:nvSpPr>
+          <p:cNvPr id="25" name="Rectangle 24"/>
+          <p:cNvSpPr/>
+          <p:nvPr/>
+        </p:nvSpPr>
+        <p:spPr>
+          <a:xfrm>
+            <a:off x="1680279" y="4876800"/>
+            <a:ext cx="186205" cy="838200"/>
+          </a:xfrm>
+          <a:prstGeom prst="rect">
+            <a:avLst/>
+          </a:prstGeom>
+          <a:solidFill>
+            <a:srgbClr val="F5F5F5">
+              <a:alpha val="30000"/>
+            </a:srgbClr>
+          </a:solidFill>
+          <a:ln>
+            <a:noFill/>
+          </a:ln>
+        </p:spPr>
+        <p:txBody>
+          <a:bodyPr rtlCol="0" anchor="ctr"/>
+          <a:lstStyle/>
+          <a:p>
+            <a:pPr algn="ctr"/>
+          </a:p>
+        </p:txBody>
+      </p:sp>
+      <p:sp>
+        <p:nvSpPr>
+          <p:cNvPr id="26" name="Rectangle 25"/>
+          <p:cNvSpPr/>
+          <p:nvPr/>
+        </p:nvSpPr>
+        <p:spPr>
+          <a:xfrm>
+            <a:off x="2012788" y="4859867"/>
+            <a:ext cx="186205" cy="855133"/>
+          </a:xfrm>
+          <a:prstGeom prst="rect">
+            <a:avLst/>
+          </a:prstGeom>
+          <a:solidFill>
+            <a:srgbClr val="F5F5F5">
+              <a:alpha val="30000"/>
+            </a:srgbClr>
+          </a:solidFill>
+          <a:ln>
+            <a:noFill/>
+          </a:ln>
+        </p:spPr>
+        <p:txBody>
+          <a:bodyPr rtlCol="0" anchor="ctr"/>
+          <a:lstStyle/>
+          <a:p>
+            <a:pPr algn="ctr"/>
+          </a:p>
+        </p:txBody>
+      </p:sp>
+      <p:sp>
+        <p:nvSpPr>
+          <p:cNvPr id="27" name="Rectangle 26"/>
+          <p:cNvSpPr/>
+          <p:nvPr/>
+        </p:nvSpPr>
+        <p:spPr>
+          <a:xfrm>
+            <a:off x="2345297" y="4394200"/>
+            <a:ext cx="186205" cy="1320800"/>
+          </a:xfrm>
+          <a:prstGeom prst="rect">
+            <a:avLst/>
+          </a:prstGeom>
+          <a:solidFill>
+            <a:srgbClr val="F5F5F5">
+              <a:alpha val="30000"/>
+            </a:srgbClr>
+          </a:solidFill>
+          <a:ln>
+            <a:noFill/>
+          </a:ln>
+        </p:spPr>
+        <p:txBody>
+          <a:bodyPr rtlCol="0" anchor="ctr"/>
+          <a:lstStyle/>
+          <a:p>
+            <a:pPr algn="ctr"/>
+          </a:p>
+        </p:txBody>
+      </p:sp>
+      <p:sp>
+        <p:nvSpPr>
+          <p:cNvPr id="28" name="Rectangle 27"/>
+          <p:cNvSpPr/>
+          <p:nvPr/>
+        </p:nvSpPr>
+        <p:spPr>
+          <a:xfrm>
+            <a:off x="2677807" y="4885267"/>
+            <a:ext cx="186205" cy="829733"/>
+          </a:xfrm>
+          <a:prstGeom prst="rect">
+            <a:avLst/>
+          </a:prstGeom>
+          <a:solidFill>
+            <a:srgbClr val="F5F5F5">
+              <a:alpha val="30000"/>
+            </a:srgbClr>
+          </a:solidFill>
+          <a:ln>
+            <a:noFill/>
+          </a:ln>
+        </p:spPr>
+        <p:txBody>
+          <a:bodyPr rtlCol="0" anchor="ctr"/>
+          <a:lstStyle/>
+          <a:p>
+            <a:pPr algn="ctr"/>
+          </a:p>
+        </p:txBody>
+      </p:sp>
+      <p:sp>
+        <p:nvSpPr>
+          <p:cNvPr id="29" name="Rectangle 28"/>
+          <p:cNvSpPr/>
+          <p:nvPr/>
+        </p:nvSpPr>
+        <p:spPr>
+          <a:xfrm>
+            <a:off x="3010316" y="4927600"/>
+            <a:ext cx="186205" cy="787400"/>
+          </a:xfrm>
+          <a:prstGeom prst="rect">
+            <a:avLst/>
+          </a:prstGeom>
+          <a:solidFill>
+            <a:srgbClr val="F5F5F5">
+              <a:alpha val="30000"/>
+            </a:srgbClr>
+          </a:solidFill>
+          <a:ln>
+            <a:noFill/>
+          </a:ln>
+        </p:spPr>
+        <p:txBody>
+          <a:bodyPr rtlCol="0" anchor="ctr"/>
+          <a:lstStyle/>
+          <a:p>
+            <a:pPr algn="ctr"/>
+          </a:p>
+        </p:txBody>
+      </p:sp>
+      <p:sp>
+        <p:nvSpPr>
+          <p:cNvPr id="30" name="Rectangle 29"/>
+          <p:cNvSpPr/>
+          <p:nvPr/>
+        </p:nvSpPr>
+        <p:spPr>
+          <a:xfrm>
+            <a:off x="3342825" y="4902200"/>
+            <a:ext cx="186205" cy="812800"/>
+          </a:xfrm>
+          <a:prstGeom prst="rect">
+            <a:avLst/>
+          </a:prstGeom>
+          <a:solidFill>
+            <a:srgbClr val="F5F5F5">
+              <a:alpha val="30000"/>
+            </a:srgbClr>
+          </a:solidFill>
+          <a:ln>
+            <a:noFill/>
+          </a:ln>
+        </p:spPr>
+        <p:txBody>
+          <a:bodyPr rtlCol="0" anchor="ctr"/>
+          <a:lstStyle/>
+          <a:p>
+            <a:pPr algn="ctr"/>
+          </a:p>
+        </p:txBody>
+      </p:sp>
+      <p:sp>
+        <p:nvSpPr>
+          <p:cNvPr id="31" name="Rectangle 30"/>
+          <p:cNvSpPr/>
+          <p:nvPr/>
+        </p:nvSpPr>
+        <p:spPr>
+          <a:xfrm>
+            <a:off x="3675334" y="4732867"/>
+            <a:ext cx="186205" cy="982133"/>
+          </a:xfrm>
+          <a:prstGeom prst="rect">
+            <a:avLst/>
+          </a:prstGeom>
+          <a:solidFill>
+            <a:srgbClr val="F5F5F5">
+              <a:alpha val="30000"/>
+            </a:srgbClr>
+          </a:solidFill>
+          <a:ln>
+            <a:noFill/>
+          </a:ln>
+        </p:spPr>
+        <p:txBody>
+          <a:bodyPr rtlCol="0" anchor="ctr"/>
+          <a:lstStyle/>
+          <a:p>
+            <a:pPr algn="ctr"/>
+          </a:p>
+        </p:txBody>
+      </p:sp>
+      <p:sp>
+        <p:nvSpPr>
+          <p:cNvPr id="32" name="Rectangle 31"/>
+          <p:cNvSpPr/>
+          <p:nvPr/>
+        </p:nvSpPr>
+        <p:spPr>
+          <a:xfrm>
+            <a:off x="4007843" y="3683000"/>
+            <a:ext cx="186205" cy="2032000"/>
+          </a:xfrm>
+          <a:prstGeom prst="rect">
+            <a:avLst/>
+          </a:prstGeom>
+          <a:solidFill>
+            <a:srgbClr val="F5F5F5">
+              <a:alpha val="30000"/>
+            </a:srgbClr>
+          </a:solidFill>
+          <a:ln>
+            <a:noFill/>
+          </a:ln>
+        </p:spPr>
+        <p:txBody>
+          <a:bodyPr rtlCol="0" anchor="ctr"/>
+          <a:lstStyle/>
+          <a:p>
+            <a:pPr algn="ctr"/>
+          </a:p>
+        </p:txBody>
+      </p:sp>
+      <p:sp>
+        <p:nvSpPr>
+          <p:cNvPr id="33" name="Rectangle 32"/>
+          <p:cNvSpPr/>
+          <p:nvPr/>
+        </p:nvSpPr>
+        <p:spPr>
+          <a:xfrm>
+            <a:off x="4340352" y="4250267"/>
+            <a:ext cx="186205" cy="1464733"/>
+          </a:xfrm>
+          <a:prstGeom prst="rect">
+            <a:avLst/>
+          </a:prstGeom>
+          <a:solidFill>
+            <a:srgbClr val="F5F5F5">
+              <a:alpha val="30000"/>
+            </a:srgbClr>
+          </a:solidFill>
+          <a:ln>
+            <a:noFill/>
+          </a:ln>
+        </p:spPr>
+        <p:txBody>
+          <a:bodyPr rtlCol="0" anchor="ctr"/>
+          <a:lstStyle/>
+          <a:p>
+            <a:pPr algn="ctr"/>
+          </a:p>
+        </p:txBody>
+      </p:sp>
+      <p:sp>
+        <p:nvSpPr>
+          <p:cNvPr id="34" name="Rectangle 33"/>
+          <p:cNvSpPr/>
+          <p:nvPr/>
+        </p:nvSpPr>
+        <p:spPr>
+          <a:xfrm>
+            <a:off x="4672861" y="5223933"/>
+            <a:ext cx="186205" cy="491067"/>
+          </a:xfrm>
+          <a:prstGeom prst="rect">
+            <a:avLst/>
+          </a:prstGeom>
+          <a:solidFill>
+            <a:srgbClr val="F5F5F5">
+              <a:alpha val="30000"/>
+            </a:srgbClr>
+          </a:solidFill>
+          <a:ln>
+            <a:noFill/>
+          </a:ln>
+        </p:spPr>
+        <p:txBody>
+          <a:bodyPr rtlCol="0" anchor="ctr"/>
+          <a:lstStyle/>
+          <a:p>
+            <a:pPr algn="ctr"/>
+          </a:p>
+        </p:txBody>
+      </p:sp>
+      <p:sp>
+        <p:nvSpPr>
+          <p:cNvPr id="35" name="Rectangle 34"/>
+          <p:cNvSpPr/>
+          <p:nvPr/>
+        </p:nvSpPr>
+        <p:spPr>
+          <a:xfrm>
+            <a:off x="5005370" y="4690533"/>
+            <a:ext cx="186205" cy="1024467"/>
+          </a:xfrm>
+          <a:prstGeom prst="rect">
+            <a:avLst/>
+          </a:prstGeom>
+          <a:solidFill>
+            <a:srgbClr val="F5F5F5">
+              <a:alpha val="30000"/>
+            </a:srgbClr>
+          </a:solidFill>
+          <a:ln>
+            <a:noFill/>
+          </a:ln>
+        </p:spPr>
+        <p:txBody>
+          <a:bodyPr rtlCol="0" anchor="ctr"/>
+          <a:lstStyle/>
+          <a:p>
+            <a:pPr algn="ctr"/>
+          </a:p>
+        </p:txBody>
+      </p:sp>
+      <p:sp>
+        <p:nvSpPr>
+          <p:cNvPr id="36" name="Rectangle 35"/>
+          <p:cNvSpPr/>
+          <p:nvPr/>
+        </p:nvSpPr>
+        <p:spPr>
+          <a:xfrm>
+            <a:off x="5337879" y="5401733"/>
+            <a:ext cx="186205" cy="313267"/>
+          </a:xfrm>
+          <a:prstGeom prst="rect">
+            <a:avLst/>
+          </a:prstGeom>
+          <a:solidFill>
+            <a:srgbClr val="F5F5F5">
+              <a:alpha val="30000"/>
+            </a:srgbClr>
+          </a:solidFill>
+          <a:ln>
+            <a:noFill/>
+          </a:ln>
+        </p:spPr>
+        <p:txBody>
+          <a:bodyPr rtlCol="0" anchor="ctr"/>
+          <a:lstStyle/>
+          <a:p>
+            <a:pPr algn="ctr"/>
+          </a:p>
+        </p:txBody>
+      </p:sp>
+      <p:sp>
+        <p:nvSpPr>
+          <p:cNvPr id="37" name="Rectangle 36"/>
+          <p:cNvSpPr/>
+          <p:nvPr/>
+        </p:nvSpPr>
+        <p:spPr>
+          <a:xfrm>
+            <a:off x="5670388" y="5317067"/>
+            <a:ext cx="186205" cy="397933"/>
+          </a:xfrm>
+          <a:prstGeom prst="rect">
+            <a:avLst/>
+          </a:prstGeom>
+          <a:solidFill>
+            <a:srgbClr val="F5F5F5">
+              <a:alpha val="30000"/>
+            </a:srgbClr>
+          </a:solidFill>
+          <a:ln>
+            <a:noFill/>
+          </a:ln>
+        </p:spPr>
+        <p:txBody>
+          <a:bodyPr rtlCol="0" anchor="ctr"/>
+          <a:lstStyle/>
+          <a:p>
+            <a:pPr algn="ctr"/>
+          </a:p>
+        </p:txBody>
+      </p:sp>
+      <p:sp>
+        <p:nvSpPr>
+          <p:cNvPr id="38" name="Rectangle 37"/>
+          <p:cNvSpPr/>
+          <p:nvPr/>
+        </p:nvSpPr>
+        <p:spPr>
+          <a:xfrm>
+            <a:off x="6002897" y="4792133"/>
+            <a:ext cx="186205" cy="922867"/>
+          </a:xfrm>
+          <a:prstGeom prst="rect">
+            <a:avLst/>
+          </a:prstGeom>
+          <a:solidFill>
+            <a:srgbClr val="F5F5F5">
+              <a:alpha val="30000"/>
+            </a:srgbClr>
+          </a:solidFill>
+          <a:ln>
+            <a:noFill/>
+          </a:ln>
+        </p:spPr>
+        <p:txBody>
+          <a:bodyPr rtlCol="0" anchor="ctr"/>
+          <a:lstStyle/>
+          <a:p>
+            <a:pPr algn="ctr"/>
+          </a:p>
+        </p:txBody>
+      </p:sp>
+      <p:sp>
+        <p:nvSpPr>
+          <p:cNvPr id="39" name="Rectangle 38"/>
+          <p:cNvSpPr/>
+          <p:nvPr/>
+        </p:nvSpPr>
+        <p:spPr>
+          <a:xfrm>
+            <a:off x="6335407" y="4741333"/>
+            <a:ext cx="186205" cy="973667"/>
+          </a:xfrm>
+          <a:prstGeom prst="rect">
+            <a:avLst/>
+          </a:prstGeom>
+          <a:solidFill>
+            <a:srgbClr val="F5F5F5">
+              <a:alpha val="30000"/>
+            </a:srgbClr>
+          </a:solidFill>
+          <a:ln>
+            <a:noFill/>
+          </a:ln>
+        </p:spPr>
+        <p:txBody>
+          <a:bodyPr rtlCol="0" anchor="ctr"/>
+          <a:lstStyle/>
+          <a:p>
+            <a:pPr algn="ctr"/>
+          </a:p>
+        </p:txBody>
+      </p:sp>
+      <p:sp>
+        <p:nvSpPr>
+          <p:cNvPr id="40" name="Rectangle 39"/>
+          <p:cNvSpPr/>
+          <p:nvPr/>
+        </p:nvSpPr>
+        <p:spPr>
+          <a:xfrm>
+            <a:off x="6667916" y="5054600"/>
+            <a:ext cx="186205" cy="660400"/>
+          </a:xfrm>
+          <a:prstGeom prst="rect">
+            <a:avLst/>
+          </a:prstGeom>
+          <a:solidFill>
+            <a:srgbClr val="F5F5F5">
+              <a:alpha val="30000"/>
+            </a:srgbClr>
+          </a:solidFill>
+          <a:ln>
+            <a:noFill/>
+          </a:ln>
+        </p:spPr>
+        <p:txBody>
+          <a:bodyPr rtlCol="0" anchor="ctr"/>
+          <a:lstStyle/>
+          <a:p>
+            <a:pPr algn="ctr"/>
+          </a:p>
+        </p:txBody>
+      </p:sp>
+      <p:sp>
+        <p:nvSpPr>
+          <p:cNvPr id="41" name="Rectangle 40"/>
+          <p:cNvSpPr/>
+          <p:nvPr/>
+        </p:nvSpPr>
+        <p:spPr>
+          <a:xfrm>
+            <a:off x="7000425" y="4834467"/>
+            <a:ext cx="186205" cy="880533"/>
+          </a:xfrm>
+          <a:prstGeom prst="rect">
+            <a:avLst/>
+          </a:prstGeom>
+          <a:solidFill>
+            <a:srgbClr val="F5F5F5">
+              <a:alpha val="30000"/>
+            </a:srgbClr>
+          </a:solidFill>
+          <a:ln>
+            <a:noFill/>
+          </a:ln>
+        </p:spPr>
+        <p:txBody>
+          <a:bodyPr rtlCol="0" anchor="ctr"/>
+          <a:lstStyle/>
+          <a:p>
+            <a:pPr algn="ctr"/>
+          </a:p>
+        </p:txBody>
+      </p:sp>
+      <p:sp>
+        <p:nvSpPr>
+          <p:cNvPr id="42" name="Rectangle 41"/>
+          <p:cNvSpPr/>
+          <p:nvPr/>
+        </p:nvSpPr>
+        <p:spPr>
+          <a:xfrm>
+            <a:off x="7332934" y="5215467"/>
+            <a:ext cx="186205" cy="499533"/>
+          </a:xfrm>
+          <a:prstGeom prst="rect">
+            <a:avLst/>
+          </a:prstGeom>
+          <a:solidFill>
+            <a:srgbClr val="F5F5F5">
+              <a:alpha val="30000"/>
+            </a:srgbClr>
+          </a:solidFill>
+          <a:ln>
+            <a:noFill/>
+          </a:ln>
+        </p:spPr>
+        <p:txBody>
+          <a:bodyPr rtlCol="0" anchor="ctr"/>
+          <a:lstStyle/>
+          <a:p>
+            <a:pPr algn="ctr"/>
+          </a:p>
+        </p:txBody>
+      </p:sp>
+      <p:sp>
+        <p:nvSpPr>
+          <p:cNvPr id="43" name="Rectangle 42"/>
+          <p:cNvSpPr/>
+          <p:nvPr/>
+        </p:nvSpPr>
+        <p:spPr>
+          <a:xfrm>
+            <a:off x="7665443" y="5342467"/>
+            <a:ext cx="186205" cy="372533"/>
+          </a:xfrm>
+          <a:prstGeom prst="rect">
+            <a:avLst/>
+          </a:prstGeom>
+          <a:solidFill>
+            <a:srgbClr val="F5F5F5">
+              <a:alpha val="30000"/>
+            </a:srgbClr>
+          </a:solidFill>
+          <a:ln>
+            <a:noFill/>
+          </a:ln>
+        </p:spPr>
+        <p:txBody>
+          <a:bodyPr rtlCol="0" anchor="ctr"/>
+          <a:lstStyle/>
+          <a:p>
+            <a:pPr algn="ctr"/>
+          </a:p>
+        </p:txBody>
+      </p:sp>
+      <p:sp>
+        <p:nvSpPr>
+          <p:cNvPr id="44" name="Rectangle 43"/>
+          <p:cNvSpPr/>
+          <p:nvPr/>
+        </p:nvSpPr>
+        <p:spPr>
+          <a:xfrm>
+            <a:off x="7997952" y="5376333"/>
+            <a:ext cx="186205" cy="338667"/>
+          </a:xfrm>
+          <a:prstGeom prst="rect">
+            <a:avLst/>
+          </a:prstGeom>
+          <a:solidFill>
+            <a:srgbClr val="F5F5F5">
+              <a:alpha val="30000"/>
+            </a:srgbClr>
+          </a:solidFill>
+          <a:ln>
+            <a:noFill/>
+          </a:ln>
+        </p:spPr>
+        <p:txBody>
+          <a:bodyPr rtlCol="0" anchor="ctr"/>
+          <a:lstStyle/>
+          <a:p>
+            <a:pPr algn="ctr"/>
+          </a:p>
+        </p:txBody>
+      </p:sp>
+      <p:sp>
+        <p:nvSpPr>
+          <p:cNvPr id="45" name="Rectangle 44"/>
+          <p:cNvSpPr/>
+          <p:nvPr/>
+        </p:nvSpPr>
+        <p:spPr>
+          <a:xfrm>
+            <a:off x="8330461" y="5613400"/>
+            <a:ext cx="186205" cy="101600"/>
+          </a:xfrm>
+          <a:prstGeom prst="rect">
+            <a:avLst/>
+          </a:prstGeom>
+          <a:solidFill>
+            <a:srgbClr val="F5F5F5">
+              <a:alpha val="30000"/>
+            </a:srgbClr>
+          </a:solidFill>
+          <a:ln>
+            <a:noFill/>
+          </a:ln>
+        </p:spPr>
+        <p:txBody>
+          <a:bodyPr rtlCol="0" anchor="ctr"/>
+          <a:lstStyle/>
+          <a:p>
+            <a:pPr algn="ctr"/>
+          </a:p>
+        </p:txBody>
+      </p:sp>
+      <p:sp>
+        <p:nvSpPr>
+          <p:cNvPr id="46" name="Rectangle 45"/>
+          <p:cNvSpPr/>
+          <p:nvPr/>
+        </p:nvSpPr>
+        <p:spPr>
+          <a:xfrm>
+            <a:off x="8662970" y="5702300"/>
+            <a:ext cx="186205" cy="12700"/>
+          </a:xfrm>
+          <a:prstGeom prst="rect">
+            <a:avLst/>
+          </a:prstGeom>
+          <a:solidFill>
+            <a:srgbClr val="F5F5F5">
+              <a:alpha val="30000"/>
+            </a:srgbClr>
+          </a:solidFill>
+          <a:ln>
+            <a:noFill/>
+          </a:ln>
+        </p:spPr>
+        <p:txBody>
+          <a:bodyPr rtlCol="0" anchor="ctr"/>
+          <a:lstStyle/>
+          <a:p>
+            <a:pPr algn="ctr"/>
+          </a:p>
+        </p:txBody>
+      </p:sp>
+      <p:sp>
+        <p:nvSpPr>
+          <p:cNvPr id="47" name="Rectangle 46"/>
+          <p:cNvSpPr/>
+          <p:nvPr/>
+        </p:nvSpPr>
+        <p:spPr>
+          <a:xfrm>
+            <a:off x="8995479" y="5325533"/>
+            <a:ext cx="186205" cy="389467"/>
+          </a:xfrm>
+          <a:prstGeom prst="rect">
+            <a:avLst/>
+          </a:prstGeom>
+          <a:solidFill>
+            <a:srgbClr val="F5F5F5">
+              <a:alpha val="30000"/>
+            </a:srgbClr>
+          </a:solidFill>
+          <a:ln>
+            <a:noFill/>
+          </a:ln>
+        </p:spPr>
+        <p:txBody>
+          <a:bodyPr rtlCol="0" anchor="ctr"/>
+          <a:lstStyle/>
+          <a:p>
+            <a:pPr algn="ctr"/>
+          </a:p>
+        </p:txBody>
+      </p:sp>
+      <p:sp>
+        <p:nvSpPr>
+          <p:cNvPr id="48" name="Rectangle 47"/>
+          <p:cNvSpPr/>
+          <p:nvPr/>
+        </p:nvSpPr>
+        <p:spPr>
+          <a:xfrm>
+            <a:off x="9327988" y="5537200"/>
+            <a:ext cx="186205" cy="177800"/>
+          </a:xfrm>
+          <a:prstGeom prst="rect">
+            <a:avLst/>
+          </a:prstGeom>
+          <a:solidFill>
+            <a:srgbClr val="F5F5F5">
+              <a:alpha val="30000"/>
+            </a:srgbClr>
+          </a:solidFill>
+          <a:ln>
+            <a:noFill/>
+          </a:ln>
+        </p:spPr>
+        <p:txBody>
+          <a:bodyPr rtlCol="0" anchor="ctr"/>
+          <a:lstStyle/>
+          <a:p>
+            <a:pPr algn="ctr"/>
+          </a:p>
+        </p:txBody>
+      </p:sp>
+      <p:sp>
+        <p:nvSpPr>
+          <p:cNvPr id="49" name="Rectangle 48"/>
+          <p:cNvSpPr/>
+          <p:nvPr/>
+        </p:nvSpPr>
+        <p:spPr>
+          <a:xfrm>
+            <a:off x="9660497" y="5638800"/>
+            <a:ext cx="186205" cy="76200"/>
+          </a:xfrm>
+          <a:prstGeom prst="rect">
+            <a:avLst/>
+          </a:prstGeom>
+          <a:solidFill>
+            <a:srgbClr val="F5F5F5">
+              <a:alpha val="30000"/>
+            </a:srgbClr>
+          </a:solidFill>
+          <a:ln>
+            <a:noFill/>
+          </a:ln>
+        </p:spPr>
+        <p:txBody>
+          <a:bodyPr rtlCol="0" anchor="ctr"/>
+          <a:lstStyle/>
+          <a:p>
+            <a:pPr algn="ctr"/>
+          </a:p>
+        </p:txBody>
+      </p:sp>
+      <p:sp>
+        <p:nvSpPr>
+          <p:cNvPr id="50" name="Rectangle 49"/>
+          <p:cNvSpPr/>
+          <p:nvPr/>
+        </p:nvSpPr>
+        <p:spPr>
+          <a:xfrm>
+            <a:off x="9993007" y="5452533"/>
+            <a:ext cx="186205" cy="262467"/>
+          </a:xfrm>
+          <a:prstGeom prst="rect">
+            <a:avLst/>
+          </a:prstGeom>
+          <a:solidFill>
+            <a:srgbClr val="F5F5F5">
+              <a:alpha val="30000"/>
+            </a:srgbClr>
+          </a:solidFill>
+          <a:ln>
+            <a:noFill/>
+          </a:ln>
+        </p:spPr>
+        <p:txBody>
+          <a:bodyPr rtlCol="0" anchor="ctr"/>
+          <a:lstStyle/>
+          <a:p>
+            <a:pPr algn="ctr"/>
+          </a:p>
+        </p:txBody>
+      </p:sp>
+      <p:sp>
+        <p:nvSpPr>
+          <p:cNvPr id="51" name="Rectangle 50"/>
+          <p:cNvSpPr/>
+          <p:nvPr/>
+        </p:nvSpPr>
+        <p:spPr>
+          <a:xfrm>
+            <a:off x="10658025" y="5638800"/>
+            <a:ext cx="186205" cy="76200"/>
+          </a:xfrm>
+          <a:prstGeom prst="rect">
+            <a:avLst/>
+          </a:prstGeom>
+          <a:solidFill>
+            <a:srgbClr val="F5F5F5">
+              <a:alpha val="30000"/>
+            </a:srgbClr>
+          </a:solidFill>
+          <a:ln>
+            <a:noFill/>
+          </a:ln>
+        </p:spPr>
+        <p:txBody>
+          <a:bodyPr rtlCol="0" anchor="ctr"/>
+          <a:lstStyle/>
+          <a:p>
+            <a:pPr algn="ctr"/>
+          </a:p>
+        </p:txBody>
+      </p:sp>
+      <p:sp>
+        <p:nvSpPr>
+          <p:cNvPr id="52" name="Rectangle 51"/>
+          <p:cNvSpPr/>
+          <p:nvPr/>
+        </p:nvSpPr>
+        <p:spPr>
+          <a:xfrm>
+            <a:off x="10990534" y="5613400"/>
+            <a:ext cx="186205" cy="101600"/>
+          </a:xfrm>
+          <a:prstGeom prst="rect">
+            <a:avLst/>
+          </a:prstGeom>
+          <a:solidFill>
+            <a:srgbClr val="F5F5F5">
+              <a:alpha val="30000"/>
+            </a:srgbClr>
+          </a:solidFill>
+          <a:ln>
+            <a:noFill/>
+          </a:ln>
+        </p:spPr>
+        <p:txBody>
+          <a:bodyPr rtlCol="0" anchor="ctr"/>
+          <a:lstStyle/>
+          <a:p>
+            <a:pPr algn="ctr"/>
+          </a:p>
+        </p:txBody>
+      </p:sp>
+      <p:sp>
+        <p:nvSpPr>
+          <p:cNvPr id="53" name="Rectangle 52"/>
+          <p:cNvSpPr/>
+          <p:nvPr/>
+        </p:nvSpPr>
+        <p:spPr>
+          <a:xfrm>
+            <a:off x="11323043" y="5588000"/>
+            <a:ext cx="186205" cy="127000"/>
+          </a:xfrm>
+          <a:prstGeom prst="rect">
+            <a:avLst/>
+          </a:prstGeom>
+          <a:solidFill>
+            <a:srgbClr val="F5F5F5">
+              <a:alpha val="30000"/>
+            </a:srgbClr>
+          </a:solidFill>
+          <a:ln>
+            <a:noFill/>
+          </a:ln>
+        </p:spPr>
+        <p:txBody>
+          <a:bodyPr rtlCol="0" anchor="ctr"/>
+          <a:lstStyle/>
+          <a:p>
+            <a:pPr algn="ctr"/>
+          </a:p>
+        </p:txBody>
+      </p:sp>
+      <p:sp>
+        <p:nvSpPr>
+          <p:cNvPr id="54" name="TextBox 53"/>
           <p:cNvSpPr txBox="1"/>
           <p:nvPr/>
         </p:nvSpPr>
         <p:spPr>
           <a:xfrm>
-            <a:off x="609600" y="5207000"/>
-            <a:ext cx="10972800" cy="279400"/>
+            <a:off x="609600" y="5816600"/>
+            <a:ext cx="10972800" cy="215900"/>
           </a:xfrm>
           <a:prstGeom prst="rect">
             <a:avLst/>
@@ -23447,92 +24618,40 @@
           <a:p>
             <a:pPr algn="l">
               <a:lnSpc>
-                <a:spcPts val="1820"/>
-              </a:lnSpc>
-            </a:pPr>
-            <a:r>
-              <a:rPr sz="1300" b="0" lang="zh-CN" altLang="en-US">
-                <a:solidFill>
-                  <a:srgbClr val="F5F5F5">
-                    <a:alpha val="70000"/>
-                  </a:srgbClr>
-                </a:solidFill>
-                <a:latin typeface="Consolas"/>
-                <a:ea typeface="微软雅黑"/>
-                <a:cs typeface="微软雅黑"/>
-              </a:rPr>
-              <a:t>这一版累计约</a:t>
-            </a:r>
-            <a:r>
-              <a:rPr sz="1300" b="0" lang="zh-CN" altLang="en-US">
-                <a:solidFill>
-                  <a:srgbClr val="F5F5F5">
-                    <a:alpha val="70000"/>
-                  </a:srgbClr>
-                </a:solidFill>
-                <a:latin typeface="微软雅黑"/>
-                <a:ea typeface="微软雅黑"/>
-                <a:cs typeface="微软雅黑"/>
-              </a:rPr>
-              <a:t> </a:t>
-            </a:r>
-            <a:r>
-              <a:rPr sz="1300" b="0" lang="zh-CN" altLang="en-US">
-                <a:solidFill>
-                  <a:srgbClr val="F5F5F5">
-                    <a:alpha val="70000"/>
-                  </a:srgbClr>
-                </a:solidFill>
-                <a:latin typeface="Consolas"/>
-                <a:ea typeface="微软雅黑"/>
-                <a:cs typeface="微软雅黑"/>
-              </a:rPr>
-              <a:t>2200</a:t>
-            </a:r>
-            <a:r>
-              <a:rPr sz="1300" b="0" lang="zh-CN" altLang="en-US">
-                <a:solidFill>
-                  <a:srgbClr val="F5F5F5">
-                    <a:alpha val="70000"/>
-                  </a:srgbClr>
-                </a:solidFill>
-                <a:latin typeface="微软雅黑"/>
-                <a:ea typeface="微软雅黑"/>
-                <a:cs typeface="微软雅黑"/>
-              </a:rPr>
-              <a:t> </a:t>
-            </a:r>
-            <a:r>
-              <a:rPr sz="1300" b="0" lang="zh-CN" altLang="en-US">
-                <a:solidFill>
-                  <a:srgbClr val="F5F5F5">
-                    <a:alpha val="70000"/>
-                  </a:srgbClr>
-                </a:solidFill>
-                <a:latin typeface="Consolas"/>
-                <a:ea typeface="微软雅黑"/>
-                <a:cs typeface="微软雅黑"/>
-              </a:rPr>
-              <a:t>次项目提交（其中约</a:t>
-            </a:r>
-            <a:r>
-              <a:rPr sz="1300" b="0" lang="zh-CN" altLang="en-US">
-                <a:solidFill>
-                  <a:srgbClr val="F5F5F5">
-                    <a:alpha val="70000"/>
-                  </a:srgbClr>
-                </a:solidFill>
-                <a:latin typeface="微软雅黑"/>
-                <a:ea typeface="微软雅黑"/>
-                <a:cs typeface="微软雅黑"/>
-              </a:rPr>
-              <a:t> </a:t>
-            </a:r>
-            <a:r>
-              <a:rPr sz="1300" b="0" lang="zh-CN" altLang="en-US">
-                <a:solidFill>
-                  <a:srgbClr val="F5F5F5">
-                    <a:alpha val="70000"/>
+                <a:spcPts val="1430"/>
+              </a:lnSpc>
+            </a:pPr>
+            <a:r>
+              <a:rPr sz="1100" b="0" lang="zh-CN" altLang="en-US">
+                <a:solidFill>
+                  <a:srgbClr val="F5F5F5">
+                    <a:alpha val="40000"/>
+                  </a:srgbClr>
+                </a:solidFill>
+                <a:latin typeface="Consolas"/>
+                <a:ea typeface="微软雅黑"/>
+                <a:cs typeface="微软雅黑"/>
+              </a:rPr>
+              <a:t>其中约</a:t>
+            </a:r>
+            <a:r>
+              <a:rPr sz="1100" b="0" lang="zh-CN" altLang="en-US">
+                <a:solidFill>
+                  <a:srgbClr val="F5F5F5">
+                    <a:alpha val="40000"/>
+                  </a:srgbClr>
+                </a:solidFill>
+                <a:latin typeface="微软雅黑"/>
+                <a:ea typeface="微软雅黑"/>
+                <a:cs typeface="微软雅黑"/>
+              </a:rPr>
+              <a:t> </a:t>
+            </a:r>
+            <a:r>
+              <a:rPr sz="1100" b="0" lang="zh-CN" altLang="en-US">
+                <a:solidFill>
+                  <a:srgbClr val="F5F5F5">
+                    <a:alpha val="40000"/>
                   </a:srgbClr>
                 </a:solidFill>
                 <a:latin typeface="Consolas"/>
@@ -23542,125 +24661,30 @@
               <a:t>350</a:t>
             </a:r>
             <a:r>
-              <a:rPr sz="1300" b="0" lang="zh-CN" altLang="en-US">
-                <a:solidFill>
-                  <a:srgbClr val="F5F5F5">
-                    <a:alpha val="70000"/>
-                  </a:srgbClr>
-                </a:solidFill>
-                <a:latin typeface="微软雅黑"/>
-                <a:ea typeface="微软雅黑"/>
-                <a:cs typeface="微软雅黑"/>
-              </a:rPr>
-              <a:t> </a:t>
-            </a:r>
-            <a:r>
-              <a:rPr sz="1300" b="0" lang="zh-CN" altLang="en-US">
-                <a:solidFill>
-                  <a:srgbClr val="F5F5F5">
-                    <a:alpha val="70000"/>
-                  </a:srgbClr>
-                </a:solidFill>
-                <a:latin typeface="Consolas"/>
-                <a:ea typeface="微软雅黑"/>
-                <a:cs typeface="微软雅黑"/>
-              </a:rPr>
-              <a:t>次为显卡后台自动回传），烘焙器迭代近</a:t>
-            </a:r>
-            <a:r>
-              <a:rPr sz="1300" b="0" lang="zh-CN" altLang="en-US">
-                <a:solidFill>
-                  <a:srgbClr val="F5F5F5">
-                    <a:alpha val="70000"/>
-                  </a:srgbClr>
-                </a:solidFill>
-                <a:latin typeface="微软雅黑"/>
-                <a:ea typeface="微软雅黑"/>
-                <a:cs typeface="微软雅黑"/>
-              </a:rPr>
-              <a:t> </a:t>
-            </a:r>
-            <a:r>
-              <a:rPr sz="1300" b="0" lang="zh-CN" altLang="en-US">
-                <a:solidFill>
-                  <a:srgbClr val="F5F5F5">
-                    <a:alpha val="70000"/>
-                  </a:srgbClr>
-                </a:solidFill>
-                <a:latin typeface="Consolas"/>
-                <a:ea typeface="微软雅黑"/>
-                <a:cs typeface="微软雅黑"/>
-              </a:rPr>
-              <a:t>200</a:t>
-            </a:r>
-            <a:r>
-              <a:rPr sz="1300" b="0" lang="zh-CN" altLang="en-US">
-                <a:solidFill>
-                  <a:srgbClr val="F5F5F5">
-                    <a:alpha val="70000"/>
-                  </a:srgbClr>
-                </a:solidFill>
-                <a:latin typeface="微软雅黑"/>
-                <a:ea typeface="微软雅黑"/>
-                <a:cs typeface="微软雅黑"/>
-              </a:rPr>
-              <a:t> </a:t>
-            </a:r>
-            <a:r>
-              <a:rPr sz="1300" b="0" lang="zh-CN" altLang="en-US">
-                <a:solidFill>
-                  <a:srgbClr val="F5F5F5">
-                    <a:alpha val="70000"/>
-                  </a:srgbClr>
-                </a:solidFill>
-                <a:latin typeface="Consolas"/>
-                <a:ea typeface="微软雅黑"/>
-                <a:cs typeface="微软雅黑"/>
-              </a:rPr>
-              <a:t>个版本号</a:t>
-            </a:r>
-          </a:p>
-        </p:txBody>
-      </p:sp>
-      <p:sp>
-        <p:nvSpPr>
-          <p:cNvPr id="23" name="TextBox 22"/>
-          <p:cNvSpPr txBox="1"/>
-          <p:nvPr/>
-        </p:nvSpPr>
-        <p:spPr>
-          <a:xfrm>
-            <a:off x="609600" y="5549900"/>
-            <a:ext cx="10972800" cy="254000"/>
-          </a:xfrm>
-          <a:prstGeom prst="rect">
-            <a:avLst/>
-          </a:prstGeom>
-          <a:noFill/>
-        </p:spPr>
-        <p:txBody>
-          <a:bodyPr wrap="square" lIns="0" rIns="0" tIns="0" bIns="0" anchor="t">
-            <a:noAutofit/>
-          </a:bodyPr>
-          <a:lstStyle/>
-          <a:p>
-            <a:pPr algn="l">
-              <a:lnSpc>
-                <a:spcPts val="1679"/>
-              </a:lnSpc>
-            </a:pPr>
-            <a:r>
-              <a:rPr sz="1200" b="0" lang="zh-CN" altLang="en-US">
+              <a:rPr sz="1100" b="0" lang="zh-CN" altLang="en-US">
                 <a:solidFill>
                   <a:srgbClr val="F5F5F5">
                     <a:alpha val="40000"/>
                   </a:srgbClr>
                 </a:solidFill>
-                <a:latin typeface="Consolas"/>
-                <a:ea typeface="微软雅黑"/>
-                <a:cs typeface="微软雅黑"/>
-              </a:rPr>
-              <a:t>导演蓝图与程序共同设计；贴图规范与性能组共同确定</a:t>
+                <a:latin typeface="微软雅黑"/>
+                <a:ea typeface="微软雅黑"/>
+                <a:cs typeface="微软雅黑"/>
+              </a:rPr>
+              <a:t> </a:t>
+            </a:r>
+            <a:r>
+              <a:rPr sz="1100" b="0" lang="zh-CN" altLang="en-US">
+                <a:solidFill>
+                  <a:srgbClr val="F5F5F5">
+                    <a:alpha val="40000"/>
+                  </a:srgbClr>
+                </a:solidFill>
+                <a:latin typeface="Consolas"/>
+                <a:ea typeface="微软雅黑"/>
+                <a:cs typeface="微软雅黑"/>
+              </a:rPr>
+              <a:t>次是显卡后台自动回传；导演蓝图与程序共同设计，贴图规范与性能组共同确定</a:t>
             </a:r>
           </a:p>
         </p:txBody>
@@ -27760,7 +28784,7 @@
           </a:prstGeom>
           <a:solidFill>
             <a:srgbClr val="0A0A0A">
-              <a:alpha val="78000"/>
+              <a:alpha val="82000"/>
             </a:srgbClr>
           </a:solidFill>
           <a:ln>
@@ -27855,8 +28879,8 @@
             <a:avLst/>
           </a:prstGeom>
           <a:solidFill>
-            <a:srgbClr val="0FF796">
-              <a:alpha val="92000"/>
+            <a:srgbClr val="0A0A0A">
+              <a:alpha val="82000"/>
             </a:srgbClr>
           </a:solidFill>
           <a:ln>
@@ -27901,7 +28925,7 @@
             <a:r>
               <a:rPr sz="1200" b="1" lang="zh-CN" altLang="en-US">
                 <a:solidFill>
-                  <a:srgbClr val="0A0A0A"/>
+                  <a:srgbClr val="0FF796"/>
                 </a:solidFill>
                 <a:latin typeface="Consolas"/>
                 <a:ea typeface="微软雅黑"/>
@@ -27912,7 +28936,7 @@
             <a:r>
               <a:rPr sz="1200" b="1" lang="zh-CN" altLang="en-US">
                 <a:solidFill>
-                  <a:srgbClr val="0A0A0A"/>
+                  <a:srgbClr val="0FF796"/>
                 </a:solidFill>
                 <a:latin typeface="微软雅黑"/>
                 <a:ea typeface="微软雅黑"/>
@@ -27923,7 +28947,7 @@
             <a:r>
               <a:rPr sz="1200" b="1" lang="zh-CN" altLang="en-US">
                 <a:solidFill>
-                  <a:srgbClr val="0A0A0A"/>
+                  <a:srgbClr val="0FF796"/>
                 </a:solidFill>
                 <a:latin typeface="Consolas"/>
                 <a:ea typeface="微软雅黑"/>
@@ -27934,7 +28958,7 @@
             <a:r>
               <a:rPr sz="1200" b="1" lang="zh-CN" altLang="en-US">
                 <a:solidFill>
-                  <a:srgbClr val="0A0A0A"/>
+                  <a:srgbClr val="0FF796"/>
                 </a:solidFill>
                 <a:latin typeface="微软雅黑"/>
                 <a:ea typeface="微软雅黑"/>
@@ -27945,7 +28969,7 @@
             <a:r>
               <a:rPr sz="1200" b="1" lang="zh-CN" altLang="en-US">
                 <a:solidFill>
-                  <a:srgbClr val="0A0A0A"/>
+                  <a:srgbClr val="0FF796"/>
                 </a:solidFill>
                 <a:latin typeface="Consolas"/>
                 <a:ea typeface="微软雅黑"/>
@@ -28143,7 +29167,7 @@
           </a:prstGeom>
           <a:solidFill>
             <a:srgbClr val="0A0A0A">
-              <a:alpha val="78000"/>
+              <a:alpha val="82000"/>
             </a:srgbClr>
           </a:solidFill>
           <a:ln>
@@ -28238,8 +29262,8 @@
             <a:avLst/>
           </a:prstGeom>
           <a:solidFill>
-            <a:srgbClr val="0FF796">
-              <a:alpha val="92000"/>
+            <a:srgbClr val="0A0A0A">
+              <a:alpha val="82000"/>
             </a:srgbClr>
           </a:solidFill>
           <a:ln>
@@ -28284,7 +29308,7 @@
             <a:r>
               <a:rPr sz="1200" b="1" lang="zh-CN" altLang="en-US">
                 <a:solidFill>
-                  <a:srgbClr val="0A0A0A"/>
+                  <a:srgbClr val="0FF796"/>
                 </a:solidFill>
                 <a:latin typeface="Consolas"/>
                 <a:ea typeface="微软雅黑"/>
@@ -28295,7 +29319,7 @@
             <a:r>
               <a:rPr sz="1200" b="1" lang="zh-CN" altLang="en-US">
                 <a:solidFill>
-                  <a:srgbClr val="0A0A0A"/>
+                  <a:srgbClr val="0FF796"/>
                 </a:solidFill>
                 <a:latin typeface="微软雅黑"/>
                 <a:ea typeface="微软雅黑"/>
@@ -28306,7 +29330,7 @@
             <a:r>
               <a:rPr sz="1200" b="1" lang="zh-CN" altLang="en-US">
                 <a:solidFill>
-                  <a:srgbClr val="0A0A0A"/>
+                  <a:srgbClr val="0FF796"/>
                 </a:solidFill>
                 <a:latin typeface="Consolas"/>
                 <a:ea typeface="微软雅黑"/>
@@ -28317,7 +29341,7 @@
             <a:r>
               <a:rPr sz="1200" b="1" lang="zh-CN" altLang="en-US">
                 <a:solidFill>
-                  <a:srgbClr val="0A0A0A"/>
+                  <a:srgbClr val="0FF796"/>
                 </a:solidFill>
                 <a:latin typeface="微软雅黑"/>
                 <a:ea typeface="微软雅黑"/>
@@ -28328,7 +29352,7 @@
             <a:r>
               <a:rPr sz="1200" b="1" lang="zh-CN" altLang="en-US">
                 <a:solidFill>
-                  <a:srgbClr val="0A0A0A"/>
+                  <a:srgbClr val="0FF796"/>
                 </a:solidFill>
                 <a:latin typeface="Consolas"/>
                 <a:ea typeface="微软雅黑"/>
@@ -29530,7 +30554,7 @@
                 <a:ea typeface="微软雅黑"/>
                 <a:cs typeface="微软雅黑"/>
               </a:rPr>
-              <a:t>黑点与末格黑块：修好一次，写进导出和导入规则</a:t>
+              <a:t>黑点与末格黑块：查清原因，写进导出和导入规则</a:t>
             </a:r>
           </a:p>
         </p:txBody>
@@ -31537,32 +32561,6 @@
               </a:rPr>
               <a:t>烟花烘焙器</a:t>
             </a:r>
-            <a:r>
-              <a:rPr sz="1000" b="0" lang="zh-CN" altLang="en-US">
-                <a:solidFill>
-                  <a:srgbClr val="F5F5F5">
-                    <a:alpha val="55000"/>
-                  </a:srgbClr>
-                </a:solidFill>
-                <a:latin typeface="微软雅黑"/>
-                <a:ea typeface="微软雅黑"/>
-                <a:cs typeface="微软雅黑"/>
-              </a:rPr>
-              <a:t> </a:t>
-            </a:r>
-            <a:r>
-              <a:rPr sz="1000" b="0" lang="zh-CN" altLang="en-US">
-                <a:solidFill>
-                  <a:srgbClr val="F5F5F5">
-                    <a:alpha val="55000"/>
-                  </a:srgbClr>
-                </a:solidFill>
-                <a:latin typeface="Consolas"/>
-                <a:ea typeface="微软雅黑"/>
-                <a:cs typeface="微软雅黑"/>
-              </a:rPr>
-              <a:t>4.9.124</a:t>
-            </a:r>
           </a:p>
         </p:txBody>
       </p:sp>
@@ -31674,7 +32672,35 @@
                 <a:ea typeface="微软雅黑"/>
                 <a:cs typeface="微软雅黑"/>
               </a:rPr>
-              <a:t>每个参数先说清是物理量、引擎字段还是预览设置；调了不生效的要变灰并写原因</a:t>
+              <a:t>每个参数先说清：是物理量、</a:t>
+            </a:r>
+            <a:br/>
+            <a:r>
+              <a:rPr sz="1250" b="0" lang="zh-CN" altLang="en-US">
+                <a:solidFill>
+                  <a:srgbClr val="F5F5F5">
+                    <a:alpha val="70000"/>
+                  </a:srgbClr>
+                </a:solidFill>
+                <a:latin typeface="Consolas"/>
+                <a:ea typeface="微软雅黑"/>
+                <a:cs typeface="微软雅黑"/>
+              </a:rPr>
+              <a:t>引擎字段，还是预览设置；</a:t>
+            </a:r>
+            <a:br/>
+            <a:r>
+              <a:rPr sz="1250" b="0" lang="zh-CN" altLang="en-US">
+                <a:solidFill>
+                  <a:srgbClr val="F5F5F5">
+                    <a:alpha val="70000"/>
+                  </a:srgbClr>
+                </a:solidFill>
+                <a:latin typeface="Consolas"/>
+                <a:ea typeface="微软雅黑"/>
+                <a:cs typeface="微软雅黑"/>
+              </a:rPr>
+              <a:t>调了不生效的变灰并写原因</a:t>
             </a:r>
           </a:p>
         </p:txBody>
@@ -31831,7 +32857,35 @@
                 <a:ea typeface="微软雅黑"/>
                 <a:cs typeface="微软雅黑"/>
               </a:rPr>
-              <a:t>入口、状态、反馈统一写法；令牌是颜色、字号等统一取值，从</a:t>
+              <a:t>入口、状态、反馈统一写法；</a:t>
+            </a:r>
+            <a:br/>
+            <a:r>
+              <a:rPr sz="1250" b="0" lang="zh-CN" altLang="en-US">
+                <a:solidFill>
+                  <a:srgbClr val="F5F5F5">
+                    <a:alpha val="70000"/>
+                  </a:srgbClr>
+                </a:solidFill>
+                <a:latin typeface="Consolas"/>
+                <a:ea typeface="微软雅黑"/>
+                <a:cs typeface="微软雅黑"/>
+              </a:rPr>
+              <a:t>令牌是颜色、字号等统一取值，</a:t>
+            </a:r>
+            <a:br/>
+            <a:r>
+              <a:rPr sz="1250" b="0" lang="zh-CN" altLang="en-US">
+                <a:solidFill>
+                  <a:srgbClr val="F5F5F5">
+                    <a:alpha val="70000"/>
+                  </a:srgbClr>
+                </a:solidFill>
+                <a:latin typeface="Consolas"/>
+                <a:ea typeface="微软雅黑"/>
+                <a:cs typeface="微软雅黑"/>
+              </a:rPr>
+              <a:t>从</a:t>
             </a:r>
             <a:r>
               <a:rPr sz="1250" b="0" lang="zh-CN" altLang="en-US">
@@ -31998,7 +33052,21 @@
                 <a:ea typeface="微软雅黑"/>
                 <a:cs typeface="微软雅黑"/>
               </a:rPr>
-              <a:t>三个工具按同一套配色收口；组件和形状还在逐步统一</a:t>
+              <a:t>三个工具按同一套配色收口；</a:t>
+            </a:r>
+            <a:br/>
+            <a:r>
+              <a:rPr sz="1250" b="0" lang="zh-CN" altLang="en-US">
+                <a:solidFill>
+                  <a:srgbClr val="F5F5F5">
+                    <a:alpha val="70000"/>
+                  </a:srgbClr>
+                </a:solidFill>
+                <a:latin typeface="Consolas"/>
+                <a:ea typeface="微软雅黑"/>
+                <a:cs typeface="微软雅黑"/>
+              </a:rPr>
+              <a:t>组件和形状还在逐步统一</a:t>
             </a:r>
           </a:p>
         </p:txBody>
@@ -37816,7 +38884,7 @@
                 <a:ea typeface="微软雅黑"/>
                 <a:cs typeface="微软雅黑"/>
               </a:rPr>
-              <a:t>脚本：让</a:t>
+              <a:t>脚本：AI</a:t>
             </a:r>
             <a:r>
               <a:rPr sz="1250" b="0" lang="zh-CN" altLang="en-US">
@@ -37842,7 +38910,7 @@
                 <a:ea typeface="微软雅黑"/>
                 <a:cs typeface="微软雅黑"/>
               </a:rPr>
-              <a:t>AI</a:t>
+              <a:t>驱动</a:t>
             </a:r>
             <a:r>
               <a:rPr sz="1250" b="0" lang="zh-CN" altLang="en-US">
@@ -37868,7 +38936,7 @@
                 <a:ea typeface="微软雅黑"/>
                 <a:cs typeface="微软雅黑"/>
               </a:rPr>
-              <a:t>写脚本驱动</a:t>
+              <a:t>Blender</a:t>
             </a:r>
             <a:r>
               <a:rPr sz="1250" b="0" lang="zh-CN" altLang="en-US">
@@ -37894,33 +38962,7 @@
                 <a:ea typeface="微软雅黑"/>
                 <a:cs typeface="微软雅黑"/>
               </a:rPr>
-              <a:t>Blender</a:t>
-            </a:r>
-            <a:r>
-              <a:rPr sz="1250" b="0" lang="zh-CN" altLang="en-US">
-                <a:solidFill>
-                  <a:srgbClr val="F5F5F5">
-                    <a:alpha val="70000"/>
-                  </a:srgbClr>
-                </a:solidFill>
-                <a:latin typeface="微软雅黑"/>
-                <a:ea typeface="微软雅黑"/>
-                <a:cs typeface="微软雅黑"/>
-              </a:rPr>
-              <a:t> </a:t>
-            </a:r>
-            <a:r>
-              <a:rPr sz="1250" b="0" lang="zh-CN" altLang="en-US">
-                <a:solidFill>
-                  <a:srgbClr val="F5F5F5">
-                    <a:alpha val="70000"/>
-                  </a:srgbClr>
-                </a:solidFill>
-                <a:latin typeface="Consolas"/>
-                <a:ea typeface="微软雅黑"/>
-                <a:cs typeface="微软雅黑"/>
-              </a:rPr>
-              <a:t>出图，能出，但每轮要等渲染，调参看不到最终效果。</a:t>
+              <a:t>出图，每轮要等渲染，调参看不到最终效果。</a:t>
             </a:r>
           </a:p>
         </p:txBody>
@@ -38291,7 +39333,7 @@
         <p:spPr>
           <a:xfrm>
             <a:off x="609600" y="1358900"/>
-            <a:ext cx="5372100" cy="2794000"/>
+            <a:ext cx="4711700" cy="2794000"/>
           </a:xfrm>
           <a:prstGeom prst="rect">
             <a:avLst/>
@@ -38314,8 +39356,8 @@
         </p:blipFill>
         <p:spPr>
           <a:xfrm>
-            <a:off x="6210300" y="1358900"/>
-            <a:ext cx="5372100" cy="2794000"/>
+            <a:off x="5549900" y="1358900"/>
+            <a:ext cx="6032500" cy="2794000"/>
           </a:xfrm>
           <a:prstGeom prst="rect">
             <a:avLst/>
@@ -38331,7 +39373,7 @@
         <p:spPr>
           <a:xfrm>
             <a:off x="609600" y="4216400"/>
-            <a:ext cx="5372100" cy="215900"/>
+            <a:ext cx="4711700" cy="215900"/>
           </a:xfrm>
           <a:prstGeom prst="rect">
             <a:avLst/>
@@ -38451,8 +39493,8 @@
         </p:nvSpPr>
         <p:spPr>
           <a:xfrm>
-            <a:off x="6210300" y="4216400"/>
-            <a:ext cx="5372100" cy="215900"/>
+            <a:off x="5549900" y="4216400"/>
+            <a:ext cx="6032500" cy="215900"/>
           </a:xfrm>
           <a:prstGeom prst="rect">
             <a:avLst/>

--- a/协作/提示词/分享PPT交接_2026-10-29/第三版交付/烟花秀AI全流程_第三版.pptx
+++ b/协作/提示词/分享PPT交接_2026-10-29/第三版交付/烟花秀AI全流程_第三版.pptx
@@ -525,13 +525,13 @@
           <a:lstStyle/>
           <a:p>
             <a:r>
-              <a:t>第 1 页 · 封面（约 30 秒）</a:t>
+              <a:t>第 1 页 · 封面（约 25 秒）</a:t>
             </a:r>
           </a:p>
           <a:p/>
           <a:p>
             <a:r>
-              <a:t>大家好，我是____。今天分享这一个多月做跨年烟花秀的过程。从做效果、进引擎到排节目，三个环节我都请 AI 写了工具。我按问题、解决思路、实践成果、经验与方法的顺序讲，最后分享一套和 AI 一起处理批量需求的做法，以及工具怎么拿。</a:t>
+              <a:t>大家好，我是____。今天分享这一个多月制作跨年烟花秀的过程。效果制作、引擎接入和节目编排三个环节，我都借助 AI 开发了工具。内容按问题、解决思路、实践成果、经验与方法的顺序展开，最后介绍批量需求的协作方法和工具获取方式。</a:t>
             </a:r>
           </a:p>
         </p:txBody>
@@ -601,13 +601,13 @@
           <a:lstStyle/>
           <a:p>
             <a:r>
-              <a:t>第 10 页 · 导入器（约 40 秒）</a:t>
+              <a:t>第 10 页 · 导入器：引擎设置规范内置于工具，确认后写入 UE（约 35 秒）</a:t>
             </a:r>
           </a:p>
           <a:p/>
           <a:p>
             <a:r>
-              <a:t>第二个工具是导入器，灵感来自我们之前特效工作台的配表入口。它读取烘焙器导出的素材包，先检查命名、尺寸和规范项，不合格的先拦下来；再按平台列出要建的贴图、材质实例和发射器；我确认后才写进 UE，写完再读回来对照一遍。和性能组定下的贴图规范，比如手游保留 Mip 和流送、最大 1024，都写在导入器里，不用每次靠人记。</a:t>
+              <a:t>第二个工具是导入器，设计参考了原有特效工作台的配表入口。导入器读取烘焙器导出的素材包，先检查命名、尺寸和规范项，不合格的先行拦截；再按平台列出需要创建的贴图、材质实例和发射器；确认后写入 UE，写入后读回核对。与性能组确定的贴图规范，例如手游保留 Mip 与流送、最大 1024，都已内置于导入器，无需人工记忆。</a:t>
             </a:r>
           </a:p>
           <a:p/>
@@ -683,13 +683,13 @@
           <a:lstStyle/>
           <a:p>
             <a:r>
-              <a:t>第 11 页 · 编排：先从舞台推出规则（约 45 秒）</a:t>
+              <a:t>第 11 页 · 编排规则：由舞台尺度推导分档与构图（约 50 秒）</a:t>
             </a:r>
           </a:p>
           <a:p/>
           <a:p>
             <a:r>
-              <a:t>排节目的思路是先推规则。舞台是一段宽约 800 米、高约 150 米的坝，坝顶按 100 米左右的点距排主发射点，加上中间点和前台一共 24 个。花分不分得清，看花径和点距的比例：一点五倍左右分得清，两倍多连成花墙，再大就糊。据此把花分成 S、M、L 和主角四档，定好开花高度，再配对应的升空尾缀。这些写进编排宪章，每一版编排都按它自动检查。实机机位和设计有出入时，以实机校正。</a:t>
+              <a:t>编排环节先推导规则。舞台为宽约 800 米、高约 150 米的坝体，坝顶按约 100 米点距布置主发射点，加上中间点和前台点共 24 个。花型能否分辨，取决于花径与点距之比：约 1.5 倍可以分辨，2 倍以上形成花墙，继续增大则糊成一片。据此将花型分为 S、M、L 和主角四档，确定各档开花高度，并配置对应的升空尾缀。这些规则写入编排宪章，每一版编排都按宪章自动检查。设计值与实机机位存在差异时，以实机为准校正。</a:t>
             </a:r>
           </a:p>
           <a:p/>
@@ -765,13 +765,13 @@
           <a:lstStyle/>
           <a:p>
             <a:r>
-              <a:t>第 12 页 · 编排工作台（约 30 秒）</a:t>
+              <a:t>第 12 页 · 烟花编排工作台：时间轴编辑，输出导演蓝图三张表（约 30 秒）</a:t>
             </a:r>
           </a:p>
           <a:p/>
           <a:p>
             <a:r>
-              <a:t>规则定了，还需要一个能排的工具。编排工作台把音乐波形、点位和烟花模板放在同一条时间轴上，可以对着音乐改。每改一次，就按宪章检查重叠、档位和预算，然后一键导出导演蓝图要的子模板、模板和时序三张表。UE 里只负责按表播放；节奏要改，回到工作台改完重新出表就行。</a:t>
+              <a:t>规则确定后，由烟花编排工作台执行编排。工作台将音乐波形、点位和烟花模板放在同一条时间轴上，可依据音乐调整节奏与模板。每次修改后按宪章检查重叠、档位和预算，并一键输出导演蓝图所需的子模板、模板和时序三张表。UE 只负责按表播放，节奏调整在工作台完成后重新输出即可。</a:t>
             </a:r>
           </a:p>
           <a:p/>
@@ -847,13 +847,13 @@
           <a:lstStyle/>
           <a:p>
             <a:r>
-              <a:t>第 13 页 · 完整操作演示（建议 150 秒，含录屏）</a:t>
+              <a:t>第 13 页 · 流程演示：从调参到 UE 播放（建议 150 秒，含录屏）</a:t>
             </a:r>
           </a:p>
           <a:p/>
           <a:p>
             <a:r>
-              <a:t>三个工具介绍完，看一段完整操作：选一个案例调参，在引擎回放里确认，一次导出 PC 和手游两套，导入器检查后写进 UE，最后在 UE 里播放。（播放录屏，约 2 分钟）录屏经过剪辑，实际用时 ×× 分钟。</a:t>
+              <a:t>下面通过一段录屏演示完整流程：选择案例并调参，在引擎回放中复核，同时导出 PC 与手游两套素材，经导入器检查后写入 UE，最后在 UE 中播放。（播放录屏，约 2 分钟）录屏经过剪辑，实际用时 ×× 分钟。</a:t>
             </a:r>
           </a:p>
           <a:p/>
@@ -929,13 +929,13 @@
           <a:lstStyle/>
           <a:p>
             <a:r>
-              <a:t>第 14 页 · 成果一：资源（约 50 秒）</a:t>
+              <a:t>第 14 页 · 资源成果：26 种开花、6 档尾缀、1 套窜天猴入表（约 45 秒）</a:t>
             </a:r>
           </a:p>
           <a:p/>
           <a:p>
             <a:r>
-              <a:t>再看成果，和前面三个问题一一对应。先说出图。最终进了跨年 3.0 资源表的，有 26 种开花花型、按尺寸共 30 个规格：球形开花 9 种、冠 3 种、柳 1 种、扇形 1 种、彗星 5 种、爆裂分裂这类特殊星效 6 种；升空尾缀 6 档，还有一套窜天猴。手游覆盖其中 12 种开花和全部尾缀。26 种开花里，20 种找到了烘焙器的导出材料，其中 19 种留有配方和导出记录，要调整时改参数重新导出就行。</a:t>
+              <a:t>再看实践成果，与前面三个问题一一对应。首先是出图：最终进入跨年 3.0 资源表的开花花型共 26 种，按尺寸为 30 个规格，其中球形开花 9 种、冠 3 种、柳 1 种、扇形 1 种、彗星 5 种、特殊星效 6 种；另有升空尾缀 6 档和一套窜天猴。手游覆盖其中 12 种开花和全部尾缀。26 种开花中，20 种有烘焙器导出材料，其中 19 种保留了配方与导出记录，可调参后重新导出。</a:t>
             </a:r>
           </a:p>
           <a:p/>
@@ -1011,13 +1011,13 @@
           <a:lstStyle/>
           <a:p>
             <a:r>
-              <a:t>第 15 页 · 成果二：进引擎（约 35 秒）</a:t>
+              <a:t>第 15 页 · 接入成果：两轮批量修正，读回结果一致（约 35 秒）</a:t>
             </a:r>
           </a:p>
           <a:p/>
           <a:p>
             <a:r>
-              <a:t>第二是进引擎。我们做过两轮整批修正：一轮是 115 个包，包括粒子系统和材质实例，统一了几项发射器和材质设置，读回没有错误；另一轮是和性能组定下贴图规范以后，149 张贴图整批重设，读回全部一致，别的项目也在用的共享贴图单独列出来，不跟着改。这些规则之后都写进了导入器，新资源导入时自动按规范设置。</a:t>
+              <a:t>其次是引擎接入，共进行过两轮批量修正。一轮针对 115 个包，包括粒子系统和材质实例，统一了几项发射器与材质设置，读回无错误；另一轮在与性能组确定贴图规范后，对 149 张贴图批量重设，读回结果一致，与其他项目共用的贴图单独列出核对，不随之修改。以上规则已内置于导入器，新资源导入时自动执行。</a:t>
             </a:r>
           </a:p>
           <a:p/>
@@ -1093,13 +1093,13 @@
           <a:lstStyle/>
           <a:p>
             <a:r>
-              <a:t>第 16 页 · 成果三：排节目（约 35 秒）</a:t>
+              <a:t>第 16 页 · 编排成果：同一编排按平台与画质分档输出（约 30 秒）</a:t>
             </a:r>
           </a:p>
           <a:p/>
           <a:p>
             <a:r>
-              <a:t>第三是排节目。编排一共迭代了 11 个大版本，每一版都有自动检查记录。同一份编排可以按平台和画质分档筛选：PC 从高配的一千一百多次播放到低配的四百多次，手游从四百多次到一百八十次左右，不用每个档位单独排一遍。也要如实说，目前节拍对齐的指标还没完全达到宪章定的目标，还在继续调。</a:t>
+              <a:t>然后是编排。编排共迭代 11 个大版本，每版均有自动检查记录。同一编排可按平台与画质分档输出：PC 从高配约一千一百次播放到低配约四百四十次，手游从约四百五十次到约一百八十次，无需逐档编排。需要说明的是，目前节拍对齐指标尚未达到宪章目标，仍在持续优化。</a:t>
             </a:r>
           </a:p>
           <a:p/>
@@ -1175,13 +1175,13 @@
           <a:lstStyle/>
           <a:p>
             <a:r>
-              <a:t>第 17 页 · 投入与角色（约 25 秒）</a:t>
+              <a:t>第 17 页 · 个人投入：一人对接 AI，覆盖需求、制作、验收与编排（约 25 秒）</a:t>
             </a:r>
           </a:p>
           <a:p/>
           <a:p>
             <a:r>
-              <a:t>这一个多月里，我一个人对接 AI，角色大致三类：定方向、做判断，还有维护规则和交接。下面是每天的提交量，这一版累计两千多次，其中三百多次是显卡后台自动回传；烘焙器迭代了近 200 个版本号。</a:t>
+              <a:t>这一个多月中，由我一人对接 AI，主要承担三类工作：方向制定、质量判断，以及规则与交接的维护。图中是项目每日的提交量，这一版累计约两千两百次提交，其中约三百五十次为显卡后台自动回传；烘焙器迭代了近 200 个版本号。</a:t>
             </a:r>
           </a:p>
           <a:p/>
@@ -1257,13 +1257,13 @@
           <a:lstStyle/>
           <a:p>
             <a:r>
-              <a:t>第 18 页 · 尾缀：近段和远段（约 40 秒）</a:t>
+              <a:t>第 18 页 · 升空尾缀：近段与远段对应不同年龄的火星（约 40 秒）</a:t>
             </a:r>
           </a:p>
           <a:p/>
           <a:p>
             <a:r>
-              <a:t>接下来讲过程中学到的东西，先讲升空尾缀。近段和远段不是相机远近的切换，而是火星的年龄：近段用循环面片跟着弹体，表现刚喷出的火星；远段用一次性序列，表现留在空中慢慢落下的老火星。卡不卡顿也从凭感觉变成了计算：按观看距离把火星运动换算成屏幕上的像素位移，再按 30 帧的节拍分配帧数。远看流畅，近看略软，这是有意的取舍。</a:t>
+              <a:t>接下来是过程中的经验，先看升空尾缀。近段与远段并非按相机距离切换，而是对应火星的不同年龄：近段为循环面片，随弹体移动，表现新喷出的火星；远段为一次性序列，表现滞留空中、缓慢下落的老火星。帧数也由经验判断改为计算：按游戏内观看距离，将火星运动换算为每帧屏幕位移，再按 30 帧节拍分配帧数。远景流畅、近景略软，属于有意取舍。</a:t>
             </a:r>
           </a:p>
           <a:p/>
@@ -1339,13 +1339,13 @@
           <a:lstStyle/>
           <a:p>
             <a:r>
-              <a:t>第 19 页 · 仙女棒：13 类火星合成一张（约 50 秒）</a:t>
+              <a:t>第 19 页 · 仙女棒：13 类火星烘焙合成，单发射器播放（约 50 秒）</a:t>
             </a:r>
           </a:p>
           <a:p/>
           <a:p>
             <a:r>
-              <a:t>第二个例子是仙女棒。它的火星有好几层：一级分叉、二级分叉，有清晰也有模糊。项目里已有的窜天猴拖尾，就用了 10 个发射器和多张贴图来拼。这次 13 类火星的结构来自我之前 Blender 工程里的版本，AI 把它移植成通用的母子分叉：子火星在母火星破裂的位置出生，继承一部分速度；快门和景深形成清晰和模糊的层次。合成后每个平台只要一张 64 帧主序列加一个发射器。目前看的是导出包回放，UE 里的观感还要再验收。</a:t>
+              <a:t>第二个案例是仙女棒。它的火星包含一级分叉、二级分叉，以及清晰与模糊的多个层次。项目中现有的窜天猴拖尾由 10 个发射器和多张贴图拼合。本次 13 类火星的结构来自我之前 Blender 工程中的版本，AI 将其移植为通用的母子分叉：子火星在母火星破裂处生成，并继承部分速度；快门与景深形成清晰和模糊的层次。合成后，每个平台只需一张 64 帧主序列和一个发射器。目前展示的是导出包回放，UE 中的观感仍待验收。</a:t>
             </a:r>
           </a:p>
           <a:p/>
@@ -1421,13 +1421,13 @@
           <a:lstStyle/>
           <a:p>
             <a:r>
-              <a:t>第 2 页 · 今年的规模（约 35 秒）</a:t>
+              <a:t>第 2 页 · 规模：开花花型由 3 种增至 26 种，时长约为去年 3 倍（约 30 秒）</a:t>
             </a:r>
           </a:p>
           <a:p/>
           <a:p>
             <a:r>
-              <a:t>先说规模。去年的烟花秀只有 3 种烟花。今年按资源表统计，开花花型有 26 种；升空尾缀按开花高度分了 6 档，还有一套窜天猴。节目约 220 秒，差不多是去年的 3 倍，而且 PC 和手游要各出一套。规模上来以后，原来的做法在出图、进引擎、排节目三个环节都跟不上，下面分别说。</a:t>
+              <a:t>首先是规模。去年的烟花秀只有 3 种烟花；今年按资源表统计，开花花型达到 26 种，升空尾缀按开花高度分为 6 档，另有一套窜天猴。节目时长约 220 秒，约为去年的 3 倍，并且 PC 与手游各需一套资源。规模扩大后，原有做法在出图、引擎接入和编排三个环节都难以支撑。</a:t>
             </a:r>
           </a:p>
           <a:p/>
@@ -1503,13 +1503,13 @@
           <a:lstStyle/>
           <a:p>
             <a:r>
-              <a:t>第 20 页 · 模糊与方头（约 50 秒）</a:t>
+              <a:t>第 20 页 · 模糊与方头：控制变量对比，分别定位（约 45 秒）</a:t>
             </a:r>
           </a:p>
           <a:p/>
           <a:p>
             <a:r>
-              <a:t>第三个是排查。模糊和方头一开始混在一起，说不清是哪一个。后来我们固定机位、固定画质档位、同时播放对比，一次只改一个变量，才把它们分开：方头是长条格被压扁后取了较低的 Mip，星头就变方，高配看不出来，低配才出现；开花先糊后清，是贴图第一次出现时还没流送到位。最后的规则按平台分：PC 主序列不生成 Mip；手游根据性能组的内存反馈，保留 Mip 和流送、最大 1024，还要再实测。经验是先把对比条件固定住，再下结论。</a:t>
+              <a:t>第三个案例是问题排查。模糊和方头最初混在一起，难以区分。后来固定机位、画质档位和播放时刻，同时播放对比，每次只改变一个变量，才将两者分开：方头是长条格压扁后采样到较低 Mip，仅在低配出现；先糊后清是贴图首次出现时尚未流送到位。最终规则按平台区分：PC 主序列不使用 Mip；手游根据性能组的内存反馈保留 Mip 与流送，最大 1024，仍待实测。经验是先固定对比条件，再下结论。</a:t>
             </a:r>
           </a:p>
           <a:p/>
@@ -1585,13 +1585,13 @@
           <a:lstStyle/>
           <a:p>
             <a:r>
-              <a:t>第 21 页 · 黑点与 Ramp 末格（约 40 秒）</a:t>
+              <a:t>第 21 页 · 黑点与末格黑块：定位原因，写入导出与导入规则（约 40 秒）</a:t>
             </a:r>
           </a:p>
           <a:p/>
           <a:p>
             <a:r>
-              <a:t>最后两个小问题：黑点和末格黑块。黑点是旧导出把淡出写在颜色里，透明度一直是 1，颜色变黑了还挡在那里；新写法保持颜色，把淡出写进 Alpha。末格黑块是最亮的地方采样碰到了 Ramp 最后一格的黑色；末格涂黑本来是为了去掉光晕灰线，所以保留它，另把 EmissiveDissolve 设为 0.98。修好以后都写进了导出和导入规则，新资源默认按新写法出。</a:t>
+              <a:t>最后两个问题是黑点和末格黑块。黑点的原因是旧导出将淡出写在颜色中，而透明度保持为 1，颜色变黑后仍遮挡后方画面；新规则保持颜色不变，将淡出写入 Alpha。末格黑块的原因是最亮处采样落在 Ramp 末格的黑色上；末格涂黑用于去除光晕灰线，予以保留，另将 EmissiveDissolve 设为 0.98。两项规则均已写入导出与导入流程，新资源默认执行。</a:t>
             </a:r>
           </a:p>
           <a:p/>
@@ -1667,13 +1667,13 @@
           <a:lstStyle/>
           <a:p>
             <a:r>
-              <a:t>第 22 页 · 规则落到界面：宪章与令牌（约 35 秒）</a:t>
+              <a:t>第 22 页 · 参数与界面规范：以宪章和设计令牌统一工具风格（约 35 秒）</a:t>
             </a:r>
           </a:p>
           <a:p/>
           <a:p>
             <a:r>
-              <a:t>参数多了以后，界面本身也成了问题。做法还是先立规则：参数宪章要求每个参数先说清是物理量、引擎字段还是预览设置，调了不生效的要变灰并写明原因；交互宪章约定入口、状态和反馈怎么写；颜色这些基础值从已有的 DF 特效工作台反推成设计令牌，三个工具按同一套配色收口。目前配色已经统一，组件和形状还在逐步收口。</a:t>
+              <a:t>参数增多后，界面本身也需要规范。参数宪章要求每个参数先明确是物理量、引擎字段还是预览设置，调整后不生效的参数必须置灰并说明原因；交互宪章统一入口、状态和反馈的写法；颜色等基础值从现有 DF 特效工作台反推为设计令牌，三个工具按同一套配色收口。目前配色已统一，组件与形状仍在逐步统一。</a:t>
             </a:r>
           </a:p>
           <a:p/>
@@ -1749,13 +1749,13 @@
           <a:lstStyle/>
           <a:p>
             <a:r>
-              <a:t>第 23 页 · 心得：遇到批量需求，这样和 AI 一起做（约 60 秒）</a:t>
+              <a:t>第 23 页 · 工作方法：批量需求的三阶段协作流程（约 60 秒）</a:t>
             </a:r>
           </a:p>
           <a:p/>
           <a:p>
             <a:r>
-              <a:t>最后是我这一个多月最大的心得：遇到批量需求，可以分三步和 AI 一起做。第一步想清楚：把目标、引擎限制和怎样算做完说清楚，让 AI 讲清要用哪些技术，选最简单可行的路线；做效果的先拆原理再调参数。第二步定规矩：任务一多，几条线会互相覆盖，所以按效果、工具和编排分给不同的 AI 对话负责，共享文件先认领；规则写成宪章和规范，每次开工先读规范和上次的交接。第三步守结果：先让机器检查，再进 UE 验收；执行结束、AI 自检通过和我验收通过分开记；通过的版本锁定下来复用。大家可以先从一件重复的小事开始。</a:t>
+              <a:t>最后是这一个多月的主要心得：批量需求可以按三个阶段与 AI 协作。第一阶段明确需求：定义目标、引擎约束和验收标准，由 AI 梳理所需技术并选择最简可行方案；效果类工作先拆解原理，再调整参数。第二阶段建立规范：任务较多时，多条线容易互相覆盖，因此按效果、工具和编排划分 AI 负责人，共享文件先认领；规则写成宪章与规范，每次执行前先读取规范和上次交接。第三阶段结果把关：先由机器自动检查，再在 UE 验收；执行结束、AI 自检通过和人工验收分别记录；通过的版本锁定后复用。建议从一项重复性工作开始尝试。</a:t>
             </a:r>
           </a:p>
           <a:p/>
@@ -1831,13 +1831,13 @@
           <a:lstStyle/>
           <a:p>
             <a:r>
-              <a:t>第 24 页 · 工具与致谢（约 40 秒）</a:t>
+              <a:t>第 24 页 · 工具获取与复用（约 35 秒）</a:t>
             </a:r>
           </a:p>
           <a:p/>
           <a:p>
             <a:r>
-              <a:t>工具包我会放在 xx 处。现在可以先拿到烘焙器和案例，导入器和编排工作台补齐后一起放上去。烘焙器可以从案例开始改；导入器需要 UE 插件和本机服务，第一次请在测试工程里试；编排工作台是离线页面。今天的案例只是载体，我真正想分享的是这种工作方式：从具体问题出发，让 AI 参与实现，把可检查、可复用的结果留下来。谢谢大家。</a:t>
+              <a:t>工具包存放位置为 xx。首批提供烘焙器和案例，导入器与编排工作台完善后补充。烘焙器可基于案例调整参数；导入器需要 UE 插件和本机交付服务，首次使用请在测试工程中进行；编排工作台为离线页面。案例只是载体，重点是一种工作方式：从具体问题出发，由 AI 参与实现，沉淀可检查、可复用的成果。谢谢大家。</a:t>
             </a:r>
           </a:p>
           <a:p/>
@@ -1913,13 +1913,13 @@
           <a:lstStyle/>
           <a:p>
             <a:r>
-              <a:t>第 3 页 · 问题一：出图（约 50 秒）</a:t>
+              <a:t>第 3 页 · 出图：每种烟花的规格需单独处理，人工成本高（约 50 秒）</a:t>
             </a:r>
           </a:p>
           <a:p/>
           <a:p>
             <a:r>
-              <a:t>第一个问题在出图。烟花在引擎里是一张面片在播序列帧，每种烟花出图前都要定好几件事：面片取多大、爆点放在哪；几十帧怎么分配；格子怎么排；怎么打包成一张图，再配上 Ramp 和 Cutout；PC 和手游还要各来一套。以前这些要在后期软件里手工裁、排、合通道，再回 Cascade 手算尺寸和曲线，效果一改就要重来。我也试过让 AI 写脚本驱动 Blender 出图，能出，但每轮都要等渲染，调参时也看不到最终效果。</a:t>
+              <a:t>第一个问题是出图。烟花在引擎中以面片播放序列帧，每种烟花出图前都需要确定多项规格：面片尺寸与爆点位置、帧数分配、格子排布、打包方式，以及 Ramp 和 Cutout；PC 与手游还要分别输出。原有方式需要在后期软件中手工裁切、排格、合通道，再在 Cascade 中计算尺寸与曲线，效果一旦调整就要全部重做。此前也尝试过由 AI 编写脚本驱动 Blender 出图，可以输出，但每轮需要等待离线渲染，调参时无法预览最终效果。</a:t>
             </a:r>
           </a:p>
           <a:p/>
@@ -1995,13 +1995,13 @@
           <a:lstStyle/>
           <a:p>
             <a:r>
-              <a:t>第 4 页 · 问题二：进引擎（约 30 秒）</a:t>
+              <a:t>第 4 页 · 引擎接入：贴图与实例需逐项按规范设置（约 30 秒）</a:t>
             </a:r>
           </a:p>
           <a:p/>
           <a:p>
             <a:r>
-              <a:t>第二个问题在进引擎。素材导出来以后，每张贴图都要按用途和平台设置流送、贴图组和 Mip，材质实例和发射器还要设参数、包围盒和朝向。这批资源一共引用 212 张贴图，每改一版就要重新创建、重新设置。全靠手点，漏掉一项往往要到实机里才发现。</a:t>
+              <a:t>第二个问题是引擎接入。素材导出后，每张贴图都需要按用途和平台设置流送、贴图组和 Mip，材质实例与发射器还要设置参数、包围盒和朝向。这批资源共引用 212 张贴图，每次版本更新都要重新创建和设置。依靠人工逐项操作，漏项通常要到实机阶段才会暴露。</a:t>
             </a:r>
           </a:p>
           <a:p/>
@@ -2077,13 +2077,13 @@
           <a:lstStyle/>
           <a:p>
             <a:r>
-              <a:t>第 5 页 · 问题三：排节目（约 40 秒）</a:t>
+              <a:t>第 5 页 · 编排：定序器手工排轨难以支撑今年的规模（约 40 秒）</a:t>
             </a:r>
           </a:p>
           <a:p/>
           <a:p>
             <a:r>
-              <a:t>第三个问题在排节目。去年是在定序器里手工拼，每发烟花都带着粒子、位移、声音这些轨道，工程里有 12 条子序列、两千多条轨道，改一处节奏就要重新对很多条；性能组也反馈过内存占用偏高。今年节目约 220 秒，24 个发射点位，PC 和手游还要各分 3 档画质，版本时间又紧。我和程序一起做了新的导演蓝图，但要对着表格手工匹配音乐节奏，还是很难改。</a:t>
+              <a:t>第三个问题是编排。去年在定序器中手工拼接，每发烟花包含粒子、位移、声音等轨道，工程共有 12 条子序列、两千余条轨道，调整一处节奏需要重新对齐多条轨道；性能组也反馈过内存占用偏高。今年节目约 220 秒，有 24 个发射点位，PC 与手游各分 3 档画质，版本周期也很紧。我与程序共同设计了新的导演蓝图，但以表格手工匹配音乐节奏，修改成本仍然较高。</a:t>
             </a:r>
           </a:p>
           <a:p/>
@@ -2159,13 +2159,13 @@
           <a:lstStyle/>
           <a:p>
             <a:r>
-              <a:t>第 6 页 · 三个问题，三个工具（约 40 秒）</a:t>
+              <a:t>第 6 页 · 解决思路：三个环节对应三个工具，以固定格式衔接（约 40 秒）</a:t>
             </a:r>
           </a:p>
           <a:p/>
           <a:p>
             <a:r>
-              <a:t>解决思路很直接：三个问题，各做一个工具。烘焙器负责出图，导入器负责进引擎，编排工作台负责排节目。工具之间用固定格式衔接：烘焙器导出的素材包，导入器可以直接读；编排工作台生成导演蓝图要用的表。分工上，目标、审美和引擎限制由我来定，工具由 AI 来写；结果先在引擎回放里查，关键的再进 UE 验收。导演蓝图是和程序一起设计的，贴图规范是和性能组一起定的。</a:t>
+              <a:t>对应的解决思路是：三个环节各开发一个工具。烘焙器负责出图，导入器负责引擎接入，编排工作台负责节目编排。工具之间以固定格式衔接：烘焙器导出的素材包由导入器直接读取，编排工作台输出导演蓝图所需的表。分工上，目标、审美与引擎约束由我确定，工具由 AI 开发；结果先经引擎回放检查，关键节点在 UE 中验收。导演蓝图与程序共同设计，贴图规范与性能组共同确定。</a:t>
             </a:r>
           </a:p>
         </p:txBody>
@@ -2235,13 +2235,13 @@
           <a:lstStyle/>
           <a:p>
             <a:r>
-              <a:t>第 7 页 · 烘焙器：为什么自己做（约 45 秒）</a:t>
+              <a:t>第 7 页 · 烟花烘焙器：可视化调参、快速出图、按项目定制（约 50 秒）</a:t>
             </a:r>
           </a:p>
           <a:p/>
           <a:p>
             <a:r>
-              <a:t>出图这一环，我让 AI 做了烘焙器。前面说的脚本路线能出图，但慢，也看不见。烟花在游戏里本质上是朝向镜头的面片，所以我不追求完整的三维场景，而是按这次的舞台尺度、观看距离和 Cascade 规范，做一个面向游戏视角的 2D 烘焙器。它有三个特点：看得见，改参数当场能看，导出后还能在「引擎回放」里按导出的贴图播放；出得快，确认后直接输出引擎要的格式；按项目定制，规格都围绕这次的需求来定。</a:t>
+              <a:t>出图环节使用烟花烘焙器。前面提到的脚本方式可以出图，但速度慢，也无法直观预览。游戏中的烟花是朝向镜头的面片序列，因此烘焙器不构建完整的三维场景，而是依据本项目的舞台尺度、观看距离和 Cascade 规范，只输出游戏视角所需的 2D 序列。它有三个特点：一是可视化，实时模拟调参，导出结果可在引擎回放中复核；二是快速输出，参数修改即时生效，直接输出引擎所需格式；三是项目定制，所有规格围绕本次需求设计。</a:t>
             </a:r>
           </a:p>
           <a:p/>
@@ -2317,13 +2317,13 @@
           <a:lstStyle/>
           <a:p>
             <a:r>
-              <a:t>第 8 页 · 导出流程化之一：取景与裁剪（约 45 秒）</a:t>
+              <a:t>第 8 页 · 取景规范：提高贴图的像素利用率（约 45 秒）</a:t>
             </a:r>
           </a:p>
           <a:p/>
           <a:p>
             <a:r>
-              <a:t>烘焙器里我花功夫最多的是导出规范，先说取景。烟花在面片里占得越小，分辨率浪费得越多。固定框是默认；随开花放大让刚开花的小花也有像素，但扇形这种只往一侧长的花，开满后反而更空，所以又加了锚在爆点，只朝有内容的方向放大，拿一个扇形测试，内容占比从两成左右提到四成左右。烘完再按每帧实际内容收紧，帧数也按运动来分。这些以前要手工框、手工算，现在每次导出自动完成。</a:t>
+              <a:t>导出规范是烘焙器中投入最多的部分，首先是取景。烟花在面片中所占比例越小，分辨率浪费越多。固定框为默认方式；随开花放大可以让开花初期获得更多像素，但单侧花型在后期留白反而增加，因此增加了锚在爆点的方式，只向内容方向放大。在一个扇形测试中，内容占面片的比例由约两成提高到约四成。烘焙后再按每帧实际内容收紧，帧数也按运动快慢分配。这些步骤原本需要手工完成，现在每次导出自动执行。</a:t>
             </a:r>
           </a:p>
           <a:p/>
@@ -2399,13 +2399,13 @@
           <a:lstStyle/>
           <a:p>
             <a:r>
-              <a:t>第 9 页 · 导出流程化之二：打包与两平台（约 45 秒）</a:t>
+              <a:t>第 9 页 · 打包规范：单张贴图 64 帧，PC 与手游同时导出（约 45 秒）</a:t>
             </a:r>
           </a:p>
           <a:p/>
           <a:p>
             <a:r>
-              <a:t>再说打包。一张图分 4×4 格，再用 RGBA 四个通道接力，一张图就能装 64 帧。贴图只存灰度，颜色交给 Ramp 去查，换颜色不用重新烘。格子跟着形状走：圆的用方格，下垂的柳用竖长格，细长的尾缀用 16×1 长条。Cutout 裁掉透明区域、减少 overdraw，省得少就不出，重复的只留一张。最后同一次导出 PC 和手游两套，交付前先在引擎回放里放一遍。</a:t>
+              <a:t>其次是打包。一张贴图分为 4×4 格，再按 RGBA 四个通道依次填充，单张贴图可容纳 64 帧。贴图只存灰度，颜色由 Ramp 查色，同一序列换色无需重新烘焙。格子随形状选择：圆形用方格，垂柳用竖长格，细长尾缀用 16×1 长条。Cutout 用于减少透明区域和 overdraw，收益不足一成时不输出，重复项只保留一份。PC 与手游同时导出，交付前在引擎回放中复核。</a:t>
             </a:r>
           </a:p>
           <a:p/>
@@ -6200,7 +6200,59 @@
                 <a:ea typeface="微软雅黑"/>
                 <a:cs typeface="微软雅黑"/>
               </a:rPr>
-              <a:t>一个多月，从做效果、进引擎到排节目</a:t>
+              <a:t>历时一个多月</a:t>
+            </a:r>
+            <a:r>
+              <a:rPr sz="1400" b="0" lang="zh-CN" altLang="en-US">
+                <a:solidFill>
+                  <a:srgbClr val="F5F5F5">
+                    <a:alpha val="55000"/>
+                  </a:srgbClr>
+                </a:solidFill>
+                <a:latin typeface="微软雅黑"/>
+                <a:ea typeface="微软雅黑"/>
+                <a:cs typeface="微软雅黑"/>
+              </a:rPr>
+              <a:t> </a:t>
+            </a:r>
+            <a:r>
+              <a:rPr sz="1400" b="0" lang="zh-CN" altLang="en-US">
+                <a:solidFill>
+                  <a:srgbClr val="F5F5F5">
+                    <a:alpha val="55000"/>
+                  </a:srgbClr>
+                </a:solidFill>
+                <a:latin typeface="Consolas"/>
+                <a:ea typeface="微软雅黑"/>
+                <a:cs typeface="微软雅黑"/>
+              </a:rPr>
+              <a:t>·</a:t>
+            </a:r>
+            <a:r>
+              <a:rPr sz="1400" b="0" lang="zh-CN" altLang="en-US">
+                <a:solidFill>
+                  <a:srgbClr val="F5F5F5">
+                    <a:alpha val="55000"/>
+                  </a:srgbClr>
+                </a:solidFill>
+                <a:latin typeface="微软雅黑"/>
+                <a:ea typeface="微软雅黑"/>
+                <a:cs typeface="微软雅黑"/>
+              </a:rPr>
+              <a:t> </a:t>
+            </a:r>
+            <a:r>
+              <a:rPr sz="1400" b="0" lang="zh-CN" altLang="en-US">
+                <a:solidFill>
+                  <a:srgbClr val="F5F5F5">
+                    <a:alpha val="55000"/>
+                  </a:srgbClr>
+                </a:solidFill>
+                <a:latin typeface="Consolas"/>
+                <a:ea typeface="微软雅黑"/>
+                <a:cs typeface="微软雅黑"/>
+              </a:rPr>
+              <a:t>覆盖效果制作、引擎接入与节目编排</a:t>
             </a:r>
           </a:p>
         </p:txBody>
@@ -6922,7 +6974,7 @@
                 <a:ea typeface="微软雅黑"/>
                 <a:cs typeface="微软雅黑"/>
               </a:rPr>
-              <a:t>导入器：把引擎设置规范写进工具，确认后才写入</a:t>
+              <a:t>导入器：引擎设置规范内置于工具，确认后写入</a:t>
             </a:r>
             <a:r>
               <a:rPr sz="2600" b="1" lang="zh-CN" altLang="en-US">
@@ -7831,7 +7883,7 @@
                 <a:ea typeface="微软雅黑"/>
                 <a:cs typeface="微软雅黑"/>
               </a:rPr>
-              <a:t>我点「导入」才写进</a:t>
+              <a:t>确认后写入</a:t>
             </a:r>
             <a:r>
               <a:rPr sz="1500" b="1" lang="zh-CN" altLang="en-US">
@@ -7896,7 +7948,7 @@
                 <a:ea typeface="微软雅黑"/>
                 <a:cs typeface="微软雅黑"/>
               </a:rPr>
-              <a:t>自动检查不改工程；</a:t>
+              <a:t>自动检查阶段不修改工程；</a:t>
             </a:r>
           </a:p>
           <a:p>
@@ -7916,7 +7968,7 @@
                 <a:ea typeface="微软雅黑"/>
                 <a:cs typeface="微软雅黑"/>
               </a:rPr>
-              <a:t>和性能组定的规范写在工具里，</a:t>
+              <a:t>与性能组确定的规范内置于工具，</a:t>
             </a:r>
           </a:p>
           <a:p>
@@ -7936,7 +7988,7 @@
                 <a:ea typeface="微软雅黑"/>
                 <a:cs typeface="微软雅黑"/>
               </a:rPr>
-              <a:t>不用每次靠人记</a:t>
+              <a:t>无需人工记忆</a:t>
             </a:r>
           </a:p>
         </p:txBody>
@@ -8135,7 +8187,7 @@
                 <a:ea typeface="微软雅黑"/>
                 <a:cs typeface="微软雅黑"/>
               </a:rPr>
-              <a:t>编排先从舞台推出规则，再按规则排</a:t>
+              <a:t>编排规则：由舞台尺度推导分档与构图</a:t>
             </a:r>
           </a:p>
         </p:txBody>
@@ -10786,7 +10838,7 @@
                 <a:ea typeface="微软雅黑"/>
                 <a:cs typeface="微软雅黑"/>
               </a:rPr>
-              <a:t>倍还分得清；</a:t>
+              <a:t>倍可分辨；</a:t>
             </a:r>
           </a:p>
           <a:p>
@@ -10806,7 +10858,33 @@
                 <a:ea typeface="微软雅黑"/>
                 <a:cs typeface="微软雅黑"/>
               </a:rPr>
-              <a:t>两倍多连成花墙；再大就糊</a:t>
+              <a:t>2</a:t>
+            </a:r>
+            <a:r>
+              <a:rPr sz="1250" b="0" lang="zh-CN" altLang="en-US">
+                <a:solidFill>
+                  <a:srgbClr val="F5F5F5">
+                    <a:alpha val="70000"/>
+                  </a:srgbClr>
+                </a:solidFill>
+                <a:latin typeface="微软雅黑"/>
+                <a:ea typeface="微软雅黑"/>
+                <a:cs typeface="微软雅黑"/>
+              </a:rPr>
+              <a:t> </a:t>
+            </a:r>
+            <a:r>
+              <a:rPr sz="1250" b="0" lang="zh-CN" altLang="en-US">
+                <a:solidFill>
+                  <a:srgbClr val="F5F5F5">
+                    <a:alpha val="70000"/>
+                  </a:srgbClr>
+                </a:solidFill>
+                <a:latin typeface="Consolas"/>
+                <a:ea typeface="微软雅黑"/>
+                <a:cs typeface="微软雅黑"/>
+              </a:rPr>
+              <a:t>倍以上形成花墙；继续增大则糊成一片</a:t>
             </a:r>
           </a:p>
         </p:txBody>
@@ -13020,7 +13098,7 @@
                 <a:ea typeface="微软雅黑"/>
                 <a:cs typeface="微软雅黑"/>
               </a:rPr>
-              <a:t>编排工作台：在时间轴上排，导出导演蓝图要的三张表</a:t>
+              <a:t>烟花编排工作台：时间轴编辑，输出导演蓝图三张表</a:t>
             </a:r>
           </a:p>
         </p:txBody>
@@ -13476,7 +13554,7 @@
                 <a:ea typeface="微软雅黑"/>
                 <a:cs typeface="微软雅黑"/>
               </a:rPr>
-              <a:t>对着音乐改节奏、换模板；改完就能看</a:t>
+              <a:t>依据音乐调整节奏与模板，修改后即时预览</a:t>
             </a:r>
           </a:p>
         </p:txBody>
@@ -13591,7 +13669,7 @@
                 <a:ea typeface="微软雅黑"/>
                 <a:cs typeface="微软雅黑"/>
               </a:rPr>
-              <a:t>按宪章检查，一键出三张表</a:t>
+              <a:t>按宪章自动检查，一键输出三张表</a:t>
             </a:r>
           </a:p>
         </p:txBody>
@@ -13634,7 +13712,7 @@
                 <a:ea typeface="微软雅黑"/>
                 <a:cs typeface="微软雅黑"/>
               </a:rPr>
-              <a:t>重叠、档位、预算每次都查；</a:t>
+              <a:t>每次检查重叠、档位与预算；</a:t>
             </a:r>
           </a:p>
           <a:p>
@@ -13654,7 +13732,7 @@
                 <a:ea typeface="微软雅黑"/>
                 <a:cs typeface="微软雅黑"/>
               </a:rPr>
-              <a:t>子模板、模板、时序三张表给导演蓝图</a:t>
+              <a:t>输出子模板、模板、时序三张表</a:t>
             </a:r>
           </a:p>
         </p:txBody>
@@ -13853,7 +13931,7 @@
                 <a:ea typeface="微软雅黑"/>
                 <a:cs typeface="微软雅黑"/>
               </a:rPr>
-              <a:t>三个工具串起来：从调参到</a:t>
+              <a:t>流程演示：从调参到</a:t>
             </a:r>
             <a:r>
               <a:rPr sz="2600" b="1" lang="zh-CN" altLang="en-US">
@@ -13897,7 +13975,7 @@
                 <a:ea typeface="微软雅黑"/>
                 <a:cs typeface="微软雅黑"/>
               </a:rPr>
-              <a:t>里播放</a:t>
+              <a:t>播放</a:t>
             </a:r>
           </a:p>
         </p:txBody>
@@ -14704,7 +14782,7 @@
                 <a:ea typeface="微软雅黑"/>
                 <a:cs typeface="微软雅黑"/>
               </a:rPr>
-              <a:t>选案例、调参</a:t>
+              <a:t>选择案例、调参</a:t>
             </a:r>
           </a:p>
         </p:txBody>
@@ -14829,7 +14907,7 @@
                 <a:ea typeface="微软雅黑"/>
                 <a:cs typeface="微软雅黑"/>
               </a:rPr>
-              <a:t>看引擎回放</a:t>
+              <a:t>引擎回放复核</a:t>
             </a:r>
           </a:p>
         </p:txBody>
@@ -14954,7 +15032,7 @@
                 <a:ea typeface="微软雅黑"/>
                 <a:cs typeface="微软雅黑"/>
               </a:rPr>
-              <a:t>一次导出</a:t>
+              <a:t>双平台导出</a:t>
             </a:r>
           </a:p>
         </p:txBody>
@@ -15148,7 +15226,7 @@
                 <a:ea typeface="微软雅黑"/>
                 <a:cs typeface="微软雅黑"/>
               </a:rPr>
-              <a:t>点「导入」才写</a:t>
+              <a:t>确认后写入</a:t>
             </a:r>
             <a:r>
               <a:rPr sz="1200" b="0" lang="zh-CN" altLang="en-US">
@@ -15759,7 +15837,29 @@
                 <a:ea typeface="微软雅黑"/>
                 <a:cs typeface="微软雅黑"/>
               </a:rPr>
-              <a:t>档尾缀和一套窜天猴进了资源表</a:t>
+              <a:t>档尾缀、1</a:t>
+            </a:r>
+            <a:r>
+              <a:rPr sz="2600" b="1" lang="zh-CN" altLang="en-US">
+                <a:solidFill>
+                  <a:srgbClr val="F5F5F5"/>
+                </a:solidFill>
+                <a:latin typeface="微软雅黑"/>
+                <a:ea typeface="微软雅黑"/>
+                <a:cs typeface="微软雅黑"/>
+              </a:rPr>
+              <a:t> </a:t>
+            </a:r>
+            <a:r>
+              <a:rPr sz="2600" b="1" lang="zh-CN" altLang="en-US">
+                <a:solidFill>
+                  <a:srgbClr val="F5F5F5"/>
+                </a:solidFill>
+                <a:latin typeface="Consolas"/>
+                <a:ea typeface="微软雅黑"/>
+                <a:cs typeface="微软雅黑"/>
+              </a:rPr>
+              <a:t>套窜天猴入表</a:t>
             </a:r>
           </a:p>
         </p:txBody>
@@ -16678,7 +16778,7 @@
                 <a:ea typeface="微软雅黑"/>
                 <a:cs typeface="微软雅黑"/>
               </a:rPr>
-              <a:t>种找到烘焙器导出材料，</a:t>
+              <a:t>种有烘焙器导出材料，</a:t>
             </a:r>
           </a:p>
           <a:p>
@@ -16724,7 +16824,7 @@
                 <a:ea typeface="微软雅黑"/>
                 <a:cs typeface="微软雅黑"/>
               </a:rPr>
-              <a:t>种留有配方和导出记录，</a:t>
+              <a:t>种保留配方与导出记录，</a:t>
             </a:r>
           </a:p>
           <a:p>
@@ -16744,7 +16844,7 @@
                 <a:ea typeface="微软雅黑"/>
                 <a:cs typeface="微软雅黑"/>
               </a:rPr>
-              <a:t>要调整时改参数重新导出</a:t>
+              <a:t>可调参后重新导出</a:t>
             </a:r>
           </a:p>
         </p:txBody>
@@ -19755,7 +19855,7 @@
                 <a:ea typeface="微软雅黑"/>
                 <a:cs typeface="微软雅黑"/>
               </a:rPr>
-              <a:t>接入成果：两轮整批修正，读回全部一致</a:t>
+              <a:t>接入成果：两轮批量修正，读回结果一致</a:t>
             </a:r>
           </a:p>
         </p:txBody>
@@ -20143,7 +20243,7 @@
                 <a:ea typeface="微软雅黑"/>
                 <a:cs typeface="微软雅黑"/>
               </a:rPr>
-              <a:t>之后这些都写进了导入器，</a:t>
+              <a:t>以上规则已内置于导入器，</a:t>
             </a:r>
           </a:p>
           <a:p>
@@ -20161,7 +20261,7 @@
                 <a:ea typeface="微软雅黑"/>
                 <a:cs typeface="微软雅黑"/>
               </a:rPr>
-              <a:t>新资源导入时自动按规范设置</a:t>
+              <a:t>新资源导入时自动执行</a:t>
             </a:r>
           </a:p>
         </p:txBody>
@@ -20341,7 +20441,7 @@
                 <a:ea typeface="微软雅黑"/>
                 <a:cs typeface="微软雅黑"/>
               </a:rPr>
-              <a:t>张贴图整批重设，读回全部一致；</a:t>
+              <a:t>张贴图批量重设，读回结果一致；</a:t>
             </a:r>
           </a:p>
           <a:p>
@@ -20361,7 +20461,7 @@
                 <a:ea typeface="微软雅黑"/>
                 <a:cs typeface="微软雅黑"/>
               </a:rPr>
-              <a:t>共享贴图单独列出核对，不跟着改</a:t>
+              <a:t>共用贴图单独列出核对，不随之修改</a:t>
             </a:r>
           </a:p>
         </p:txBody>
@@ -20874,7 +20974,7 @@
                 <a:ea typeface="微软雅黑"/>
                 <a:cs typeface="微软雅黑"/>
               </a:rPr>
-              <a:t>编排成果：同一份节目，按平台和画质分档出表</a:t>
+              <a:t>编排成果：同一编排按平台与画质分档输出</a:t>
             </a:r>
           </a:p>
         </p:txBody>
@@ -22243,7 +22343,7 @@
                 <a:ea typeface="微软雅黑"/>
                 <a:cs typeface="微软雅黑"/>
               </a:rPr>
-              <a:t>每一版都有自动检查记录；改节奏回工作台改完重新出表，</a:t>
+              <a:t>每版均有自动检查记录；节奏调整在工作台完成并重新输出，</a:t>
             </a:r>
           </a:p>
           <a:p>
@@ -22289,7 +22389,7 @@
                 <a:ea typeface="微软雅黑"/>
                 <a:cs typeface="微软雅黑"/>
               </a:rPr>
-              <a:t>只按表播放，不用每档单独排</a:t>
+              <a:t>按表播放，无需逐档编排</a:t>
             </a:r>
           </a:p>
         </p:txBody>
@@ -22406,7 +22506,7 @@
                 <a:ea typeface="微软雅黑"/>
                 <a:cs typeface="微软雅黑"/>
               </a:rPr>
-              <a:t>节拍对齐的指标还没达到</a:t>
+              <a:t>节拍对齐指标尚未达到</a:t>
             </a:r>
           </a:p>
           <a:p>
@@ -22426,7 +22526,7 @@
                 <a:ea typeface="微软雅黑"/>
                 <a:cs typeface="微软雅黑"/>
               </a:rPr>
-              <a:t>宪章定的目标，仍在调</a:t>
+              <a:t>宪章目标，持续优化中</a:t>
             </a:r>
           </a:p>
         </p:txBody>
@@ -22625,7 +22725,7 @@
                 <a:ea typeface="微软雅黑"/>
                 <a:cs typeface="微软雅黑"/>
               </a:rPr>
-              <a:t>一个人对接</a:t>
+              <a:t>个人投入：一人对接</a:t>
             </a:r>
             <a:r>
               <a:rPr sz="2600" b="1" lang="zh-CN" altLang="en-US">
@@ -22647,7 +22747,7 @@
                 <a:ea typeface="微软雅黑"/>
                 <a:cs typeface="微软雅黑"/>
               </a:rPr>
-              <a:t>AI，贯穿需求、制作、验收和编排</a:t>
+              <a:t>AI，覆盖需求、制作、验收与编排</a:t>
             </a:r>
           </a:p>
         </p:txBody>
@@ -22941,7 +23041,7 @@
                 <a:ea typeface="微软雅黑"/>
                 <a:cs typeface="微软雅黑"/>
               </a:rPr>
-              <a:t>定方向</a:t>
+              <a:t>方向制定</a:t>
             </a:r>
           </a:p>
         </p:txBody>
@@ -22984,7 +23084,7 @@
                 <a:ea typeface="微软雅黑"/>
                 <a:cs typeface="微软雅黑"/>
               </a:rPr>
-              <a:t>需求、目标与限制；舞台与编排设计</a:t>
+              <a:t>需求、目标与约束；舞台与编排设计</a:t>
             </a:r>
           </a:p>
         </p:txBody>
@@ -23099,7 +23199,7 @@
                 <a:ea typeface="微软雅黑"/>
                 <a:cs typeface="微软雅黑"/>
               </a:rPr>
-              <a:t>做判断</a:t>
+              <a:t>质量判断</a:t>
             </a:r>
           </a:p>
         </p:txBody>
@@ -23168,7 +23268,7 @@
                 <a:ea typeface="微软雅黑"/>
                 <a:cs typeface="微软雅黑"/>
               </a:rPr>
-              <a:t>里验收、规范取舍</a:t>
+              <a:t>验收、规范取舍</a:t>
             </a:r>
           </a:p>
         </p:txBody>
@@ -23283,7 +23383,7 @@
                 <a:ea typeface="微软雅黑"/>
                 <a:cs typeface="微软雅黑"/>
               </a:rPr>
-              <a:t>维护规则和交接</a:t>
+              <a:t>规则与交接</a:t>
             </a:r>
           </a:p>
         </p:txBody>
@@ -23326,7 +23426,7 @@
                 <a:ea typeface="微软雅黑"/>
                 <a:cs typeface="微软雅黑"/>
               </a:rPr>
-              <a:t>把要求写成规则，每段工作留交接</a:t>
+              <a:t>要求成文，每段工作留存交接</a:t>
             </a:r>
           </a:p>
         </p:txBody>
@@ -23367,7 +23467,7 @@
                 <a:ea typeface="微软雅黑"/>
                 <a:cs typeface="微软雅黑"/>
               </a:rPr>
-              <a:t>一个多月里每天的项目提交量</a:t>
+              <a:t>项目每日提交量（历时一个多月）</a:t>
             </a:r>
           </a:p>
         </p:txBody>
@@ -24883,7 +24983,7 @@
                 <a:ea typeface="微软雅黑"/>
                 <a:cs typeface="微软雅黑"/>
               </a:rPr>
-              <a:t>尾缀：近段和远段分别表现不同年龄的火星</a:t>
+              <a:t>升空尾缀：近段与远段对应不同年龄的火星</a:t>
             </a:r>
           </a:p>
         </p:txBody>
@@ -25120,7 +25220,7 @@
                 <a:ea typeface="微软雅黑"/>
                 <a:cs typeface="微软雅黑"/>
               </a:rPr>
-              <a:t>导出行里，亮头附近一小段是近段，下面拖着的长尾是远段</a:t>
+              <a:t>导出行中：亮头附近为近段，下方长尾为远段</a:t>
             </a:r>
           </a:p>
         </p:txBody>
@@ -25233,7 +25333,7 @@
                 <a:ea typeface="微软雅黑"/>
                 <a:cs typeface="微软雅黑"/>
               </a:rPr>
-              <a:t>循环面片跟着弹体，</a:t>
+              <a:t>循环面片随弹体移动，</a:t>
             </a:r>
             <a:br/>
             <a:r>
@@ -25247,7 +25347,7 @@
                 <a:ea typeface="微软雅黑"/>
                 <a:cs typeface="微软雅黑"/>
               </a:rPr>
-              <a:t>表现刚喷出的火星</a:t>
+              <a:t>表现新喷出的火星</a:t>
             </a:r>
           </a:p>
         </p:txBody>
@@ -25360,7 +25460,7 @@
                 <a:ea typeface="微软雅黑"/>
                 <a:cs typeface="微软雅黑"/>
               </a:rPr>
-              <a:t>一次性序列，表现留在空中</a:t>
+              <a:t>一次性序列，表现滞留空中、</a:t>
             </a:r>
             <a:br/>
             <a:r>
@@ -25374,7 +25474,7 @@
                 <a:ea typeface="微软雅黑"/>
                 <a:cs typeface="微软雅黑"/>
               </a:rPr>
-              <a:t>慢慢落下的老火星</a:t>
+              <a:t>缓慢下落的老火星</a:t>
             </a:r>
           </a:p>
         </p:txBody>
@@ -25415,7 +25515,7 @@
                 <a:ea typeface="微软雅黑"/>
                 <a:cs typeface="微软雅黑"/>
               </a:rPr>
-              <a:t>注意：不是相机远近的切换</a:t>
+              <a:t>注：并非按相机距离切换</a:t>
             </a:r>
           </a:p>
         </p:txBody>
@@ -25518,7 +25618,7 @@
                 <a:ea typeface="微软雅黑"/>
                 <a:cs typeface="微软雅黑"/>
               </a:rPr>
-              <a:t>帧数怎么分</a:t>
+              <a:t>帧数分配</a:t>
             </a:r>
           </a:p>
         </p:txBody>
@@ -25561,7 +25661,7 @@
                 <a:ea typeface="微软雅黑"/>
                 <a:cs typeface="微软雅黑"/>
               </a:rPr>
-              <a:t>按游戏里的观看距离，把火星运动换算成屏幕上每帧移动多少像素，再按</a:t>
+              <a:t>按游戏内观看距离，将火星运动换算为每帧屏幕位移，再按</a:t>
             </a:r>
             <a:r>
               <a:rPr sz="1300" b="0" lang="zh-CN" altLang="en-US">
@@ -25613,7 +25713,7 @@
                 <a:ea typeface="微软雅黑"/>
                 <a:cs typeface="微软雅黑"/>
               </a:rPr>
-              <a:t>帧的节拍分配帧数。</a:t>
+              <a:t>帧节拍分配帧数。</a:t>
             </a:r>
           </a:p>
         </p:txBody>
@@ -25654,7 +25754,7 @@
                 <a:ea typeface="微软雅黑"/>
                 <a:cs typeface="微软雅黑"/>
               </a:rPr>
-              <a:t>远看流畅，近看略软：</a:t>
+              <a:t>远景流畅、近景略软，</a:t>
             </a:r>
           </a:p>
           <a:p>
@@ -25672,7 +25772,7 @@
                 <a:ea typeface="微软雅黑"/>
                 <a:cs typeface="微软雅黑"/>
               </a:rPr>
-              <a:t>这是有意做的取舍</a:t>
+              <a:t>属于有意取舍</a:t>
             </a:r>
           </a:p>
         </p:txBody>
@@ -25893,7 +25993,7 @@
                 <a:ea typeface="微软雅黑"/>
                 <a:cs typeface="微软雅黑"/>
               </a:rPr>
-              <a:t>类火星在烘焙时合成，一个发射器播放</a:t>
+              <a:t>类火星烘焙合成，单发射器播放</a:t>
             </a:r>
           </a:p>
         </p:txBody>
@@ -26454,7 +26554,7 @@
                 <a:ea typeface="微软雅黑"/>
                 <a:cs typeface="微软雅黑"/>
               </a:rPr>
-              <a:t>已有的窜天猴拖尾用了</a:t>
+              <a:t>现有窜天猴拖尾由</a:t>
             </a:r>
             <a:br/>
             <a:r>
@@ -26494,7 +26594,7 @@
                 <a:ea typeface="微软雅黑"/>
                 <a:cs typeface="微软雅黑"/>
               </a:rPr>
-              <a:t>个发射器、多张贴图来拼</a:t>
+              <a:t>个发射器、多张贴图拼合</a:t>
             </a:r>
           </a:p>
         </p:txBody>
@@ -26535,7 +26635,7 @@
                 <a:ea typeface="微软雅黑"/>
                 <a:cs typeface="微软雅黑"/>
               </a:rPr>
-              <a:t>这次</a:t>
+              <a:t>本次</a:t>
             </a:r>
           </a:p>
         </p:txBody>
@@ -26604,7 +26704,7 @@
                 <a:ea typeface="微软雅黑"/>
                 <a:cs typeface="微软雅黑"/>
               </a:rPr>
-              <a:t>移植成通用的母子分叉：子火星</a:t>
+              <a:t>移植为通用母子分叉：子火星</a:t>
             </a:r>
             <a:br/>
             <a:r>
@@ -26618,7 +26718,7 @@
                 <a:ea typeface="微软雅黑"/>
                 <a:cs typeface="微软雅黑"/>
               </a:rPr>
-              <a:t>在母火星破裂处出生、继承部分速度</a:t>
+              <a:t>在母火星破裂处生成并继承部分速度</a:t>
             </a:r>
           </a:p>
         </p:txBody>
@@ -27131,7 +27231,139 @@
                 <a:ea typeface="微软雅黑"/>
                 <a:cs typeface="微软雅黑"/>
               </a:rPr>
-              <a:t>今年的烟花秀，种类和时长都比去年大得多</a:t>
+              <a:t>规模：开花花型由</a:t>
+            </a:r>
+            <a:r>
+              <a:rPr sz="2600" b="1" lang="zh-CN" altLang="en-US">
+                <a:solidFill>
+                  <a:srgbClr val="F5F5F5"/>
+                </a:solidFill>
+                <a:latin typeface="微软雅黑"/>
+                <a:ea typeface="微软雅黑"/>
+                <a:cs typeface="微软雅黑"/>
+              </a:rPr>
+              <a:t> </a:t>
+            </a:r>
+            <a:r>
+              <a:rPr sz="2600" b="1" lang="zh-CN" altLang="en-US">
+                <a:solidFill>
+                  <a:srgbClr val="F5F5F5"/>
+                </a:solidFill>
+                <a:latin typeface="Consolas"/>
+                <a:ea typeface="微软雅黑"/>
+                <a:cs typeface="微软雅黑"/>
+              </a:rPr>
+              <a:t>3</a:t>
+            </a:r>
+            <a:r>
+              <a:rPr sz="2600" b="1" lang="zh-CN" altLang="en-US">
+                <a:solidFill>
+                  <a:srgbClr val="F5F5F5"/>
+                </a:solidFill>
+                <a:latin typeface="微软雅黑"/>
+                <a:ea typeface="微软雅黑"/>
+                <a:cs typeface="微软雅黑"/>
+              </a:rPr>
+              <a:t> </a:t>
+            </a:r>
+            <a:r>
+              <a:rPr sz="2600" b="1" lang="zh-CN" altLang="en-US">
+                <a:solidFill>
+                  <a:srgbClr val="F5F5F5"/>
+                </a:solidFill>
+                <a:latin typeface="Consolas"/>
+                <a:ea typeface="微软雅黑"/>
+                <a:cs typeface="微软雅黑"/>
+              </a:rPr>
+              <a:t>种增至</a:t>
+            </a:r>
+            <a:r>
+              <a:rPr sz="2600" b="1" lang="zh-CN" altLang="en-US">
+                <a:solidFill>
+                  <a:srgbClr val="F5F5F5"/>
+                </a:solidFill>
+                <a:latin typeface="微软雅黑"/>
+                <a:ea typeface="微软雅黑"/>
+                <a:cs typeface="微软雅黑"/>
+              </a:rPr>
+              <a:t> </a:t>
+            </a:r>
+            <a:r>
+              <a:rPr sz="2600" b="1" lang="zh-CN" altLang="en-US">
+                <a:solidFill>
+                  <a:srgbClr val="F5F5F5"/>
+                </a:solidFill>
+                <a:latin typeface="Consolas"/>
+                <a:ea typeface="微软雅黑"/>
+                <a:cs typeface="微软雅黑"/>
+              </a:rPr>
+              <a:t>26</a:t>
+            </a:r>
+            <a:r>
+              <a:rPr sz="2600" b="1" lang="zh-CN" altLang="en-US">
+                <a:solidFill>
+                  <a:srgbClr val="F5F5F5"/>
+                </a:solidFill>
+                <a:latin typeface="微软雅黑"/>
+                <a:ea typeface="微软雅黑"/>
+                <a:cs typeface="微软雅黑"/>
+              </a:rPr>
+              <a:t> </a:t>
+            </a:r>
+            <a:r>
+              <a:rPr sz="2600" b="1" lang="zh-CN" altLang="en-US">
+                <a:solidFill>
+                  <a:srgbClr val="F5F5F5"/>
+                </a:solidFill>
+                <a:latin typeface="Consolas"/>
+                <a:ea typeface="微软雅黑"/>
+                <a:cs typeface="微软雅黑"/>
+              </a:rPr>
+              <a:t>种，时长约为去年</a:t>
+            </a:r>
+            <a:r>
+              <a:rPr sz="2600" b="1" lang="zh-CN" altLang="en-US">
+                <a:solidFill>
+                  <a:srgbClr val="F5F5F5"/>
+                </a:solidFill>
+                <a:latin typeface="微软雅黑"/>
+                <a:ea typeface="微软雅黑"/>
+                <a:cs typeface="微软雅黑"/>
+              </a:rPr>
+              <a:t> </a:t>
+            </a:r>
+            <a:r>
+              <a:rPr sz="2600" b="1" lang="zh-CN" altLang="en-US">
+                <a:solidFill>
+                  <a:srgbClr val="F5F5F5"/>
+                </a:solidFill>
+                <a:latin typeface="Consolas"/>
+                <a:ea typeface="微软雅黑"/>
+                <a:cs typeface="微软雅黑"/>
+              </a:rPr>
+              <a:t>3</a:t>
+            </a:r>
+            <a:r>
+              <a:rPr sz="2600" b="1" lang="zh-CN" altLang="en-US">
+                <a:solidFill>
+                  <a:srgbClr val="F5F5F5"/>
+                </a:solidFill>
+                <a:latin typeface="微软雅黑"/>
+                <a:ea typeface="微软雅黑"/>
+                <a:cs typeface="微软雅黑"/>
+              </a:rPr>
+              <a:t> </a:t>
+            </a:r>
+            <a:r>
+              <a:rPr sz="2600" b="1" lang="zh-CN" altLang="en-US">
+                <a:solidFill>
+                  <a:srgbClr val="F5F5F5"/>
+                </a:solidFill>
+                <a:latin typeface="Consolas"/>
+                <a:ea typeface="微软雅黑"/>
+                <a:cs typeface="微软雅黑"/>
+              </a:rPr>
+              <a:t>倍</a:t>
             </a:r>
           </a:p>
         </p:txBody>
@@ -28093,7 +28325,33 @@
                 <a:ea typeface="微软雅黑"/>
                 <a:cs typeface="微软雅黑"/>
               </a:rPr>
-              <a:t>PC、手游各一套，各自再分画质档</a:t>
+              <a:t>PC</a:t>
+            </a:r>
+            <a:r>
+              <a:rPr sz="1200" b="0" lang="zh-CN" altLang="en-US">
+                <a:solidFill>
+                  <a:srgbClr val="F5F5F5">
+                    <a:alpha val="70000"/>
+                  </a:srgbClr>
+                </a:solidFill>
+                <a:latin typeface="微软雅黑"/>
+                <a:ea typeface="微软雅黑"/>
+                <a:cs typeface="微软雅黑"/>
+              </a:rPr>
+              <a:t> </a:t>
+            </a:r>
+            <a:r>
+              <a:rPr sz="1200" b="0" lang="zh-CN" altLang="en-US">
+                <a:solidFill>
+                  <a:srgbClr val="F5F5F5">
+                    <a:alpha val="70000"/>
+                  </a:srgbClr>
+                </a:solidFill>
+                <a:latin typeface="Consolas"/>
+                <a:ea typeface="微软雅黑"/>
+                <a:cs typeface="微软雅黑"/>
+              </a:rPr>
+              <a:t>与手游各一套，分别设画质档位</a:t>
             </a:r>
           </a:p>
         </p:txBody>
@@ -28589,7 +28847,7 @@
                 <a:ea typeface="微软雅黑"/>
                 <a:cs typeface="微软雅黑"/>
               </a:rPr>
-              <a:t>模糊与方头：固定条件对比后，分开定位</a:t>
+              <a:t>模糊与方头：控制变量对比，分别定位</a:t>
             </a:r>
           </a:p>
         </p:txBody>
@@ -29765,7 +30023,7 @@
                 <a:ea typeface="微软雅黑"/>
                 <a:cs typeface="微软雅黑"/>
               </a:rPr>
-              <a:t>长条格被压扁后取了较低的</a:t>
+              <a:t>长条格压扁后采样到较低</a:t>
             </a:r>
             <a:r>
               <a:rPr sz="1300" b="0" lang="zh-CN" altLang="en-US">
@@ -29805,7 +30063,7 @@
                 <a:ea typeface="微软雅黑"/>
                 <a:cs typeface="微软雅黑"/>
               </a:rPr>
-              <a:t>高配看不出，低配才出现</a:t>
+              <a:t>仅在低配出现</a:t>
             </a:r>
           </a:p>
         </p:txBody>
@@ -29918,7 +30176,7 @@
                 <a:ea typeface="微软雅黑"/>
                 <a:cs typeface="微软雅黑"/>
               </a:rPr>
-              <a:t>贴图第一次出现时</a:t>
+              <a:t>贴图首次出现时</a:t>
             </a:r>
             <a:br/>
             <a:r>
@@ -29932,7 +30190,7 @@
                 <a:ea typeface="微软雅黑"/>
                 <a:cs typeface="微软雅黑"/>
               </a:rPr>
-              <a:t>还没流送到位</a:t>
+              <a:t>尚未流送到位</a:t>
             </a:r>
           </a:p>
         </p:txBody>
@@ -30335,7 +30593,7 @@
                 <a:ea typeface="微软雅黑"/>
                 <a:cs typeface="微软雅黑"/>
               </a:rPr>
-              <a:t>固定机位、画质档位和播放时刻，</a:t>
+              <a:t>固定机位、画质档位与播放时刻，</a:t>
             </a:r>
           </a:p>
           <a:p>
@@ -30355,7 +30613,7 @@
                 <a:ea typeface="微软雅黑"/>
                 <a:cs typeface="微软雅黑"/>
               </a:rPr>
-              <a:t>一次只改一个变量，再下结论</a:t>
+              <a:t>单变量对比后再下结论</a:t>
             </a:r>
           </a:p>
         </p:txBody>
@@ -30554,7 +30812,7 @@
                 <a:ea typeface="微软雅黑"/>
                 <a:cs typeface="微软雅黑"/>
               </a:rPr>
-              <a:t>黑点与末格黑块：查清原因，写进导出和导入规则</a:t>
+              <a:t>黑点与末格黑块：定位原因，写入导出与导入规则</a:t>
             </a:r>
           </a:p>
         </p:txBody>
@@ -30807,7 +31065,7 @@
                 <a:ea typeface="微软雅黑"/>
                 <a:cs typeface="微软雅黑"/>
               </a:rPr>
-              <a:t>修一次</a:t>
+              <a:t>定位原因</a:t>
             </a:r>
           </a:p>
         </p:txBody>
@@ -30872,7 +31130,7 @@
                 <a:ea typeface="微软雅黑"/>
                 <a:cs typeface="微软雅黑"/>
               </a:rPr>
-              <a:t>写成规则</a:t>
+              <a:t>写入规则</a:t>
             </a:r>
           </a:p>
         </p:txBody>
@@ -30937,7 +31195,7 @@
                 <a:ea typeface="微软雅黑"/>
                 <a:cs typeface="微软雅黑"/>
               </a:rPr>
-              <a:t>新资源默认</a:t>
+              <a:t>新资源</a:t>
             </a:r>
           </a:p>
           <a:p>
@@ -30955,7 +31213,7 @@
                 <a:ea typeface="微软雅黑"/>
                 <a:cs typeface="微软雅黑"/>
               </a:rPr>
-              <a:t>按新写法</a:t>
+              <a:t>默认执行</a:t>
             </a:r>
           </a:p>
         </p:txBody>
@@ -30998,7 +31256,7 @@
                 <a:ea typeface="微软雅黑"/>
                 <a:cs typeface="微软雅黑"/>
               </a:rPr>
-              <a:t>导出时按新写法出；</a:t>
+              <a:t>导出按新规则输出；</a:t>
             </a:r>
           </a:p>
           <a:p>
@@ -31128,7 +31386,7 @@
                 <a:ea typeface="微软雅黑"/>
                 <a:cs typeface="微软雅黑"/>
               </a:rPr>
-              <a:t>颜色变黑了，透明度还是</a:t>
+              <a:t>颜色变黑但透明度保持为</a:t>
             </a:r>
             <a:r>
               <a:rPr sz="1250" b="0" lang="zh-CN" altLang="en-US">
@@ -31154,7 +31412,7 @@
                 <a:ea typeface="微软雅黑"/>
                 <a:cs typeface="微软雅黑"/>
               </a:rPr>
-              <a:t>1，挡住了后面的画面</a:t>
+              <a:t>1，遮挡后方画面</a:t>
             </a:r>
           </a:p>
         </p:txBody>
@@ -31874,7 +32132,7 @@
                 <a:ea typeface="微软雅黑"/>
                 <a:cs typeface="微软雅黑"/>
               </a:rPr>
-              <a:t>最亮的地方采样碰到了</a:t>
+              <a:t>最亮处采样落在</a:t>
             </a:r>
             <a:r>
               <a:rPr sz="1300" b="0" lang="zh-CN" altLang="en-US">
@@ -31926,7 +32184,7 @@
                 <a:ea typeface="微软雅黑"/>
                 <a:cs typeface="微软雅黑"/>
               </a:rPr>
-              <a:t>最后一格的黑色。</a:t>
+              <a:t>末格的黑色上。</a:t>
             </a:r>
           </a:p>
           <a:p>
@@ -31949,7 +32207,7 @@
                 <a:ea typeface="微软雅黑"/>
                 <a:cs typeface="微软雅黑"/>
               </a:rPr>
-              <a:t>末格涂黑本来是为了去掉光晕灰线，保留；</a:t>
+              <a:t>末格涂黑用于去除光晕灰线，予以保留；</a:t>
             </a:r>
           </a:p>
           <a:p>
@@ -31969,7 +32227,7 @@
                 <a:ea typeface="微软雅黑"/>
                 <a:cs typeface="微软雅黑"/>
               </a:rPr>
-              <a:t>另把</a:t>
+              <a:t>另设</a:t>
             </a:r>
             <a:r>
               <a:rPr sz="1300" b="0" lang="zh-CN" altLang="en-US">
@@ -32021,7 +32279,7 @@
                 <a:ea typeface="微软雅黑"/>
                 <a:cs typeface="微软雅黑"/>
               </a:rPr>
-              <a:t>设为</a:t>
+              <a:t>为</a:t>
             </a:r>
             <a:r>
               <a:rPr sz="1300" b="0" lang="zh-CN" altLang="en-US">
@@ -32047,7 +32305,7 @@
                 <a:ea typeface="微软雅黑"/>
                 <a:cs typeface="微软雅黑"/>
               </a:rPr>
-              <a:t>0.98，让最亮处碰不到末格。</a:t>
+              <a:t>0.98，使最亮处不采到末格。</a:t>
             </a:r>
           </a:p>
         </p:txBody>
@@ -32246,51 +32504,7 @@
                 <a:ea typeface="微软雅黑"/>
                 <a:cs typeface="微软雅黑"/>
               </a:rPr>
-              <a:t>参数和界面也立规则：宪章加令牌，向</a:t>
-            </a:r>
-            <a:r>
-              <a:rPr sz="2600" b="1" lang="zh-CN" altLang="en-US">
-                <a:solidFill>
-                  <a:srgbClr val="F5F5F5"/>
-                </a:solidFill>
-                <a:latin typeface="微软雅黑"/>
-                <a:ea typeface="微软雅黑"/>
-                <a:cs typeface="微软雅黑"/>
-              </a:rPr>
-              <a:t> </a:t>
-            </a:r>
-            <a:r>
-              <a:rPr sz="2600" b="1" lang="zh-CN" altLang="en-US">
-                <a:solidFill>
-                  <a:srgbClr val="F5F5F5"/>
-                </a:solidFill>
-                <a:latin typeface="Consolas"/>
-                <a:ea typeface="微软雅黑"/>
-                <a:cs typeface="微软雅黑"/>
-              </a:rPr>
-              <a:t>DF</a:t>
-            </a:r>
-            <a:r>
-              <a:rPr sz="2600" b="1" lang="zh-CN" altLang="en-US">
-                <a:solidFill>
-                  <a:srgbClr val="F5F5F5"/>
-                </a:solidFill>
-                <a:latin typeface="微软雅黑"/>
-                <a:ea typeface="微软雅黑"/>
-                <a:cs typeface="微软雅黑"/>
-              </a:rPr>
-              <a:t> </a:t>
-            </a:r>
-            <a:r>
-              <a:rPr sz="2600" b="1" lang="zh-CN" altLang="en-US">
-                <a:solidFill>
-                  <a:srgbClr val="F5F5F5"/>
-                </a:solidFill>
-                <a:latin typeface="Consolas"/>
-                <a:ea typeface="微软雅黑"/>
-                <a:cs typeface="微软雅黑"/>
-              </a:rPr>
-              <a:t>特效工作台风格收口</a:t>
+              <a:t>参数与界面规范：以宪章和设计令牌统一工具风格</a:t>
             </a:r>
           </a:p>
         </p:txBody>
@@ -33265,51 +33479,7 @@
                 <a:ea typeface="微软雅黑"/>
                 <a:cs typeface="微软雅黑"/>
               </a:rPr>
-              <a:t>遇到批量需求，我会分三步和</a:t>
-            </a:r>
-            <a:r>
-              <a:rPr sz="2600" b="1" lang="zh-CN" altLang="en-US">
-                <a:solidFill>
-                  <a:srgbClr val="F5F5F5"/>
-                </a:solidFill>
-                <a:latin typeface="微软雅黑"/>
-                <a:ea typeface="微软雅黑"/>
-                <a:cs typeface="微软雅黑"/>
-              </a:rPr>
-              <a:t> </a:t>
-            </a:r>
-            <a:r>
-              <a:rPr sz="2600" b="1" lang="zh-CN" altLang="en-US">
-                <a:solidFill>
-                  <a:srgbClr val="F5F5F5"/>
-                </a:solidFill>
-                <a:latin typeface="Consolas"/>
-                <a:ea typeface="微软雅黑"/>
-                <a:cs typeface="微软雅黑"/>
-              </a:rPr>
-              <a:t>AI</a:t>
-            </a:r>
-            <a:r>
-              <a:rPr sz="2600" b="1" lang="zh-CN" altLang="en-US">
-                <a:solidFill>
-                  <a:srgbClr val="F5F5F5"/>
-                </a:solidFill>
-                <a:latin typeface="微软雅黑"/>
-                <a:ea typeface="微软雅黑"/>
-                <a:cs typeface="微软雅黑"/>
-              </a:rPr>
-              <a:t> </a:t>
-            </a:r>
-            <a:r>
-              <a:rPr sz="2600" b="1" lang="zh-CN" altLang="en-US">
-                <a:solidFill>
-                  <a:srgbClr val="F5F5F5"/>
-                </a:solidFill>
-                <a:latin typeface="Consolas"/>
-                <a:ea typeface="微软雅黑"/>
-                <a:cs typeface="微软雅黑"/>
-              </a:rPr>
-              <a:t>一起做</a:t>
+              <a:t>工作方法：批量需求的三阶段协作流程</a:t>
             </a:r>
           </a:p>
         </p:txBody>
@@ -33574,7 +33744,7 @@
                 <a:ea typeface="微软雅黑"/>
                 <a:cs typeface="微软雅黑"/>
               </a:rPr>
-              <a:t>想清楚</a:t>
+              <a:t>明确需求</a:t>
             </a:r>
           </a:p>
         </p:txBody>
@@ -33615,7 +33785,7 @@
                 <a:ea typeface="微软雅黑"/>
                 <a:cs typeface="微软雅黑"/>
               </a:rPr>
-              <a:t>需求说清</a:t>
+              <a:t>需求定义</a:t>
             </a:r>
             <a:r>
               <a:rPr sz="1200" b="0" lang="zh-CN" altLang="en-US">
@@ -33641,7 +33811,7 @@
                 <a:ea typeface="微软雅黑"/>
                 <a:cs typeface="微软雅黑"/>
               </a:rPr>
-              <a:t>目标、引擎限制、怎样算做完</a:t>
+              <a:t>目标、引擎约束、验收标准</a:t>
             </a:r>
           </a:p>
         </p:txBody>
@@ -33682,7 +33852,7 @@
                 <a:ea typeface="微软雅黑"/>
                 <a:cs typeface="微软雅黑"/>
               </a:rPr>
-              <a:t>摸清技术栈</a:t>
+              <a:t>技术选型</a:t>
             </a:r>
             <a:r>
               <a:rPr sz="1200" b="0" lang="zh-CN" altLang="en-US">
@@ -33708,7 +33878,7 @@
                 <a:ea typeface="微软雅黑"/>
                 <a:cs typeface="微软雅黑"/>
               </a:rPr>
-              <a:t>让</a:t>
+              <a:t>由</a:t>
             </a:r>
             <a:r>
               <a:rPr sz="1200" b="0" lang="zh-CN" altLang="en-US">
@@ -33760,7 +33930,7 @@
                 <a:ea typeface="微软雅黑"/>
                 <a:cs typeface="微软雅黑"/>
               </a:rPr>
-              <a:t>讲清要用哪些技术，选最简单的路线</a:t>
+              <a:t>梳理所需技术，选择最简可行方案</a:t>
             </a:r>
           </a:p>
         </p:txBody>
@@ -33827,7 +33997,7 @@
                 <a:ea typeface="微软雅黑"/>
                 <a:cs typeface="微软雅黑"/>
               </a:rPr>
-              <a:t>先拆清结构，再调参数</a:t>
+              <a:t>先拆解结构，再调整参数</a:t>
             </a:r>
           </a:p>
         </p:txBody>
@@ -33973,7 +34143,7 @@
                 <a:ea typeface="微软雅黑"/>
                 <a:cs typeface="微软雅黑"/>
               </a:rPr>
-              <a:t>定规矩</a:t>
+              <a:t>建立规范</a:t>
             </a:r>
           </a:p>
         </p:txBody>
@@ -34014,7 +34184,7 @@
                 <a:ea typeface="微软雅黑"/>
                 <a:cs typeface="微软雅黑"/>
               </a:rPr>
-              <a:t>拆分</a:t>
+              <a:t>任务拆分</a:t>
             </a:r>
             <a:r>
               <a:rPr sz="1200" b="0" lang="zh-CN" altLang="en-US">
@@ -34040,7 +34210,7 @@
                 <a:ea typeface="微软雅黑"/>
                 <a:cs typeface="微软雅黑"/>
               </a:rPr>
-              <a:t>几条线会互相覆盖，按效果、工具、编排分给不同</a:t>
+              <a:t>按效果、工具、编排划分</a:t>
             </a:r>
             <a:r>
               <a:rPr sz="1200" b="0" lang="zh-CN" altLang="en-US">
@@ -34092,7 +34262,7 @@
                 <a:ea typeface="微软雅黑"/>
                 <a:cs typeface="微软雅黑"/>
               </a:rPr>
-              <a:t>对话负责</a:t>
+              <a:t>负责人，避免互相覆盖</a:t>
             </a:r>
           </a:p>
         </p:txBody>
@@ -34133,7 +34303,7 @@
                 <a:ea typeface="微软雅黑"/>
                 <a:cs typeface="微软雅黑"/>
               </a:rPr>
-              <a:t>写成宪章与规范</a:t>
+              <a:t>宪章与规范</a:t>
             </a:r>
             <a:r>
               <a:rPr sz="1200" b="0" lang="zh-CN" altLang="en-US">
@@ -34200,7 +34370,7 @@
                 <a:ea typeface="微软雅黑"/>
                 <a:cs typeface="微软雅黑"/>
               </a:rPr>
-              <a:t>每次执行先读</a:t>
+              <a:t>执行前读取</a:t>
             </a:r>
             <a:r>
               <a:rPr sz="1200" b="0" lang="zh-CN" altLang="en-US">
@@ -34226,7 +34396,7 @@
                 <a:ea typeface="微软雅黑"/>
                 <a:cs typeface="微软雅黑"/>
               </a:rPr>
-              <a:t>读规范和上次交接，中断也能接上</a:t>
+              <a:t>先读规范与交接，中断后可接续</a:t>
             </a:r>
           </a:p>
         </p:txBody>
@@ -34372,7 +34542,7 @@
                 <a:ea typeface="微软雅黑"/>
                 <a:cs typeface="微软雅黑"/>
               </a:rPr>
-              <a:t>守结果</a:t>
+              <a:t>结果把关</a:t>
             </a:r>
           </a:p>
         </p:txBody>
@@ -34413,7 +34583,7 @@
                 <a:ea typeface="微软雅黑"/>
                 <a:cs typeface="微软雅黑"/>
               </a:rPr>
-              <a:t>机器先检查</a:t>
+              <a:t>自动检查</a:t>
             </a:r>
             <a:r>
               <a:rPr sz="1200" b="0" lang="zh-CN" altLang="en-US">
@@ -34480,7 +34650,7 @@
                 <a:ea typeface="微软雅黑"/>
                 <a:cs typeface="微软雅黑"/>
               </a:rPr>
-              <a:t>状态分开记</a:t>
+              <a:t>状态分离</a:t>
             </a:r>
             <a:r>
               <a:rPr sz="1200" b="0" lang="zh-CN" altLang="en-US">
@@ -34532,7 +34702,7 @@
                 <a:ea typeface="微软雅黑"/>
                 <a:cs typeface="微软雅黑"/>
               </a:rPr>
-              <a:t>自检通过、我验收通过</a:t>
+              <a:t>自检、人工验收分别记录</a:t>
             </a:r>
           </a:p>
         </p:txBody>
@@ -34573,7 +34743,7 @@
                 <a:ea typeface="微软雅黑"/>
                 <a:cs typeface="微软雅黑"/>
               </a:rPr>
-              <a:t>锁版本复用</a:t>
+              <a:t>版本锁定</a:t>
             </a:r>
             <a:r>
               <a:rPr sz="1200" b="0" lang="zh-CN" altLang="en-US">
@@ -34599,7 +34769,7 @@
                 <a:ea typeface="微软雅黑"/>
                 <a:cs typeface="微软雅黑"/>
               </a:rPr>
-              <a:t>通过的版本锁定，在同一套规则上派生</a:t>
+              <a:t>通过的版本锁定，在同一规则下派生复用</a:t>
             </a:r>
           </a:p>
         </p:txBody>
@@ -34702,29 +34872,7 @@
                 <a:ea typeface="微软雅黑"/>
                 <a:cs typeface="微软雅黑"/>
               </a:rPr>
-              <a:t>你们也可以这样用</a:t>
-            </a:r>
-            <a:r>
-              <a:rPr sz="1700" b="1" lang="zh-CN" altLang="en-US">
-                <a:solidFill>
-                  <a:srgbClr val="F5F5F5"/>
-                </a:solidFill>
-                <a:latin typeface="微软雅黑"/>
-                <a:ea typeface="微软雅黑"/>
-                <a:cs typeface="微软雅黑"/>
-              </a:rPr>
-              <a:t> </a:t>
-            </a:r>
-            <a:r>
-              <a:rPr sz="1700" b="1" lang="zh-CN" altLang="en-US">
-                <a:solidFill>
-                  <a:srgbClr val="F5F5F5"/>
-                </a:solidFill>
-                <a:latin typeface="Consolas"/>
-                <a:ea typeface="微软雅黑"/>
-                <a:cs typeface="微软雅黑"/>
-              </a:rPr>
-              <a:t>AI</a:t>
+              <a:t>可复用的场景</a:t>
             </a:r>
           </a:p>
         </p:txBody>
@@ -34794,7 +34942,7 @@
                 <a:ea typeface="微软雅黑"/>
                 <a:cs typeface="微软雅黑"/>
               </a:rPr>
-              <a:t>重复的设置</a:t>
+              <a:t>重复性设置</a:t>
             </a:r>
           </a:p>
         </p:txBody>
@@ -34837,7 +34985,7 @@
                 <a:ea typeface="微软雅黑"/>
                 <a:cs typeface="微软雅黑"/>
               </a:rPr>
-              <a:t>让</a:t>
+              <a:t>由</a:t>
             </a:r>
             <a:r>
               <a:rPr sz="1250" b="0" lang="zh-CN" altLang="en-US">
@@ -34889,7 +35037,7 @@
                 <a:ea typeface="微软雅黑"/>
                 <a:cs typeface="微软雅黑"/>
               </a:rPr>
-              <a:t>写成工具，按规范批量做</a:t>
+              <a:t>开发工具，按规范批量处理</a:t>
             </a:r>
           </a:p>
         </p:txBody>
@@ -34959,7 +35107,7 @@
                 <a:ea typeface="微软雅黑"/>
                 <a:cs typeface="微软雅黑"/>
               </a:rPr>
-              <a:t>难做的效果</a:t>
+              <a:t>复杂效果</a:t>
             </a:r>
           </a:p>
         </p:txBody>
@@ -35002,7 +35150,7 @@
                 <a:ea typeface="微软雅黑"/>
                 <a:cs typeface="微软雅黑"/>
               </a:rPr>
-              <a:t>先拆结构，再模拟、烘焙成序列</a:t>
+              <a:t>先拆解结构，再模拟并烘焙为序列</a:t>
             </a:r>
           </a:p>
         </p:txBody>
@@ -35115,7 +35263,7 @@
                 <a:ea typeface="微软雅黑"/>
                 <a:cs typeface="微软雅黑"/>
               </a:rPr>
-              <a:t>用表来驱动，改表比改轨道快</a:t>
+              <a:t>以表驱动，修改成本低于逐轨调整</a:t>
             </a:r>
           </a:p>
         </p:txBody>
@@ -35156,7 +35304,7 @@
                 <a:ea typeface="微软雅黑"/>
                 <a:cs typeface="微软雅黑"/>
               </a:rPr>
-              <a:t>从一件重复的小事开始：</a:t>
+              <a:t>建议从一项重复性工作入手：</a:t>
             </a:r>
           </a:p>
           <a:p>
@@ -35174,7 +35322,7 @@
                 <a:ea typeface="微软雅黑"/>
                 <a:cs typeface="微软雅黑"/>
               </a:rPr>
-              <a:t>先写清输入、标准和检查方法</a:t>
+              <a:t>先明确输入、标准与检查方式</a:t>
             </a:r>
           </a:p>
         </p:txBody>
@@ -35402,7 +35550,7 @@
                 <a:ea typeface="微软雅黑"/>
                 <a:cs typeface="微软雅黑"/>
               </a:rPr>
-              <a:t>三个工具和案例，会按同一套流程继续复用</a:t>
+              <a:t>工具获取与复用</a:t>
             </a:r>
           </a:p>
         </p:txBody>
@@ -35638,7 +35786,7 @@
                 <a:ea typeface="微软雅黑"/>
                 <a:cs typeface="微软雅黑"/>
               </a:rPr>
-              <a:t>做什么</a:t>
+              <a:t>功能</a:t>
             </a:r>
           </a:p>
         </p:txBody>
@@ -35681,7 +35829,7 @@
                 <a:ea typeface="微软雅黑"/>
                 <a:cs typeface="微软雅黑"/>
               </a:rPr>
-              <a:t>怎么用</a:t>
+              <a:t>使用方式</a:t>
             </a:r>
           </a:p>
         </p:txBody>
@@ -35905,7 +36053,7 @@
                 <a:ea typeface="微软雅黑"/>
                 <a:cs typeface="微软雅黑"/>
               </a:rPr>
-              <a:t>从案例开始改参数</a:t>
+              <a:t>基于案例调整参数</a:t>
             </a:r>
           </a:p>
           <a:p>
@@ -35951,7 +36099,33 @@
                 <a:ea typeface="微软雅黑"/>
                 <a:cs typeface="微软雅黑"/>
               </a:rPr>
-              <a:t>HTML，Chrome</a:t>
+              <a:t>HTML，使用</a:t>
+            </a:r>
+            <a:r>
+              <a:rPr sz="1250" b="0" lang="zh-CN" altLang="en-US">
+                <a:solidFill>
+                  <a:srgbClr val="F5F5F5">
+                    <a:alpha val="55000"/>
+                  </a:srgbClr>
+                </a:solidFill>
+                <a:latin typeface="微软雅黑"/>
+                <a:ea typeface="微软雅黑"/>
+                <a:cs typeface="微软雅黑"/>
+              </a:rPr>
+              <a:t> </a:t>
+            </a:r>
+            <a:r>
+              <a:rPr sz="1250" b="0" lang="zh-CN" altLang="en-US">
+                <a:solidFill>
+                  <a:srgbClr val="F5F5F5">
+                    <a:alpha val="55000"/>
+                  </a:srgbClr>
+                </a:solidFill>
+                <a:latin typeface="Consolas"/>
+                <a:ea typeface="微软雅黑"/>
+                <a:cs typeface="微软雅黑"/>
+              </a:rPr>
+              <a:t>Chrome</a:t>
             </a:r>
             <a:r>
               <a:rPr sz="1250" b="0" lang="zh-CN" altLang="en-US">
@@ -36451,7 +36625,7 @@
                 <a:ea typeface="微软雅黑"/>
                 <a:cs typeface="微软雅黑"/>
               </a:rPr>
-              <a:t>打开节目文件即可编辑</a:t>
+              <a:t>打开节目文件后编辑</a:t>
             </a:r>
           </a:p>
         </p:txBody>
@@ -36523,51 +36697,7 @@
                 <a:ea typeface="微软雅黑"/>
                 <a:cs typeface="微软雅黑"/>
               </a:rPr>
-              <a:t>工具包我会放在</a:t>
-            </a:r>
-            <a:r>
-              <a:rPr sz="2000" b="1" lang="zh-CN" altLang="en-US">
-                <a:solidFill>
-                  <a:srgbClr val="F5F5F5"/>
-                </a:solidFill>
-                <a:latin typeface="微软雅黑"/>
-                <a:ea typeface="微软雅黑"/>
-                <a:cs typeface="微软雅黑"/>
-              </a:rPr>
-              <a:t> </a:t>
-            </a:r>
-            <a:r>
-              <a:rPr sz="2000" b="1" lang="zh-CN" altLang="en-US">
-                <a:solidFill>
-                  <a:srgbClr val="F5F5F5"/>
-                </a:solidFill>
-                <a:latin typeface="Consolas"/>
-                <a:ea typeface="微软雅黑"/>
-                <a:cs typeface="微软雅黑"/>
-              </a:rPr>
-              <a:t>xx</a:t>
-            </a:r>
-            <a:r>
-              <a:rPr sz="2000" b="1" lang="zh-CN" altLang="en-US">
-                <a:solidFill>
-                  <a:srgbClr val="F5F5F5"/>
-                </a:solidFill>
-                <a:latin typeface="微软雅黑"/>
-                <a:ea typeface="微软雅黑"/>
-                <a:cs typeface="微软雅黑"/>
-              </a:rPr>
-              <a:t> </a:t>
-            </a:r>
-            <a:r>
-              <a:rPr sz="2000" b="1" lang="zh-CN" altLang="en-US">
-                <a:solidFill>
-                  <a:srgbClr val="F5F5F5"/>
-                </a:solidFill>
-                <a:latin typeface="Consolas"/>
-                <a:ea typeface="微软雅黑"/>
-                <a:cs typeface="微软雅黑"/>
-              </a:rPr>
-              <a:t>处</a:t>
+              <a:t>工具包存放位置：xx</a:t>
             </a:r>
           </a:p>
         </p:txBody>
@@ -36610,7 +36740,7 @@
                 <a:ea typeface="微软雅黑"/>
                 <a:cs typeface="微软雅黑"/>
               </a:rPr>
-              <a:t>现在先放烘焙器和案例；导入器、编排工作台补齐后一起放</a:t>
+              <a:t>首批提供烘焙器与案例；导入器与编排工作台完善后补充</a:t>
             </a:r>
           </a:p>
         </p:txBody>
@@ -36653,7 +36783,7 @@
                 <a:ea typeface="微软雅黑"/>
                 <a:cs typeface="微软雅黑"/>
               </a:rPr>
-              <a:t>案例只是载体，想分享的是一种工作方式：</a:t>
+              <a:t>案例只是载体，重点是一种工作方式：</a:t>
             </a:r>
           </a:p>
           <a:p>
@@ -36673,7 +36803,7 @@
                 <a:ea typeface="微软雅黑"/>
                 <a:cs typeface="微软雅黑"/>
               </a:rPr>
-              <a:t>从具体问题出发，让</a:t>
+              <a:t>从具体问题出发，由</a:t>
             </a:r>
             <a:r>
               <a:rPr sz="1250" b="0" lang="zh-CN" altLang="en-US">
@@ -36725,7 +36855,7 @@
                 <a:ea typeface="微软雅黑"/>
                 <a:cs typeface="微软雅黑"/>
               </a:rPr>
-              <a:t>参与实现，把可检查、可复用的结果留下来。</a:t>
+              <a:t>参与实现，沉淀可检查、可复用的成果。</a:t>
             </a:r>
           </a:p>
         </p:txBody>
@@ -36994,7 +37124,7 @@
                 <a:ea typeface="微软雅黑"/>
                 <a:cs typeface="微软雅黑"/>
               </a:rPr>
-              <a:t>每种烟花都要单独处理出图规格，手工做不过来</a:t>
+              <a:t>出图：每种烟花的规格需单独处理，人工成本高</a:t>
             </a:r>
           </a:p>
         </p:txBody>
@@ -37428,7 +37558,7 @@
                 <a:ea typeface="微软雅黑"/>
                 <a:cs typeface="微软雅黑"/>
               </a:rPr>
-              <a:t>四周的黑也占着分辨率</a:t>
+              <a:t>空白区域同样占用分辨率</a:t>
             </a:r>
           </a:p>
           <a:p>
@@ -37619,7 +37749,7 @@
                 <a:ea typeface="微软雅黑"/>
                 <a:cs typeface="微软雅黑"/>
               </a:rPr>
-              <a:t>出图前，每种烟花要定</a:t>
+              <a:t>每种烟花出图前需确定</a:t>
             </a:r>
             <a:r>
               <a:rPr sz="1600" b="1" lang="zh-CN" altLang="en-US">
@@ -37663,7 +37793,7 @@
                 <a:ea typeface="微软雅黑"/>
                 <a:cs typeface="微软雅黑"/>
               </a:rPr>
-              <a:t>件事</a:t>
+              <a:t>项规格</a:t>
             </a:r>
           </a:p>
         </p:txBody>
@@ -37821,7 +37951,7 @@
                 <a:ea typeface="微软雅黑"/>
                 <a:cs typeface="微软雅黑"/>
               </a:rPr>
-              <a:t>面片取多大，爆点放在哪</a:t>
+              <a:t>面片尺寸与爆点位置</a:t>
             </a:r>
           </a:p>
         </p:txBody>
@@ -37979,7 +38109,7 @@
                 <a:ea typeface="微软雅黑"/>
                 <a:cs typeface="微软雅黑"/>
               </a:rPr>
-              <a:t>几十帧分给开花、下垂、熄灭</a:t>
+              <a:t>开花、下垂、熄灭的帧数分配</a:t>
             </a:r>
           </a:p>
         </p:txBody>
@@ -38137,7 +38267,7 @@
                 <a:ea typeface="微软雅黑"/>
                 <a:cs typeface="微软雅黑"/>
               </a:rPr>
-              <a:t>圆形、下垂、细长，排法不同</a:t>
+              <a:t>圆形、下垂、细长形态排法不同</a:t>
             </a:r>
           </a:p>
         </p:txBody>
@@ -38295,7 +38425,7 @@
                 <a:ea typeface="微软雅黑"/>
                 <a:cs typeface="微软雅黑"/>
               </a:rPr>
-              <a:t>几十帧装进一张贴图</a:t>
+              <a:t>多帧合入单张贴图</a:t>
             </a:r>
           </a:p>
         </p:txBody>
@@ -38766,7 +38896,7 @@
                 <a:ea typeface="微软雅黑"/>
                 <a:cs typeface="微软雅黑"/>
               </a:rPr>
-              <a:t>之前的做法</a:t>
+              <a:t>原有方式</a:t>
             </a:r>
           </a:p>
         </p:txBody>
@@ -38812,7 +38942,7 @@
                 <a:ea typeface="微软雅黑"/>
                 <a:cs typeface="微软雅黑"/>
               </a:rPr>
-              <a:t>手工：渲染后在软件里裁、排、合通道，再回</a:t>
+              <a:t>手工：渲染后裁切、排格、合通道，再在</a:t>
             </a:r>
             <a:r>
               <a:rPr sz="1250" b="0" lang="zh-CN" altLang="en-US">
@@ -38864,7 +38994,7 @@
                 <a:ea typeface="微软雅黑"/>
                 <a:cs typeface="微软雅黑"/>
               </a:rPr>
-              <a:t>手算尺寸和曲线，一改就重来。</a:t>
+              <a:t>中计算尺寸与曲线；效果调整后需全部重做。</a:t>
             </a:r>
           </a:p>
           <a:p>
@@ -38962,7 +39092,7 @@
                 <a:ea typeface="微软雅黑"/>
                 <a:cs typeface="微软雅黑"/>
               </a:rPr>
-              <a:t>出图，每轮要等渲染，调参看不到最终效果。</a:t>
+              <a:t>出图；每轮需等待离线渲染，调参时无法预览最终效果。</a:t>
             </a:r>
           </a:p>
         </p:txBody>
@@ -39161,7 +39291,7 @@
                 <a:ea typeface="微软雅黑"/>
                 <a:cs typeface="微软雅黑"/>
               </a:rPr>
-              <a:t>进引擎时，每张贴图、每个实例都要按规范设置</a:t>
+              <a:t>引擎接入：贴图与实例需逐项按规范设置</a:t>
             </a:r>
           </a:p>
         </p:txBody>
@@ -39943,7 +40073,7 @@
                 <a:ea typeface="微软雅黑"/>
                 <a:cs typeface="微软雅黑"/>
               </a:rPr>
-              <a:t>都要设</a:t>
+              <a:t>均需设置</a:t>
             </a:r>
           </a:p>
         </p:txBody>
@@ -40044,7 +40174,7 @@
                 <a:ea typeface="微软雅黑"/>
                 <a:cs typeface="微软雅黑"/>
               </a:rPr>
-              <a:t>每改一版</a:t>
+              <a:t>版本更新</a:t>
             </a:r>
           </a:p>
         </p:txBody>
@@ -40087,7 +40217,7 @@
                 <a:ea typeface="微软雅黑"/>
                 <a:cs typeface="微软雅黑"/>
               </a:rPr>
-              <a:t>重新创建、重新设置；</a:t>
+              <a:t>需重新创建与设置；</a:t>
             </a:r>
             <a:br/>
             <a:r>
@@ -40101,7 +40231,7 @@
                 <a:ea typeface="微软雅黑"/>
                 <a:cs typeface="微软雅黑"/>
               </a:rPr>
-              <a:t>漏一项往往到实机才发现</a:t>
+              <a:t>漏项通常在实机阶段才暴露</a:t>
             </a:r>
           </a:p>
         </p:txBody>
@@ -40447,7 +40577,7 @@
                 <a:ea typeface="微软雅黑"/>
                 <a:cs typeface="微软雅黑"/>
               </a:rPr>
-              <a:t>去年在定序器里手工排，今年这样排已经改不动</a:t>
+              <a:t>编排：定序器手工排轨难以支撑今年的规模</a:t>
             </a:r>
           </a:p>
         </p:txBody>
@@ -40857,7 +40987,7 @@
                 <a:ea typeface="微软雅黑"/>
                 <a:cs typeface="微软雅黑"/>
               </a:rPr>
-              <a:t>定序器里手工拼：12</a:t>
+              <a:t>定序器手工拼接：12</a:t>
             </a:r>
             <a:r>
               <a:rPr sz="1300" b="0" lang="zh-CN" altLang="en-US">
@@ -40903,7 +41033,7 @@
                 <a:ea typeface="微软雅黑"/>
                 <a:cs typeface="微软雅黑"/>
               </a:rPr>
-              <a:t>两千多条轨道</a:t>
+              <a:t>两千余条轨道</a:t>
             </a:r>
           </a:p>
           <a:p>
@@ -40923,7 +41053,7 @@
                 <a:ea typeface="微软雅黑"/>
                 <a:cs typeface="微软雅黑"/>
               </a:rPr>
-              <a:t>改一处节奏要重新对很多条</a:t>
+              <a:t>调整节奏需重新对齐多条轨道</a:t>
             </a:r>
           </a:p>
           <a:p>
@@ -41104,7 +41234,7 @@
                 <a:ea typeface="微软雅黑"/>
                 <a:cs typeface="微软雅黑"/>
               </a:rPr>
-              <a:t>秒节目</a:t>
+              <a:t>秒节目时长</a:t>
             </a:r>
           </a:p>
         </p:txBody>
@@ -41282,7 +41412,33 @@
                 <a:ea typeface="微软雅黑"/>
                 <a:cs typeface="微软雅黑"/>
               </a:rPr>
-              <a:t>PC、手游各</a:t>
+              <a:t>PC</a:t>
+            </a:r>
+            <a:r>
+              <a:rPr sz="1300" b="0" lang="zh-CN" altLang="en-US">
+                <a:solidFill>
+                  <a:srgbClr val="F5F5F5">
+                    <a:alpha val="70000"/>
+                  </a:srgbClr>
+                </a:solidFill>
+                <a:latin typeface="微软雅黑"/>
+                <a:ea typeface="微软雅黑"/>
+                <a:cs typeface="微软雅黑"/>
+              </a:rPr>
+              <a:t> </a:t>
+            </a:r>
+            <a:r>
+              <a:rPr sz="1300" b="0" lang="zh-CN" altLang="en-US">
+                <a:solidFill>
+                  <a:srgbClr val="F5F5F5">
+                    <a:alpha val="70000"/>
+                  </a:srgbClr>
+                </a:solidFill>
+                <a:latin typeface="Consolas"/>
+                <a:ea typeface="微软雅黑"/>
+                <a:cs typeface="微软雅黑"/>
+              </a:rPr>
+              <a:t>与手游各</a:t>
             </a:r>
             <a:r>
               <a:rPr sz="1300" b="0" lang="zh-CN" altLang="en-US">
@@ -41377,7 +41533,7 @@
                 <a:ea typeface="微软雅黑"/>
                 <a:cs typeface="微软雅黑"/>
               </a:rPr>
-              <a:t>版本时间紧；新做了导演蓝图（与程序共同设计），</a:t>
+              <a:t>版本周期紧；已与程序共同设计新导演蓝图，</a:t>
             </a:r>
           </a:p>
           <a:p>
@@ -41397,7 +41553,7 @@
                 <a:ea typeface="微软雅黑"/>
                 <a:cs typeface="微软雅黑"/>
               </a:rPr>
-              <a:t>但对着表格手工对音乐节奏，仍然很难改</a:t>
+              <a:t>但以表格手工匹配音乐节奏，修改成本仍高</a:t>
             </a:r>
           </a:p>
         </p:txBody>
@@ -41552,7 +41708,7 @@
                 <a:ea typeface="微软雅黑"/>
                 <a:cs typeface="微软雅黑"/>
               </a:rPr>
-              <a:t>三个问题对应三个工具，用固定格式首尾衔接</a:t>
+              <a:t>解决思路：三个环节对应三个工具，以固定格式衔接</a:t>
             </a:r>
           </a:p>
         </p:txBody>
@@ -43458,7 +43614,7 @@
                 <a:ea typeface="微软雅黑"/>
                 <a:cs typeface="微软雅黑"/>
               </a:rPr>
-              <a:t>分工：我定方向，AI</a:t>
+              <a:t>分工：本人定方向，AI</a:t>
             </a:r>
             <a:r>
               <a:rPr sz="1500" b="1" lang="zh-CN" altLang="en-US">
@@ -43480,7 +43636,7 @@
                 <a:ea typeface="微软雅黑"/>
                 <a:cs typeface="微软雅黑"/>
               </a:rPr>
-              <a:t>写工具，关键结果进</a:t>
+              <a:t>开发工具，关键结果在</a:t>
             </a:r>
             <a:r>
               <a:rPr sz="1500" b="1" lang="zh-CN" altLang="en-US">
@@ -43567,7 +43723,7 @@
                 <a:ea typeface="微软雅黑"/>
                 <a:cs typeface="微软雅黑"/>
               </a:rPr>
-              <a:t>目标、审美和引擎限制由我定；工具由</a:t>
+              <a:t>目标、审美与引擎约束由本人确定，工具由</a:t>
             </a:r>
             <a:r>
               <a:rPr sz="1300" b="0" lang="zh-CN" altLang="en-US">
@@ -43619,7 +43775,7 @@
                 <a:ea typeface="微软雅黑"/>
                 <a:cs typeface="微软雅黑"/>
               </a:rPr>
-              <a:t>写；</a:t>
+              <a:t>开发；</a:t>
             </a:r>
           </a:p>
           <a:p>
@@ -43639,7 +43795,7 @@
                 <a:ea typeface="微软雅黑"/>
                 <a:cs typeface="微软雅黑"/>
               </a:rPr>
-              <a:t>结果先在引擎回放里查，关键的再进</a:t>
+              <a:t>结果先经引擎回放检查，关键节点在</a:t>
             </a:r>
             <a:r>
               <a:rPr sz="1300" b="0" lang="zh-CN" altLang="en-US">
@@ -43765,7 +43921,7 @@
                 <a:ea typeface="微软雅黑"/>
                 <a:cs typeface="微软雅黑"/>
               </a:rPr>
-              <a:t>和其他组一起定的部分</a:t>
+              <a:t>跨组协作</a:t>
             </a:r>
           </a:p>
         </p:txBody>
@@ -44027,7 +44183,7 @@
                 <a:ea typeface="微软雅黑"/>
                 <a:cs typeface="微软雅黑"/>
               </a:rPr>
-              <a:t>烘焙器：让出图看得见、出得快、按项目定制</a:t>
+              <a:t>烟花烘焙器：可视化调参、快速出图、按项目定制</a:t>
             </a:r>
           </a:p>
         </p:txBody>
@@ -44251,7 +44407,7 @@
                 <a:ea typeface="微软雅黑"/>
                 <a:cs typeface="微软雅黑"/>
               </a:rPr>
-              <a:t>之前</a:t>
+              <a:t>原有方式</a:t>
             </a:r>
           </a:p>
         </p:txBody>
@@ -44426,7 +44582,7 @@
                 <a:ea typeface="微软雅黑"/>
                 <a:cs typeface="微软雅黑"/>
               </a:rPr>
-              <a:t>能出图</a:t>
+              <a:t>可输出贴图</a:t>
             </a:r>
           </a:p>
         </p:txBody>
@@ -44500,7 +44656,7 @@
                 <a:ea typeface="微软雅黑"/>
                 <a:cs typeface="微软雅黑"/>
               </a:rPr>
-              <a:t>每轮要等离线渲染</a:t>
+              <a:t>每轮需等待离线渲染</a:t>
             </a:r>
           </a:p>
         </p:txBody>
@@ -44574,7 +44730,7 @@
                 <a:ea typeface="微软雅黑"/>
                 <a:cs typeface="微软雅黑"/>
               </a:rPr>
-              <a:t>调参时看到的不是最终输出</a:t>
+              <a:t>预览与最终输出不一致</a:t>
             </a:r>
           </a:p>
         </p:txBody>
@@ -44648,7 +44804,7 @@
                 <a:ea typeface="微软雅黑"/>
                 <a:cs typeface="微软雅黑"/>
               </a:rPr>
-              <a:t>规格要等出完才能确认</a:t>
+              <a:t>规格需导出后才能确认</a:t>
             </a:r>
           </a:p>
         </p:txBody>
@@ -44722,7 +44878,7 @@
                 <a:ea typeface="微软雅黑"/>
                 <a:cs typeface="微软雅黑"/>
               </a:rPr>
-              <a:t>烟花在游戏里是朝向镜头的面片，</a:t>
+              <a:t>游戏中的烟花是朝向镜头的</a:t>
             </a:r>
           </a:p>
           <a:p>
@@ -44742,7 +44898,7 @@
                 <a:ea typeface="微软雅黑"/>
                 <a:cs typeface="微软雅黑"/>
               </a:rPr>
-              <a:t>播的是粒子运动。</a:t>
+              <a:t>面片序列，因此烘焙器只针对</a:t>
             </a:r>
           </a:p>
           <a:p>
@@ -44762,7 +44918,7 @@
                 <a:ea typeface="微软雅黑"/>
                 <a:cs typeface="微软雅黑"/>
               </a:rPr>
-              <a:t>所以只做游戏视角的</a:t>
+              <a:t>游戏视角输出</a:t>
             </a:r>
             <a:r>
               <a:rPr sz="1300" b="0" lang="zh-CN" altLang="en-US">
@@ -44814,7 +44970,7 @@
                 <a:ea typeface="微软雅黑"/>
                 <a:cs typeface="微软雅黑"/>
               </a:rPr>
-              <a:t>烘焙器，</a:t>
+              <a:t>序列，</a:t>
             </a:r>
           </a:p>
           <a:p>
@@ -44834,7 +44990,7 @@
                 <a:ea typeface="微软雅黑"/>
                 <a:cs typeface="微软雅黑"/>
               </a:rPr>
-              <a:t>不追求完整三维场景。</a:t>
+              <a:t>不构建完整三维场景。</a:t>
             </a:r>
           </a:p>
         </p:txBody>
@@ -44901,7 +45057,7 @@
                 <a:ea typeface="微软雅黑"/>
                 <a:cs typeface="微软雅黑"/>
               </a:rPr>
-              <a:t>烘焙器「引擎回放」：按导出的贴图和配置在浏览器里播放</a:t>
+              <a:t>引擎回放：按导出的贴图与配置在浏览器中播放</a:t>
             </a:r>
           </a:p>
         </p:txBody>
@@ -44983,7 +45139,7 @@
                 <a:ea typeface="微软雅黑"/>
                 <a:cs typeface="微软雅黑"/>
               </a:rPr>
-              <a:t>看得见</a:t>
+              <a:t>可视化</a:t>
             </a:r>
           </a:p>
         </p:txBody>
@@ -45046,7 +45202,7 @@
                 <a:ea typeface="微软雅黑"/>
                 <a:cs typeface="微软雅黑"/>
               </a:rPr>
-              <a:t>导出后在引擎回放里看</a:t>
+              <a:t>导出结果可在引擎回放中复核</a:t>
             </a:r>
           </a:p>
         </p:txBody>
@@ -45128,7 +45284,7 @@
                 <a:ea typeface="微软雅黑"/>
                 <a:cs typeface="微软雅黑"/>
               </a:rPr>
-              <a:t>出得快</a:t>
+              <a:t>快速输出</a:t>
             </a:r>
           </a:p>
         </p:txBody>
@@ -45171,7 +45327,7 @@
                 <a:ea typeface="微软雅黑"/>
                 <a:cs typeface="微软雅黑"/>
               </a:rPr>
-              <a:t>改完参数当场看；</a:t>
+              <a:t>参数修改即时生效；</a:t>
             </a:r>
           </a:p>
           <a:p>
@@ -45191,7 +45347,7 @@
                 <a:ea typeface="微软雅黑"/>
                 <a:cs typeface="微软雅黑"/>
               </a:rPr>
-              <a:t>直接导出引擎要的格式</a:t>
+              <a:t>直接输出引擎所需格式</a:t>
             </a:r>
           </a:p>
         </p:txBody>
@@ -45273,7 +45429,7 @@
                 <a:ea typeface="微软雅黑"/>
                 <a:cs typeface="微软雅黑"/>
               </a:rPr>
-              <a:t>按项目定制</a:t>
+              <a:t>项目定制</a:t>
             </a:r>
           </a:p>
         </p:txBody>
@@ -45316,7 +45472,7 @@
                 <a:ea typeface="微软雅黑"/>
                 <a:cs typeface="微软雅黑"/>
               </a:rPr>
-              <a:t>按这次的舞台、视距</a:t>
+              <a:t>依据本项目舞台、视距</a:t>
             </a:r>
           </a:p>
           <a:p>
@@ -45336,7 +45492,7 @@
                 <a:ea typeface="微软雅黑"/>
                 <a:cs typeface="微软雅黑"/>
               </a:rPr>
-              <a:t>和</a:t>
+              <a:t>与</a:t>
             </a:r>
             <a:r>
               <a:rPr sz="1200" b="0" lang="zh-CN" altLang="en-US">
@@ -45429,7 +45585,7 @@
                 <a:ea typeface="微软雅黑"/>
                 <a:cs typeface="微软雅黑"/>
               </a:rPr>
-              <a:t>重点不是换软件，而是让预览、输出和引擎里的效果对得上</a:t>
+              <a:t>目标：预览、导出与引擎内效果保持一致</a:t>
             </a:r>
           </a:p>
         </p:txBody>
@@ -45628,7 +45784,7 @@
                 <a:ea typeface="微软雅黑"/>
                 <a:cs typeface="微软雅黑"/>
               </a:rPr>
-              <a:t>取景流程化：让贴图的像素尽量用在烟花上</a:t>
+              <a:t>取景规范：提高贴图的像素利用率</a:t>
             </a:r>
           </a:p>
         </p:txBody>
@@ -45927,7 +46083,7 @@
                 <a:ea typeface="微软雅黑"/>
                 <a:cs typeface="微软雅黑"/>
               </a:rPr>
-              <a:t>整段的最大范围一个框</a:t>
+              <a:t>按整段最大范围取一个框</a:t>
             </a:r>
           </a:p>
         </p:txBody>
@@ -46161,7 +46317,7 @@
                 <a:ea typeface="微软雅黑"/>
                 <a:cs typeface="微软雅黑"/>
               </a:rPr>
-              <a:t>以爆点为中心长大；扇形开满反而更空</a:t>
+              <a:t>以爆点为中心逐级放大；单侧花型后期留白增加</a:t>
             </a:r>
           </a:p>
         </p:txBody>
@@ -46395,7 +46551,7 @@
                 <a:ea typeface="微软雅黑"/>
                 <a:cs typeface="微软雅黑"/>
               </a:rPr>
-              <a:t>偏一侧的花，只朝有内容的方向放大</a:t>
+              <a:t>单侧花型仅向内容方向放大</a:t>
             </a:r>
           </a:p>
         </p:txBody>
@@ -46898,7 +47054,7 @@
                 <a:ea typeface="微软雅黑"/>
                 <a:cs typeface="微软雅黑"/>
               </a:rPr>
-              <a:t>烘完收紧</a:t>
+              <a:t>烘焙后收紧</a:t>
             </a:r>
           </a:p>
         </p:txBody>
@@ -46941,7 +47097,7 @@
                 <a:ea typeface="微软雅黑"/>
                 <a:cs typeface="微软雅黑"/>
               </a:rPr>
-              <a:t>按每帧实际内容再收一次；</a:t>
+              <a:t>按每帧实际内容二次收紧；</a:t>
             </a:r>
             <a:br/>
             <a:r>
@@ -46955,7 +47111,7 @@
                 <a:ea typeface="微软雅黑"/>
                 <a:cs typeface="微软雅黑"/>
               </a:rPr>
-              <a:t>几乎全黑的帧不收</a:t>
+              <a:t>近全黑帧不收紧</a:t>
             </a:r>
           </a:p>
         </p:txBody>
@@ -47039,7 +47195,7 @@
                 <a:ea typeface="微软雅黑"/>
                 <a:cs typeface="微软雅黑"/>
               </a:rPr>
-              <a:t>面片大小最多分</a:t>
+              <a:t>面片尺寸最多分</a:t>
             </a:r>
             <a:r>
               <a:rPr sz="1200" b="0" lang="zh-CN" altLang="en-US">
@@ -47105,7 +47261,7 @@
                 <a:ea typeface="微软雅黑"/>
                 <a:cs typeface="微软雅黑"/>
               </a:rPr>
-              <a:t>曲线点从近百个减到二十几个</a:t>
+              <a:t>曲线关键点由近百个减至二十余个</a:t>
             </a:r>
           </a:p>
         </p:txBody>
@@ -47189,7 +47345,7 @@
                 <a:ea typeface="微软雅黑"/>
                 <a:cs typeface="微软雅黑"/>
               </a:rPr>
-              <a:t>动得快的阶段帧给得密，</a:t>
+              <a:t>运动快的阶段分配更多帧，</a:t>
             </a:r>
             <a:br/>
             <a:r>
@@ -47203,7 +47359,7 @@
                 <a:ea typeface="微软雅黑"/>
                 <a:cs typeface="微软雅黑"/>
               </a:rPr>
-              <a:t>慢的阶段少给</a:t>
+              <a:t>慢阶段相应减少</a:t>
             </a:r>
           </a:p>
         </p:txBody>
@@ -47287,7 +47443,7 @@
                 <a:ea typeface="微软雅黑"/>
                 <a:cs typeface="微软雅黑"/>
               </a:rPr>
-              <a:t>逐帧紧裁、面片跟着跑，</a:t>
+              <a:t>逐帧紧裁导致面片位移，</a:t>
             </a:r>
             <a:br/>
             <a:r>
@@ -47301,7 +47457,7 @@
                 <a:ea typeface="微软雅黑"/>
                 <a:cs typeface="微软雅黑"/>
               </a:rPr>
-              <a:t>在引擎里会抖</a:t>
+              <a:t>引擎内出现抖动</a:t>
             </a:r>
           </a:p>
         </p:txBody>
@@ -47500,7 +47656,7 @@
                 <a:ea typeface="微软雅黑"/>
                 <a:cs typeface="微软雅黑"/>
               </a:rPr>
-              <a:t>打包流程化：一张图装</a:t>
+              <a:t>打包规范：单张贴图</a:t>
             </a:r>
             <a:r>
               <a:rPr sz="2600" b="1" lang="zh-CN" altLang="en-US">
@@ -47566,7 +47722,7 @@
                 <a:ea typeface="微软雅黑"/>
                 <a:cs typeface="微软雅黑"/>
               </a:rPr>
-              <a:t>和手游一次导出</a:t>
+              <a:t>与手游同时导出</a:t>
             </a:r>
           </a:p>
         </p:txBody>
@@ -48153,7 +48309,7 @@
                 <a:ea typeface="微软雅黑"/>
                 <a:cs typeface="微软雅黑"/>
               </a:rPr>
-              <a:t>贴图只存灰度，颜色交给</a:t>
+              <a:t>贴图仅存灰度，颜色由</a:t>
             </a:r>
             <a:r>
               <a:rPr sz="1250" b="0" lang="zh-CN" altLang="en-US">
@@ -48225,7 +48381,7 @@
                 <a:ea typeface="微软雅黑"/>
                 <a:cs typeface="微软雅黑"/>
               </a:rPr>
-              <a:t>同一套序列换颜色不用重烘</a:t>
+              <a:t>同一序列换色无需重新烘焙</a:t>
             </a:r>
           </a:p>
         </p:txBody>
@@ -48767,7 +48923,7 @@
                 <a:ea typeface="微软雅黑"/>
                 <a:cs typeface="微软雅黑"/>
               </a:rPr>
-              <a:t>格子跟形状走</a:t>
+              <a:t>格子随形状选择</a:t>
             </a:r>
           </a:p>
         </p:txBody>
@@ -48810,7 +48966,7 @@
                 <a:ea typeface="微软雅黑"/>
                 <a:cs typeface="微软雅黑"/>
               </a:rPr>
-              <a:t>圆形用方格，下垂的柳用竖长格，</a:t>
+              <a:t>圆形用方格，垂柳用竖长格，</a:t>
             </a:r>
             <a:br/>
             <a:r>
@@ -48968,7 +49124,7 @@
                 <a:ea typeface="微软雅黑"/>
                 <a:cs typeface="微软雅黑"/>
               </a:rPr>
-              <a:t>减透明区</a:t>
+              <a:t>减少透明区</a:t>
             </a:r>
           </a:p>
         </p:txBody>
@@ -49011,7 +49167,7 @@
                 <a:ea typeface="微软雅黑"/>
                 <a:cs typeface="微软雅黑"/>
               </a:rPr>
-              <a:t>所有帧叠出轮廓，裁成</a:t>
+              <a:t>叠加全部帧生成</a:t>
             </a:r>
             <a:r>
               <a:rPr sz="1200" b="0" lang="zh-CN" altLang="en-US">
@@ -49063,7 +49219,7 @@
                 <a:ea typeface="微软雅黑"/>
                 <a:cs typeface="微软雅黑"/>
               </a:rPr>
-              <a:t>顶点；</a:t>
+              <a:t>顶点轮廓；</a:t>
             </a:r>
             <a:br/>
             <a:r>
@@ -49077,7 +49233,59 @@
                 <a:ea typeface="微软雅黑"/>
                 <a:cs typeface="微软雅黑"/>
               </a:rPr>
-              <a:t>省得少就不出，重复的只留一张</a:t>
+              <a:t>收益不足</a:t>
+            </a:r>
+            <a:r>
+              <a:rPr sz="1200" b="0" lang="zh-CN" altLang="en-US">
+                <a:solidFill>
+                  <a:srgbClr val="F5F5F5">
+                    <a:alpha val="70000"/>
+                  </a:srgbClr>
+                </a:solidFill>
+                <a:latin typeface="微软雅黑"/>
+                <a:ea typeface="微软雅黑"/>
+                <a:cs typeface="微软雅黑"/>
+              </a:rPr>
+              <a:t> </a:t>
+            </a:r>
+            <a:r>
+              <a:rPr sz="1200" b="0" lang="zh-CN" altLang="en-US">
+                <a:solidFill>
+                  <a:srgbClr val="F5F5F5">
+                    <a:alpha val="70000"/>
+                  </a:srgbClr>
+                </a:solidFill>
+                <a:latin typeface="Consolas"/>
+                <a:ea typeface="微软雅黑"/>
+                <a:cs typeface="微软雅黑"/>
+              </a:rPr>
+              <a:t>10%</a:t>
+            </a:r>
+            <a:r>
+              <a:rPr sz="1200" b="0" lang="zh-CN" altLang="en-US">
+                <a:solidFill>
+                  <a:srgbClr val="F5F5F5">
+                    <a:alpha val="70000"/>
+                  </a:srgbClr>
+                </a:solidFill>
+                <a:latin typeface="微软雅黑"/>
+                <a:ea typeface="微软雅黑"/>
+                <a:cs typeface="微软雅黑"/>
+              </a:rPr>
+              <a:t> </a:t>
+            </a:r>
+            <a:r>
+              <a:rPr sz="1200" b="0" lang="zh-CN" altLang="en-US">
+                <a:solidFill>
+                  <a:srgbClr val="F5F5F5">
+                    <a:alpha val="70000"/>
+                  </a:srgbClr>
+                </a:solidFill>
+                <a:latin typeface="Consolas"/>
+                <a:ea typeface="微软雅黑"/>
+                <a:cs typeface="微软雅黑"/>
+              </a:rPr>
+              <a:t>不输出，重复项只保留一份</a:t>
             </a:r>
           </a:p>
         </p:txBody>
@@ -49147,7 +49355,7 @@
                 <a:ea typeface="微软雅黑"/>
                 <a:cs typeface="微软雅黑"/>
               </a:rPr>
-              <a:t>两个平台一次导出</a:t>
+              <a:t>双平台同时导出</a:t>
             </a:r>
           </a:p>
         </p:txBody>
@@ -49326,7 +49534,7 @@
                 <a:ea typeface="微软雅黑"/>
                 <a:cs typeface="微软雅黑"/>
               </a:rPr>
-              <a:t>出包前先回放</a:t>
+              <a:t>交付前回放复核</a:t>
             </a:r>
           </a:p>
         </p:txBody>
@@ -49369,7 +49577,7 @@
                 <a:ea typeface="微软雅黑"/>
                 <a:cs typeface="微软雅黑"/>
               </a:rPr>
-              <a:t>在引擎回放里按导出的贴图放一遍，</a:t>
+              <a:t>按导出贴图在引擎回放中复核，</a:t>
             </a:r>
             <a:br/>
             <a:r>
